--- a/riggs-bureaucracy.pptx
+++ b/riggs-bureaucracy.pptx
@@ -1558,9 +1558,16 @@
   <p:cSld name="DARK">
     <p:bg>
       <p:bgPr>
-        <a:solidFill>
-          <a:schemeClr val="tx2"/>
-        </a:solidFill>
+        <a:blipFill dpi="0" rotWithShape="1">
+          <a:blip r:embed="rId1">
+            <a:lum/>
+          </a:blip>
+          <a:srcRect/>
+          <a:stretch>
+            <a:fillRect/>
+          </a:stretch>
+        </a:blipFill>
+        <a:effectLst/>
       </p:bgPr>
     </p:bg>
     <p:spTree>
@@ -1590,9 +1597,16 @@
   <p:cSld name="LIGHT">
     <p:bg>
       <p:bgPr>
-        <a:solidFill>
-          <a:schemeClr val="bg1"/>
-        </a:solidFill>
+        <a:blipFill dpi="0" rotWithShape="1">
+          <a:blip r:embed="rId1">
+            <a:lum/>
+          </a:blip>
+          <a:srcRect/>
+          <a:stretch>
+            <a:fillRect/>
+          </a:stretch>
+        </a:blipFill>
+        <a:effectLst/>
       </p:bgPr>
     </p:bg>
     <p:spTree>
@@ -2028,14 +2042,17 @@
               <a:buNone/>
             </a:pPr>
             <a:r>
-              <a:rPr lang="en-US" sz="4000" b="1" dirty="0">
+              <a:rPr lang="en-US" sz="4200" dirty="0">
                 <a:solidFill>
                   <a:schemeClr val="bg1"/>
                 </a:solidFill>
+                <a:latin typeface="B Titr" pitchFamily="34" charset="0"/>
+                <a:ea typeface="B Titr" pitchFamily="34" charset="-122"/>
+                <a:cs typeface="B Titr" pitchFamily="34" charset="-120"/>
               </a:rPr>
               <a:t>بوروکراسی و مدل‌های اداره امور عمومی</a:t>
             </a:r>
-            <a:endParaRPr lang="en-US" sz="4000" dirty="0"/>
+            <a:endParaRPr lang="en-US" sz="4200" dirty="0"/>
           </a:p>
         </p:txBody>
       </p:sp>
@@ -2064,14 +2081,17 @@
               <a:buNone/>
             </a:pPr>
             <a:r>
-              <a:rPr lang="en-US" sz="1800" dirty="0">
+              <a:rPr lang="en-US" sz="2000" dirty="0">
                 <a:solidFill>
                   <a:srgbClr val="CFE3E1"/>
                 </a:solidFill>
+                <a:latin typeface="B Nazanin" pitchFamily="34" charset="0"/>
+                <a:ea typeface="B Nazanin" pitchFamily="34" charset="-122"/>
+                <a:cs typeface="B Nazanin" pitchFamily="34" charset="-120"/>
               </a:rPr>
               <a:t>برگرفته از کتاب «چارچوبی برای مطالعات تطبیقی» (فصل ۲) — فرد ریگز</a:t>
             </a:r>
-            <a:endParaRPr lang="en-US" sz="1800" dirty="0"/>
+            <a:endParaRPr lang="en-US" sz="2000" dirty="0"/>
           </a:p>
         </p:txBody>
       </p:sp>
@@ -2100,14 +2120,17 @@
               <a:buNone/>
             </a:pPr>
             <a:r>
-              <a:rPr lang="en-US" sz="1600" b="1" dirty="0">
+              <a:rPr lang="en-US" sz="1800" b="1" dirty="0">
                 <a:solidFill>
                   <a:srgbClr val="F2B661"/>
                 </a:solidFill>
+                <a:latin typeface="B Nazanin" pitchFamily="34" charset="0"/>
+                <a:ea typeface="B Nazanin" pitchFamily="34" charset="-122"/>
+                <a:cs typeface="B Nazanin" pitchFamily="34" charset="-120"/>
               </a:rPr>
               <a:t>ارائه‌دهنده: حمیده رزدان</a:t>
             </a:r>
-            <a:endParaRPr lang="en-US" sz="1600" dirty="0"/>
+            <a:endParaRPr lang="en-US" sz="1800" dirty="0"/>
           </a:p>
         </p:txBody>
       </p:sp>
@@ -2163,14 +2186,17 @@
               <a:buNone/>
             </a:pPr>
             <a:r>
-              <a:rPr lang="en-US" sz="3200" b="1" dirty="0">
+              <a:rPr lang="en-US" sz="3400" dirty="0">
                 <a:solidFill>
                   <a:schemeClr val="accent1"/>
                 </a:solidFill>
+                <a:latin typeface="B Titr" pitchFamily="34" charset="0"/>
+                <a:ea typeface="B Titr" pitchFamily="34" charset="-122"/>
+                <a:cs typeface="B Titr" pitchFamily="34" charset="-120"/>
               </a:rPr>
               <a:t>انواع نظام‌های اداری بر اساس «ریگز»</a:t>
             </a:r>
-            <a:endParaRPr lang="en-US" sz="3200" dirty="0"/>
+            <a:endParaRPr lang="en-US" sz="3400" dirty="0"/>
           </a:p>
         </p:txBody>
       </p:sp>
@@ -2183,11 +2209,11 @@
         <p:spPr>
           <a:xfrm>
             <a:off x="4709160" y="1234440"/>
-            <a:ext cx="3977640" cy="2606040"/>
+            <a:ext cx="3977640" cy="2743200"/>
           </a:xfrm>
           <a:prstGeom prst="roundRect">
             <a:avLst>
-              <a:gd name="adj" fmla="val 3509"/>
+              <a:gd name="adj" fmla="val 3333"/>
             </a:avLst>
           </a:prstGeom>
           <a:solidFill>
@@ -2209,8 +2235,8 @@
         </p:nvSpPr>
         <p:spPr>
           <a:xfrm>
-            <a:off x="4846320" y="1344168"/>
-            <a:ext cx="3703320" cy="411480"/>
+            <a:off x="4846320" y="1325880"/>
+            <a:ext cx="3703320" cy="640080"/>
           </a:xfrm>
           <a:prstGeom prst="rect">
             <a:avLst/>
@@ -2226,14 +2252,17 @@
               <a:buNone/>
             </a:pPr>
             <a:r>
-              <a:rPr lang="en-US" sz="1600" b="1" dirty="0">
+              <a:rPr lang="en-US" sz="1700" b="1" dirty="0">
                 <a:solidFill>
                   <a:schemeClr val="tx2"/>
                 </a:solidFill>
+                <a:latin typeface="B Nazanin" pitchFamily="34" charset="0"/>
+                <a:ea typeface="B Nazanin" pitchFamily="34" charset="-122"/>
+                <a:cs typeface="B Nazanin" pitchFamily="34" charset="-120"/>
               </a:rPr>
               <a:t>معیار طبقه‌بندی</a:t>
             </a:r>
-            <a:endParaRPr lang="en-US" sz="1600" dirty="0"/>
+            <a:endParaRPr lang="en-US" sz="1700" dirty="0"/>
           </a:p>
         </p:txBody>
       </p:sp>
@@ -2245,8 +2274,8 @@
         </p:nvSpPr>
         <p:spPr>
           <a:xfrm>
-            <a:off x="4846320" y="1801368"/>
-            <a:ext cx="3703320" cy="1920240"/>
+            <a:off x="4846320" y="2011680"/>
+            <a:ext cx="3703320" cy="1874520"/>
           </a:xfrm>
           <a:prstGeom prst="rect">
             <a:avLst/>
@@ -2266,14 +2295,17 @@
               <a:buChar char="•"/>
             </a:pPr>
             <a:r>
-              <a:rPr lang="en-US" sz="1400" dirty="0">
+              <a:rPr lang="en-US" sz="1500" dirty="0">
                 <a:solidFill>
                   <a:schemeClr val="tx1"/>
                 </a:solidFill>
+                <a:latin typeface="B Nazanin" pitchFamily="34" charset="0"/>
+                <a:ea typeface="B Nazanin" pitchFamily="34" charset="-122"/>
+                <a:cs typeface="B Nazanin" pitchFamily="34" charset="-120"/>
               </a:rPr>
               <a:t>رابطه سیستم اداری با سیستم سیاسی، اقتصادی و اجتماعی</a:t>
             </a:r>
-            <a:endParaRPr lang="en-US" sz="1400" dirty="0"/>
+            <a:endParaRPr lang="en-US" sz="1500" dirty="0"/>
           </a:p>
         </p:txBody>
       </p:sp>
@@ -2286,11 +2318,11 @@
         <p:spPr>
           <a:xfrm>
             <a:off x="457200" y="1234440"/>
-            <a:ext cx="3977640" cy="2606040"/>
+            <a:ext cx="3977640" cy="2743200"/>
           </a:xfrm>
           <a:prstGeom prst="roundRect">
             <a:avLst>
-              <a:gd name="adj" fmla="val 3509"/>
+              <a:gd name="adj" fmla="val 3333"/>
             </a:avLst>
           </a:prstGeom>
           <a:solidFill>
@@ -2312,8 +2344,8 @@
         </p:nvSpPr>
         <p:spPr>
           <a:xfrm>
-            <a:off x="594360" y="1344168"/>
-            <a:ext cx="3703320" cy="411480"/>
+            <a:off x="594360" y="1325880"/>
+            <a:ext cx="3703320" cy="640080"/>
           </a:xfrm>
           <a:prstGeom prst="rect">
             <a:avLst/>
@@ -2329,14 +2361,17 @@
               <a:buNone/>
             </a:pPr>
             <a:r>
-              <a:rPr lang="en-US" sz="1600" b="1" dirty="0">
+              <a:rPr lang="en-US" sz="1700" b="1" dirty="0">
                 <a:solidFill>
                   <a:schemeClr val="tx2"/>
                 </a:solidFill>
+                <a:latin typeface="B Nazanin" pitchFamily="34" charset="0"/>
+                <a:ea typeface="B Nazanin" pitchFamily="34" charset="-122"/>
+                <a:cs typeface="B Nazanin" pitchFamily="34" charset="-120"/>
               </a:rPr>
               <a:t>سه ویژگی اصلی</a:t>
             </a:r>
-            <a:endParaRPr lang="en-US" sz="1600" dirty="0"/>
+            <a:endParaRPr lang="en-US" sz="1700" dirty="0"/>
           </a:p>
         </p:txBody>
       </p:sp>
@@ -2348,8 +2383,8 @@
         </p:nvSpPr>
         <p:spPr>
           <a:xfrm>
-            <a:off x="594360" y="1801368"/>
-            <a:ext cx="3703320" cy="1920240"/>
+            <a:off x="594360" y="2011680"/>
+            <a:ext cx="3703320" cy="1874520"/>
           </a:xfrm>
           <a:prstGeom prst="rect">
             <a:avLst/>
@@ -2369,14 +2404,17 @@
               <a:buChar char="•"/>
             </a:pPr>
             <a:r>
-              <a:rPr lang="en-US" sz="1400" dirty="0">
+              <a:rPr lang="en-US" sz="1500" dirty="0">
                 <a:solidFill>
                   <a:schemeClr val="tx1"/>
                 </a:solidFill>
+                <a:latin typeface="B Nazanin" pitchFamily="34" charset="0"/>
+                <a:ea typeface="B Nazanin" pitchFamily="34" charset="-122"/>
+                <a:cs typeface="B Nazanin" pitchFamily="34" charset="-120"/>
               </a:rPr>
               <a:t>پاسخگویی به حاکم</a:t>
             </a:r>
-            <a:endParaRPr lang="en-US" sz="1400" dirty="0"/>
+            <a:endParaRPr lang="en-US" sz="1500" dirty="0"/>
           </a:p>
           <a:p>
             <a:pPr algn="r" marL="342900" indent="-342900">
@@ -2387,14 +2425,17 @@
               <a:buChar char="•"/>
             </a:pPr>
             <a:r>
-              <a:rPr lang="en-US" sz="1400" dirty="0">
+              <a:rPr lang="en-US" sz="1500" dirty="0">
                 <a:solidFill>
                   <a:schemeClr val="tx1"/>
                 </a:solidFill>
+                <a:latin typeface="B Nazanin" pitchFamily="34" charset="0"/>
+                <a:ea typeface="B Nazanin" pitchFamily="34" charset="-122"/>
+                <a:cs typeface="B Nazanin" pitchFamily="34" charset="-120"/>
               </a:rPr>
               <a:t>پاسخگویی به حزب</a:t>
             </a:r>
-            <a:endParaRPr lang="en-US" sz="1400" dirty="0"/>
+            <a:endParaRPr lang="en-US" sz="1500" dirty="0"/>
           </a:p>
           <a:p>
             <a:pPr algn="r" marL="342900" indent="-342900">
@@ -2405,14 +2446,17 @@
               <a:buChar char="•"/>
             </a:pPr>
             <a:r>
-              <a:rPr lang="en-US" sz="1400" dirty="0">
+              <a:rPr lang="en-US" sz="1500" dirty="0">
                 <a:solidFill>
                   <a:schemeClr val="tx1"/>
                 </a:solidFill>
+                <a:latin typeface="B Nazanin" pitchFamily="34" charset="0"/>
+                <a:ea typeface="B Nazanin" pitchFamily="34" charset="-122"/>
+                <a:cs typeface="B Nazanin" pitchFamily="34" charset="-120"/>
               </a:rPr>
               <a:t>پاسخگویی به ارتش</a:t>
             </a:r>
-            <a:endParaRPr lang="en-US" sz="1400" dirty="0"/>
+            <a:endParaRPr lang="en-US" sz="1500" dirty="0"/>
           </a:p>
         </p:txBody>
       </p:sp>
@@ -2424,12 +2468,12 @@
         </p:nvSpPr>
         <p:spPr>
           <a:xfrm>
-            <a:off x="457200" y="3931920"/>
-            <a:ext cx="8229600" cy="777240"/>
+            <a:off x="457200" y="4069080"/>
+            <a:ext cx="8229600" cy="640080"/>
           </a:xfrm>
           <a:prstGeom prst="roundRect">
             <a:avLst>
-              <a:gd name="adj" fmla="val 11765"/>
+              <a:gd name="adj" fmla="val 14286"/>
             </a:avLst>
           </a:prstGeom>
           <a:solidFill>
@@ -2451,8 +2495,8 @@
         </p:nvSpPr>
         <p:spPr>
           <a:xfrm>
-            <a:off x="640080" y="3931920"/>
-            <a:ext cx="7863840" cy="777240"/>
+            <a:off x="640080" y="4069080"/>
+            <a:ext cx="7863840" cy="640080"/>
           </a:xfrm>
           <a:prstGeom prst="rect">
             <a:avLst/>
@@ -2468,10 +2512,13 @@
               <a:buNone/>
             </a:pPr>
             <a:r>
-              <a:rPr lang="en-US" sz="1400" dirty="0">
+              <a:rPr lang="en-US" sz="1600" dirty="0">
                 <a:solidFill>
                   <a:schemeClr val="tx1"/>
                 </a:solidFill>
+                <a:latin typeface="B Nazanin" pitchFamily="34" charset="0"/>
+                <a:ea typeface="B Nazanin" pitchFamily="34" charset="-122"/>
+                <a:cs typeface="B Nazanin" pitchFamily="34" charset="-120"/>
               </a:rPr>
               <a:t>💡 </a:t>
             </a:r>
@@ -2479,14 +2526,17 @@
               <a:buNone/>
             </a:pPr>
             <a:r>
-              <a:rPr lang="en-US" sz="1400" dirty="0">
+              <a:rPr lang="en-US" sz="1600" dirty="0">
                 <a:solidFill>
                   <a:schemeClr val="tx1"/>
                 </a:solidFill>
+                <a:latin typeface="B Nazanin" pitchFamily="34" charset="0"/>
+                <a:ea typeface="B Nazanin" pitchFamily="34" charset="-122"/>
+                <a:cs typeface="B Nazanin" pitchFamily="34" charset="-120"/>
               </a:rPr>
               <a:t>پاسخگویی به «حاکم» ← بوروکراسی سیاسی و وابسته. پاسخگویی به «قانون» ← بوروکراسی حرفه‌ای‌تر و مستقل‌تر.</a:t>
             </a:r>
-            <a:endParaRPr lang="en-US" sz="1400" dirty="0"/>
+            <a:endParaRPr lang="en-US" sz="1600" dirty="0"/>
           </a:p>
         </p:txBody>
       </p:sp>
@@ -2587,14 +2637,17 @@
               <a:buNone/>
             </a:pPr>
             <a:r>
-              <a:rPr lang="en-US" sz="3200" b="1" dirty="0">
+              <a:rPr lang="en-US" sz="3400" dirty="0">
                 <a:solidFill>
                   <a:schemeClr val="accent1"/>
                 </a:solidFill>
+                <a:latin typeface="B Titr" pitchFamily="34" charset="0"/>
+                <a:ea typeface="B Titr" pitchFamily="34" charset="-122"/>
+                <a:cs typeface="B Titr" pitchFamily="34" charset="-120"/>
               </a:rPr>
               <a:t>جمع‌بندی و نتیجه‌گیری</a:t>
             </a:r>
-            <a:endParaRPr lang="en-US" sz="3200" dirty="0"/>
+            <a:endParaRPr lang="en-US" sz="3400" dirty="0"/>
           </a:p>
         </p:txBody>
       </p:sp>
@@ -2607,7 +2660,7 @@
         <p:spPr>
           <a:xfrm>
             <a:off x="6126480" y="1234440"/>
-            <a:ext cx="2560320" cy="2606040"/>
+            <a:ext cx="2560320" cy="2743200"/>
           </a:xfrm>
           <a:prstGeom prst="roundRect">
             <a:avLst>
@@ -2633,8 +2686,8 @@
         </p:nvSpPr>
         <p:spPr>
           <a:xfrm>
-            <a:off x="6263640" y="1344168"/>
-            <a:ext cx="2286000" cy="411480"/>
+            <a:off x="6263640" y="1325880"/>
+            <a:ext cx="2286000" cy="640080"/>
           </a:xfrm>
           <a:prstGeom prst="rect">
             <a:avLst/>
@@ -2650,14 +2703,17 @@
               <a:buNone/>
             </a:pPr>
             <a:r>
-              <a:rPr lang="en-US" sz="1600" b="1" dirty="0">
+              <a:rPr lang="en-US" sz="1700" b="1" dirty="0">
                 <a:solidFill>
                   <a:schemeClr val="tx2"/>
                 </a:solidFill>
+                <a:latin typeface="B Nazanin" pitchFamily="34" charset="0"/>
+                <a:ea typeface="B Nazanin" pitchFamily="34" charset="-122"/>
+                <a:cs typeface="B Nazanin" pitchFamily="34" charset="-120"/>
               </a:rPr>
               <a:t>ریگز و مدل منشوری</a:t>
             </a:r>
-            <a:endParaRPr lang="en-US" sz="1600" dirty="0"/>
+            <a:endParaRPr lang="en-US" sz="1700" dirty="0"/>
           </a:p>
         </p:txBody>
       </p:sp>
@@ -2669,8 +2725,8 @@
         </p:nvSpPr>
         <p:spPr>
           <a:xfrm>
-            <a:off x="6263640" y="1801368"/>
-            <a:ext cx="2286000" cy="1920240"/>
+            <a:off x="6263640" y="2011680"/>
+            <a:ext cx="2286000" cy="1874520"/>
           </a:xfrm>
           <a:prstGeom prst="rect">
             <a:avLst/>
@@ -2690,14 +2746,17 @@
               <a:buChar char="•"/>
             </a:pPr>
             <a:r>
-              <a:rPr lang="en-US" sz="1400" dirty="0">
+              <a:rPr lang="en-US" sz="1500" dirty="0">
                 <a:solidFill>
                   <a:schemeClr val="tx1"/>
                 </a:solidFill>
+                <a:latin typeface="B Nazanin" pitchFamily="34" charset="0"/>
+                <a:ea typeface="B Nazanin" pitchFamily="34" charset="-122"/>
+                <a:cs typeface="B Nazanin" pitchFamily="34" charset="-120"/>
               </a:rPr>
               <a:t>بهترین چارچوب برای تحلیل بوروکراسی در کشورهای در حال توسعه</a:t>
             </a:r>
-            <a:endParaRPr lang="en-US" sz="1400" dirty="0"/>
+            <a:endParaRPr lang="en-US" sz="1500" dirty="0"/>
           </a:p>
         </p:txBody>
       </p:sp>
@@ -2710,7 +2769,7 @@
         <p:spPr>
           <a:xfrm>
             <a:off x="3291840" y="1234440"/>
-            <a:ext cx="2560320" cy="2606040"/>
+            <a:ext cx="2560320" cy="2743200"/>
           </a:xfrm>
           <a:prstGeom prst="roundRect">
             <a:avLst>
@@ -2736,8 +2795,8 @@
         </p:nvSpPr>
         <p:spPr>
           <a:xfrm>
-            <a:off x="3429000" y="1344168"/>
-            <a:ext cx="2286000" cy="411480"/>
+            <a:off x="3429000" y="1325880"/>
+            <a:ext cx="2286000" cy="640080"/>
           </a:xfrm>
           <a:prstGeom prst="rect">
             <a:avLst/>
@@ -2753,14 +2812,17 @@
               <a:buNone/>
             </a:pPr>
             <a:r>
-              <a:rPr lang="en-US" sz="1600" b="1" dirty="0">
+              <a:rPr lang="en-US" sz="1700" b="1" dirty="0">
                 <a:solidFill>
                   <a:schemeClr val="tx2"/>
                 </a:solidFill>
+                <a:latin typeface="B Nazanin" pitchFamily="34" charset="0"/>
+                <a:ea typeface="B Nazanin" pitchFamily="34" charset="-122"/>
+                <a:cs typeface="B Nazanin" pitchFamily="34" charset="-120"/>
               </a:rPr>
               <a:t>چالش اصلی</a:t>
             </a:r>
-            <a:endParaRPr lang="en-US" sz="1600" dirty="0"/>
+            <a:endParaRPr lang="en-US" sz="1700" dirty="0"/>
           </a:p>
         </p:txBody>
       </p:sp>
@@ -2772,8 +2834,8 @@
         </p:nvSpPr>
         <p:spPr>
           <a:xfrm>
-            <a:off x="3429000" y="1801368"/>
-            <a:ext cx="2286000" cy="1920240"/>
+            <a:off x="3429000" y="2011680"/>
+            <a:ext cx="2286000" cy="1874520"/>
           </a:xfrm>
           <a:prstGeom prst="rect">
             <a:avLst/>
@@ -2793,14 +2855,17 @@
               <a:buChar char="•"/>
             </a:pPr>
             <a:r>
-              <a:rPr lang="en-US" sz="1400" dirty="0">
+              <a:rPr lang="en-US" sz="1500" dirty="0">
                 <a:solidFill>
                   <a:schemeClr val="tx1"/>
                 </a:solidFill>
+                <a:latin typeface="B Nazanin" pitchFamily="34" charset="0"/>
+                <a:ea typeface="B Nazanin" pitchFamily="34" charset="-122"/>
+                <a:cs typeface="B Nazanin" pitchFamily="34" charset="-120"/>
               </a:rPr>
               <a:t>عدم تطابق بین ساختارهای مدرن و کارکردهای سنتی</a:t>
             </a:r>
-            <a:endParaRPr lang="en-US" sz="1400" dirty="0"/>
+            <a:endParaRPr lang="en-US" sz="1500" dirty="0"/>
           </a:p>
         </p:txBody>
       </p:sp>
@@ -2813,7 +2878,7 @@
         <p:spPr>
           <a:xfrm>
             <a:off x="457200" y="1234440"/>
-            <a:ext cx="2560320" cy="2606040"/>
+            <a:ext cx="2560320" cy="2743200"/>
           </a:xfrm>
           <a:prstGeom prst="roundRect">
             <a:avLst>
@@ -2839,8 +2904,8 @@
         </p:nvSpPr>
         <p:spPr>
           <a:xfrm>
-            <a:off x="594360" y="1344168"/>
-            <a:ext cx="2286000" cy="411480"/>
+            <a:off x="594360" y="1325880"/>
+            <a:ext cx="2286000" cy="640080"/>
           </a:xfrm>
           <a:prstGeom prst="rect">
             <a:avLst/>
@@ -2856,14 +2921,17 @@
               <a:buNone/>
             </a:pPr>
             <a:r>
-              <a:rPr lang="en-US" sz="1600" b="1" dirty="0">
+              <a:rPr lang="en-US" sz="1700" b="1" dirty="0">
                 <a:solidFill>
                   <a:schemeClr val="tx2"/>
                 </a:solidFill>
+                <a:latin typeface="B Nazanin" pitchFamily="34" charset="0"/>
+                <a:ea typeface="B Nazanin" pitchFamily="34" charset="-122"/>
+                <a:cs typeface="B Nazanin" pitchFamily="34" charset="-120"/>
               </a:rPr>
               <a:t>راهکار</a:t>
             </a:r>
-            <a:endParaRPr lang="en-US" sz="1600" dirty="0"/>
+            <a:endParaRPr lang="en-US" sz="1700" dirty="0"/>
           </a:p>
         </p:txBody>
       </p:sp>
@@ -2875,8 +2943,8 @@
         </p:nvSpPr>
         <p:spPr>
           <a:xfrm>
-            <a:off x="594360" y="1801368"/>
-            <a:ext cx="2286000" cy="1920240"/>
+            <a:off x="594360" y="2011680"/>
+            <a:ext cx="2286000" cy="1874520"/>
           </a:xfrm>
           <a:prstGeom prst="rect">
             <a:avLst/>
@@ -2896,14 +2964,17 @@
               <a:buChar char="•"/>
             </a:pPr>
             <a:r>
-              <a:rPr lang="en-US" sz="1400" dirty="0">
+              <a:rPr lang="en-US" sz="1500" dirty="0">
                 <a:solidFill>
                   <a:schemeClr val="tx1"/>
                 </a:solidFill>
+                <a:latin typeface="B Nazanin" pitchFamily="34" charset="0"/>
+                <a:ea typeface="B Nazanin" pitchFamily="34" charset="-122"/>
+                <a:cs typeface="B Nazanin" pitchFamily="34" charset="-120"/>
               </a:rPr>
               <a:t>درک بوم‌شناسی اداری (محیط سیاسی، اجتماعی و فرهنگی) قبل از هرگونه اصلاحات اداری</a:t>
             </a:r>
-            <a:endParaRPr lang="en-US" sz="1400" dirty="0"/>
+            <a:endParaRPr lang="en-US" sz="1500" dirty="0"/>
           </a:p>
         </p:txBody>
       </p:sp>
@@ -2915,12 +2986,12 @@
         </p:nvSpPr>
         <p:spPr>
           <a:xfrm>
-            <a:off x="457200" y="3931920"/>
-            <a:ext cx="8229600" cy="777240"/>
+            <a:off x="457200" y="4069080"/>
+            <a:ext cx="8229600" cy="640080"/>
           </a:xfrm>
           <a:prstGeom prst="roundRect">
             <a:avLst>
-              <a:gd name="adj" fmla="val 11765"/>
+              <a:gd name="adj" fmla="val 14286"/>
             </a:avLst>
           </a:prstGeom>
           <a:solidFill>
@@ -2942,8 +3013,8 @@
         </p:nvSpPr>
         <p:spPr>
           <a:xfrm>
-            <a:off x="640080" y="3931920"/>
-            <a:ext cx="7863840" cy="777240"/>
+            <a:off x="640080" y="4069080"/>
+            <a:ext cx="7863840" cy="640080"/>
           </a:xfrm>
           <a:prstGeom prst="rect">
             <a:avLst/>
@@ -2959,10 +3030,13 @@
               <a:buNone/>
             </a:pPr>
             <a:r>
-              <a:rPr lang="en-US" sz="1400" dirty="0">
+              <a:rPr lang="en-US" sz="1600" dirty="0">
                 <a:solidFill>
                   <a:schemeClr val="tx1"/>
                 </a:solidFill>
+                <a:latin typeface="B Nazanin" pitchFamily="34" charset="0"/>
+                <a:ea typeface="B Nazanin" pitchFamily="34" charset="-122"/>
+                <a:cs typeface="B Nazanin" pitchFamily="34" charset="-120"/>
               </a:rPr>
               <a:t>💡 </a:t>
             </a:r>
@@ -2970,14 +3044,17 @@
               <a:buNone/>
             </a:pPr>
             <a:r>
-              <a:rPr lang="en-US" sz="1400" dirty="0">
+              <a:rPr lang="en-US" sz="1600" dirty="0">
                 <a:solidFill>
                   <a:schemeClr val="tx1"/>
                 </a:solidFill>
+                <a:latin typeface="B Nazanin" pitchFamily="34" charset="0"/>
+                <a:ea typeface="B Nazanin" pitchFamily="34" charset="-122"/>
+                <a:cs typeface="B Nazanin" pitchFamily="34" charset="-120"/>
               </a:rPr>
               <a:t>سخن آخر: بوروکراسی صرفاً یک ابزار فنی نیست، بلکه بازتابی از فرهنگ و سیاست هر جامعه است.</a:t>
             </a:r>
-            <a:endParaRPr lang="en-US" sz="1400" dirty="0"/>
+            <a:endParaRPr lang="en-US" sz="1600" dirty="0"/>
           </a:p>
         </p:txBody>
       </p:sp>
@@ -3078,14 +3155,17 @@
               <a:buNone/>
             </a:pPr>
             <a:r>
-              <a:rPr lang="en-US" sz="3200" b="1" dirty="0">
+              <a:rPr lang="en-US" sz="3400" dirty="0">
                 <a:solidFill>
                   <a:schemeClr val="accent1"/>
                 </a:solidFill>
+                <a:latin typeface="B Titr" pitchFamily="34" charset="0"/>
+                <a:ea typeface="B Titr" pitchFamily="34" charset="-122"/>
+                <a:cs typeface="B Titr" pitchFamily="34" charset="-120"/>
               </a:rPr>
               <a:t>نکات کلیدی برای ارائه در کلاس</a:t>
             </a:r>
-            <a:endParaRPr lang="en-US" sz="3200" dirty="0"/>
+            <a:endParaRPr lang="en-US" sz="3400" dirty="0"/>
           </a:p>
         </p:txBody>
       </p:sp>
@@ -3166,14 +3246,17 @@
               <a:buNone/>
             </a:pPr>
             <a:r>
-              <a:rPr lang="en-US" sz="1600" b="1" dirty="0">
+              <a:rPr lang="en-US" sz="1800" b="1" dirty="0">
                 <a:solidFill>
                   <a:schemeClr val="bg1"/>
                 </a:solidFill>
+                <a:latin typeface="B Nazanin" pitchFamily="34" charset="0"/>
+                <a:ea typeface="B Nazanin" pitchFamily="34" charset="-122"/>
+                <a:cs typeface="B Nazanin" pitchFamily="34" charset="-120"/>
               </a:rPr>
               <a:t>۱</a:t>
             </a:r>
-            <a:endParaRPr lang="en-US" sz="1600" dirty="0"/>
+            <a:endParaRPr lang="en-US" sz="1800" dirty="0"/>
           </a:p>
         </p:txBody>
       </p:sp>
@@ -3202,14 +3285,17 @@
               <a:buNone/>
             </a:pPr>
             <a:r>
-              <a:rPr lang="en-US" sz="1500" dirty="0">
+              <a:rPr lang="en-US" sz="1700" dirty="0">
                 <a:solidFill>
                   <a:schemeClr val="tx1"/>
                 </a:solidFill>
+                <a:latin typeface="B Nazanin" pitchFamily="34" charset="0"/>
+                <a:ea typeface="B Nazanin" pitchFamily="34" charset="-122"/>
+                <a:cs typeface="B Nazanin" pitchFamily="34" charset="-120"/>
               </a:rPr>
               <a:t>استفاده از نمودارها: نمودار درختی مدل‌های ریگز را روی تخته یا اسلاید بکشید</a:t>
             </a:r>
-            <a:endParaRPr lang="en-US" sz="1500" dirty="0"/>
+            <a:endParaRPr lang="en-US" sz="1700" dirty="0"/>
           </a:p>
         </p:txBody>
       </p:sp>
@@ -3290,14 +3376,17 @@
               <a:buNone/>
             </a:pPr>
             <a:r>
-              <a:rPr lang="en-US" sz="1600" b="1" dirty="0">
+              <a:rPr lang="en-US" sz="1800" b="1" dirty="0">
                 <a:solidFill>
                   <a:schemeClr val="bg1"/>
                 </a:solidFill>
+                <a:latin typeface="B Nazanin" pitchFamily="34" charset="0"/>
+                <a:ea typeface="B Nazanin" pitchFamily="34" charset="-122"/>
+                <a:cs typeface="B Nazanin" pitchFamily="34" charset="-120"/>
               </a:rPr>
               <a:t>۲</a:t>
             </a:r>
-            <a:endParaRPr lang="en-US" sz="1600" dirty="0"/>
+            <a:endParaRPr lang="en-US" sz="1800" dirty="0"/>
           </a:p>
         </p:txBody>
       </p:sp>
@@ -3326,14 +3415,17 @@
               <a:buNone/>
             </a:pPr>
             <a:r>
-              <a:rPr lang="en-US" sz="1500" dirty="0">
+              <a:rPr lang="en-US" sz="1700" dirty="0">
                 <a:solidFill>
                   <a:schemeClr val="tx1"/>
                 </a:solidFill>
+                <a:latin typeface="B Nazanin" pitchFamily="34" charset="0"/>
+                <a:ea typeface="B Nazanin" pitchFamily="34" charset="-122"/>
+                <a:cs typeface="B Nazanin" pitchFamily="34" charset="-120"/>
               </a:rPr>
               <a:t>مثال‌های عینی: برای مدل «منشوری»، مثال سازمان‌های دولتی در ایران را ذکر کنید</a:t>
             </a:r>
-            <a:endParaRPr lang="en-US" sz="1500" dirty="0"/>
+            <a:endParaRPr lang="en-US" sz="1700" dirty="0"/>
           </a:p>
         </p:txBody>
       </p:sp>
@@ -3414,14 +3506,17 @@
               <a:buNone/>
             </a:pPr>
             <a:r>
-              <a:rPr lang="en-US" sz="1600" b="1" dirty="0">
+              <a:rPr lang="en-US" sz="1800" b="1" dirty="0">
                 <a:solidFill>
                   <a:schemeClr val="bg1"/>
                 </a:solidFill>
+                <a:latin typeface="B Nazanin" pitchFamily="34" charset="0"/>
+                <a:ea typeface="B Nazanin" pitchFamily="34" charset="-122"/>
+                <a:cs typeface="B Nazanin" pitchFamily="34" charset="-120"/>
               </a:rPr>
               <a:t>۳</a:t>
             </a:r>
-            <a:endParaRPr lang="en-US" sz="1600" dirty="0"/>
+            <a:endParaRPr lang="en-US" sz="1800" dirty="0"/>
           </a:p>
         </p:txBody>
       </p:sp>
@@ -3450,14 +3545,17 @@
               <a:buNone/>
             </a:pPr>
             <a:r>
-              <a:rPr lang="en-US" sz="1500" dirty="0">
+              <a:rPr lang="en-US" sz="1700" dirty="0">
                 <a:solidFill>
                   <a:schemeClr val="tx1"/>
                 </a:solidFill>
+                <a:latin typeface="B Nazanin" pitchFamily="34" charset="0"/>
+                <a:ea typeface="B Nazanin" pitchFamily="34" charset="-122"/>
+                <a:cs typeface="B Nazanin" pitchFamily="34" charset="-120"/>
               </a:rPr>
               <a:t>پرسش و پاسخ: از همکلاسی‌ها بپرسید: «به نظر شما بوروکراسی در ایران بیشتر به مدل وبری نزدیک است یا مدل منشوری ریگز؟»</a:t>
             </a:r>
-            <a:endParaRPr lang="en-US" sz="1500" dirty="0"/>
+            <a:endParaRPr lang="en-US" sz="1700" dirty="0"/>
           </a:p>
         </p:txBody>
       </p:sp>
@@ -3558,14 +3656,17 @@
               <a:buNone/>
             </a:pPr>
             <a:r>
-              <a:rPr lang="en-US" sz="3200" b="1" dirty="0">
+              <a:rPr lang="en-US" sz="3400" dirty="0">
                 <a:solidFill>
                   <a:schemeClr val="accent1"/>
                 </a:solidFill>
+                <a:latin typeface="B Titr" pitchFamily="34" charset="0"/>
+                <a:ea typeface="B Titr" pitchFamily="34" charset="-122"/>
+                <a:cs typeface="B Titr" pitchFamily="34" charset="-120"/>
               </a:rPr>
               <a:t>مقدمه و مفهوم «ریگز»</a:t>
             </a:r>
-            <a:endParaRPr lang="en-US" sz="3200" dirty="0"/>
+            <a:endParaRPr lang="en-US" sz="3400" dirty="0"/>
           </a:p>
         </p:txBody>
       </p:sp>
@@ -3578,11 +3679,11 @@
         <p:spPr>
           <a:xfrm>
             <a:off x="4709160" y="1234440"/>
-            <a:ext cx="3977640" cy="2606040"/>
+            <a:ext cx="3977640" cy="2743200"/>
           </a:xfrm>
           <a:prstGeom prst="roundRect">
             <a:avLst>
-              <a:gd name="adj" fmla="val 3509"/>
+              <a:gd name="adj" fmla="val 3333"/>
             </a:avLst>
           </a:prstGeom>
           <a:solidFill>
@@ -3604,8 +3705,8 @@
         </p:nvSpPr>
         <p:spPr>
           <a:xfrm>
-            <a:off x="4846320" y="1344168"/>
-            <a:ext cx="3703320" cy="411480"/>
+            <a:off x="4846320" y="1325880"/>
+            <a:ext cx="3703320" cy="640080"/>
           </a:xfrm>
           <a:prstGeom prst="rect">
             <a:avLst/>
@@ -3621,14 +3722,17 @@
               <a:buNone/>
             </a:pPr>
             <a:r>
-              <a:rPr lang="en-US" sz="1600" b="1" dirty="0">
+              <a:rPr lang="en-US" sz="1700" b="1" dirty="0">
                 <a:solidFill>
                   <a:schemeClr val="tx2"/>
                 </a:solidFill>
+                <a:latin typeface="B Nazanin" pitchFamily="34" charset="0"/>
+                <a:ea typeface="B Nazanin" pitchFamily="34" charset="-122"/>
+                <a:cs typeface="B Nazanin" pitchFamily="34" charset="-120"/>
               </a:rPr>
               <a:t>فرد ریگز (Riggs)</a:t>
             </a:r>
-            <a:endParaRPr lang="en-US" sz="1600" dirty="0"/>
+            <a:endParaRPr lang="en-US" sz="1700" dirty="0"/>
           </a:p>
         </p:txBody>
       </p:sp>
@@ -3640,8 +3744,8 @@
         </p:nvSpPr>
         <p:spPr>
           <a:xfrm>
-            <a:off x="4846320" y="1801368"/>
-            <a:ext cx="3703320" cy="1920240"/>
+            <a:off x="4846320" y="2011680"/>
+            <a:ext cx="3703320" cy="1874520"/>
           </a:xfrm>
           <a:prstGeom prst="rect">
             <a:avLst/>
@@ -3661,14 +3765,17 @@
               <a:buChar char="•"/>
             </a:pPr>
             <a:r>
-              <a:rPr lang="en-US" sz="1400" dirty="0">
+              <a:rPr lang="en-US" sz="1500" dirty="0">
                 <a:solidFill>
                   <a:schemeClr val="tx1"/>
                 </a:solidFill>
+                <a:latin typeface="B Nazanin" pitchFamily="34" charset="0"/>
+                <a:ea typeface="B Nazanin" pitchFamily="34" charset="-122"/>
+                <a:cs typeface="B Nazanin" pitchFamily="34" charset="-120"/>
               </a:rPr>
               <a:t>تئوری منشوری (Prismatic Theory)</a:t>
             </a:r>
-            <a:endParaRPr lang="en-US" sz="1400" dirty="0"/>
+            <a:endParaRPr lang="en-US" sz="1500" dirty="0"/>
           </a:p>
           <a:p>
             <a:pPr algn="r" marL="342900" indent="-342900">
@@ -3679,14 +3786,17 @@
               <a:buChar char="•"/>
             </a:pPr>
             <a:r>
-              <a:rPr lang="en-US" sz="1400" dirty="0">
+              <a:rPr lang="en-US" sz="1500" dirty="0">
                 <a:solidFill>
                   <a:schemeClr val="tx1"/>
                 </a:solidFill>
+                <a:latin typeface="B Nazanin" pitchFamily="34" charset="0"/>
+                <a:ea typeface="B Nazanin" pitchFamily="34" charset="-122"/>
+                <a:cs typeface="B Nazanin" pitchFamily="34" charset="-120"/>
               </a:rPr>
               <a:t>کشورهای در حال توسعه = ساختارهای «منشوری» (ترکیب سنت + مدرنیته)</a:t>
             </a:r>
-            <a:endParaRPr lang="en-US" sz="1400" dirty="0"/>
+            <a:endParaRPr lang="en-US" sz="1500" dirty="0"/>
           </a:p>
         </p:txBody>
       </p:sp>
@@ -3699,11 +3809,11 @@
         <p:spPr>
           <a:xfrm>
             <a:off x="457200" y="1234440"/>
-            <a:ext cx="3977640" cy="2606040"/>
+            <a:ext cx="3977640" cy="2743200"/>
           </a:xfrm>
           <a:prstGeom prst="roundRect">
             <a:avLst>
-              <a:gd name="adj" fmla="val 3509"/>
+              <a:gd name="adj" fmla="val 3333"/>
             </a:avLst>
           </a:prstGeom>
           <a:solidFill>
@@ -3725,8 +3835,8 @@
         </p:nvSpPr>
         <p:spPr>
           <a:xfrm>
-            <a:off x="594360" y="1344168"/>
-            <a:ext cx="3703320" cy="411480"/>
+            <a:off x="594360" y="1325880"/>
+            <a:ext cx="3703320" cy="640080"/>
           </a:xfrm>
           <a:prstGeom prst="rect">
             <a:avLst/>
@@ -3742,14 +3852,17 @@
               <a:buNone/>
             </a:pPr>
             <a:r>
-              <a:rPr lang="en-US" sz="1600" b="1" dirty="0">
+              <a:rPr lang="en-US" sz="1700" b="1" dirty="0">
                 <a:solidFill>
                   <a:schemeClr val="tx2"/>
                 </a:solidFill>
+                <a:latin typeface="B Nazanin" pitchFamily="34" charset="0"/>
+                <a:ea typeface="B Nazanin" pitchFamily="34" charset="-122"/>
+                <a:cs typeface="B Nazanin" pitchFamily="34" charset="-120"/>
               </a:rPr>
               <a:t>مفهوم «سالا» (Sala)</a:t>
             </a:r>
-            <a:endParaRPr lang="en-US" sz="1600" dirty="0"/>
+            <a:endParaRPr lang="en-US" sz="1700" dirty="0"/>
           </a:p>
         </p:txBody>
       </p:sp>
@@ -3761,8 +3874,8 @@
         </p:nvSpPr>
         <p:spPr>
           <a:xfrm>
-            <a:off x="594360" y="1801368"/>
-            <a:ext cx="3703320" cy="1920240"/>
+            <a:off x="594360" y="2011680"/>
+            <a:ext cx="3703320" cy="1874520"/>
           </a:xfrm>
           <a:prstGeom prst="rect">
             <a:avLst/>
@@ -3782,14 +3895,17 @@
               <a:buChar char="•"/>
             </a:pPr>
             <a:r>
-              <a:rPr lang="en-US" sz="1400" dirty="0">
+              <a:rPr lang="en-US" sz="1500" dirty="0">
                 <a:solidFill>
                   <a:schemeClr val="tx1"/>
                 </a:solidFill>
+                <a:latin typeface="B Nazanin" pitchFamily="34" charset="0"/>
+                <a:ea typeface="B Nazanin" pitchFamily="34" charset="-122"/>
+                <a:cs typeface="B Nazanin" pitchFamily="34" charset="-120"/>
               </a:rPr>
               <a:t>دیوان (Bureau): هر سه مدل (متمرکز، مرکب، وسیع)</a:t>
             </a:r>
-            <a:endParaRPr lang="en-US" sz="1400" dirty="0"/>
+            <a:endParaRPr lang="en-US" sz="1500" dirty="0"/>
           </a:p>
           <a:p>
             <a:pPr algn="r" marL="342900" indent="-342900">
@@ -3800,14 +3916,17 @@
               <a:buChar char="•"/>
             </a:pPr>
             <a:r>
-              <a:rPr lang="en-US" sz="1400" dirty="0">
+              <a:rPr lang="en-US" sz="1500" dirty="0">
                 <a:solidFill>
                   <a:schemeClr val="tx1"/>
                 </a:solidFill>
+                <a:latin typeface="B Nazanin" pitchFamily="34" charset="0"/>
+                <a:ea typeface="B Nazanin" pitchFamily="34" charset="-122"/>
+                <a:cs typeface="B Nazanin" pitchFamily="34" charset="-120"/>
               </a:rPr>
               <a:t>اتاق (Chamber): بوروکراسی مرکب</a:t>
             </a:r>
-            <a:endParaRPr lang="en-US" sz="1400" dirty="0"/>
+            <a:endParaRPr lang="en-US" sz="1500" dirty="0"/>
           </a:p>
           <a:p>
             <a:pPr algn="r" marL="342900" indent="-342900">
@@ -3818,14 +3937,17 @@
               <a:buChar char="•"/>
             </a:pPr>
             <a:r>
-              <a:rPr lang="en-US" sz="1400" dirty="0">
+              <a:rPr lang="en-US" sz="1500" dirty="0">
                 <a:solidFill>
                   <a:schemeClr val="tx1"/>
                 </a:solidFill>
+                <a:latin typeface="B Nazanin" pitchFamily="34" charset="0"/>
+                <a:ea typeface="B Nazanin" pitchFamily="34" charset="-122"/>
+                <a:cs typeface="B Nazanin" pitchFamily="34" charset="-120"/>
               </a:rPr>
               <a:t>اداره (Office): بوروکراسی وسیع و جدید</a:t>
             </a:r>
-            <a:endParaRPr lang="en-US" sz="1400" dirty="0"/>
+            <a:endParaRPr lang="en-US" sz="1500" dirty="0"/>
           </a:p>
         </p:txBody>
       </p:sp>
@@ -3837,12 +3959,12 @@
         </p:nvSpPr>
         <p:spPr>
           <a:xfrm>
-            <a:off x="457200" y="3931920"/>
-            <a:ext cx="8229600" cy="777240"/>
+            <a:off x="457200" y="4069080"/>
+            <a:ext cx="8229600" cy="640080"/>
           </a:xfrm>
           <a:prstGeom prst="roundRect">
             <a:avLst>
-              <a:gd name="adj" fmla="val 11765"/>
+              <a:gd name="adj" fmla="val 14286"/>
             </a:avLst>
           </a:prstGeom>
           <a:solidFill>
@@ -3864,8 +3986,8 @@
         </p:nvSpPr>
         <p:spPr>
           <a:xfrm>
-            <a:off x="640080" y="3931920"/>
-            <a:ext cx="7863840" cy="777240"/>
+            <a:off x="640080" y="4069080"/>
+            <a:ext cx="7863840" cy="640080"/>
           </a:xfrm>
           <a:prstGeom prst="rect">
             <a:avLst/>
@@ -3881,10 +4003,13 @@
               <a:buNone/>
             </a:pPr>
             <a:r>
-              <a:rPr lang="en-US" sz="1400" dirty="0">
+              <a:rPr lang="en-US" sz="1600" dirty="0">
                 <a:solidFill>
                   <a:schemeClr val="tx1"/>
                 </a:solidFill>
+                <a:latin typeface="B Nazanin" pitchFamily="34" charset="0"/>
+                <a:ea typeface="B Nazanin" pitchFamily="34" charset="-122"/>
+                <a:cs typeface="B Nazanin" pitchFamily="34" charset="-120"/>
               </a:rPr>
               <a:t>💡 </a:t>
             </a:r>
@@ -3892,14 +4017,17 @@
               <a:buNone/>
             </a:pPr>
             <a:r>
-              <a:rPr lang="en-US" sz="1400" dirty="0">
+              <a:rPr lang="en-US" sz="1600" dirty="0">
                 <a:solidFill>
                   <a:schemeClr val="tx1"/>
                 </a:solidFill>
+                <a:latin typeface="B Nazanin" pitchFamily="34" charset="0"/>
+                <a:ea typeface="B Nazanin" pitchFamily="34" charset="-122"/>
+                <a:cs typeface="B Nazanin" pitchFamily="34" charset="-120"/>
               </a:rPr>
               <a:t>در جوامع در حال توسعه، ساختارها ظاهراً مدرن‌اند، اما کارکردهایشان هنوز سنتی و خانوادگی است.</a:t>
             </a:r>
-            <a:endParaRPr lang="en-US" sz="1400" dirty="0"/>
+            <a:endParaRPr lang="en-US" sz="1600" dirty="0"/>
           </a:p>
         </p:txBody>
       </p:sp>
@@ -4000,14 +4128,17 @@
               <a:buNone/>
             </a:pPr>
             <a:r>
-              <a:rPr lang="en-US" sz="3200" b="1" dirty="0">
+              <a:rPr lang="en-US" sz="3400" dirty="0">
                 <a:solidFill>
                   <a:schemeClr val="accent1"/>
                 </a:solidFill>
+                <a:latin typeface="B Titr" pitchFamily="34" charset="0"/>
+                <a:ea typeface="B Titr" pitchFamily="34" charset="-122"/>
+                <a:cs typeface="B Titr" pitchFamily="34" charset="-120"/>
               </a:rPr>
               <a:t>نقد مدل وبری</a:t>
             </a:r>
-            <a:endParaRPr lang="en-US" sz="3200" dirty="0"/>
+            <a:endParaRPr lang="en-US" sz="3400" dirty="0"/>
           </a:p>
         </p:txBody>
       </p:sp>
@@ -4020,7 +4151,7 @@
         <p:spPr>
           <a:xfrm>
             <a:off x="6126480" y="1234440"/>
-            <a:ext cx="2560320" cy="2606040"/>
+            <a:ext cx="2560320" cy="2743200"/>
           </a:xfrm>
           <a:prstGeom prst="roundRect">
             <a:avLst>
@@ -4046,8 +4177,8 @@
         </p:nvSpPr>
         <p:spPr>
           <a:xfrm>
-            <a:off x="6263640" y="1344168"/>
-            <a:ext cx="2286000" cy="411480"/>
+            <a:off x="6263640" y="1325880"/>
+            <a:ext cx="2286000" cy="640080"/>
           </a:xfrm>
           <a:prstGeom prst="rect">
             <a:avLst/>
@@ -4063,14 +4194,17 @@
               <a:buNone/>
             </a:pPr>
             <a:r>
-              <a:rPr lang="en-US" sz="1600" b="1" dirty="0">
+              <a:rPr lang="en-US" sz="1700" b="1" dirty="0">
                 <a:solidFill>
                   <a:schemeClr val="tx2"/>
                 </a:solidFill>
+                <a:latin typeface="B Nazanin" pitchFamily="34" charset="0"/>
+                <a:ea typeface="B Nazanin" pitchFamily="34" charset="-122"/>
+                <a:cs typeface="B Nazanin" pitchFamily="34" charset="-120"/>
               </a:rPr>
               <a:t>مدل وبری (عقلانی-قانونی)</a:t>
             </a:r>
-            <a:endParaRPr lang="en-US" sz="1600" dirty="0"/>
+            <a:endParaRPr lang="en-US" sz="1700" dirty="0"/>
           </a:p>
         </p:txBody>
       </p:sp>
@@ -4082,8 +4216,8 @@
         </p:nvSpPr>
         <p:spPr>
           <a:xfrm>
-            <a:off x="6263640" y="1801368"/>
-            <a:ext cx="2286000" cy="1920240"/>
+            <a:off x="6263640" y="2011680"/>
+            <a:ext cx="2286000" cy="1874520"/>
           </a:xfrm>
           <a:prstGeom prst="rect">
             <a:avLst/>
@@ -4103,14 +4237,17 @@
               <a:buChar char="•"/>
             </a:pPr>
             <a:r>
-              <a:rPr lang="en-US" sz="1400" dirty="0">
+              <a:rPr lang="en-US" sz="1500" dirty="0">
                 <a:solidFill>
                   <a:schemeClr val="tx1"/>
                 </a:solidFill>
+                <a:latin typeface="B Nazanin" pitchFamily="34" charset="0"/>
+                <a:ea typeface="B Nazanin" pitchFamily="34" charset="-122"/>
+                <a:cs typeface="B Nazanin" pitchFamily="34" charset="-120"/>
               </a:rPr>
               <a:t>سلسله‌مراتب</a:t>
             </a:r>
-            <a:endParaRPr lang="en-US" sz="1400" dirty="0"/>
+            <a:endParaRPr lang="en-US" sz="1500" dirty="0"/>
           </a:p>
           <a:p>
             <a:pPr algn="r" marL="342900" indent="-342900">
@@ -4121,14 +4258,17 @@
               <a:buChar char="•"/>
             </a:pPr>
             <a:r>
-              <a:rPr lang="en-US" sz="1400" dirty="0">
+              <a:rPr lang="en-US" sz="1500" dirty="0">
                 <a:solidFill>
                   <a:schemeClr val="tx1"/>
                 </a:solidFill>
+                <a:latin typeface="B Nazanin" pitchFamily="34" charset="0"/>
+                <a:ea typeface="B Nazanin" pitchFamily="34" charset="-122"/>
+                <a:cs typeface="B Nazanin" pitchFamily="34" charset="-120"/>
               </a:rPr>
               <a:t>تقسیم کار</a:t>
             </a:r>
-            <a:endParaRPr lang="en-US" sz="1400" dirty="0"/>
+            <a:endParaRPr lang="en-US" sz="1500" dirty="0"/>
           </a:p>
           <a:p>
             <a:pPr algn="r" marL="342900" indent="-342900">
@@ -4139,14 +4279,17 @@
               <a:buChar char="•"/>
             </a:pPr>
             <a:r>
-              <a:rPr lang="en-US" sz="1400" dirty="0">
+              <a:rPr lang="en-US" sz="1500" dirty="0">
                 <a:solidFill>
                   <a:schemeClr val="tx1"/>
                 </a:solidFill>
+                <a:latin typeface="B Nazanin" pitchFamily="34" charset="0"/>
+                <a:ea typeface="B Nazanin" pitchFamily="34" charset="-122"/>
+                <a:cs typeface="B Nazanin" pitchFamily="34" charset="-120"/>
               </a:rPr>
               <a:t>قوانین مکتوب</a:t>
             </a:r>
-            <a:endParaRPr lang="en-US" sz="1400" dirty="0"/>
+            <a:endParaRPr lang="en-US" sz="1500" dirty="0"/>
           </a:p>
           <a:p>
             <a:pPr algn="r" marL="342900" indent="-342900">
@@ -4157,14 +4300,17 @@
               <a:buChar char="•"/>
             </a:pPr>
             <a:r>
-              <a:rPr lang="en-US" sz="1400" dirty="0">
+              <a:rPr lang="en-US" sz="1500" dirty="0">
                 <a:solidFill>
                   <a:schemeClr val="tx1"/>
                 </a:solidFill>
+                <a:latin typeface="B Nazanin" pitchFamily="34" charset="0"/>
+                <a:ea typeface="B Nazanin" pitchFamily="34" charset="-122"/>
+                <a:cs typeface="B Nazanin" pitchFamily="34" charset="-120"/>
               </a:rPr>
               <a:t>تخصص</a:t>
             </a:r>
-            <a:endParaRPr lang="en-US" sz="1400" dirty="0"/>
+            <a:endParaRPr lang="en-US" sz="1500" dirty="0"/>
           </a:p>
         </p:txBody>
       </p:sp>
@@ -4177,7 +4323,7 @@
         <p:spPr>
           <a:xfrm>
             <a:off x="3291840" y="1234440"/>
-            <a:ext cx="2560320" cy="2606040"/>
+            <a:ext cx="2560320" cy="2743200"/>
           </a:xfrm>
           <a:prstGeom prst="roundRect">
             <a:avLst>
@@ -4203,8 +4349,8 @@
         </p:nvSpPr>
         <p:spPr>
           <a:xfrm>
-            <a:off x="3429000" y="1344168"/>
-            <a:ext cx="2286000" cy="411480"/>
+            <a:off x="3429000" y="1325880"/>
+            <a:ext cx="2286000" cy="640080"/>
           </a:xfrm>
           <a:prstGeom prst="rect">
             <a:avLst/>
@@ -4220,14 +4366,17 @@
               <a:buNone/>
             </a:pPr>
             <a:r>
-              <a:rPr lang="en-US" sz="1600" b="1" dirty="0">
+              <a:rPr lang="en-US" sz="1700" b="1" dirty="0">
                 <a:solidFill>
                   <a:schemeClr val="tx2"/>
                 </a:solidFill>
+                <a:latin typeface="B Nazanin" pitchFamily="34" charset="0"/>
+                <a:ea typeface="B Nazanin" pitchFamily="34" charset="-122"/>
+                <a:cs typeface="B Nazanin" pitchFamily="34" charset="-120"/>
               </a:rPr>
               <a:t>نقد ریگز به وبر</a:t>
             </a:r>
-            <a:endParaRPr lang="en-US" sz="1600" dirty="0"/>
+            <a:endParaRPr lang="en-US" sz="1700" dirty="0"/>
           </a:p>
         </p:txBody>
       </p:sp>
@@ -4239,8 +4388,8 @@
         </p:nvSpPr>
         <p:spPr>
           <a:xfrm>
-            <a:off x="3429000" y="1801368"/>
-            <a:ext cx="2286000" cy="1920240"/>
+            <a:off x="3429000" y="2011680"/>
+            <a:ext cx="2286000" cy="1874520"/>
           </a:xfrm>
           <a:prstGeom prst="rect">
             <a:avLst/>
@@ -4260,14 +4409,17 @@
               <a:buChar char="•"/>
             </a:pPr>
             <a:r>
-              <a:rPr lang="en-US" sz="1400" dirty="0">
+              <a:rPr lang="en-US" sz="1500" dirty="0">
                 <a:solidFill>
                   <a:schemeClr val="tx1"/>
                 </a:solidFill>
+                <a:latin typeface="B Nazanin" pitchFamily="34" charset="0"/>
+                <a:ea typeface="B Nazanin" pitchFamily="34" charset="-122"/>
+                <a:cs typeface="B Nazanin" pitchFamily="34" charset="-120"/>
               </a:rPr>
               <a:t>مدل وبری برای جوامع غربی طراحی شده</a:t>
             </a:r>
-            <a:endParaRPr lang="en-US" sz="1400" dirty="0"/>
+            <a:endParaRPr lang="en-US" sz="1500" dirty="0"/>
           </a:p>
           <a:p>
             <a:pPr algn="r" marL="342900" indent="-342900">
@@ -4278,14 +4430,17 @@
               <a:buChar char="•"/>
             </a:pPr>
             <a:r>
-              <a:rPr lang="en-US" sz="1400" dirty="0">
+              <a:rPr lang="en-US" sz="1500" dirty="0">
                 <a:solidFill>
                   <a:schemeClr val="tx1"/>
                 </a:solidFill>
+                <a:latin typeface="B Nazanin" pitchFamily="34" charset="0"/>
+                <a:ea typeface="B Nazanin" pitchFamily="34" charset="-122"/>
+                <a:cs typeface="B Nazanin" pitchFamily="34" charset="-120"/>
               </a:rPr>
               <a:t>برای جوامع در حال توسعه کارایی ندارد</a:t>
             </a:r>
-            <a:endParaRPr lang="en-US" sz="1400" dirty="0"/>
+            <a:endParaRPr lang="en-US" sz="1500" dirty="0"/>
           </a:p>
         </p:txBody>
       </p:sp>
@@ -4298,7 +4453,7 @@
         <p:spPr>
           <a:xfrm>
             <a:off x="457200" y="1234440"/>
-            <a:ext cx="2560320" cy="2606040"/>
+            <a:ext cx="2560320" cy="2743200"/>
           </a:xfrm>
           <a:prstGeom prst="roundRect">
             <a:avLst>
@@ -4324,8 +4479,8 @@
         </p:nvSpPr>
         <p:spPr>
           <a:xfrm>
-            <a:off x="594360" y="1344168"/>
-            <a:ext cx="2286000" cy="411480"/>
+            <a:off x="594360" y="1325880"/>
+            <a:ext cx="2286000" cy="640080"/>
           </a:xfrm>
           <a:prstGeom prst="rect">
             <a:avLst/>
@@ -4341,14 +4496,17 @@
               <a:buNone/>
             </a:pPr>
             <a:r>
-              <a:rPr lang="en-US" sz="1600" b="1" dirty="0">
+              <a:rPr lang="en-US" sz="1700" b="1" dirty="0">
                 <a:solidFill>
                   <a:schemeClr val="tx2"/>
                 </a:solidFill>
+                <a:latin typeface="B Nazanin" pitchFamily="34" charset="0"/>
+                <a:ea typeface="B Nazanin" pitchFamily="34" charset="-122"/>
+                <a:cs typeface="B Nazanin" pitchFamily="34" charset="-120"/>
               </a:rPr>
               <a:t>مشکلات در کشورهای در حال توسعه</a:t>
             </a:r>
-            <a:endParaRPr lang="en-US" sz="1600" dirty="0"/>
+            <a:endParaRPr lang="en-US" sz="1700" dirty="0"/>
           </a:p>
         </p:txBody>
       </p:sp>
@@ -4360,8 +4518,8 @@
         </p:nvSpPr>
         <p:spPr>
           <a:xfrm>
-            <a:off x="594360" y="1801368"/>
-            <a:ext cx="2286000" cy="1920240"/>
+            <a:off x="594360" y="2011680"/>
+            <a:ext cx="2286000" cy="1874520"/>
           </a:xfrm>
           <a:prstGeom prst="rect">
             <a:avLst/>
@@ -4381,14 +4539,17 @@
               <a:buChar char="•"/>
             </a:pPr>
             <a:r>
-              <a:rPr lang="en-US" sz="1400" dirty="0">
+              <a:rPr lang="en-US" sz="1500" dirty="0">
                 <a:solidFill>
                   <a:schemeClr val="tx1"/>
                 </a:solidFill>
+                <a:latin typeface="B Nazanin" pitchFamily="34" charset="0"/>
+                <a:ea typeface="B Nazanin" pitchFamily="34" charset="-122"/>
+                <a:cs typeface="B Nazanin" pitchFamily="34" charset="-120"/>
               </a:rPr>
               <a:t>نادیده گرفتن روابط غیررسمی و خانوادگی</a:t>
             </a:r>
-            <a:endParaRPr lang="en-US" sz="1400" dirty="0"/>
+            <a:endParaRPr lang="en-US" sz="1500" dirty="0"/>
           </a:p>
           <a:p>
             <a:pPr algn="r" marL="342900" indent="-342900">
@@ -4399,14 +4560,17 @@
               <a:buChar char="•"/>
             </a:pPr>
             <a:r>
-              <a:rPr lang="en-US" sz="1400" dirty="0">
+              <a:rPr lang="en-US" sz="1500" dirty="0">
                 <a:solidFill>
                   <a:schemeClr val="tx1"/>
                 </a:solidFill>
+                <a:latin typeface="B Nazanin" pitchFamily="34" charset="0"/>
+                <a:ea typeface="B Nazanin" pitchFamily="34" charset="-122"/>
+                <a:cs typeface="B Nazanin" pitchFamily="34" charset="-120"/>
               </a:rPr>
               <a:t>عدم تطابق با ساختارهای سیاسی سنتی</a:t>
             </a:r>
-            <a:endParaRPr lang="en-US" sz="1400" dirty="0"/>
+            <a:endParaRPr lang="en-US" sz="1500" dirty="0"/>
           </a:p>
           <a:p>
             <a:pPr algn="r" marL="342900" indent="-342900">
@@ -4417,14 +4581,17 @@
               <a:buChar char="•"/>
             </a:pPr>
             <a:r>
-              <a:rPr lang="en-US" sz="1400" dirty="0">
+              <a:rPr lang="en-US" sz="1500" dirty="0">
                 <a:solidFill>
                   <a:schemeClr val="tx1"/>
                 </a:solidFill>
+                <a:latin typeface="B Nazanin" pitchFamily="34" charset="0"/>
+                <a:ea typeface="B Nazanin" pitchFamily="34" charset="-122"/>
+                <a:cs typeface="B Nazanin" pitchFamily="34" charset="-120"/>
               </a:rPr>
               <a:t>شکاف بین انتظارات رسمی و رفتار عملی کارکنان</a:t>
             </a:r>
-            <a:endParaRPr lang="en-US" sz="1400" dirty="0"/>
+            <a:endParaRPr lang="en-US" sz="1500" dirty="0"/>
           </a:p>
         </p:txBody>
       </p:sp>
@@ -4436,12 +4603,12 @@
         </p:nvSpPr>
         <p:spPr>
           <a:xfrm>
-            <a:off x="457200" y="3931920"/>
-            <a:ext cx="8229600" cy="777240"/>
+            <a:off x="457200" y="4069080"/>
+            <a:ext cx="8229600" cy="640080"/>
           </a:xfrm>
           <a:prstGeom prst="roundRect">
             <a:avLst>
-              <a:gd name="adj" fmla="val 11765"/>
+              <a:gd name="adj" fmla="val 14286"/>
             </a:avLst>
           </a:prstGeom>
           <a:solidFill>
@@ -4463,8 +4630,8 @@
         </p:nvSpPr>
         <p:spPr>
           <a:xfrm>
-            <a:off x="640080" y="3931920"/>
-            <a:ext cx="7863840" cy="777240"/>
+            <a:off x="640080" y="4069080"/>
+            <a:ext cx="7863840" cy="640080"/>
           </a:xfrm>
           <a:prstGeom prst="rect">
             <a:avLst/>
@@ -4480,10 +4647,13 @@
               <a:buNone/>
             </a:pPr>
             <a:r>
-              <a:rPr lang="en-US" sz="1400" dirty="0">
+              <a:rPr lang="en-US" sz="1600" dirty="0">
                 <a:solidFill>
                   <a:schemeClr val="tx1"/>
                 </a:solidFill>
+                <a:latin typeface="B Nazanin" pitchFamily="34" charset="0"/>
+                <a:ea typeface="B Nazanin" pitchFamily="34" charset="-122"/>
+                <a:cs typeface="B Nazanin" pitchFamily="34" charset="-120"/>
               </a:rPr>
               <a:t>💡 </a:t>
             </a:r>
@@ -4491,14 +4661,17 @@
               <a:buNone/>
             </a:pPr>
             <a:r>
-              <a:rPr lang="en-US" sz="1400" dirty="0">
+              <a:rPr lang="en-US" sz="1600" dirty="0">
                 <a:solidFill>
                   <a:schemeClr val="tx1"/>
                 </a:solidFill>
+                <a:latin typeface="B Nazanin" pitchFamily="34" charset="0"/>
+                <a:ea typeface="B Nazanin" pitchFamily="34" charset="-122"/>
+                <a:cs typeface="B Nazanin" pitchFamily="34" charset="-120"/>
               </a:rPr>
               <a:t>«آلوریان» معتقد است مدل وبری در کشورهای در حال توسعه باعث «بوروکراسی زائد» می‌شود.</a:t>
             </a:r>
-            <a:endParaRPr lang="en-US" sz="1400" dirty="0"/>
+            <a:endParaRPr lang="en-US" sz="1600" dirty="0"/>
           </a:p>
         </p:txBody>
       </p:sp>
@@ -4599,14 +4772,17 @@
               <a:buNone/>
             </a:pPr>
             <a:r>
-              <a:rPr lang="en-US" sz="3200" b="1" dirty="0">
+              <a:rPr lang="en-US" sz="3400" dirty="0">
                 <a:solidFill>
                   <a:schemeClr val="accent1"/>
                 </a:solidFill>
+                <a:latin typeface="B Titr" pitchFamily="34" charset="0"/>
+                <a:ea typeface="B Titr" pitchFamily="34" charset="-122"/>
+                <a:cs typeface="B Titr" pitchFamily="34" charset="-120"/>
               </a:rPr>
               <a:t>مدل‌های سه‌گانه بوروکراسی در نظریه ریگز</a:t>
             </a:r>
-            <a:endParaRPr lang="en-US" sz="3200" dirty="0"/>
+            <a:endParaRPr lang="en-US" sz="3400" dirty="0"/>
           </a:p>
         </p:txBody>
       </p:sp>
@@ -4647,14 +4823,14 @@
                         <a:buNone/>
                       </a:pPr>
                       <a:r>
-                        <a:rPr lang="en-US" sz="1400" b="1" dirty="0">
+                        <a:rPr lang="en-US" sz="1600" b="1" dirty="0">
                           <a:solidFill>
                             <a:schemeClr val="bg1"/>
                           </a:solidFill>
                         </a:rPr>
                         <a:t>مثال</a:t>
                       </a:r>
-                      <a:endParaRPr lang="en-US" sz="1400" dirty="0"/>
+                      <a:endParaRPr lang="en-US" sz="1600" dirty="0"/>
                     </a:p>
                   </a:txBody>
                   <a:tcPr marL="91440" marR="91440" marT="45720" marB="45720" anchor="ctr">
@@ -4708,14 +4884,14 @@
                         <a:buNone/>
                       </a:pPr>
                       <a:r>
-                        <a:rPr lang="en-US" sz="1400" b="1" dirty="0">
+                        <a:rPr lang="en-US" sz="1600" b="1" dirty="0">
                           <a:solidFill>
                             <a:schemeClr val="bg1"/>
                           </a:solidFill>
                         </a:rPr>
                         <a:t>ویژگی‌ها</a:t>
                       </a:r>
-                      <a:endParaRPr lang="en-US" sz="1400" dirty="0"/>
+                      <a:endParaRPr lang="en-US" sz="1600" dirty="0"/>
                     </a:p>
                   </a:txBody>
                   <a:tcPr marL="91440" marR="91440" marT="45720" marB="45720" anchor="ctr">
@@ -4769,14 +4945,14 @@
                         <a:buNone/>
                       </a:pPr>
                       <a:r>
-                        <a:rPr lang="en-US" sz="1400" b="1" dirty="0">
+                        <a:rPr lang="en-US" sz="1600" b="1" dirty="0">
                           <a:solidFill>
                             <a:schemeClr val="bg1"/>
                           </a:solidFill>
                         </a:rPr>
                         <a:t>مدل</a:t>
                       </a:r>
-                      <a:endParaRPr lang="en-US" sz="1400" dirty="0"/>
+                      <a:endParaRPr lang="en-US" sz="1600" dirty="0"/>
                     </a:p>
                   </a:txBody>
                   <a:tcPr marL="91440" marR="91440" marT="45720" marB="45720" anchor="ctr">
@@ -4832,14 +5008,14 @@
                         <a:buNone/>
                       </a:pPr>
                       <a:r>
-                        <a:rPr lang="en-US" sz="1400" dirty="0">
+                        <a:rPr lang="en-US" sz="1600" dirty="0">
                           <a:solidFill>
                             <a:schemeClr val="tx1"/>
                           </a:solidFill>
                         </a:rPr>
                         <a:t>کشورهای توسعه‌یافته غربی</a:t>
                       </a:r>
-                      <a:endParaRPr lang="en-US" sz="1400" dirty="0"/>
+                      <a:endParaRPr lang="en-US" sz="1600" dirty="0"/>
                     </a:p>
                   </a:txBody>
                   <a:tcPr marL="91440" marR="91440" marT="45720" marB="45720" anchor="ctr">
@@ -4893,14 +5069,14 @@
                         <a:buNone/>
                       </a:pPr>
                       <a:r>
-                        <a:rPr lang="en-US" sz="1400" dirty="0">
+                        <a:rPr lang="en-US" sz="1600" dirty="0">
                           <a:solidFill>
                             <a:schemeClr val="tx1"/>
                           </a:solidFill>
                         </a:rPr>
                         <a:t>قوانین، عقلانیت، سلسله‌مراتب، تخصص</a:t>
                       </a:r>
-                      <a:endParaRPr lang="en-US" sz="1400" dirty="0"/>
+                      <a:endParaRPr lang="en-US" sz="1600" dirty="0"/>
                     </a:p>
                   </a:txBody>
                   <a:tcPr marL="91440" marR="91440" marT="45720" marB="45720" anchor="ctr">
@@ -4954,14 +5130,14 @@
                         <a:buNone/>
                       </a:pPr>
                       <a:r>
-                        <a:rPr lang="en-US" sz="1400" dirty="0">
+                        <a:rPr lang="en-US" sz="1600" dirty="0">
                           <a:solidFill>
                             <a:schemeClr val="tx1"/>
                           </a:solidFill>
                         </a:rPr>
                         <a:t>۱. مدل «حاکمیت» (Weberian/Classic)</a:t>
                       </a:r>
-                      <a:endParaRPr lang="en-US" sz="1400" dirty="0"/>
+                      <a:endParaRPr lang="en-US" sz="1600" dirty="0"/>
                     </a:p>
                   </a:txBody>
                   <a:tcPr marL="91440" marR="91440" marT="45720" marB="45720" anchor="ctr">
@@ -5017,14 +5193,14 @@
                         <a:buNone/>
                       </a:pPr>
                       <a:r>
-                        <a:rPr lang="en-US" sz="1400" dirty="0">
+                        <a:rPr lang="en-US" sz="1600" dirty="0">
                           <a:solidFill>
                             <a:schemeClr val="tx1"/>
                           </a:solidFill>
                         </a:rPr>
                         <a:t>کشورهای در حال توسعه (ایران، مصر)</a:t>
                       </a:r>
-                      <a:endParaRPr lang="en-US" sz="1400" dirty="0"/>
+                      <a:endParaRPr lang="en-US" sz="1600" dirty="0"/>
                     </a:p>
                   </a:txBody>
                   <a:tcPr marL="91440" marR="91440" marT="45720" marB="45720" anchor="ctr">
@@ -5078,14 +5254,14 @@
                         <a:buNone/>
                       </a:pPr>
                       <a:r>
-                        <a:rPr lang="en-US" sz="1400" dirty="0">
+                        <a:rPr lang="en-US" sz="1600" dirty="0">
                           <a:solidFill>
                             <a:schemeClr val="tx1"/>
                           </a:solidFill>
                         </a:rPr>
                         <a:t>ترکیب سنتی و مدرن، عدم تطابق کارکردها با ساختار</a:t>
                       </a:r>
-                      <a:endParaRPr lang="en-US" sz="1400" dirty="0"/>
+                      <a:endParaRPr lang="en-US" sz="1600" dirty="0"/>
                     </a:p>
                   </a:txBody>
                   <a:tcPr marL="91440" marR="91440" marT="45720" marB="45720" anchor="ctr">
@@ -5139,14 +5315,14 @@
                         <a:buNone/>
                       </a:pPr>
                       <a:r>
-                        <a:rPr lang="en-US" sz="1400" dirty="0">
+                        <a:rPr lang="en-US" sz="1600" dirty="0">
                           <a:solidFill>
                             <a:schemeClr val="tx1"/>
                           </a:solidFill>
                         </a:rPr>
                         <a:t>۲. مدل «منشوری» (Prismatic)</a:t>
                       </a:r>
-                      <a:endParaRPr lang="en-US" sz="1400" dirty="0"/>
+                      <a:endParaRPr lang="en-US" sz="1600" dirty="0"/>
                     </a:p>
                   </a:txBody>
                   <a:tcPr marL="91440" marR="91440" marT="45720" marB="45720" anchor="ctr">
@@ -5202,14 +5378,14 @@
                         <a:buNone/>
                       </a:pPr>
                       <a:r>
-                        <a:rPr lang="en-US" sz="1400" dirty="0">
+                        <a:rPr lang="en-US" sz="1600" dirty="0">
                           <a:solidFill>
                             <a:schemeClr val="tx1"/>
                           </a:solidFill>
                         </a:rPr>
                         <a:t>—</a:t>
                       </a:r>
-                      <a:endParaRPr lang="en-US" sz="1400" dirty="0"/>
+                      <a:endParaRPr lang="en-US" sz="1600" dirty="0"/>
                     </a:p>
                   </a:txBody>
                   <a:tcPr marL="91440" marR="91440" marT="45720" marB="45720" anchor="ctr">
@@ -5263,14 +5439,14 @@
                         <a:buNone/>
                       </a:pPr>
                       <a:r>
-                        <a:rPr lang="en-US" sz="1400" dirty="0">
+                        <a:rPr lang="en-US" sz="1600" dirty="0">
                           <a:solidFill>
                             <a:schemeClr val="tx1"/>
                           </a:solidFill>
                         </a:rPr>
                         <a:t>ترکیبی؛ شامل «دیوان»، «اتاق» و «اداره»</a:t>
                       </a:r>
-                      <a:endParaRPr lang="en-US" sz="1400" dirty="0"/>
+                      <a:endParaRPr lang="en-US" sz="1600" dirty="0"/>
                     </a:p>
                   </a:txBody>
                   <a:tcPr marL="91440" marR="91440" marT="45720" marB="45720" anchor="ctr">
@@ -5324,14 +5500,14 @@
                         <a:buNone/>
                       </a:pPr>
                       <a:r>
-                        <a:rPr lang="en-US" sz="1400" dirty="0">
+                        <a:rPr lang="en-US" sz="1600" dirty="0">
                           <a:solidFill>
                             <a:schemeClr val="tx1"/>
                           </a:solidFill>
                         </a:rPr>
                         <a:t>۳. مدل «سالا» (Sala)</a:t>
                       </a:r>
-                      <a:endParaRPr lang="en-US" sz="1400" dirty="0"/>
+                      <a:endParaRPr lang="en-US" sz="1600" dirty="0"/>
                     </a:p>
                   </a:txBody>
                   <a:tcPr marL="91440" marR="91440" marT="45720" marB="45720" anchor="ctr">
@@ -5389,12 +5565,12 @@
         </p:nvSpPr>
         <p:spPr>
           <a:xfrm>
-            <a:off x="457200" y="3931920"/>
-            <a:ext cx="8229600" cy="777240"/>
+            <a:off x="457200" y="4069080"/>
+            <a:ext cx="8229600" cy="640080"/>
           </a:xfrm>
           <a:prstGeom prst="roundRect">
             <a:avLst>
-              <a:gd name="adj" fmla="val 11765"/>
+              <a:gd name="adj" fmla="val 14286"/>
             </a:avLst>
           </a:prstGeom>
           <a:solidFill>
@@ -5416,8 +5592,8 @@
         </p:nvSpPr>
         <p:spPr>
           <a:xfrm>
-            <a:off x="640080" y="3931920"/>
-            <a:ext cx="7863840" cy="777240"/>
+            <a:off x="640080" y="4069080"/>
+            <a:ext cx="7863840" cy="640080"/>
           </a:xfrm>
           <a:prstGeom prst="rect">
             <a:avLst/>
@@ -5433,10 +5609,13 @@
               <a:buNone/>
             </a:pPr>
             <a:r>
-              <a:rPr lang="en-US" sz="1400" dirty="0">
+              <a:rPr lang="en-US" sz="1600" dirty="0">
                 <a:solidFill>
                   <a:schemeClr val="tx1"/>
                 </a:solidFill>
+                <a:latin typeface="B Nazanin" pitchFamily="34" charset="0"/>
+                <a:ea typeface="B Nazanin" pitchFamily="34" charset="-122"/>
+                <a:cs typeface="B Nazanin" pitchFamily="34" charset="-120"/>
               </a:rPr>
               <a:t>💡 </a:t>
             </a:r>
@@ -5444,14 +5623,17 @@
               <a:buNone/>
             </a:pPr>
             <a:r>
-              <a:rPr lang="en-US" sz="1400" dirty="0">
+              <a:rPr lang="en-US" sz="1600" dirty="0">
                 <a:solidFill>
                   <a:schemeClr val="tx1"/>
                 </a:solidFill>
+                <a:latin typeface="B Nazanin" pitchFamily="34" charset="0"/>
+                <a:ea typeface="B Nazanin" pitchFamily="34" charset="-122"/>
+                <a:cs typeface="B Nazanin" pitchFamily="34" charset="-120"/>
               </a:rPr>
               <a:t>در مدل «منشوری»، پدیده «هم‌ریختگی» (Overlapping) رخ می‌دهد؛ سازمان‌های جدید جایگزین قدیمی‌ها نمی‌شوند، بلکه در کنار آنها با کارکردهای متناقض ادامه می‌یابند.</a:t>
             </a:r>
-            <a:endParaRPr lang="en-US" sz="1400" dirty="0"/>
+            <a:endParaRPr lang="en-US" sz="1600" dirty="0"/>
           </a:p>
         </p:txBody>
       </p:sp>
@@ -5552,14 +5734,17 @@
               <a:buNone/>
             </a:pPr>
             <a:r>
-              <a:rPr lang="en-US" sz="3200" b="1" dirty="0">
+              <a:rPr lang="en-US" sz="3400" dirty="0">
                 <a:solidFill>
                   <a:schemeClr val="accent1"/>
                 </a:solidFill>
+                <a:latin typeface="B Titr" pitchFamily="34" charset="0"/>
+                <a:ea typeface="B Titr" pitchFamily="34" charset="-122"/>
+                <a:cs typeface="B Titr" pitchFamily="34" charset="-120"/>
               </a:rPr>
               <a:t>یکپارچگی و عدم یکپارچگی در جوامع</a:t>
             </a:r>
-            <a:endParaRPr lang="en-US" sz="3200" dirty="0"/>
+            <a:endParaRPr lang="en-US" sz="3400" dirty="0"/>
           </a:p>
         </p:txBody>
       </p:sp>
@@ -5572,7 +5757,7 @@
         <p:spPr>
           <a:xfrm>
             <a:off x="6126480" y="1234440"/>
-            <a:ext cx="2560320" cy="2606040"/>
+            <a:ext cx="2560320" cy="2743200"/>
           </a:xfrm>
           <a:prstGeom prst="roundRect">
             <a:avLst>
@@ -5598,8 +5783,8 @@
         </p:nvSpPr>
         <p:spPr>
           <a:xfrm>
-            <a:off x="6263640" y="1344168"/>
-            <a:ext cx="2286000" cy="411480"/>
+            <a:off x="6263640" y="1325880"/>
+            <a:ext cx="2286000" cy="640080"/>
           </a:xfrm>
           <a:prstGeom prst="rect">
             <a:avLst/>
@@ -5615,14 +5800,17 @@
               <a:buNone/>
             </a:pPr>
             <a:r>
-              <a:rPr lang="en-US" sz="1600" b="1" dirty="0">
+              <a:rPr lang="en-US" sz="1700" b="1" dirty="0">
                 <a:solidFill>
                   <a:schemeClr val="tx2"/>
                 </a:solidFill>
+                <a:latin typeface="B Nazanin" pitchFamily="34" charset="0"/>
+                <a:ea typeface="B Nazanin" pitchFamily="34" charset="-122"/>
+                <a:cs typeface="B Nazanin" pitchFamily="34" charset="-120"/>
               </a:rPr>
               <a:t>جامعه یکپارچه (Fused)</a:t>
             </a:r>
-            <a:endParaRPr lang="en-US" sz="1600" dirty="0"/>
+            <a:endParaRPr lang="en-US" sz="1700" dirty="0"/>
           </a:p>
         </p:txBody>
       </p:sp>
@@ -5634,8 +5822,8 @@
         </p:nvSpPr>
         <p:spPr>
           <a:xfrm>
-            <a:off x="6263640" y="1801368"/>
-            <a:ext cx="2286000" cy="1920240"/>
+            <a:off x="6263640" y="2011680"/>
+            <a:ext cx="2286000" cy="1874520"/>
           </a:xfrm>
           <a:prstGeom prst="rect">
             <a:avLst/>
@@ -5655,14 +5843,17 @@
               <a:buChar char="•"/>
             </a:pPr>
             <a:r>
-              <a:rPr lang="en-US" sz="1400" dirty="0">
+              <a:rPr lang="en-US" sz="1500" dirty="0">
                 <a:solidFill>
                   <a:schemeClr val="tx1"/>
                 </a:solidFill>
+                <a:latin typeface="B Nazanin" pitchFamily="34" charset="0"/>
+                <a:ea typeface="B Nazanin" pitchFamily="34" charset="-122"/>
+                <a:cs typeface="B Nazanin" pitchFamily="34" charset="-120"/>
               </a:rPr>
               <a:t>جوامع سنتی</a:t>
             </a:r>
-            <a:endParaRPr lang="en-US" sz="1400" dirty="0"/>
+            <a:endParaRPr lang="en-US" sz="1500" dirty="0"/>
           </a:p>
           <a:p>
             <a:pPr algn="r" marL="342900" indent="-342900">
@@ -5673,14 +5864,17 @@
               <a:buChar char="•"/>
             </a:pPr>
             <a:r>
-              <a:rPr lang="en-US" sz="1400" dirty="0">
+              <a:rPr lang="en-US" sz="1500" dirty="0">
                 <a:solidFill>
                   <a:schemeClr val="tx1"/>
                 </a:solidFill>
+                <a:latin typeface="B Nazanin" pitchFamily="34" charset="0"/>
+                <a:ea typeface="B Nazanin" pitchFamily="34" charset="-122"/>
+                <a:cs typeface="B Nazanin" pitchFamily="34" charset="-120"/>
               </a:rPr>
               <a:t>ساختارها و کارکردها تفکیک نشده‌اند (قبیله‌ای)</a:t>
             </a:r>
-            <a:endParaRPr lang="en-US" sz="1400" dirty="0"/>
+            <a:endParaRPr lang="en-US" sz="1500" dirty="0"/>
           </a:p>
         </p:txBody>
       </p:sp>
@@ -5693,7 +5887,7 @@
         <p:spPr>
           <a:xfrm>
             <a:off x="3291840" y="1234440"/>
-            <a:ext cx="2560320" cy="2606040"/>
+            <a:ext cx="2560320" cy="2743200"/>
           </a:xfrm>
           <a:prstGeom prst="roundRect">
             <a:avLst>
@@ -5719,8 +5913,8 @@
         </p:nvSpPr>
         <p:spPr>
           <a:xfrm>
-            <a:off x="3429000" y="1344168"/>
-            <a:ext cx="2286000" cy="411480"/>
+            <a:off x="3429000" y="1325880"/>
+            <a:ext cx="2286000" cy="640080"/>
           </a:xfrm>
           <a:prstGeom prst="rect">
             <a:avLst/>
@@ -5736,14 +5930,17 @@
               <a:buNone/>
             </a:pPr>
             <a:r>
-              <a:rPr lang="en-US" sz="1600" b="1" dirty="0">
+              <a:rPr lang="en-US" sz="1700" b="1" dirty="0">
                 <a:solidFill>
                   <a:schemeClr val="tx2"/>
                 </a:solidFill>
+                <a:latin typeface="B Nazanin" pitchFamily="34" charset="0"/>
+                <a:ea typeface="B Nazanin" pitchFamily="34" charset="-122"/>
+                <a:cs typeface="B Nazanin" pitchFamily="34" charset="-120"/>
               </a:rPr>
               <a:t>جامعه منشوری (Prismatic)</a:t>
             </a:r>
-            <a:endParaRPr lang="en-US" sz="1600" dirty="0"/>
+            <a:endParaRPr lang="en-US" sz="1700" dirty="0"/>
           </a:p>
         </p:txBody>
       </p:sp>
@@ -5755,8 +5952,8 @@
         </p:nvSpPr>
         <p:spPr>
           <a:xfrm>
-            <a:off x="3429000" y="1801368"/>
-            <a:ext cx="2286000" cy="1920240"/>
+            <a:off x="3429000" y="2011680"/>
+            <a:ext cx="2286000" cy="1874520"/>
           </a:xfrm>
           <a:prstGeom prst="rect">
             <a:avLst/>
@@ -5776,14 +5973,17 @@
               <a:buChar char="•"/>
             </a:pPr>
             <a:r>
-              <a:rPr lang="en-US" sz="1400" dirty="0">
+              <a:rPr lang="en-US" sz="1500" dirty="0">
                 <a:solidFill>
                   <a:schemeClr val="tx1"/>
                 </a:solidFill>
+                <a:latin typeface="B Nazanin" pitchFamily="34" charset="0"/>
+                <a:ea typeface="B Nazanin" pitchFamily="34" charset="-122"/>
+                <a:cs typeface="B Nazanin" pitchFamily="34" charset="-120"/>
               </a:rPr>
               <a:t>جوامع در حال گذار</a:t>
             </a:r>
-            <a:endParaRPr lang="en-US" sz="1400" dirty="0"/>
+            <a:endParaRPr lang="en-US" sz="1500" dirty="0"/>
           </a:p>
           <a:p>
             <a:pPr algn="r" marL="342900" indent="-342900">
@@ -5794,14 +5994,17 @@
               <a:buChar char="•"/>
             </a:pPr>
             <a:r>
-              <a:rPr lang="en-US" sz="1400" dirty="0">
+              <a:rPr lang="en-US" sz="1500" dirty="0">
                 <a:solidFill>
                   <a:schemeClr val="tx1"/>
                 </a:solidFill>
+                <a:latin typeface="B Nazanin" pitchFamily="34" charset="0"/>
+                <a:ea typeface="B Nazanin" pitchFamily="34" charset="-122"/>
+                <a:cs typeface="B Nazanin" pitchFamily="34" charset="-120"/>
               </a:rPr>
               <a:t>نهادهای جدید ایجاد شده، اما کارکردها هنوز سنتی است</a:t>
             </a:r>
-            <a:endParaRPr lang="en-US" sz="1400" dirty="0"/>
+            <a:endParaRPr lang="en-US" sz="1500" dirty="0"/>
           </a:p>
         </p:txBody>
       </p:sp>
@@ -5814,7 +6017,7 @@
         <p:spPr>
           <a:xfrm>
             <a:off x="457200" y="1234440"/>
-            <a:ext cx="2560320" cy="2606040"/>
+            <a:ext cx="2560320" cy="2743200"/>
           </a:xfrm>
           <a:prstGeom prst="roundRect">
             <a:avLst>
@@ -5840,8 +6043,8 @@
         </p:nvSpPr>
         <p:spPr>
           <a:xfrm>
-            <a:off x="594360" y="1344168"/>
-            <a:ext cx="2286000" cy="411480"/>
+            <a:off x="594360" y="1325880"/>
+            <a:ext cx="2286000" cy="640080"/>
           </a:xfrm>
           <a:prstGeom prst="rect">
             <a:avLst/>
@@ -5857,14 +6060,17 @@
               <a:buNone/>
             </a:pPr>
             <a:r>
-              <a:rPr lang="en-US" sz="1600" b="1" dirty="0">
+              <a:rPr lang="en-US" sz="1700" b="1" dirty="0">
                 <a:solidFill>
                   <a:schemeClr val="tx2"/>
                 </a:solidFill>
+                <a:latin typeface="B Nazanin" pitchFamily="34" charset="0"/>
+                <a:ea typeface="B Nazanin" pitchFamily="34" charset="-122"/>
+                <a:cs typeface="B Nazanin" pitchFamily="34" charset="-120"/>
               </a:rPr>
               <a:t>جامعه تفکیک‌یافته (Diffracted)</a:t>
             </a:r>
-            <a:endParaRPr lang="en-US" sz="1600" dirty="0"/>
+            <a:endParaRPr lang="en-US" sz="1700" dirty="0"/>
           </a:p>
         </p:txBody>
       </p:sp>
@@ -5876,8 +6082,8 @@
         </p:nvSpPr>
         <p:spPr>
           <a:xfrm>
-            <a:off x="594360" y="1801368"/>
-            <a:ext cx="2286000" cy="1920240"/>
+            <a:off x="594360" y="2011680"/>
+            <a:ext cx="2286000" cy="1874520"/>
           </a:xfrm>
           <a:prstGeom prst="rect">
             <a:avLst/>
@@ -5897,14 +6103,17 @@
               <a:buChar char="•"/>
             </a:pPr>
             <a:r>
-              <a:rPr lang="en-US" sz="1400" dirty="0">
+              <a:rPr lang="en-US" sz="1500" dirty="0">
                 <a:solidFill>
                   <a:schemeClr val="tx1"/>
                 </a:solidFill>
+                <a:latin typeface="B Nazanin" pitchFamily="34" charset="0"/>
+                <a:ea typeface="B Nazanin" pitchFamily="34" charset="-122"/>
+                <a:cs typeface="B Nazanin" pitchFamily="34" charset="-120"/>
               </a:rPr>
               <a:t>جوامع مدرن</a:t>
             </a:r>
-            <a:endParaRPr lang="en-US" sz="1400" dirty="0"/>
+            <a:endParaRPr lang="en-US" sz="1500" dirty="0"/>
           </a:p>
           <a:p>
             <a:pPr algn="r" marL="342900" indent="-342900">
@@ -5915,14 +6124,17 @@
               <a:buChar char="•"/>
             </a:pPr>
             <a:r>
-              <a:rPr lang="en-US" sz="1400" dirty="0">
+              <a:rPr lang="en-US" sz="1500" dirty="0">
                 <a:solidFill>
                   <a:schemeClr val="tx1"/>
                 </a:solidFill>
+                <a:latin typeface="B Nazanin" pitchFamily="34" charset="0"/>
+                <a:ea typeface="B Nazanin" pitchFamily="34" charset="-122"/>
+                <a:cs typeface="B Nazanin" pitchFamily="34" charset="-120"/>
               </a:rPr>
               <a:t>تفکیک کامل ساختارها و کارکردها</a:t>
             </a:r>
-            <a:endParaRPr lang="en-US" sz="1400" dirty="0"/>
+            <a:endParaRPr lang="en-US" sz="1500" dirty="0"/>
           </a:p>
         </p:txBody>
       </p:sp>
@@ -5934,12 +6146,12 @@
         </p:nvSpPr>
         <p:spPr>
           <a:xfrm>
-            <a:off x="457200" y="3931920"/>
-            <a:ext cx="8229600" cy="777240"/>
+            <a:off x="457200" y="4069080"/>
+            <a:ext cx="8229600" cy="640080"/>
           </a:xfrm>
           <a:prstGeom prst="roundRect">
             <a:avLst>
-              <a:gd name="adj" fmla="val 11765"/>
+              <a:gd name="adj" fmla="val 14286"/>
             </a:avLst>
           </a:prstGeom>
           <a:solidFill>
@@ -5961,8 +6173,8 @@
         </p:nvSpPr>
         <p:spPr>
           <a:xfrm>
-            <a:off x="640080" y="3931920"/>
-            <a:ext cx="7863840" cy="777240"/>
+            <a:off x="640080" y="4069080"/>
+            <a:ext cx="7863840" cy="640080"/>
           </a:xfrm>
           <a:prstGeom prst="rect">
             <a:avLst/>
@@ -5978,10 +6190,13 @@
               <a:buNone/>
             </a:pPr>
             <a:r>
-              <a:rPr lang="en-US" sz="1400" dirty="0">
+              <a:rPr lang="en-US" sz="1600" dirty="0">
                 <a:solidFill>
                   <a:schemeClr val="tx1"/>
                 </a:solidFill>
+                <a:latin typeface="B Nazanin" pitchFamily="34" charset="0"/>
+                <a:ea typeface="B Nazanin" pitchFamily="34" charset="-122"/>
+                <a:cs typeface="B Nazanin" pitchFamily="34" charset="-120"/>
               </a:rPr>
               <a:t>💡 </a:t>
             </a:r>
@@ -5989,14 +6204,17 @@
               <a:buNone/>
             </a:pPr>
             <a:r>
-              <a:rPr lang="en-US" sz="1400" dirty="0">
+              <a:rPr lang="en-US" sz="1600" dirty="0">
                 <a:solidFill>
                   <a:schemeClr val="tx1"/>
                 </a:solidFill>
+                <a:latin typeface="B Nazanin" pitchFamily="34" charset="0"/>
+                <a:ea typeface="B Nazanin" pitchFamily="34" charset="-122"/>
+                <a:cs typeface="B Nazanin" pitchFamily="34" charset="-120"/>
               </a:rPr>
               <a:t>مثال از متن: ریگز جامعه منشوری را به «ارکستر سمفونی» تشبیه می‌کند که هر نوازنده ساز خود را می‌زند و هماهنگی وجود ندارد.</a:t>
             </a:r>
-            <a:endParaRPr lang="en-US" sz="1400" dirty="0"/>
+            <a:endParaRPr lang="en-US" sz="1600" dirty="0"/>
           </a:p>
         </p:txBody>
       </p:sp>
@@ -6097,14 +6315,17 @@
               <a:buNone/>
             </a:pPr>
             <a:r>
-              <a:rPr lang="en-US" sz="3200" b="1" dirty="0">
+              <a:rPr lang="en-US" sz="3400" dirty="0">
                 <a:solidFill>
                   <a:schemeClr val="accent1"/>
                 </a:solidFill>
+                <a:latin typeface="B Titr" pitchFamily="34" charset="0"/>
+                <a:ea typeface="B Titr" pitchFamily="34" charset="-122"/>
+                <a:cs typeface="B Titr" pitchFamily="34" charset="-120"/>
               </a:rPr>
               <a:t>طبقه‌بندی نظام‌های سیاسی و بوروکراسی</a:t>
             </a:r>
-            <a:endParaRPr lang="en-US" sz="3200" dirty="0"/>
+            <a:endParaRPr lang="en-US" sz="3400" dirty="0"/>
           </a:p>
         </p:txBody>
       </p:sp>
@@ -6117,11 +6338,11 @@
         <p:spPr>
           <a:xfrm>
             <a:off x="4709160" y="1234440"/>
-            <a:ext cx="3977640" cy="2606040"/>
+            <a:ext cx="3977640" cy="2743200"/>
           </a:xfrm>
           <a:prstGeom prst="roundRect">
             <a:avLst>
-              <a:gd name="adj" fmla="val 3509"/>
+              <a:gd name="adj" fmla="val 3333"/>
             </a:avLst>
           </a:prstGeom>
           <a:solidFill>
@@ -6143,8 +6364,8 @@
         </p:nvSpPr>
         <p:spPr>
           <a:xfrm>
-            <a:off x="4846320" y="1344168"/>
-            <a:ext cx="3703320" cy="411480"/>
+            <a:off x="4846320" y="1325880"/>
+            <a:ext cx="3703320" cy="640080"/>
           </a:xfrm>
           <a:prstGeom prst="rect">
             <a:avLst/>
@@ -6160,14 +6381,17 @@
               <a:buNone/>
             </a:pPr>
             <a:r>
-              <a:rPr lang="en-US" sz="1600" b="1" dirty="0">
+              <a:rPr lang="en-US" sz="1700" b="1" dirty="0">
                 <a:solidFill>
                   <a:schemeClr val="tx2"/>
                 </a:solidFill>
+                <a:latin typeface="B Nazanin" pitchFamily="34" charset="0"/>
+                <a:ea typeface="B Nazanin" pitchFamily="34" charset="-122"/>
+                <a:cs typeface="B Nazanin" pitchFamily="34" charset="-120"/>
               </a:rPr>
               <a:t>مدل «حاکمیت» (Heer)</a:t>
             </a:r>
-            <a:endParaRPr lang="en-US" sz="1600" dirty="0"/>
+            <a:endParaRPr lang="en-US" sz="1700" dirty="0"/>
           </a:p>
         </p:txBody>
       </p:sp>
@@ -6179,8 +6403,8 @@
         </p:nvSpPr>
         <p:spPr>
           <a:xfrm>
-            <a:off x="4846320" y="1801368"/>
-            <a:ext cx="3703320" cy="1920240"/>
+            <a:off x="4846320" y="2011680"/>
+            <a:ext cx="3703320" cy="1874520"/>
           </a:xfrm>
           <a:prstGeom prst="rect">
             <a:avLst/>
@@ -6200,14 +6424,17 @@
               <a:buChar char="•"/>
             </a:pPr>
             <a:r>
-              <a:rPr lang="en-US" sz="1400" dirty="0">
+              <a:rPr lang="en-US" sz="1500" dirty="0">
                 <a:solidFill>
                   <a:schemeClr val="tx1"/>
                 </a:solidFill>
+                <a:latin typeface="B Nazanin" pitchFamily="34" charset="0"/>
+                <a:ea typeface="B Nazanin" pitchFamily="34" charset="-122"/>
+                <a:cs typeface="B Nazanin" pitchFamily="34" charset="-120"/>
               </a:rPr>
               <a:t>تقسیم‌بندی نظام‌های سیاسی بر اساس درجه حاکمیت</a:t>
             </a:r>
-            <a:endParaRPr lang="en-US" sz="1400" dirty="0"/>
+            <a:endParaRPr lang="en-US" sz="1500" dirty="0"/>
           </a:p>
         </p:txBody>
       </p:sp>
@@ -6220,11 +6447,11 @@
         <p:spPr>
           <a:xfrm>
             <a:off x="457200" y="1234440"/>
-            <a:ext cx="3977640" cy="2606040"/>
+            <a:ext cx="3977640" cy="2743200"/>
           </a:xfrm>
           <a:prstGeom prst="roundRect">
             <a:avLst>
-              <a:gd name="adj" fmla="val 3509"/>
+              <a:gd name="adj" fmla="val 3333"/>
             </a:avLst>
           </a:prstGeom>
           <a:solidFill>
@@ -6246,8 +6473,8 @@
         </p:nvSpPr>
         <p:spPr>
           <a:xfrm>
-            <a:off x="594360" y="1344168"/>
-            <a:ext cx="3703320" cy="411480"/>
+            <a:off x="594360" y="1325880"/>
+            <a:ext cx="3703320" cy="640080"/>
           </a:xfrm>
           <a:prstGeom prst="rect">
             <a:avLst/>
@@ -6263,14 +6490,17 @@
               <a:buNone/>
             </a:pPr>
             <a:r>
-              <a:rPr lang="en-US" sz="1600" b="1" dirty="0">
+              <a:rPr lang="en-US" sz="1700" b="1" dirty="0">
                 <a:solidFill>
                   <a:schemeClr val="tx2"/>
                 </a:solidFill>
+                <a:latin typeface="B Nazanin" pitchFamily="34" charset="0"/>
+                <a:ea typeface="B Nazanin" pitchFamily="34" charset="-122"/>
+                <a:cs typeface="B Nazanin" pitchFamily="34" charset="-120"/>
               </a:rPr>
               <a:t>انواع حکومت‌ها</a:t>
             </a:r>
-            <a:endParaRPr lang="en-US" sz="1600" dirty="0"/>
+            <a:endParaRPr lang="en-US" sz="1700" dirty="0"/>
           </a:p>
         </p:txBody>
       </p:sp>
@@ -6282,8 +6512,8 @@
         </p:nvSpPr>
         <p:spPr>
           <a:xfrm>
-            <a:off x="594360" y="1801368"/>
-            <a:ext cx="3703320" cy="1920240"/>
+            <a:off x="594360" y="2011680"/>
+            <a:ext cx="3703320" cy="1874520"/>
           </a:xfrm>
           <a:prstGeom prst="rect">
             <a:avLst/>
@@ -6303,14 +6533,17 @@
               <a:buChar char="•"/>
             </a:pPr>
             <a:r>
-              <a:rPr lang="en-US" sz="1400" dirty="0">
+              <a:rPr lang="en-US" sz="1500" dirty="0">
                 <a:solidFill>
                   <a:schemeClr val="tx1"/>
                 </a:solidFill>
+                <a:latin typeface="B Nazanin" pitchFamily="34" charset="0"/>
+                <a:ea typeface="B Nazanin" pitchFamily="34" charset="-122"/>
+                <a:cs typeface="B Nazanin" pitchFamily="34" charset="-120"/>
               </a:rPr>
               <a:t>حکومت حاکم (متمرکز مطلق) ← استبدادی سنتی</a:t>
             </a:r>
-            <a:endParaRPr lang="en-US" sz="1400" dirty="0"/>
+            <a:endParaRPr lang="en-US" sz="1500" dirty="0"/>
           </a:p>
           <a:p>
             <a:pPr algn="r" marL="342900" indent="-342900">
@@ -6321,14 +6554,17 @@
               <a:buChar char="•"/>
             </a:pPr>
             <a:r>
-              <a:rPr lang="en-US" sz="1400" dirty="0">
+              <a:rPr lang="en-US" sz="1500" dirty="0">
                 <a:solidFill>
                   <a:schemeClr val="tx1"/>
                 </a:solidFill>
+                <a:latin typeface="B Nazanin" pitchFamily="34" charset="0"/>
+                <a:ea typeface="B Nazanin" pitchFamily="34" charset="-122"/>
+                <a:cs typeface="B Nazanin" pitchFamily="34" charset="-120"/>
               </a:rPr>
               <a:t>حکومت حزب (تک‌حزبی) ← شوروی سابق، چین</a:t>
             </a:r>
-            <a:endParaRPr lang="en-US" sz="1400" dirty="0"/>
+            <a:endParaRPr lang="en-US" sz="1500" dirty="0"/>
           </a:p>
           <a:p>
             <a:pPr algn="r" marL="342900" indent="-342900">
@@ -6339,14 +6575,17 @@
               <a:buChar char="•"/>
             </a:pPr>
             <a:r>
-              <a:rPr lang="en-US" sz="1400" dirty="0">
+              <a:rPr lang="en-US" sz="1500" dirty="0">
                 <a:solidFill>
                   <a:schemeClr val="tx1"/>
                 </a:solidFill>
+                <a:latin typeface="B Nazanin" pitchFamily="34" charset="0"/>
+                <a:ea typeface="B Nazanin" pitchFamily="34" charset="-122"/>
+                <a:cs typeface="B Nazanin" pitchFamily="34" charset="-120"/>
               </a:rPr>
               <a:t>حکومت بوروکراتیک (دموکراسی) ← کشورهای غربی</a:t>
             </a:r>
-            <a:endParaRPr lang="en-US" sz="1400" dirty="0"/>
+            <a:endParaRPr lang="en-US" sz="1500" dirty="0"/>
           </a:p>
         </p:txBody>
       </p:sp>
@@ -6358,12 +6597,12 @@
         </p:nvSpPr>
         <p:spPr>
           <a:xfrm>
-            <a:off x="457200" y="3931920"/>
-            <a:ext cx="8229600" cy="777240"/>
+            <a:off x="457200" y="4069080"/>
+            <a:ext cx="8229600" cy="640080"/>
           </a:xfrm>
           <a:prstGeom prst="roundRect">
             <a:avLst>
-              <a:gd name="adj" fmla="val 11765"/>
+              <a:gd name="adj" fmla="val 14286"/>
             </a:avLst>
           </a:prstGeom>
           <a:solidFill>
@@ -6385,8 +6624,8 @@
         </p:nvSpPr>
         <p:spPr>
           <a:xfrm>
-            <a:off x="640080" y="3931920"/>
-            <a:ext cx="7863840" cy="777240"/>
+            <a:off x="640080" y="4069080"/>
+            <a:ext cx="7863840" cy="640080"/>
           </a:xfrm>
           <a:prstGeom prst="rect">
             <a:avLst/>
@@ -6402,10 +6641,13 @@
               <a:buNone/>
             </a:pPr>
             <a:r>
-              <a:rPr lang="en-US" sz="1400" dirty="0">
+              <a:rPr lang="en-US" sz="1600" dirty="0">
                 <a:solidFill>
                   <a:schemeClr val="tx1"/>
                 </a:solidFill>
+                <a:latin typeface="B Nazanin" pitchFamily="34" charset="0"/>
+                <a:ea typeface="B Nazanin" pitchFamily="34" charset="-122"/>
+                <a:cs typeface="B Nazanin" pitchFamily="34" charset="-120"/>
               </a:rPr>
               <a:t>💡 </a:t>
             </a:r>
@@ -6413,14 +6655,17 @@
               <a:buNone/>
             </a:pPr>
             <a:r>
-              <a:rPr lang="en-US" sz="1400" dirty="0">
+              <a:rPr lang="en-US" sz="1600" dirty="0">
                 <a:solidFill>
                   <a:schemeClr val="tx1"/>
                 </a:solidFill>
+                <a:latin typeface="B Nazanin" pitchFamily="34" charset="0"/>
+                <a:ea typeface="B Nazanin" pitchFamily="34" charset="-122"/>
+                <a:cs typeface="B Nazanin" pitchFamily="34" charset="-120"/>
               </a:rPr>
               <a:t>در «حکومت حاکم»، قدرت در دست یک فرد یا گروه کوچک متمرکز است و بوروکراسی صرفاً ابزاری برای اجرای دستورات است.</a:t>
             </a:r>
-            <a:endParaRPr lang="en-US" sz="1400" dirty="0"/>
+            <a:endParaRPr lang="en-US" sz="1600" dirty="0"/>
           </a:p>
         </p:txBody>
       </p:sp>
@@ -6521,14 +6766,17 @@
               <a:buNone/>
             </a:pPr>
             <a:r>
-              <a:rPr lang="en-US" sz="3200" b="1" dirty="0">
+              <a:rPr lang="en-US" sz="3400" dirty="0">
                 <a:solidFill>
                   <a:schemeClr val="accent1"/>
                 </a:solidFill>
+                <a:latin typeface="B Titr" pitchFamily="34" charset="0"/>
+                <a:ea typeface="B Titr" pitchFamily="34" charset="-122"/>
+                <a:cs typeface="B Titr" pitchFamily="34" charset="-120"/>
               </a:rPr>
               <a:t>نظریه «گاوس» و بوم‌شناسی اداری</a:t>
             </a:r>
-            <a:endParaRPr lang="en-US" sz="3200" dirty="0"/>
+            <a:endParaRPr lang="en-US" sz="3400" dirty="0"/>
           </a:p>
         </p:txBody>
       </p:sp>
@@ -6541,11 +6789,11 @@
         <p:spPr>
           <a:xfrm>
             <a:off x="4709160" y="1234440"/>
-            <a:ext cx="3977640" cy="2606040"/>
+            <a:ext cx="3977640" cy="2743200"/>
           </a:xfrm>
           <a:prstGeom prst="roundRect">
             <a:avLst>
-              <a:gd name="adj" fmla="val 3509"/>
+              <a:gd name="adj" fmla="val 3333"/>
             </a:avLst>
           </a:prstGeom>
           <a:solidFill>
@@ -6567,8 +6815,8 @@
         </p:nvSpPr>
         <p:spPr>
           <a:xfrm>
-            <a:off x="4846320" y="1344168"/>
-            <a:ext cx="3703320" cy="411480"/>
+            <a:off x="4846320" y="1325880"/>
+            <a:ext cx="3703320" cy="640080"/>
           </a:xfrm>
           <a:prstGeom prst="rect">
             <a:avLst/>
@@ -6584,14 +6832,17 @@
               <a:buNone/>
             </a:pPr>
             <a:r>
-              <a:rPr lang="en-US" sz="1600" b="1" dirty="0">
+              <a:rPr lang="en-US" sz="1700" b="1" dirty="0">
                 <a:solidFill>
                   <a:schemeClr val="tx2"/>
                 </a:solidFill>
+                <a:latin typeface="B Nazanin" pitchFamily="34" charset="0"/>
+                <a:ea typeface="B Nazanin" pitchFamily="34" charset="-122"/>
+                <a:cs typeface="B Nazanin" pitchFamily="34" charset="-120"/>
               </a:rPr>
               <a:t>جان گاوس (John Gaus)</a:t>
             </a:r>
-            <a:endParaRPr lang="en-US" sz="1600" dirty="0"/>
+            <a:endParaRPr lang="en-US" sz="1700" dirty="0"/>
           </a:p>
         </p:txBody>
       </p:sp>
@@ -6603,8 +6854,8 @@
         </p:nvSpPr>
         <p:spPr>
           <a:xfrm>
-            <a:off x="4846320" y="1801368"/>
-            <a:ext cx="3703320" cy="1920240"/>
+            <a:off x="4846320" y="2011680"/>
+            <a:ext cx="3703320" cy="1874520"/>
           </a:xfrm>
           <a:prstGeom prst="rect">
             <a:avLst/>
@@ -6624,14 +6875,17 @@
               <a:buChar char="•"/>
             </a:pPr>
             <a:r>
-              <a:rPr lang="en-US" sz="1400" dirty="0">
+              <a:rPr lang="en-US" sz="1500" dirty="0">
                 <a:solidFill>
                   <a:schemeClr val="tx1"/>
                 </a:solidFill>
+                <a:latin typeface="B Nazanin" pitchFamily="34" charset="0"/>
+                <a:ea typeface="B Nazanin" pitchFamily="34" charset="-122"/>
+                <a:cs typeface="B Nazanin" pitchFamily="34" charset="-120"/>
               </a:rPr>
               <a:t>بنیان‌گذار نظریه بوم‌شناسی اداری</a:t>
             </a:r>
-            <a:endParaRPr lang="en-US" sz="1400" dirty="0"/>
+            <a:endParaRPr lang="en-US" sz="1500" dirty="0"/>
           </a:p>
           <a:p>
             <a:pPr algn="r" marL="342900" indent="-342900">
@@ -6642,14 +6896,17 @@
               <a:buChar char="•"/>
             </a:pPr>
             <a:r>
-              <a:rPr lang="en-US" sz="1400" dirty="0">
+              <a:rPr lang="en-US" sz="1500" dirty="0">
                 <a:solidFill>
                   <a:schemeClr val="tx1"/>
                 </a:solidFill>
+                <a:latin typeface="B Nazanin" pitchFamily="34" charset="0"/>
+                <a:ea typeface="B Nazanin" pitchFamily="34" charset="-122"/>
+                <a:cs typeface="B Nazanin" pitchFamily="34" charset="-120"/>
               </a:rPr>
               <a:t>اداره امور دولتی را نمی‌توان جدا از محیط اجتماعی، اقتصادی و سیاسی مطالعه کرد</a:t>
             </a:r>
-            <a:endParaRPr lang="en-US" sz="1400" dirty="0"/>
+            <a:endParaRPr lang="en-US" sz="1500" dirty="0"/>
           </a:p>
         </p:txBody>
       </p:sp>
@@ -6662,11 +6919,11 @@
         <p:spPr>
           <a:xfrm>
             <a:off x="457200" y="1234440"/>
-            <a:ext cx="3977640" cy="2606040"/>
+            <a:ext cx="3977640" cy="2743200"/>
           </a:xfrm>
           <a:prstGeom prst="roundRect">
             <a:avLst>
-              <a:gd name="adj" fmla="val 3509"/>
+              <a:gd name="adj" fmla="val 3333"/>
             </a:avLst>
           </a:prstGeom>
           <a:solidFill>
@@ -6688,8 +6945,8 @@
         </p:nvSpPr>
         <p:spPr>
           <a:xfrm>
-            <a:off x="594360" y="1344168"/>
-            <a:ext cx="3703320" cy="411480"/>
+            <a:off x="594360" y="1325880"/>
+            <a:ext cx="3703320" cy="640080"/>
           </a:xfrm>
           <a:prstGeom prst="rect">
             <a:avLst/>
@@ -6705,14 +6962,17 @@
               <a:buNone/>
             </a:pPr>
             <a:r>
-              <a:rPr lang="en-US" sz="1600" b="1" dirty="0">
+              <a:rPr lang="en-US" sz="1700" b="1" dirty="0">
                 <a:solidFill>
                   <a:schemeClr val="tx2"/>
                 </a:solidFill>
+                <a:latin typeface="B Nazanin" pitchFamily="34" charset="0"/>
+                <a:ea typeface="B Nazanin" pitchFamily="34" charset="-122"/>
+                <a:cs typeface="B Nazanin" pitchFamily="34" charset="-120"/>
               </a:rPr>
               <a:t>عوامل موثر بر اداره</a:t>
             </a:r>
-            <a:endParaRPr lang="en-US" sz="1600" dirty="0"/>
+            <a:endParaRPr lang="en-US" sz="1700" dirty="0"/>
           </a:p>
         </p:txBody>
       </p:sp>
@@ -6724,8 +6984,8 @@
         </p:nvSpPr>
         <p:spPr>
           <a:xfrm>
-            <a:off x="594360" y="1801368"/>
-            <a:ext cx="3703320" cy="1920240"/>
+            <a:off x="594360" y="2011680"/>
+            <a:ext cx="3703320" cy="1874520"/>
           </a:xfrm>
           <a:prstGeom prst="rect">
             <a:avLst/>
@@ -6745,14 +7005,17 @@
               <a:buChar char="•"/>
             </a:pPr>
             <a:r>
-              <a:rPr lang="en-US" sz="1400" dirty="0">
+              <a:rPr lang="en-US" sz="1500" dirty="0">
                 <a:solidFill>
                   <a:schemeClr val="tx1"/>
                 </a:solidFill>
+                <a:latin typeface="B Nazanin" pitchFamily="34" charset="0"/>
+                <a:ea typeface="B Nazanin" pitchFamily="34" charset="-122"/>
+                <a:cs typeface="B Nazanin" pitchFamily="34" charset="-120"/>
               </a:rPr>
               <a:t>تکنولوژی</a:t>
             </a:r>
-            <a:endParaRPr lang="en-US" sz="1400" dirty="0"/>
+            <a:endParaRPr lang="en-US" sz="1500" dirty="0"/>
           </a:p>
           <a:p>
             <a:pPr algn="r" marL="342900" indent="-342900">
@@ -6763,14 +7026,17 @@
               <a:buChar char="•"/>
             </a:pPr>
             <a:r>
-              <a:rPr lang="en-US" sz="1400" dirty="0">
+              <a:rPr lang="en-US" sz="1500" dirty="0">
                 <a:solidFill>
                   <a:schemeClr val="tx1"/>
                 </a:solidFill>
+                <a:latin typeface="B Nazanin" pitchFamily="34" charset="0"/>
+                <a:ea typeface="B Nazanin" pitchFamily="34" charset="-122"/>
+                <a:cs typeface="B Nazanin" pitchFamily="34" charset="-120"/>
               </a:rPr>
               <a:t>افراد</a:t>
             </a:r>
-            <a:endParaRPr lang="en-US" sz="1400" dirty="0"/>
+            <a:endParaRPr lang="en-US" sz="1500" dirty="0"/>
           </a:p>
           <a:p>
             <a:pPr algn="r" marL="342900" indent="-342900">
@@ -6781,14 +7047,17 @@
               <a:buChar char="•"/>
             </a:pPr>
             <a:r>
-              <a:rPr lang="en-US" sz="1400" dirty="0">
+              <a:rPr lang="en-US" sz="1500" dirty="0">
                 <a:solidFill>
                   <a:schemeClr val="tx1"/>
                 </a:solidFill>
+                <a:latin typeface="B Nazanin" pitchFamily="34" charset="0"/>
+                <a:ea typeface="B Nazanin" pitchFamily="34" charset="-122"/>
+                <a:cs typeface="B Nazanin" pitchFamily="34" charset="-120"/>
               </a:rPr>
               <a:t>مکان</a:t>
             </a:r>
-            <a:endParaRPr lang="en-US" sz="1400" dirty="0"/>
+            <a:endParaRPr lang="en-US" sz="1500" dirty="0"/>
           </a:p>
           <a:p>
             <a:pPr algn="r" marL="342900" indent="-342900">
@@ -6799,14 +7068,17 @@
               <a:buChar char="•"/>
             </a:pPr>
             <a:r>
-              <a:rPr lang="en-US" sz="1400" dirty="0">
+              <a:rPr lang="en-US" sz="1500" dirty="0">
                 <a:solidFill>
                   <a:schemeClr val="tx1"/>
                 </a:solidFill>
+                <a:latin typeface="B Nazanin" pitchFamily="34" charset="0"/>
+                <a:ea typeface="B Nazanin" pitchFamily="34" charset="-122"/>
+                <a:cs typeface="B Nazanin" pitchFamily="34" charset="-120"/>
               </a:rPr>
               <a:t>آرزوها و عقاید</a:t>
             </a:r>
-            <a:endParaRPr lang="en-US" sz="1400" dirty="0"/>
+            <a:endParaRPr lang="en-US" sz="1500" dirty="0"/>
           </a:p>
         </p:txBody>
       </p:sp>
@@ -6818,12 +7090,12 @@
         </p:nvSpPr>
         <p:spPr>
           <a:xfrm>
-            <a:off x="457200" y="3931920"/>
-            <a:ext cx="8229600" cy="777240"/>
+            <a:off x="457200" y="4069080"/>
+            <a:ext cx="8229600" cy="640080"/>
           </a:xfrm>
           <a:prstGeom prst="roundRect">
             <a:avLst>
-              <a:gd name="adj" fmla="val 11765"/>
+              <a:gd name="adj" fmla="val 14286"/>
             </a:avLst>
           </a:prstGeom>
           <a:solidFill>
@@ -6845,8 +7117,8 @@
         </p:nvSpPr>
         <p:spPr>
           <a:xfrm>
-            <a:off x="640080" y="3931920"/>
-            <a:ext cx="7863840" cy="777240"/>
+            <a:off x="640080" y="4069080"/>
+            <a:ext cx="7863840" cy="640080"/>
           </a:xfrm>
           <a:prstGeom prst="rect">
             <a:avLst/>
@@ -6862,10 +7134,13 @@
               <a:buNone/>
             </a:pPr>
             <a:r>
-              <a:rPr lang="en-US" sz="1400" dirty="0">
+              <a:rPr lang="en-US" sz="1600" dirty="0">
                 <a:solidFill>
                   <a:schemeClr val="tx1"/>
                 </a:solidFill>
+                <a:latin typeface="B Nazanin" pitchFamily="34" charset="0"/>
+                <a:ea typeface="B Nazanin" pitchFamily="34" charset="-122"/>
+                <a:cs typeface="B Nazanin" pitchFamily="34" charset="-120"/>
               </a:rPr>
               <a:t>💡 </a:t>
             </a:r>
@@ -6873,14 +7148,17 @@
               <a:buNone/>
             </a:pPr>
             <a:r>
-              <a:rPr lang="en-US" sz="1400" dirty="0">
+              <a:rPr lang="en-US" sz="1600" dirty="0">
                 <a:solidFill>
                   <a:schemeClr val="tx1"/>
                 </a:solidFill>
+                <a:latin typeface="B Nazanin" pitchFamily="34" charset="0"/>
+                <a:ea typeface="B Nazanin" pitchFamily="34" charset="-122"/>
+                <a:cs typeface="B Nazanin" pitchFamily="34" charset="-120"/>
               </a:rPr>
               <a:t>«بوم‌شناسی» کمک می‌کند بفهمیم چرا یک مدل اداری در یک کشور موفق و در کشور دیگر ناموفق است. این نظریه بعدها توسط «ریگز» بسط داده شد.</a:t>
             </a:r>
-            <a:endParaRPr lang="en-US" sz="1400" dirty="0"/>
+            <a:endParaRPr lang="en-US" sz="1600" dirty="0"/>
           </a:p>
         </p:txBody>
       </p:sp>
@@ -6981,14 +7259,17 @@
               <a:buNone/>
             </a:pPr>
             <a:r>
-              <a:rPr lang="en-US" sz="3200" b="1" dirty="0">
+              <a:rPr lang="en-US" sz="3400" dirty="0">
                 <a:solidFill>
                   <a:schemeClr val="accent1"/>
                 </a:solidFill>
+                <a:latin typeface="B Titr" pitchFamily="34" charset="0"/>
+                <a:ea typeface="B Titr" pitchFamily="34" charset="-122"/>
+                <a:cs typeface="B Titr" pitchFamily="34" charset="-120"/>
               </a:rPr>
               <a:t>کارمندان دولتی و اندازه دولت</a:t>
             </a:r>
-            <a:endParaRPr lang="en-US" sz="3200" dirty="0"/>
+            <a:endParaRPr lang="en-US" sz="3400" dirty="0"/>
           </a:p>
         </p:txBody>
       </p:sp>
@@ -7001,11 +7282,11 @@
         <p:spPr>
           <a:xfrm>
             <a:off x="457200" y="1234440"/>
-            <a:ext cx="8229600" cy="2606040"/>
+            <a:ext cx="8229600" cy="2743200"/>
           </a:xfrm>
           <a:prstGeom prst="roundRect">
             <a:avLst>
-              <a:gd name="adj" fmla="val 3509"/>
+              <a:gd name="adj" fmla="val 3333"/>
             </a:avLst>
           </a:prstGeom>
           <a:solidFill>
@@ -7027,8 +7308,8 @@
         </p:nvSpPr>
         <p:spPr>
           <a:xfrm>
-            <a:off x="594360" y="1344168"/>
-            <a:ext cx="7955280" cy="411480"/>
+            <a:off x="594360" y="1325880"/>
+            <a:ext cx="7955280" cy="640080"/>
           </a:xfrm>
           <a:prstGeom prst="rect">
             <a:avLst/>
@@ -7044,14 +7325,17 @@
               <a:buNone/>
             </a:pPr>
             <a:r>
-              <a:rPr lang="en-US" sz="1600" b="1" dirty="0">
+              <a:rPr lang="en-US" sz="1700" b="1" dirty="0">
                 <a:solidFill>
                   <a:schemeClr val="tx2"/>
                 </a:solidFill>
+                <a:latin typeface="B Nazanin" pitchFamily="34" charset="0"/>
+                <a:ea typeface="B Nazanin" pitchFamily="34" charset="-122"/>
+                <a:cs typeface="B Nazanin" pitchFamily="34" charset="-120"/>
               </a:rPr>
               <a:t>آمارهای جهانی (جدول ۱ و ۲)</a:t>
             </a:r>
-            <a:endParaRPr lang="en-US" sz="1600" dirty="0"/>
+            <a:endParaRPr lang="en-US" sz="1700" dirty="0"/>
           </a:p>
         </p:txBody>
       </p:sp>
@@ -7063,8 +7347,8 @@
         </p:nvSpPr>
         <p:spPr>
           <a:xfrm>
-            <a:off x="594360" y="1801368"/>
-            <a:ext cx="7955280" cy="1920240"/>
+            <a:off x="594360" y="2011680"/>
+            <a:ext cx="7955280" cy="1874520"/>
           </a:xfrm>
           <a:prstGeom prst="rect">
             <a:avLst/>
@@ -7084,14 +7368,17 @@
               <a:buChar char="•"/>
             </a:pPr>
             <a:r>
-              <a:rPr lang="en-US" sz="1400" dirty="0">
+              <a:rPr lang="en-US" sz="1500" dirty="0">
                 <a:solidFill>
                   <a:schemeClr val="tx1"/>
                 </a:solidFill>
+                <a:latin typeface="B Nazanin" pitchFamily="34" charset="0"/>
+                <a:ea typeface="B Nazanin" pitchFamily="34" charset="-122"/>
+                <a:cs typeface="B Nazanin" pitchFamily="34" charset="-120"/>
               </a:rPr>
               <a:t>کشورهای توسعه‌یافته (سوئد، دانمارک): ۲۵-۳۰٪ استخدام دولتی</a:t>
             </a:r>
-            <a:endParaRPr lang="en-US" sz="1400" dirty="0"/>
+            <a:endParaRPr lang="en-US" sz="1500" dirty="0"/>
           </a:p>
           <a:p>
             <a:pPr algn="r" marL="342900" indent="-342900">
@@ -7102,14 +7389,17 @@
               <a:buChar char="•"/>
             </a:pPr>
             <a:r>
-              <a:rPr lang="en-US" sz="1400" dirty="0">
+              <a:rPr lang="en-US" sz="1500" dirty="0">
                 <a:solidFill>
                   <a:schemeClr val="tx1"/>
                 </a:solidFill>
+                <a:latin typeface="B Nazanin" pitchFamily="34" charset="0"/>
+                <a:ea typeface="B Nazanin" pitchFamily="34" charset="-122"/>
+                <a:cs typeface="B Nazanin" pitchFamily="34" charset="-120"/>
               </a:rPr>
               <a:t>کشورهای در حال توسعه (هند، مصر): سهم کمتر، اما لزوماً کارایی بیشتر نیست</a:t>
             </a:r>
-            <a:endParaRPr lang="en-US" sz="1400" dirty="0"/>
+            <a:endParaRPr lang="en-US" sz="1500" dirty="0"/>
           </a:p>
         </p:txBody>
       </p:sp>
@@ -7121,12 +7411,12 @@
         </p:nvSpPr>
         <p:spPr>
           <a:xfrm>
-            <a:off x="457200" y="3931920"/>
-            <a:ext cx="8229600" cy="777240"/>
+            <a:off x="457200" y="4069080"/>
+            <a:ext cx="8229600" cy="640080"/>
           </a:xfrm>
           <a:prstGeom prst="roundRect">
             <a:avLst>
-              <a:gd name="adj" fmla="val 11765"/>
+              <a:gd name="adj" fmla="val 14286"/>
             </a:avLst>
           </a:prstGeom>
           <a:solidFill>
@@ -7148,8 +7438,8 @@
         </p:nvSpPr>
         <p:spPr>
           <a:xfrm>
-            <a:off x="640080" y="3931920"/>
-            <a:ext cx="7863840" cy="777240"/>
+            <a:off x="640080" y="4069080"/>
+            <a:ext cx="7863840" cy="640080"/>
           </a:xfrm>
           <a:prstGeom prst="rect">
             <a:avLst/>
@@ -7165,10 +7455,13 @@
               <a:buNone/>
             </a:pPr>
             <a:r>
-              <a:rPr lang="en-US" sz="1400" dirty="0">
+              <a:rPr lang="en-US" sz="1600" dirty="0">
                 <a:solidFill>
                   <a:schemeClr val="tx1"/>
                 </a:solidFill>
+                <a:latin typeface="B Nazanin" pitchFamily="34" charset="0"/>
+                <a:ea typeface="B Nazanin" pitchFamily="34" charset="-122"/>
+                <a:cs typeface="B Nazanin" pitchFamily="34" charset="-120"/>
               </a:rPr>
               <a:t>💡 </a:t>
             </a:r>
@@ -7176,14 +7469,17 @@
               <a:buNone/>
             </a:pPr>
             <a:r>
-              <a:rPr lang="en-US" sz="1400" dirty="0">
+              <a:rPr lang="en-US" sz="1600" dirty="0">
                 <a:solidFill>
                   <a:schemeClr val="tx1"/>
                 </a:solidFill>
+                <a:latin typeface="B Nazanin" pitchFamily="34" charset="0"/>
+                <a:ea typeface="B Nazanin" pitchFamily="34" charset="-122"/>
+                <a:cs typeface="B Nazanin" pitchFamily="34" charset="-120"/>
               </a:rPr>
               <a:t>در بسیاری از کشورهای در حال توسعه، «بزرگ شدن دولت» = افزایش بوروکراسی زائد، نه افزایش خدمات. این پدیده به «قانون پارکینسون» معروف است: کار کارمندان تا پر شدن زمان موجود گسترش می‌یابد.</a:t>
             </a:r>
-            <a:endParaRPr lang="en-US" sz="1400" dirty="0"/>
+            <a:endParaRPr lang="en-US" sz="1600" dirty="0"/>
           </a:p>
         </p:txBody>
       </p:sp>
@@ -7284,14 +7580,17 @@
               <a:buNone/>
             </a:pPr>
             <a:r>
-              <a:rPr lang="en-US" sz="3200" b="1" dirty="0">
+              <a:rPr lang="en-US" sz="3400" dirty="0">
                 <a:solidFill>
                   <a:schemeClr val="accent1"/>
                 </a:solidFill>
+                <a:latin typeface="B Titr" pitchFamily="34" charset="0"/>
+                <a:ea typeface="B Titr" pitchFamily="34" charset="-122"/>
+                <a:cs typeface="B Titr" pitchFamily="34" charset="-120"/>
               </a:rPr>
               <a:t>مدل‌های نظام اداری در کشورهای در حال توسعه</a:t>
             </a:r>
-            <a:endParaRPr lang="en-US" sz="3200" dirty="0"/>
+            <a:endParaRPr lang="en-US" sz="3400" dirty="0"/>
           </a:p>
         </p:txBody>
       </p:sp>
@@ -7372,14 +7671,17 @@
               <a:buNone/>
             </a:pPr>
             <a:r>
-              <a:rPr lang="en-US" sz="1600" b="1" dirty="0">
+              <a:rPr lang="en-US" sz="1800" b="1" dirty="0">
                 <a:solidFill>
                   <a:schemeClr val="bg1"/>
                 </a:solidFill>
+                <a:latin typeface="B Nazanin" pitchFamily="34" charset="0"/>
+                <a:ea typeface="B Nazanin" pitchFamily="34" charset="-122"/>
+                <a:cs typeface="B Nazanin" pitchFamily="34" charset="-120"/>
               </a:rPr>
               <a:t>۱</a:t>
             </a:r>
-            <a:endParaRPr lang="en-US" sz="1600" dirty="0"/>
+            <a:endParaRPr lang="en-US" sz="1800" dirty="0"/>
           </a:p>
         </p:txBody>
       </p:sp>
@@ -7408,14 +7710,17 @@
               <a:buNone/>
             </a:pPr>
             <a:r>
-              <a:rPr lang="en-US" sz="1600" b="1" dirty="0">
+              <a:rPr lang="en-US" sz="1800" b="1" dirty="0">
                 <a:solidFill>
                   <a:schemeClr val="tx2"/>
                 </a:solidFill>
+                <a:latin typeface="B Nazanin" pitchFamily="34" charset="0"/>
+                <a:ea typeface="B Nazanin" pitchFamily="34" charset="-122"/>
+                <a:cs typeface="B Nazanin" pitchFamily="34" charset="-120"/>
               </a:rPr>
               <a:t>مدل‌های مردم‌محور (Populist)</a:t>
             </a:r>
-            <a:endParaRPr lang="en-US" sz="1600" dirty="0"/>
+            <a:endParaRPr lang="en-US" sz="1800" dirty="0"/>
           </a:p>
         </p:txBody>
       </p:sp>
@@ -7444,14 +7749,17 @@
               <a:buNone/>
             </a:pPr>
             <a:r>
-              <a:rPr lang="en-US" sz="1400" dirty="0">
+              <a:rPr lang="en-US" sz="1600" dirty="0">
                 <a:solidFill>
                   <a:schemeClr val="tx1"/>
                 </a:solidFill>
+                <a:latin typeface="B Nazanin" pitchFamily="34" charset="0"/>
+                <a:ea typeface="B Nazanin" pitchFamily="34" charset="-122"/>
+                <a:cs typeface="B Nazanin" pitchFamily="34" charset="-120"/>
               </a:rPr>
               <a:t>تأکید بر مشارکت مردمی</a:t>
             </a:r>
-            <a:endParaRPr lang="en-US" sz="1400" dirty="0"/>
+            <a:endParaRPr lang="en-US" sz="1600" dirty="0"/>
           </a:p>
         </p:txBody>
       </p:sp>
@@ -7532,14 +7840,17 @@
               <a:buNone/>
             </a:pPr>
             <a:r>
-              <a:rPr lang="en-US" sz="1600" b="1" dirty="0">
+              <a:rPr lang="en-US" sz="1800" b="1" dirty="0">
                 <a:solidFill>
                   <a:schemeClr val="bg1"/>
                 </a:solidFill>
+                <a:latin typeface="B Nazanin" pitchFamily="34" charset="0"/>
+                <a:ea typeface="B Nazanin" pitchFamily="34" charset="-122"/>
+                <a:cs typeface="B Nazanin" pitchFamily="34" charset="-120"/>
               </a:rPr>
               <a:t>۲</a:t>
             </a:r>
-            <a:endParaRPr lang="en-US" sz="1600" dirty="0"/>
+            <a:endParaRPr lang="en-US" sz="1800" dirty="0"/>
           </a:p>
         </p:txBody>
       </p:sp>
@@ -7568,14 +7879,17 @@
               <a:buNone/>
             </a:pPr>
             <a:r>
-              <a:rPr lang="en-US" sz="1600" b="1" dirty="0">
+              <a:rPr lang="en-US" sz="1800" b="1" dirty="0">
                 <a:solidFill>
                   <a:schemeClr val="tx2"/>
                 </a:solidFill>
+                <a:latin typeface="B Nazanin" pitchFamily="34" charset="0"/>
+                <a:ea typeface="B Nazanin" pitchFamily="34" charset="-122"/>
+                <a:cs typeface="B Nazanin" pitchFamily="34" charset="-120"/>
               </a:rPr>
               <a:t>مدل‌های بوروکراتیک مطلق</a:t>
             </a:r>
-            <a:endParaRPr lang="en-US" sz="1600" dirty="0"/>
+            <a:endParaRPr lang="en-US" sz="1800" dirty="0"/>
           </a:p>
         </p:txBody>
       </p:sp>
@@ -7604,14 +7918,17 @@
               <a:buNone/>
             </a:pPr>
             <a:r>
-              <a:rPr lang="en-US" sz="1400" dirty="0">
+              <a:rPr lang="en-US" sz="1600" dirty="0">
                 <a:solidFill>
                   <a:schemeClr val="tx1"/>
                 </a:solidFill>
+                <a:latin typeface="B Nazanin" pitchFamily="34" charset="0"/>
+                <a:ea typeface="B Nazanin" pitchFamily="34" charset="-122"/>
+                <a:cs typeface="B Nazanin" pitchFamily="34" charset="-120"/>
               </a:rPr>
               <a:t>کنترل شدید و تمرکز</a:t>
             </a:r>
-            <a:endParaRPr lang="en-US" sz="1400" dirty="0"/>
+            <a:endParaRPr lang="en-US" sz="1600" dirty="0"/>
           </a:p>
         </p:txBody>
       </p:sp>
@@ -7692,14 +8009,17 @@
               <a:buNone/>
             </a:pPr>
             <a:r>
-              <a:rPr lang="en-US" sz="1600" b="1" dirty="0">
+              <a:rPr lang="en-US" sz="1800" b="1" dirty="0">
                 <a:solidFill>
                   <a:schemeClr val="bg1"/>
                 </a:solidFill>
+                <a:latin typeface="B Nazanin" pitchFamily="34" charset="0"/>
+                <a:ea typeface="B Nazanin" pitchFamily="34" charset="-122"/>
+                <a:cs typeface="B Nazanin" pitchFamily="34" charset="-120"/>
               </a:rPr>
               <a:t>۳</a:t>
             </a:r>
-            <a:endParaRPr lang="en-US" sz="1600" dirty="0"/>
+            <a:endParaRPr lang="en-US" sz="1800" dirty="0"/>
           </a:p>
         </p:txBody>
       </p:sp>
@@ -7728,14 +8048,17 @@
               <a:buNone/>
             </a:pPr>
             <a:r>
-              <a:rPr lang="en-US" sz="1600" b="1" dirty="0">
+              <a:rPr lang="en-US" sz="1800" b="1" dirty="0">
                 <a:solidFill>
                   <a:schemeClr val="tx2"/>
                 </a:solidFill>
+                <a:latin typeface="B Nazanin" pitchFamily="34" charset="0"/>
+                <a:ea typeface="B Nazanin" pitchFamily="34" charset="-122"/>
+                <a:cs typeface="B Nazanin" pitchFamily="34" charset="-120"/>
               </a:rPr>
               <a:t>مدل‌های ائتلافی</a:t>
             </a:r>
-            <a:endParaRPr lang="en-US" sz="1600" dirty="0"/>
+            <a:endParaRPr lang="en-US" sz="1800" dirty="0"/>
           </a:p>
         </p:txBody>
       </p:sp>
@@ -7764,14 +8087,17 @@
               <a:buNone/>
             </a:pPr>
             <a:r>
-              <a:rPr lang="en-US" sz="1400" dirty="0">
+              <a:rPr lang="en-US" sz="1600" dirty="0">
                 <a:solidFill>
                   <a:schemeClr val="tx1"/>
                 </a:solidFill>
+                <a:latin typeface="B Nazanin" pitchFamily="34" charset="0"/>
+                <a:ea typeface="B Nazanin" pitchFamily="34" charset="-122"/>
+                <a:cs typeface="B Nazanin" pitchFamily="34" charset="-120"/>
               </a:rPr>
               <a:t>ترکیب نیروهای سیاسی مختلف</a:t>
             </a:r>
-            <a:endParaRPr lang="en-US" sz="1400" dirty="0"/>
+            <a:endParaRPr lang="en-US" sz="1600" dirty="0"/>
           </a:p>
         </p:txBody>
       </p:sp>
@@ -7852,14 +8178,17 @@
               <a:buNone/>
             </a:pPr>
             <a:r>
-              <a:rPr lang="en-US" sz="1600" b="1" dirty="0">
+              <a:rPr lang="en-US" sz="1800" b="1" dirty="0">
                 <a:solidFill>
                   <a:schemeClr val="bg1"/>
                 </a:solidFill>
+                <a:latin typeface="B Nazanin" pitchFamily="34" charset="0"/>
+                <a:ea typeface="B Nazanin" pitchFamily="34" charset="-122"/>
+                <a:cs typeface="B Nazanin" pitchFamily="34" charset="-120"/>
               </a:rPr>
               <a:t>۴</a:t>
             </a:r>
-            <a:endParaRPr lang="en-US" sz="1600" dirty="0"/>
+            <a:endParaRPr lang="en-US" sz="1800" dirty="0"/>
           </a:p>
         </p:txBody>
       </p:sp>
@@ -7888,14 +8217,17 @@
               <a:buNone/>
             </a:pPr>
             <a:r>
-              <a:rPr lang="en-US" sz="1600" b="1" dirty="0">
+              <a:rPr lang="en-US" sz="1800" b="1" dirty="0">
                 <a:solidFill>
                   <a:schemeClr val="tx2"/>
                 </a:solidFill>
+                <a:latin typeface="B Nazanin" pitchFamily="34" charset="0"/>
+                <a:ea typeface="B Nazanin" pitchFamily="34" charset="-122"/>
+                <a:cs typeface="B Nazanin" pitchFamily="34" charset="-120"/>
               </a:rPr>
               <a:t>مدل‌های جنبشی</a:t>
             </a:r>
-            <a:endParaRPr lang="en-US" sz="1600" dirty="0"/>
+            <a:endParaRPr lang="en-US" sz="1800" dirty="0"/>
           </a:p>
         </p:txBody>
       </p:sp>
@@ -7924,14 +8256,17 @@
               <a:buNone/>
             </a:pPr>
             <a:r>
-              <a:rPr lang="en-US" sz="1400" dirty="0">
+              <a:rPr lang="en-US" sz="1600" dirty="0">
                 <a:solidFill>
                   <a:schemeClr val="tx1"/>
                 </a:solidFill>
+                <a:latin typeface="B Nazanin" pitchFamily="34" charset="0"/>
+                <a:ea typeface="B Nazanin" pitchFamily="34" charset="-122"/>
+                <a:cs typeface="B Nazanin" pitchFamily="34" charset="-120"/>
               </a:rPr>
               <a:t>مبتنی بر ایدئولوژی و تحرک سیاسی</a:t>
             </a:r>
-            <a:endParaRPr lang="en-US" sz="1400" dirty="0"/>
+            <a:endParaRPr lang="en-US" sz="1600" dirty="0"/>
           </a:p>
         </p:txBody>
       </p:sp>
@@ -7943,12 +8278,12 @@
         </p:nvSpPr>
         <p:spPr>
           <a:xfrm>
-            <a:off x="457200" y="3931920"/>
-            <a:ext cx="8229600" cy="777240"/>
+            <a:off x="457200" y="4069080"/>
+            <a:ext cx="8229600" cy="640080"/>
           </a:xfrm>
           <a:prstGeom prst="roundRect">
             <a:avLst>
-              <a:gd name="adj" fmla="val 11765"/>
+              <a:gd name="adj" fmla="val 14286"/>
             </a:avLst>
           </a:prstGeom>
           <a:solidFill>
@@ -7970,8 +8305,8 @@
         </p:nvSpPr>
         <p:spPr>
           <a:xfrm>
-            <a:off x="640080" y="3931920"/>
-            <a:ext cx="7863840" cy="777240"/>
+            <a:off x="640080" y="4069080"/>
+            <a:ext cx="7863840" cy="640080"/>
           </a:xfrm>
           <a:prstGeom prst="rect">
             <a:avLst/>
@@ -7987,10 +8322,13 @@
               <a:buNone/>
             </a:pPr>
             <a:r>
-              <a:rPr lang="en-US" sz="1400" dirty="0">
+              <a:rPr lang="en-US" sz="1600" dirty="0">
                 <a:solidFill>
                   <a:schemeClr val="tx1"/>
                 </a:solidFill>
+                <a:latin typeface="B Nazanin" pitchFamily="34" charset="0"/>
+                <a:ea typeface="B Nazanin" pitchFamily="34" charset="-122"/>
+                <a:cs typeface="B Nazanin" pitchFamily="34" charset="-120"/>
               </a:rPr>
               <a:t>💡 </a:t>
             </a:r>
@@ -7998,14 +8336,17 @@
               <a:buNone/>
             </a:pPr>
             <a:r>
-              <a:rPr lang="en-US" sz="1400" dirty="0">
+              <a:rPr lang="en-US" sz="1600" dirty="0">
                 <a:solidFill>
                   <a:schemeClr val="tx1"/>
                 </a:solidFill>
+                <a:latin typeface="B Nazanin" pitchFamily="34" charset="0"/>
+                <a:ea typeface="B Nazanin" pitchFamily="34" charset="-122"/>
+                <a:cs typeface="B Nazanin" pitchFamily="34" charset="-120"/>
               </a:rPr>
               <a:t>این مدل‌ها توسط «ادوارد شیلز» و دیگران بسط یافتند.</a:t>
             </a:r>
-            <a:endParaRPr lang="en-US" sz="1400" dirty="0"/>
+            <a:endParaRPr lang="en-US" sz="1600" dirty="0"/>
           </a:p>
         </p:txBody>
       </p:sp>
@@ -8105,7 +8446,7 @@
     </a:clrScheme>
     <a:fontScheme name="Riggs">
       <a:majorFont>
-        <a:latin typeface="Arial"/>
+        <a:latin typeface="B Titr"/>
         <a:ea typeface=""/>
         <a:cs typeface=""/>
         <a:font script="Jpan" typeface="游ゴシック Light"/>
@@ -8157,7 +8498,7 @@
         <a:font script="Tfng" typeface="Ebrima"/>
       </a:majorFont>
       <a:minorFont>
-        <a:latin typeface="Arial"/>
+        <a:latin typeface="B Nazanin"/>
         <a:ea typeface=""/>
         <a:cs typeface=""/>
         <a:font script="Jpan" typeface="游ゴシック"/>

--- a/riggs-bureaucracy.pptx
+++ b/riggs-bureaucracy.pptx
@@ -125,13 +125,13 @@
   <p:extLst>
     <p:ext uri="{521415D9-36F7-43E2-AB2F-B90AF26B5E84}">
       <p14:sectionLst xmlns:p14="http://schemas.microsoft.com/office/powerpoint/2010/main">
-        <p14:section name="آغاز" id="{ee43c359-80ff-a609-a20d-3c52d462cec1}">
+        <p14:section name="آغاز" id="{5c2da6e5-3e6e-3747-b09f-fca273e841de}">
           <p14:sldIdLst>
             <p14:sldId id="256"/>
             <p14:sldId id="257"/>
           </p14:sldIdLst>
         </p14:section>
-        <p14:section name="بخش اول: مبانی نظری ریگز و نقد وبر" id="{543abe93-45ed-ee90-4d8a-7244ca0f87a6}">
+        <p14:section name="بخش اول: مبانی نظری ریگز و نقد وبر" id="{8b9bb63c-662b-c352-9196-872fba90fc4e}">
           <p14:sldIdLst>
             <p14:sldId id="258"/>
             <p14:sldId id="259"/>
@@ -139,7 +139,7 @@
             <p14:sldId id="261"/>
           </p14:sldIdLst>
         </p14:section>
-        <p14:section name="بخش دوم: جامعه، حکومت و بوم‌شناسی اداری" id="{2adbfaee-f54c-4004-8b79-06475b84eacc}">
+        <p14:section name="بخش دوم: جامعه، حکومت و بوم‌شناسی اداری" id="{154ac544-7b9b-7d84-b8e4-4e60174689ac}">
           <p14:sldIdLst>
             <p14:sldId id="262"/>
             <p14:sldId id="263"/>
@@ -148,7 +148,7 @@
             <p14:sldId id="266"/>
           </p14:sldIdLst>
         </p14:section>
-        <p14:section name="بخش سوم: دولت و نظام‌های اداری" id="{1e87f511-74ee-d603-5699-842bea90e8f1}">
+        <p14:section name="بخش سوم: دولت و نظام‌های اداری" id="{b9e55b62-1c2c-0f21-d04d-a3d1fb4d72d8}">
           <p14:sldIdLst>
             <p14:sldId id="267"/>
             <p14:sldId id="268"/>
@@ -156,14 +156,14 @@
             <p14:sldId id="270"/>
           </p14:sldIdLst>
         </p14:section>
-        <p14:section name="بخش چهارم: جمع‌بندی و کاربرد در کلاس" id="{6ec5bfae-99cb-ed62-6f53-dc1cc8d74088}">
+        <p14:section name="بخش چهارم: جمع‌بندی و کاربرد در کلاس" id="{a5e8d032-c10a-66a3-f687-9e66b2dde070}">
           <p14:sldIdLst>
             <p14:sldId id="271"/>
             <p14:sldId id="272"/>
             <p14:sldId id="273"/>
           </p14:sldIdLst>
         </p14:section>
-        <p14:section name="پایان" id="{ce9af180-e838-6ddb-5481-6f5faa61d374}">
+        <p14:section name="پایان" id="{51799078-aaa9-f670-db18-4a583f8be3fc}">
           <p14:sldIdLst>
             <p14:sldId id="274"/>
           </p14:sldIdLst>
@@ -193,7 +193,8 @@
                 <a:solidFill>
                   <a:srgbClr val="0F3D3E"/>
                 </a:solidFill>
-                <a:latin typeface="B Zar"/>
+                <a:latin typeface="Calibri"/>
+                <a:cs typeface="B Zar"/>
               </a:defRPr>
             </a:pPr>
             <a:r>
@@ -201,7 +202,8 @@
                 <a:solidFill>
                   <a:srgbClr val="0F3D3E"/>
                 </a:solidFill>
-                <a:latin typeface="B Zar"/>
+                <a:latin typeface="Calibri"/>
+                <a:cs typeface="B Zar"/>
               </a:rPr>
               <a:t>نمودار مفهومی، نه آماری</a:t>
             </a:r>
@@ -250,7 +252,8 @@
                     <a:solidFill>
                       <a:srgbClr val="000000"/>
                     </a:solidFill>
-                    <a:latin typeface="B Nazanin"/>
+                    <a:latin typeface="Calibri"/>
+                    <a:cs typeface="B Nazanin"/>
                   </a:defRPr>
                 </a:pPr>
               </a:p>
@@ -345,7 +348,8 @@
                   <a:solidFill>
                     <a:srgbClr val="000000"/>
                   </a:solidFill>
-                  <a:latin typeface="B Nazanin"/>
+                  <a:latin typeface="Calibri"/>
+                  <a:cs typeface="B Nazanin"/>
                 </a:defRPr>
               </a:pPr>
             </a:p>
@@ -393,7 +397,8 @@
                 <a:solidFill>
                   <a:srgbClr val="1F2933"/>
                 </a:solidFill>
-                <a:latin typeface="B Nazanin"/>
+                <a:latin typeface="Calibri"/>
+                <a:cs typeface="B Nazanin"/>
               </a:defRPr>
             </a:pPr>
             <a:endParaRPr lang="en-US"/>
@@ -436,7 +441,8 @@
                 <a:solidFill>
                   <a:srgbClr val="000000"/>
                 </a:solidFill>
-                <a:latin typeface="B Nazanin"/>
+                <a:latin typeface="Calibri"/>
+                <a:cs typeface="B Nazanin"/>
               </a:defRPr>
             </a:pPr>
             <a:endParaRPr lang="en-US"/>
@@ -486,7 +492,8 @@
                 <a:solidFill>
                   <a:srgbClr val="0F3D3E"/>
                 </a:solidFill>
-                <a:latin typeface="B Zar"/>
+                <a:latin typeface="Calibri"/>
+                <a:cs typeface="B Zar"/>
               </a:defRPr>
             </a:pPr>
             <a:r>
@@ -494,7 +501,8 @@
                 <a:solidFill>
                   <a:srgbClr val="0F3D3E"/>
                 </a:solidFill>
-                <a:latin typeface="B Zar"/>
+                <a:latin typeface="Calibri"/>
+                <a:cs typeface="B Zar"/>
               </a:rPr>
               <a:t>بازه استخدام دولتی در سوئد و دانمارک</a:t>
             </a:r>
@@ -543,7 +551,8 @@
                     <a:solidFill>
                       <a:srgbClr val="1F2933"/>
                     </a:solidFill>
-                    <a:latin typeface="B Nazanin"/>
+                    <a:latin typeface="Calibri"/>
+                    <a:cs typeface="B Nazanin"/>
                   </a:defRPr>
                 </a:pPr>
               </a:p>
@@ -621,7 +630,8 @@
                   <a:solidFill>
                     <a:srgbClr val="1F2933"/>
                   </a:solidFill>
-                  <a:latin typeface="B Nazanin"/>
+                  <a:latin typeface="Calibri"/>
+                  <a:cs typeface="B Nazanin"/>
                 </a:defRPr>
               </a:pPr>
             </a:p>
@@ -669,7 +679,8 @@
                 <a:solidFill>
                   <a:srgbClr val="1F2933"/>
                 </a:solidFill>
-                <a:latin typeface="B Nazanin"/>
+                <a:latin typeface="Calibri"/>
+                <a:cs typeface="B Nazanin"/>
               </a:defRPr>
             </a:pPr>
             <a:endParaRPr lang="en-US"/>
@@ -712,7 +723,8 @@
                 <a:solidFill>
                   <a:srgbClr val="000000"/>
                 </a:solidFill>
-                <a:latin typeface="B Nazanin"/>
+                <a:latin typeface="Calibri"/>
+                <a:cs typeface="B Nazanin"/>
               </a:defRPr>
             </a:pPr>
             <a:endParaRPr lang="en-US"/>
@@ -2896,8 +2908,8 @@
                 <a:solidFill>
                   <a:srgbClr val="6B7A86"/>
                 </a:solidFill>
-                <a:latin typeface="B Nazanin" pitchFamily="34" charset="0"/>
-                <a:ea typeface="B Nazanin" pitchFamily="34" charset="-122"/>
+                <a:latin typeface="Calibri" pitchFamily="34" charset="0"/>
+                <a:ea typeface="Calibri" pitchFamily="34" charset="-122"/>
                 <a:cs typeface="B Nazanin" pitchFamily="34" charset="-120"/>
               </a:rPr>
               <a:t>بوروکراسی و مدل‌های اداره امور عمومی — فرد ریگز</a:t>
@@ -2938,8 +2950,9 @@
                 <a:solidFill>
                   <a:srgbClr val="6B7A86"/>
                 </a:solidFill>
-                <a:latin typeface="B Nazanin"/>
-                <a:ea typeface="B Nazanin"/>
+                <a:latin typeface="Calibri"/>
+                <a:cs typeface="B Nazanin"/>
+                <a:ea typeface="Calibri"/>
                 <a:cs typeface="B Nazanin"/>
               </a:defRPr>
             </a:lvl1pPr>
@@ -3011,8 +3024,9 @@
                 <a:solidFill>
                   <a:srgbClr val="6B7A86"/>
                 </a:solidFill>
-                <a:latin typeface="B Nazanin"/>
-                <a:ea typeface="B Nazanin"/>
+                <a:latin typeface="Calibri"/>
+                <a:cs typeface="B Nazanin"/>
+                <a:ea typeface="Calibri"/>
                 <a:cs typeface="B Nazanin"/>
               </a:defRPr>
             </a:lvl1pPr>
@@ -3306,16 +3320,40 @@
           <a:chExt cx="0" cy="0"/>
         </a:xfrm>
       </p:grpSpPr>
-      <p:sp>
-        <p:nvSpPr>
-          <p:cNvPr id="2" name="Title"/>
+      <p:pic>
+        <p:nvPicPr>
+          <p:cNvPr id="2" name="PrismArt" descr="prism illustration">    </p:cNvPr>
+          <p:cNvPicPr>
+            <a:picLocks noChangeAspect="1"/>
+          </p:cNvPicPr>
+          <p:nvPr/>
+        </p:nvPicPr>
+        <p:blipFill>
+          <a:blip r:embed="rId1"/>
+          <a:stretch>
+            <a:fillRect/>
+          </a:stretch>
+        </p:blipFill>
+        <p:spPr>
+          <a:xfrm>
+            <a:off x="182880" y="1097280"/>
+            <a:ext cx="3200400" cy="2487168"/>
+          </a:xfrm>
+          <a:prstGeom prst="rect">
+            <a:avLst/>
+          </a:prstGeom>
+        </p:spPr>
+      </p:pic>
+      <p:sp>
+        <p:nvSpPr>
+          <p:cNvPr id="3" name="Title"/>
           <p:cNvSpPr txBox="1"/>
           <p:nvPr/>
         </p:nvSpPr>
         <p:spPr>
           <a:xfrm>
-            <a:off x="640080" y="1097280"/>
-            <a:ext cx="7863840" cy="1188720"/>
+            <a:off x="3566160" y="1097280"/>
+            <a:ext cx="4937760" cy="1188720"/>
           </a:xfrm>
           <a:prstGeom prst="rect">
             <a:avLst/>
@@ -3337,8 +3375,8 @@
                 <a:solidFill>
                   <a:schemeClr val="bg1"/>
                 </a:solidFill>
-                <a:latin typeface="B Zar" pitchFamily="34" charset="0"/>
-                <a:ea typeface="B Zar" pitchFamily="34" charset="-122"/>
+                <a:latin typeface="Calibri" pitchFamily="34" charset="0"/>
+                <a:ea typeface="Calibri" pitchFamily="34" charset="-122"/>
                 <a:cs typeface="B Zar" pitchFamily="34" charset="-120"/>
               </a:rPr>
               <a:t>بوروکراسی و مدل‌های اداره امور عمومی</a:t>
@@ -3349,14 +3387,14 @@
       </p:sp>
       <p:sp>
         <p:nvSpPr>
-          <p:cNvPr id="3" name="Subtitle"/>
+          <p:cNvPr id="4" name="Subtitle"/>
           <p:cNvSpPr txBox="1"/>
           <p:nvPr/>
         </p:nvSpPr>
         <p:spPr>
           <a:xfrm>
-            <a:off x="640080" y="2423160"/>
-            <a:ext cx="7863840" cy="457200"/>
+            <a:off x="3566160" y="2423160"/>
+            <a:ext cx="4937760" cy="822960"/>
           </a:xfrm>
           <a:prstGeom prst="rect">
             <a:avLst/>
@@ -3372,30 +3410,30 @@
               <a:buNone/>
             </a:pPr>
             <a:r>
-              <a:rPr lang="fa-IR" sz="2000" dirty="0">
+              <a:rPr lang="fa-IR" sz="1800" dirty="0">
                 <a:solidFill>
                   <a:srgbClr val="CFE3E1"/>
                 </a:solidFill>
-                <a:latin typeface="B Nazanin" pitchFamily="34" charset="0"/>
-                <a:ea typeface="B Nazanin" pitchFamily="34" charset="-122"/>
+                <a:latin typeface="Calibri" pitchFamily="34" charset="0"/>
+                <a:ea typeface="Calibri" pitchFamily="34" charset="-122"/>
                 <a:cs typeface="B Nazanin" pitchFamily="34" charset="-120"/>
               </a:rPr>
               <a:t>برگرفته از کتاب «چارچوبی برای مطالعات تطبیقی» (فصل ۲)، نوشته فرد ریگز</a:t>
             </a:r>
-            <a:endParaRPr lang="fa-IR" sz="2000" dirty="0"/>
-          </a:p>
-        </p:txBody>
-      </p:sp>
-      <p:sp>
-        <p:nvSpPr>
-          <p:cNvPr id="4" name="Presenter"/>
+            <a:endParaRPr lang="fa-IR" sz="1800" dirty="0"/>
+          </a:p>
+        </p:txBody>
+      </p:sp>
+      <p:sp>
+        <p:nvSpPr>
+          <p:cNvPr id="5" name="Presenter"/>
           <p:cNvSpPr txBox="1"/>
           <p:nvPr/>
         </p:nvSpPr>
         <p:spPr>
           <a:xfrm>
-            <a:off x="640080" y="3108960"/>
-            <a:ext cx="7863840" cy="457200"/>
+            <a:off x="3566160" y="3383280"/>
+            <a:ext cx="4937760" cy="457200"/>
           </a:xfrm>
           <a:prstGeom prst="rect">
             <a:avLst/>
@@ -3415,8 +3453,8 @@
                 <a:solidFill>
                   <a:srgbClr val="F2B661"/>
                 </a:solidFill>
-                <a:latin typeface="B Zar" pitchFamily="34" charset="0"/>
-                <a:ea typeface="B Zar" pitchFamily="34" charset="-122"/>
+                <a:latin typeface="Calibri" pitchFamily="34" charset="0"/>
+                <a:ea typeface="Calibri" pitchFamily="34" charset="-122"/>
                 <a:cs typeface="B Zar" pitchFamily="34" charset="-120"/>
               </a:rPr>
               <a:t>ارائه‌دهنده: حمیده رزدان</a:t>
@@ -3482,8 +3520,8 @@
                 <a:solidFill>
                   <a:schemeClr val="accent2"/>
                 </a:solidFill>
-                <a:latin typeface="B Nazanin" pitchFamily="34" charset="0"/>
-                <a:ea typeface="B Nazanin" pitchFamily="34" charset="-122"/>
+                <a:latin typeface="Calibri" pitchFamily="34" charset="0"/>
+                <a:ea typeface="Calibri" pitchFamily="34" charset="-122"/>
                 <a:cs typeface="B Nazanin" pitchFamily="34" charset="-120"/>
               </a:rPr>
               <a:t>بخش دوم: جامعه، حکومت و بوم‌شناسی اداری</a:t>
@@ -3523,8 +3561,8 @@
                 <a:solidFill>
                   <a:schemeClr val="accent1"/>
                 </a:solidFill>
-                <a:latin typeface="B Zar" pitchFamily="34" charset="0"/>
-                <a:ea typeface="B Zar" pitchFamily="34" charset="-122"/>
+                <a:latin typeface="Calibri" pitchFamily="34" charset="0"/>
+                <a:ea typeface="Calibri" pitchFamily="34" charset="-122"/>
                 <a:cs typeface="B Zar" pitchFamily="34" charset="-120"/>
               </a:rPr>
               <a:t>طبقه‌بندی نظام‌های سیاسی و بوروکراسی</a:t>
@@ -3569,14 +3607,63 @@
       </p:sp>
       <p:sp>
         <p:nvSpPr>
-          <p:cNvPr id="5" name="CardHead0"/>
+          <p:cNvPr id="5" name="IconBg_FaScaleBalanced"/>
+          <p:cNvSpPr/>
+          <p:nvPr/>
+        </p:nvSpPr>
+        <p:spPr>
+          <a:xfrm>
+            <a:off x="8138160" y="1344168"/>
+            <a:ext cx="420624" cy="420624"/>
+          </a:xfrm>
+          <a:prstGeom prst="ellipse">
+            <a:avLst/>
+          </a:prstGeom>
+          <a:solidFill>
+            <a:schemeClr val="accent1"/>
+          </a:solidFill>
+          <a:ln w="12700">
+            <a:solidFill>
+              <a:schemeClr val="accent1"/>
+            </a:solidFill>
+            <a:prstDash val="solid"/>
+          </a:ln>
+        </p:spPr>
+      </p:sp>
+      <p:pic>
+        <p:nvPicPr>
+          <p:cNvPr id="6" name="Icon_FaScaleBalanced" descr="FaScaleBalanced">    </p:cNvPr>
+          <p:cNvPicPr>
+            <a:picLocks noChangeAspect="1"/>
+          </p:cNvPicPr>
+          <p:nvPr/>
+        </p:nvPicPr>
+        <p:blipFill>
+          <a:blip r:embed="rId1"/>
+          <a:stretch>
+            <a:fillRect/>
+          </a:stretch>
+        </p:blipFill>
+        <p:spPr>
+          <a:xfrm>
+            <a:off x="8243316" y="1449324"/>
+            <a:ext cx="210312" cy="210312"/>
+          </a:xfrm>
+          <a:prstGeom prst="rect">
+            <a:avLst/>
+          </a:prstGeom>
+        </p:spPr>
+      </p:pic>
+      <p:sp>
+        <p:nvSpPr>
+          <p:cNvPr id="7" name="CardHead0"/>
           <p:cNvSpPr txBox="1"/>
           <p:nvPr/>
         </p:nvSpPr>
         <p:spPr>
           <a:xfrm>
             <a:off x="4846320" y="1325880"/>
-            <a:ext cx="3703320" cy="640080"/>
+            <a:ext cx="3200400" cy="640080"/>
           </a:xfrm>
           <a:prstGeom prst="rect">
             <a:avLst/>
@@ -3596,8 +3683,8 @@
                 <a:solidFill>
                   <a:schemeClr val="tx2"/>
                 </a:solidFill>
-                <a:latin typeface="B Zar" pitchFamily="34" charset="0"/>
-                <a:ea typeface="B Zar" pitchFamily="34" charset="-122"/>
+                <a:latin typeface="Calibri" pitchFamily="34" charset="0"/>
+                <a:ea typeface="Calibri" pitchFamily="34" charset="-122"/>
                 <a:cs typeface="B Zar" pitchFamily="34" charset="-120"/>
               </a:rPr>
               <a:t>مدل «حاکمیت» (Heer)</a:t>
@@ -3608,7 +3695,7 @@
       </p:sp>
       <p:sp>
         <p:nvSpPr>
-          <p:cNvPr id="6" name="CardBody0"/>
+          <p:cNvPr id="8" name="CardBody0"/>
           <p:cNvSpPr txBox="1"/>
           <p:nvPr/>
         </p:nvSpPr>
@@ -3639,8 +3726,8 @@
                 <a:solidFill>
                   <a:schemeClr val="tx1"/>
                 </a:solidFill>
-                <a:latin typeface="B Nazanin" pitchFamily="34" charset="0"/>
-                <a:ea typeface="B Nazanin" pitchFamily="34" charset="-122"/>
+                <a:latin typeface="Calibri" pitchFamily="34" charset="0"/>
+                <a:ea typeface="Calibri" pitchFamily="34" charset="-122"/>
                 <a:cs typeface="B Nazanin" pitchFamily="34" charset="-120"/>
               </a:rPr>
               <a:t>تقسیم‌بندی نظام‌های سیاسی بر اساس درجه حاکمیت</a:t>
@@ -3651,7 +3738,7 @@
       </p:sp>
       <p:sp>
         <p:nvSpPr>
-          <p:cNvPr id="7" name="Card1"/>
+          <p:cNvPr id="9" name="Card1"/>
           <p:cNvSpPr/>
           <p:nvPr/>
         </p:nvSpPr>
@@ -3685,14 +3772,63 @@
       </p:sp>
       <p:sp>
         <p:nvSpPr>
-          <p:cNvPr id="8" name="CardHead1"/>
+          <p:cNvPr id="10" name="IconBg_FaFlag"/>
+          <p:cNvSpPr/>
+          <p:nvPr/>
+        </p:nvSpPr>
+        <p:spPr>
+          <a:xfrm>
+            <a:off x="3886200" y="1344168"/>
+            <a:ext cx="420624" cy="420624"/>
+          </a:xfrm>
+          <a:prstGeom prst="ellipse">
+            <a:avLst/>
+          </a:prstGeom>
+          <a:solidFill>
+            <a:schemeClr val="accent2"/>
+          </a:solidFill>
+          <a:ln w="12700">
+            <a:solidFill>
+              <a:schemeClr val="accent2"/>
+            </a:solidFill>
+            <a:prstDash val="solid"/>
+          </a:ln>
+        </p:spPr>
+      </p:sp>
+      <p:pic>
+        <p:nvPicPr>
+          <p:cNvPr id="11" name="Icon_FaFlag" descr="FaFlag">    </p:cNvPr>
+          <p:cNvPicPr>
+            <a:picLocks noChangeAspect="1"/>
+          </p:cNvPicPr>
+          <p:nvPr/>
+        </p:nvPicPr>
+        <p:blipFill>
+          <a:blip r:embed="rId2"/>
+          <a:stretch>
+            <a:fillRect/>
+          </a:stretch>
+        </p:blipFill>
+        <p:spPr>
+          <a:xfrm>
+            <a:off x="3991356" y="1449324"/>
+            <a:ext cx="210312" cy="210312"/>
+          </a:xfrm>
+          <a:prstGeom prst="rect">
+            <a:avLst/>
+          </a:prstGeom>
+        </p:spPr>
+      </p:pic>
+      <p:sp>
+        <p:nvSpPr>
+          <p:cNvPr id="12" name="CardHead1"/>
           <p:cNvSpPr txBox="1"/>
           <p:nvPr/>
         </p:nvSpPr>
         <p:spPr>
           <a:xfrm>
             <a:off x="594360" y="1325880"/>
-            <a:ext cx="3703320" cy="640080"/>
+            <a:ext cx="3200400" cy="640080"/>
           </a:xfrm>
           <a:prstGeom prst="rect">
             <a:avLst/>
@@ -3712,8 +3848,8 @@
                 <a:solidFill>
                   <a:schemeClr val="tx2"/>
                 </a:solidFill>
-                <a:latin typeface="B Zar" pitchFamily="34" charset="0"/>
-                <a:ea typeface="B Zar" pitchFamily="34" charset="-122"/>
+                <a:latin typeface="Calibri" pitchFamily="34" charset="0"/>
+                <a:ea typeface="Calibri" pitchFamily="34" charset="-122"/>
                 <a:cs typeface="B Zar" pitchFamily="34" charset="-120"/>
               </a:rPr>
               <a:t>انواع حکومت‌ها</a:t>
@@ -3724,7 +3860,7 @@
       </p:sp>
       <p:sp>
         <p:nvSpPr>
-          <p:cNvPr id="9" name="CardBody1"/>
+          <p:cNvPr id="13" name="CardBody1"/>
           <p:cNvSpPr txBox="1"/>
           <p:nvPr/>
         </p:nvSpPr>
@@ -3755,8 +3891,8 @@
                 <a:solidFill>
                   <a:schemeClr val="tx1"/>
                 </a:solidFill>
-                <a:latin typeface="B Nazanin" pitchFamily="34" charset="0"/>
-                <a:ea typeface="B Nazanin" pitchFamily="34" charset="-122"/>
+                <a:latin typeface="Calibri" pitchFamily="34" charset="0"/>
+                <a:ea typeface="Calibri" pitchFamily="34" charset="-122"/>
                 <a:cs typeface="B Nazanin" pitchFamily="34" charset="-120"/>
               </a:rPr>
               <a:t>حکومت حاکم (متمرکز مطلق) ← استبدادی سنتی</a:t>
@@ -3776,8 +3912,8 @@
                 <a:solidFill>
                   <a:schemeClr val="tx1"/>
                 </a:solidFill>
-                <a:latin typeface="B Nazanin" pitchFamily="34" charset="0"/>
-                <a:ea typeface="B Nazanin" pitchFamily="34" charset="-122"/>
+                <a:latin typeface="Calibri" pitchFamily="34" charset="0"/>
+                <a:ea typeface="Calibri" pitchFamily="34" charset="-122"/>
                 <a:cs typeface="B Nazanin" pitchFamily="34" charset="-120"/>
               </a:rPr>
               <a:t>حکومت حزب (تک‌حزبی) ← شوروی سابق، چین</a:t>
@@ -3797,8 +3933,8 @@
                 <a:solidFill>
                   <a:schemeClr val="tx1"/>
                 </a:solidFill>
-                <a:latin typeface="B Nazanin" pitchFamily="34" charset="0"/>
-                <a:ea typeface="B Nazanin" pitchFamily="34" charset="-122"/>
+                <a:latin typeface="Calibri" pitchFamily="34" charset="0"/>
+                <a:ea typeface="Calibri" pitchFamily="34" charset="-122"/>
                 <a:cs typeface="B Nazanin" pitchFamily="34" charset="-120"/>
               </a:rPr>
               <a:t>حکومت بوروکراتیک (دموکراسی) ← کشورهای غربی</a:t>
@@ -3809,7 +3945,7 @@
       </p:sp>
       <p:sp>
         <p:nvSpPr>
-          <p:cNvPr id="10" name="NoteCard"/>
+          <p:cNvPr id="14" name="NoteCard"/>
           <p:cNvSpPr/>
           <p:nvPr/>
         </p:nvSpPr>
@@ -3843,7 +3979,7 @@
       </p:sp>
       <p:sp>
         <p:nvSpPr>
-          <p:cNvPr id="11" name="NoteBadge"/>
+          <p:cNvPr id="15" name="NoteBadge"/>
           <p:cNvSpPr/>
           <p:nvPr/>
         </p:nvSpPr>
@@ -3870,14 +4006,14 @@
       </p:sp>
       <p:sp>
         <p:nvSpPr>
-          <p:cNvPr id="12" name="NoteBadgeText"/>
+          <p:cNvPr id="16" name="NoteBadgeText"/>
           <p:cNvSpPr txBox="1"/>
           <p:nvPr/>
         </p:nvSpPr>
         <p:spPr>
           <a:xfrm>
             <a:off x="7406640" y="4206240"/>
-            <a:ext cx="1097280" cy="365760"/>
+            <a:ext cx="822960" cy="365760"/>
           </a:xfrm>
           <a:prstGeom prst="rect">
             <a:avLst/>
@@ -3897,8 +4033,8 @@
                 <a:solidFill>
                   <a:schemeClr val="bg1"/>
                 </a:solidFill>
-                <a:latin typeface="B Zar" pitchFamily="34" charset="0"/>
-                <a:ea typeface="B Zar" pitchFamily="34" charset="-122"/>
+                <a:latin typeface="Calibri" pitchFamily="34" charset="0"/>
+                <a:ea typeface="Calibri" pitchFamily="34" charset="-122"/>
                 <a:cs typeface="B Zar" pitchFamily="34" charset="-120"/>
               </a:rPr>
               <a:t>نکته</a:t>
@@ -3907,9 +4043,33 @@
           </a:p>
         </p:txBody>
       </p:sp>
-      <p:sp>
-        <p:nvSpPr>
-          <p:cNvPr id="13" name="Note"/>
+      <p:pic>
+        <p:nvPicPr>
+          <p:cNvPr id="17" name="NoteIcon" descr="lightbulb">    </p:cNvPr>
+          <p:cNvPicPr>
+            <a:picLocks noChangeAspect="1"/>
+          </p:cNvPicPr>
+          <p:nvPr/>
+        </p:nvPicPr>
+        <p:blipFill>
+          <a:blip r:embed="rId3"/>
+          <a:stretch>
+            <a:fillRect/>
+          </a:stretch>
+        </p:blipFill>
+        <p:spPr>
+          <a:xfrm>
+            <a:off x="8229600" y="4261104"/>
+            <a:ext cx="256032" cy="256032"/>
+          </a:xfrm>
+          <a:prstGeom prst="rect">
+            <a:avLst/>
+          </a:prstGeom>
+        </p:spPr>
+      </p:pic>
+      <p:sp>
+        <p:nvSpPr>
+          <p:cNvPr id="18" name="Note"/>
           <p:cNvSpPr txBox="1"/>
           <p:nvPr/>
         </p:nvSpPr>
@@ -3936,8 +4096,8 @@
                 <a:solidFill>
                   <a:schemeClr val="tx1"/>
                 </a:solidFill>
-                <a:latin typeface="B Nazanin" pitchFamily="34" charset="0"/>
-                <a:ea typeface="B Nazanin" pitchFamily="34" charset="-122"/>
+                <a:latin typeface="Calibri" pitchFamily="34" charset="0"/>
+                <a:ea typeface="Calibri" pitchFamily="34" charset="-122"/>
                 <a:cs typeface="B Nazanin" pitchFamily="34" charset="-120"/>
               </a:rPr>
               <a:t>در «حکومت حاکم»، قدرت در دست یک فرد یا گروه کوچک متمرکز است و بوروکراسی صرفاً ابزاری برای اجرای دستورات است.</a:t>
@@ -3978,8 +4138,9 @@
                 <a:solidFill>
                   <a:srgbClr val="6B7A86"/>
                 </a:solidFill>
-                <a:latin typeface="B Nazanin"/>
-                <a:ea typeface="B Nazanin"/>
+                <a:latin typeface="Calibri"/>
+                <a:cs typeface="B Nazanin"/>
+                <a:ea typeface="Calibri"/>
                 <a:cs typeface="B Nazanin"/>
               </a:defRPr>
             </a:lvl1pPr>
@@ -4051,8 +4212,8 @@
                 <a:solidFill>
                   <a:schemeClr val="accent2"/>
                 </a:solidFill>
-                <a:latin typeface="B Nazanin" pitchFamily="34" charset="0"/>
-                <a:ea typeface="B Nazanin" pitchFamily="34" charset="-122"/>
+                <a:latin typeface="Calibri" pitchFamily="34" charset="0"/>
+                <a:ea typeface="Calibri" pitchFamily="34" charset="-122"/>
                 <a:cs typeface="B Nazanin" pitchFamily="34" charset="-120"/>
               </a:rPr>
               <a:t>بخش دوم: جامعه، حکومت و بوم‌شناسی اداری</a:t>
@@ -4092,8 +4253,8 @@
                 <a:solidFill>
                   <a:schemeClr val="accent1"/>
                 </a:solidFill>
-                <a:latin typeface="B Zar" pitchFamily="34" charset="0"/>
-                <a:ea typeface="B Zar" pitchFamily="34" charset="-122"/>
+                <a:latin typeface="Calibri" pitchFamily="34" charset="0"/>
+                <a:ea typeface="Calibri" pitchFamily="34" charset="-122"/>
                 <a:cs typeface="B Zar" pitchFamily="34" charset="-120"/>
               </a:rPr>
               <a:t>نظریه «گاوس» و بوم‌شناسی اداری</a:t>
@@ -4138,14 +4299,63 @@
       </p:sp>
       <p:sp>
         <p:nvSpPr>
-          <p:cNvPr id="5" name="CardHead0"/>
+          <p:cNvPr id="5" name="IconBg_FaBookOpen"/>
+          <p:cNvSpPr/>
+          <p:nvPr/>
+        </p:nvSpPr>
+        <p:spPr>
+          <a:xfrm>
+            <a:off x="8138160" y="1344168"/>
+            <a:ext cx="420624" cy="420624"/>
+          </a:xfrm>
+          <a:prstGeom prst="ellipse">
+            <a:avLst/>
+          </a:prstGeom>
+          <a:solidFill>
+            <a:schemeClr val="accent1"/>
+          </a:solidFill>
+          <a:ln w="12700">
+            <a:solidFill>
+              <a:schemeClr val="accent1"/>
+            </a:solidFill>
+            <a:prstDash val="solid"/>
+          </a:ln>
+        </p:spPr>
+      </p:sp>
+      <p:pic>
+        <p:nvPicPr>
+          <p:cNvPr id="6" name="Icon_FaBookOpen" descr="FaBookOpen">    </p:cNvPr>
+          <p:cNvPicPr>
+            <a:picLocks noChangeAspect="1"/>
+          </p:cNvPicPr>
+          <p:nvPr/>
+        </p:nvPicPr>
+        <p:blipFill>
+          <a:blip r:embed="rId1"/>
+          <a:stretch>
+            <a:fillRect/>
+          </a:stretch>
+        </p:blipFill>
+        <p:spPr>
+          <a:xfrm>
+            <a:off x="8243316" y="1449324"/>
+            <a:ext cx="210312" cy="210312"/>
+          </a:xfrm>
+          <a:prstGeom prst="rect">
+            <a:avLst/>
+          </a:prstGeom>
+        </p:spPr>
+      </p:pic>
+      <p:sp>
+        <p:nvSpPr>
+          <p:cNvPr id="7" name="CardHead0"/>
           <p:cNvSpPr txBox="1"/>
           <p:nvPr/>
         </p:nvSpPr>
         <p:spPr>
           <a:xfrm>
             <a:off x="4846320" y="1325880"/>
-            <a:ext cx="3703320" cy="640080"/>
+            <a:ext cx="3200400" cy="640080"/>
           </a:xfrm>
           <a:prstGeom prst="rect">
             <a:avLst/>
@@ -4165,8 +4375,8 @@
                 <a:solidFill>
                   <a:schemeClr val="tx2"/>
                 </a:solidFill>
-                <a:latin typeface="B Zar" pitchFamily="34" charset="0"/>
-                <a:ea typeface="B Zar" pitchFamily="34" charset="-122"/>
+                <a:latin typeface="Calibri" pitchFamily="34" charset="0"/>
+                <a:ea typeface="Calibri" pitchFamily="34" charset="-122"/>
                 <a:cs typeface="B Zar" pitchFamily="34" charset="-120"/>
               </a:rPr>
               <a:t>جان گاوس (John Gaus)</a:t>
@@ -4177,7 +4387,7 @@
       </p:sp>
       <p:sp>
         <p:nvSpPr>
-          <p:cNvPr id="6" name="CardBody0"/>
+          <p:cNvPr id="8" name="CardBody0"/>
           <p:cNvSpPr txBox="1"/>
           <p:nvPr/>
         </p:nvSpPr>
@@ -4208,8 +4418,8 @@
                 <a:solidFill>
                   <a:schemeClr val="tx1"/>
                 </a:solidFill>
-                <a:latin typeface="B Nazanin" pitchFamily="34" charset="0"/>
-                <a:ea typeface="B Nazanin" pitchFamily="34" charset="-122"/>
+                <a:latin typeface="Calibri" pitchFamily="34" charset="0"/>
+                <a:ea typeface="Calibri" pitchFamily="34" charset="-122"/>
                 <a:cs typeface="B Nazanin" pitchFamily="34" charset="-120"/>
               </a:rPr>
               <a:t>بنیان‌گذار نظریه بوم‌شناسی اداری</a:t>
@@ -4229,8 +4439,8 @@
                 <a:solidFill>
                   <a:schemeClr val="tx1"/>
                 </a:solidFill>
-                <a:latin typeface="B Nazanin" pitchFamily="34" charset="0"/>
-                <a:ea typeface="B Nazanin" pitchFamily="34" charset="-122"/>
+                <a:latin typeface="Calibri" pitchFamily="34" charset="0"/>
+                <a:ea typeface="Calibri" pitchFamily="34" charset="-122"/>
                 <a:cs typeface="B Nazanin" pitchFamily="34" charset="-120"/>
               </a:rPr>
               <a:t>اداره امور دولتی را نمی‌توان جدا از محیط اجتماعی، اقتصادی و سیاسی مطالعه کرد</a:t>
@@ -4241,7 +4451,7 @@
       </p:sp>
       <p:sp>
         <p:nvSpPr>
-          <p:cNvPr id="7" name="Card1"/>
+          <p:cNvPr id="9" name="Card1"/>
           <p:cNvSpPr/>
           <p:nvPr/>
         </p:nvSpPr>
@@ -4275,14 +4485,63 @@
       </p:sp>
       <p:sp>
         <p:nvSpPr>
-          <p:cNvPr id="8" name="CardHead1"/>
+          <p:cNvPr id="10" name="IconBg_FaGears"/>
+          <p:cNvSpPr/>
+          <p:nvPr/>
+        </p:nvSpPr>
+        <p:spPr>
+          <a:xfrm>
+            <a:off x="3886200" y="1344168"/>
+            <a:ext cx="420624" cy="420624"/>
+          </a:xfrm>
+          <a:prstGeom prst="ellipse">
+            <a:avLst/>
+          </a:prstGeom>
+          <a:solidFill>
+            <a:schemeClr val="accent2"/>
+          </a:solidFill>
+          <a:ln w="12700">
+            <a:solidFill>
+              <a:schemeClr val="accent2"/>
+            </a:solidFill>
+            <a:prstDash val="solid"/>
+          </a:ln>
+        </p:spPr>
+      </p:sp>
+      <p:pic>
+        <p:nvPicPr>
+          <p:cNvPr id="11" name="Icon_FaGears" descr="FaGears">    </p:cNvPr>
+          <p:cNvPicPr>
+            <a:picLocks noChangeAspect="1"/>
+          </p:cNvPicPr>
+          <p:nvPr/>
+        </p:nvPicPr>
+        <p:blipFill>
+          <a:blip r:embed="rId2"/>
+          <a:stretch>
+            <a:fillRect/>
+          </a:stretch>
+        </p:blipFill>
+        <p:spPr>
+          <a:xfrm>
+            <a:off x="3991356" y="1449324"/>
+            <a:ext cx="210312" cy="210312"/>
+          </a:xfrm>
+          <a:prstGeom prst="rect">
+            <a:avLst/>
+          </a:prstGeom>
+        </p:spPr>
+      </p:pic>
+      <p:sp>
+        <p:nvSpPr>
+          <p:cNvPr id="12" name="CardHead1"/>
           <p:cNvSpPr txBox="1"/>
           <p:nvPr/>
         </p:nvSpPr>
         <p:spPr>
           <a:xfrm>
             <a:off x="594360" y="1325880"/>
-            <a:ext cx="3703320" cy="640080"/>
+            <a:ext cx="3200400" cy="640080"/>
           </a:xfrm>
           <a:prstGeom prst="rect">
             <a:avLst/>
@@ -4302,8 +4561,8 @@
                 <a:solidFill>
                   <a:schemeClr val="tx2"/>
                 </a:solidFill>
-                <a:latin typeface="B Zar" pitchFamily="34" charset="0"/>
-                <a:ea typeface="B Zar" pitchFamily="34" charset="-122"/>
+                <a:latin typeface="Calibri" pitchFamily="34" charset="0"/>
+                <a:ea typeface="Calibri" pitchFamily="34" charset="-122"/>
                 <a:cs typeface="B Zar" pitchFamily="34" charset="-120"/>
               </a:rPr>
               <a:t>عوامل موثر بر اداره</a:t>
@@ -4314,7 +4573,7 @@
       </p:sp>
       <p:sp>
         <p:nvSpPr>
-          <p:cNvPr id="9" name="CardBody1"/>
+          <p:cNvPr id="13" name="CardBody1"/>
           <p:cNvSpPr txBox="1"/>
           <p:nvPr/>
         </p:nvSpPr>
@@ -4345,8 +4604,8 @@
                 <a:solidFill>
                   <a:schemeClr val="tx1"/>
                 </a:solidFill>
-                <a:latin typeface="B Nazanin" pitchFamily="34" charset="0"/>
-                <a:ea typeface="B Nazanin" pitchFamily="34" charset="-122"/>
+                <a:latin typeface="Calibri" pitchFamily="34" charset="0"/>
+                <a:ea typeface="Calibri" pitchFamily="34" charset="-122"/>
                 <a:cs typeface="B Nazanin" pitchFamily="34" charset="-120"/>
               </a:rPr>
               <a:t>تکنولوژی</a:t>
@@ -4366,8 +4625,8 @@
                 <a:solidFill>
                   <a:schemeClr val="tx1"/>
                 </a:solidFill>
-                <a:latin typeface="B Nazanin" pitchFamily="34" charset="0"/>
-                <a:ea typeface="B Nazanin" pitchFamily="34" charset="-122"/>
+                <a:latin typeface="Calibri" pitchFamily="34" charset="0"/>
+                <a:ea typeface="Calibri" pitchFamily="34" charset="-122"/>
                 <a:cs typeface="B Nazanin" pitchFamily="34" charset="-120"/>
               </a:rPr>
               <a:t>افراد</a:t>
@@ -4387,8 +4646,8 @@
                 <a:solidFill>
                   <a:schemeClr val="tx1"/>
                 </a:solidFill>
-                <a:latin typeface="B Nazanin" pitchFamily="34" charset="0"/>
-                <a:ea typeface="B Nazanin" pitchFamily="34" charset="-122"/>
+                <a:latin typeface="Calibri" pitchFamily="34" charset="0"/>
+                <a:ea typeface="Calibri" pitchFamily="34" charset="-122"/>
                 <a:cs typeface="B Nazanin" pitchFamily="34" charset="-120"/>
               </a:rPr>
               <a:t>مکان</a:t>
@@ -4408,8 +4667,8 @@
                 <a:solidFill>
                   <a:schemeClr val="tx1"/>
                 </a:solidFill>
-                <a:latin typeface="B Nazanin" pitchFamily="34" charset="0"/>
-                <a:ea typeface="B Nazanin" pitchFamily="34" charset="-122"/>
+                <a:latin typeface="Calibri" pitchFamily="34" charset="0"/>
+                <a:ea typeface="Calibri" pitchFamily="34" charset="-122"/>
                 <a:cs typeface="B Nazanin" pitchFamily="34" charset="-120"/>
               </a:rPr>
               <a:t>آرزوها و عقاید</a:t>
@@ -4420,7 +4679,7 @@
       </p:sp>
       <p:sp>
         <p:nvSpPr>
-          <p:cNvPr id="10" name="NoteCard"/>
+          <p:cNvPr id="14" name="NoteCard"/>
           <p:cNvSpPr/>
           <p:nvPr/>
         </p:nvSpPr>
@@ -4454,7 +4713,7 @@
       </p:sp>
       <p:sp>
         <p:nvSpPr>
-          <p:cNvPr id="11" name="NoteBadge"/>
+          <p:cNvPr id="15" name="NoteBadge"/>
           <p:cNvSpPr/>
           <p:nvPr/>
         </p:nvSpPr>
@@ -4481,14 +4740,14 @@
       </p:sp>
       <p:sp>
         <p:nvSpPr>
-          <p:cNvPr id="12" name="NoteBadgeText"/>
+          <p:cNvPr id="16" name="NoteBadgeText"/>
           <p:cNvSpPr txBox="1"/>
           <p:nvPr/>
         </p:nvSpPr>
         <p:spPr>
           <a:xfrm>
             <a:off x="7406640" y="4206240"/>
-            <a:ext cx="1097280" cy="365760"/>
+            <a:ext cx="822960" cy="365760"/>
           </a:xfrm>
           <a:prstGeom prst="rect">
             <a:avLst/>
@@ -4508,8 +4767,8 @@
                 <a:solidFill>
                   <a:schemeClr val="bg1"/>
                 </a:solidFill>
-                <a:latin typeface="B Zar" pitchFamily="34" charset="0"/>
-                <a:ea typeface="B Zar" pitchFamily="34" charset="-122"/>
+                <a:latin typeface="Calibri" pitchFamily="34" charset="0"/>
+                <a:ea typeface="Calibri" pitchFamily="34" charset="-122"/>
                 <a:cs typeface="B Zar" pitchFamily="34" charset="-120"/>
               </a:rPr>
               <a:t>نکته</a:t>
@@ -4518,9 +4777,33 @@
           </a:p>
         </p:txBody>
       </p:sp>
-      <p:sp>
-        <p:nvSpPr>
-          <p:cNvPr id="13" name="Note"/>
+      <p:pic>
+        <p:nvPicPr>
+          <p:cNvPr id="17" name="NoteIcon" descr="lightbulb">    </p:cNvPr>
+          <p:cNvPicPr>
+            <a:picLocks noChangeAspect="1"/>
+          </p:cNvPicPr>
+          <p:nvPr/>
+        </p:nvPicPr>
+        <p:blipFill>
+          <a:blip r:embed="rId3"/>
+          <a:stretch>
+            <a:fillRect/>
+          </a:stretch>
+        </p:blipFill>
+        <p:spPr>
+          <a:xfrm>
+            <a:off x="8229600" y="4261104"/>
+            <a:ext cx="256032" cy="256032"/>
+          </a:xfrm>
+          <a:prstGeom prst="rect">
+            <a:avLst/>
+          </a:prstGeom>
+        </p:spPr>
+      </p:pic>
+      <p:sp>
+        <p:nvSpPr>
+          <p:cNvPr id="18" name="Note"/>
           <p:cNvSpPr txBox="1"/>
           <p:nvPr/>
         </p:nvSpPr>
@@ -4547,8 +4830,8 @@
                 <a:solidFill>
                   <a:schemeClr val="tx1"/>
                 </a:solidFill>
-                <a:latin typeface="B Nazanin" pitchFamily="34" charset="0"/>
-                <a:ea typeface="B Nazanin" pitchFamily="34" charset="-122"/>
+                <a:latin typeface="Calibri" pitchFamily="34" charset="0"/>
+                <a:ea typeface="Calibri" pitchFamily="34" charset="-122"/>
                 <a:cs typeface="B Nazanin" pitchFamily="34" charset="-120"/>
               </a:rPr>
               <a:t>«بوم‌شناسی» کمک می‌کند بفهمیم چرا یک مدل اداری در یک کشور موفق و در کشور دیگر ناموفق است. این نظریه بعدها توسط «ریگز» بسط داده شد.</a:t>
@@ -4589,8 +4872,9 @@
                 <a:solidFill>
                   <a:srgbClr val="6B7A86"/>
                 </a:solidFill>
-                <a:latin typeface="B Nazanin"/>
-                <a:ea typeface="B Nazanin"/>
+                <a:latin typeface="Calibri"/>
+                <a:cs typeface="B Nazanin"/>
+                <a:ea typeface="Calibri"/>
                 <a:cs typeface="B Nazanin"/>
               </a:defRPr>
             </a:lvl1pPr>
@@ -4694,8 +4978,8 @@
                 <a:solidFill>
                   <a:schemeClr val="bg1"/>
                 </a:solidFill>
-                <a:latin typeface="B Zar" pitchFamily="34" charset="0"/>
-                <a:ea typeface="B Zar" pitchFamily="34" charset="-122"/>
+                <a:latin typeface="Calibri" pitchFamily="34" charset="0"/>
+                <a:ea typeface="Calibri" pitchFamily="34" charset="-122"/>
                 <a:cs typeface="B Zar" pitchFamily="34" charset="-120"/>
               </a:rPr>
               <a:t>۳</a:t>
@@ -4704,16 +4988,40 @@
           </a:p>
         </p:txBody>
       </p:sp>
-      <p:sp>
-        <p:nvSpPr>
-          <p:cNvPr id="4" name="Title"/>
+      <p:pic>
+        <p:nvPicPr>
+          <p:cNvPr id="4" name="DividerArt" descr="building illustration">    </p:cNvPr>
+          <p:cNvPicPr>
+            <a:picLocks noChangeAspect="1"/>
+          </p:cNvPicPr>
+          <p:nvPr/>
+        </p:nvPicPr>
+        <p:blipFill>
+          <a:blip r:embed="rId1"/>
+          <a:stretch>
+            <a:fillRect/>
+          </a:stretch>
+        </p:blipFill>
+        <p:spPr>
+          <a:xfrm>
+            <a:off x="365760" y="914400"/>
+            <a:ext cx="3840480" cy="2990088"/>
+          </a:xfrm>
+          <a:prstGeom prst="rect">
+            <a:avLst/>
+          </a:prstGeom>
+        </p:spPr>
+      </p:pic>
+      <p:sp>
+        <p:nvSpPr>
+          <p:cNvPr id="5" name="Title"/>
           <p:cNvSpPr txBox="1"/>
           <p:nvPr/>
         </p:nvSpPr>
         <p:spPr>
           <a:xfrm>
-            <a:off x="640080" y="2377440"/>
-            <a:ext cx="7863840" cy="914400"/>
+            <a:off x="4389120" y="2286000"/>
+            <a:ext cx="4114800" cy="1097280"/>
           </a:xfrm>
           <a:prstGeom prst="rect">
             <a:avLst/>
@@ -4731,30 +5039,30 @@
               <a:buNone/>
             </a:pPr>
             <a:r>
-              <a:rPr lang="fa-IR" sz="3800" b="1" dirty="0">
+              <a:rPr lang="fa-IR" sz="3400" b="1" dirty="0">
                 <a:solidFill>
                   <a:schemeClr val="bg1"/>
                 </a:solidFill>
-                <a:latin typeface="B Zar" pitchFamily="34" charset="0"/>
-                <a:ea typeface="B Zar" pitchFamily="34" charset="-122"/>
+                <a:latin typeface="Calibri" pitchFamily="34" charset="0"/>
+                <a:ea typeface="Calibri" pitchFamily="34" charset="-122"/>
                 <a:cs typeface="B Zar" pitchFamily="34" charset="-120"/>
               </a:rPr>
               <a:t>دولت و نظام‌های اداری</a:t>
             </a:r>
-            <a:endParaRPr lang="fa-IR" sz="3800" dirty="0"/>
-          </a:p>
-        </p:txBody>
-      </p:sp>
-      <p:sp>
-        <p:nvSpPr>
-          <p:cNvPr id="5" name="Subtitle"/>
+            <a:endParaRPr lang="fa-IR" sz="3400" dirty="0"/>
+          </a:p>
+        </p:txBody>
+      </p:sp>
+      <p:sp>
+        <p:nvSpPr>
+          <p:cNvPr id="6" name="Subtitle"/>
           <p:cNvSpPr txBox="1"/>
           <p:nvPr/>
         </p:nvSpPr>
         <p:spPr>
           <a:xfrm>
-            <a:off x="640080" y="3337560"/>
-            <a:ext cx="7863840" cy="457200"/>
+            <a:off x="4389120" y="3429000"/>
+            <a:ext cx="4114800" cy="822960"/>
           </a:xfrm>
           <a:prstGeom prst="rect">
             <a:avLst/>
@@ -4770,17 +5078,17 @@
               <a:buNone/>
             </a:pPr>
             <a:r>
-              <a:rPr lang="fa-IR" sz="2000" dirty="0">
+              <a:rPr lang="fa-IR" sz="1800" dirty="0">
                 <a:solidFill>
                   <a:srgbClr val="CFE3E1"/>
                 </a:solidFill>
-                <a:latin typeface="B Nazanin" pitchFamily="34" charset="0"/>
-                <a:ea typeface="B Nazanin" pitchFamily="34" charset="-122"/>
+                <a:latin typeface="Calibri" pitchFamily="34" charset="0"/>
+                <a:ea typeface="Calibri" pitchFamily="34" charset="-122"/>
                 <a:cs typeface="B Nazanin" pitchFamily="34" charset="-120"/>
               </a:rPr>
               <a:t>اندازه دولت، مدل‌های توسعه و انواع نظام‌های اداری</a:t>
             </a:r>
-            <a:endParaRPr lang="fa-IR" sz="2000" dirty="0"/>
+            <a:endParaRPr lang="fa-IR" sz="1800" dirty="0"/>
           </a:p>
         </p:txBody>
       </p:sp>
@@ -4841,8 +5149,8 @@
                 <a:solidFill>
                   <a:schemeClr val="accent2"/>
                 </a:solidFill>
-                <a:latin typeface="B Nazanin" pitchFamily="34" charset="0"/>
-                <a:ea typeface="B Nazanin" pitchFamily="34" charset="-122"/>
+                <a:latin typeface="Calibri" pitchFamily="34" charset="0"/>
+                <a:ea typeface="Calibri" pitchFamily="34" charset="-122"/>
                 <a:cs typeface="B Nazanin" pitchFamily="34" charset="-120"/>
               </a:rPr>
               <a:t>بخش سوم: دولت و نظام‌های اداری</a:t>
@@ -4882,8 +5190,8 @@
                 <a:solidFill>
                   <a:schemeClr val="accent1"/>
                 </a:solidFill>
-                <a:latin typeface="B Zar" pitchFamily="34" charset="0"/>
-                <a:ea typeface="B Zar" pitchFamily="34" charset="-122"/>
+                <a:latin typeface="Calibri" pitchFamily="34" charset="0"/>
+                <a:ea typeface="Calibri" pitchFamily="34" charset="-122"/>
                 <a:cs typeface="B Zar" pitchFamily="34" charset="-120"/>
               </a:rPr>
               <a:t>کارمندان دولتی و اندازه دولت</a:t>
@@ -4928,14 +5236,63 @@
       </p:sp>
       <p:sp>
         <p:nvSpPr>
-          <p:cNvPr id="5" name="CardHead0"/>
+          <p:cNvPr id="5" name="IconBg_FaUsers"/>
+          <p:cNvSpPr/>
+          <p:nvPr/>
+        </p:nvSpPr>
+        <p:spPr>
+          <a:xfrm>
+            <a:off x="8092440" y="1325880"/>
+            <a:ext cx="457200" cy="457200"/>
+          </a:xfrm>
+          <a:prstGeom prst="ellipse">
+            <a:avLst/>
+          </a:prstGeom>
+          <a:solidFill>
+            <a:schemeClr val="accent1"/>
+          </a:solidFill>
+          <a:ln w="12700">
+            <a:solidFill>
+              <a:schemeClr val="accent1"/>
+            </a:solidFill>
+            <a:prstDash val="solid"/>
+          </a:ln>
+        </p:spPr>
+      </p:sp>
+      <p:pic>
+        <p:nvPicPr>
+          <p:cNvPr id="6" name="Icon_FaUsers" descr="FaUsers">    </p:cNvPr>
+          <p:cNvPicPr>
+            <a:picLocks noChangeAspect="1"/>
+          </p:cNvPicPr>
+          <p:nvPr/>
+        </p:nvPicPr>
+        <p:blipFill>
+          <a:blip r:embed="rId1"/>
+          <a:stretch>
+            <a:fillRect/>
+          </a:stretch>
+        </p:blipFill>
+        <p:spPr>
+          <a:xfrm>
+            <a:off x="8206740" y="1440180"/>
+            <a:ext cx="228600" cy="228600"/>
+          </a:xfrm>
+          <a:prstGeom prst="rect">
+            <a:avLst/>
+          </a:prstGeom>
+        </p:spPr>
+      </p:pic>
+      <p:sp>
+        <p:nvSpPr>
+          <p:cNvPr id="7" name="CardHead0"/>
           <p:cNvSpPr txBox="1"/>
           <p:nvPr/>
         </p:nvSpPr>
         <p:spPr>
           <a:xfrm>
             <a:off x="4617720" y="1325880"/>
-            <a:ext cx="3931920" cy="457200"/>
+            <a:ext cx="3383280" cy="457200"/>
           </a:xfrm>
           <a:prstGeom prst="rect">
             <a:avLst/>
@@ -4955,8 +5312,8 @@
                 <a:solidFill>
                   <a:schemeClr val="tx2"/>
                 </a:solidFill>
-                <a:latin typeface="B Zar" pitchFamily="34" charset="0"/>
-                <a:ea typeface="B Zar" pitchFamily="34" charset="-122"/>
+                <a:latin typeface="Calibri" pitchFamily="34" charset="0"/>
+                <a:ea typeface="Calibri" pitchFamily="34" charset="-122"/>
                 <a:cs typeface="B Zar" pitchFamily="34" charset="-120"/>
               </a:rPr>
               <a:t>آمارهای جهانی (جدول ۱ و ۲)</a:t>
@@ -4967,7 +5324,7 @@
       </p:sp>
       <p:sp>
         <p:nvSpPr>
-          <p:cNvPr id="6" name="CardBody0"/>
+          <p:cNvPr id="8" name="CardBody0"/>
           <p:cNvSpPr txBox="1"/>
           <p:nvPr/>
         </p:nvSpPr>
@@ -4998,8 +5355,8 @@
                 <a:solidFill>
                   <a:schemeClr val="tx1"/>
                 </a:solidFill>
-                <a:latin typeface="B Nazanin" pitchFamily="34" charset="0"/>
-                <a:ea typeface="B Nazanin" pitchFamily="34" charset="-122"/>
+                <a:latin typeface="Calibri" pitchFamily="34" charset="0"/>
+                <a:ea typeface="Calibri" pitchFamily="34" charset="-122"/>
                 <a:cs typeface="B Nazanin" pitchFamily="34" charset="-120"/>
               </a:rPr>
               <a:t>کشورهای توسعه‌یافته (سوئد، دانمارک): ۲۵-۳۰٪ استخدام دولتی</a:t>
@@ -5019,8 +5376,8 @@
                 <a:solidFill>
                   <a:schemeClr val="tx1"/>
                 </a:solidFill>
-                <a:latin typeface="B Nazanin" pitchFamily="34" charset="0"/>
-                <a:ea typeface="B Nazanin" pitchFamily="34" charset="-122"/>
+                <a:latin typeface="Calibri" pitchFamily="34" charset="0"/>
+                <a:ea typeface="Calibri" pitchFamily="34" charset="-122"/>
                 <a:cs typeface="B Nazanin" pitchFamily="34" charset="-120"/>
               </a:rPr>
               <a:t>کشورهای در حال توسعه (هند، مصر): سهم کمتر، اما لزوماً کارایی بیشتر نیست</a:t>
@@ -5031,7 +5388,7 @@
       </p:sp>
       <p:sp>
         <p:nvSpPr>
-          <p:cNvPr id="7" name="ChartCard"/>
+          <p:cNvPr id="9" name="ChartCard"/>
           <p:cNvSpPr/>
           <p:nvPr/>
         </p:nvSpPr>
@@ -5065,7 +5422,7 @@
       </p:sp>
       <p:graphicFrame>
         <p:nvGraphicFramePr>
-          <p:cNvPr id="8" name="Chart 0" descr=""/>
+          <p:cNvPr id="10" name="Chart 0" descr=""/>
           <p:cNvGraphicFramePr/>
           <p:nvPr/>
         </p:nvGraphicFramePr>
@@ -5075,13 +5432,13 @@
         </p:xfrm>
         <a:graphic xmlns:a="http://schemas.openxmlformats.org/drawingml/2006/main">
           <a:graphicData uri="http://schemas.openxmlformats.org/drawingml/2006/chart">
-            <c:chart xmlns:c="http://schemas.openxmlformats.org/drawingml/2006/chart" r:id="rId1"/>
+            <c:chart xmlns:c="http://schemas.openxmlformats.org/drawingml/2006/chart" r:id="rId2"/>
           </a:graphicData>
         </a:graphic>
       </p:graphicFrame>
       <p:sp>
         <p:nvSpPr>
-          <p:cNvPr id="9" name="NoteCard"/>
+          <p:cNvPr id="11" name="NoteCard"/>
           <p:cNvSpPr/>
           <p:nvPr/>
         </p:nvSpPr>
@@ -5115,7 +5472,7 @@
       </p:sp>
       <p:sp>
         <p:nvSpPr>
-          <p:cNvPr id="10" name="NoteBadge"/>
+          <p:cNvPr id="12" name="NoteBadge"/>
           <p:cNvSpPr/>
           <p:nvPr/>
         </p:nvSpPr>
@@ -5142,14 +5499,14 @@
       </p:sp>
       <p:sp>
         <p:nvSpPr>
-          <p:cNvPr id="11" name="NoteBadgeText"/>
+          <p:cNvPr id="13" name="NoteBadgeText"/>
           <p:cNvSpPr txBox="1"/>
           <p:nvPr/>
         </p:nvSpPr>
         <p:spPr>
           <a:xfrm>
             <a:off x="7406640" y="4206240"/>
-            <a:ext cx="1097280" cy="365760"/>
+            <a:ext cx="822960" cy="365760"/>
           </a:xfrm>
           <a:prstGeom prst="rect">
             <a:avLst/>
@@ -5169,8 +5526,8 @@
                 <a:solidFill>
                   <a:schemeClr val="bg1"/>
                 </a:solidFill>
-                <a:latin typeface="B Zar" pitchFamily="34" charset="0"/>
-                <a:ea typeface="B Zar" pitchFamily="34" charset="-122"/>
+                <a:latin typeface="Calibri" pitchFamily="34" charset="0"/>
+                <a:ea typeface="Calibri" pitchFamily="34" charset="-122"/>
                 <a:cs typeface="B Zar" pitchFamily="34" charset="-120"/>
               </a:rPr>
               <a:t>نکته</a:t>
@@ -5179,9 +5536,33 @@
           </a:p>
         </p:txBody>
       </p:sp>
-      <p:sp>
-        <p:nvSpPr>
-          <p:cNvPr id="12" name="Note"/>
+      <p:pic>
+        <p:nvPicPr>
+          <p:cNvPr id="14" name="NoteIcon" descr="lightbulb">    </p:cNvPr>
+          <p:cNvPicPr>
+            <a:picLocks noChangeAspect="1"/>
+          </p:cNvPicPr>
+          <p:nvPr/>
+        </p:nvPicPr>
+        <p:blipFill>
+          <a:blip r:embed="rId3"/>
+          <a:stretch>
+            <a:fillRect/>
+          </a:stretch>
+        </p:blipFill>
+        <p:spPr>
+          <a:xfrm>
+            <a:off x="8229600" y="4261104"/>
+            <a:ext cx="256032" cy="256032"/>
+          </a:xfrm>
+          <a:prstGeom prst="rect">
+            <a:avLst/>
+          </a:prstGeom>
+        </p:spPr>
+      </p:pic>
+      <p:sp>
+        <p:nvSpPr>
+          <p:cNvPr id="15" name="Note"/>
           <p:cNvSpPr txBox="1"/>
           <p:nvPr/>
         </p:nvSpPr>
@@ -5208,8 +5589,8 @@
                 <a:solidFill>
                   <a:schemeClr val="tx1"/>
                 </a:solidFill>
-                <a:latin typeface="B Nazanin" pitchFamily="34" charset="0"/>
-                <a:ea typeface="B Nazanin" pitchFamily="34" charset="-122"/>
+                <a:latin typeface="Calibri" pitchFamily="34" charset="0"/>
+                <a:ea typeface="Calibri" pitchFamily="34" charset="-122"/>
                 <a:cs typeface="B Nazanin" pitchFamily="34" charset="-120"/>
               </a:rPr>
               <a:t>در بسیاری از کشورهای در حال توسعه، «بزرگ شدن دولت» = افزایش بوروکراسی زائد، نه افزایش خدمات. این پدیده به «قانون پارکینسون» معروف است: کار کارمندان تا پر شدن زمان موجود گسترش می‌یابد.</a:t>
@@ -5250,8 +5631,9 @@
                 <a:solidFill>
                   <a:srgbClr val="6B7A86"/>
                 </a:solidFill>
-                <a:latin typeface="B Nazanin"/>
-                <a:ea typeface="B Nazanin"/>
+                <a:latin typeface="Calibri"/>
+                <a:cs typeface="B Nazanin"/>
+                <a:ea typeface="Calibri"/>
                 <a:cs typeface="B Nazanin"/>
               </a:defRPr>
             </a:lvl1pPr>
@@ -5323,8 +5705,8 @@
                 <a:solidFill>
                   <a:schemeClr val="accent2"/>
                 </a:solidFill>
-                <a:latin typeface="B Nazanin" pitchFamily="34" charset="0"/>
-                <a:ea typeface="B Nazanin" pitchFamily="34" charset="-122"/>
+                <a:latin typeface="Calibri" pitchFamily="34" charset="0"/>
+                <a:ea typeface="Calibri" pitchFamily="34" charset="-122"/>
                 <a:cs typeface="B Nazanin" pitchFamily="34" charset="-120"/>
               </a:rPr>
               <a:t>بخش سوم: دولت و نظام‌های اداری</a:t>
@@ -5364,8 +5746,8 @@
                 <a:solidFill>
                   <a:schemeClr val="accent1"/>
                 </a:solidFill>
-                <a:latin typeface="B Zar" pitchFamily="34" charset="0"/>
-                <a:ea typeface="B Zar" pitchFamily="34" charset="-122"/>
+                <a:latin typeface="Calibri" pitchFamily="34" charset="0"/>
+                <a:ea typeface="Calibri" pitchFamily="34" charset="-122"/>
                 <a:cs typeface="B Zar" pitchFamily="34" charset="-120"/>
               </a:rPr>
               <a:t>مدل‌های نظام اداری در کشورهای در حال توسعه</a:t>
@@ -5410,14 +5792,14 @@
       </p:sp>
       <p:sp>
         <p:nvSpPr>
-          <p:cNvPr id="5" name="Badge0"/>
+          <p:cNvPr id="5" name="IconBg_FaPeopleGroup"/>
           <p:cNvSpPr/>
           <p:nvPr/>
         </p:nvSpPr>
         <p:spPr>
           <a:xfrm>
-            <a:off x="8046720" y="1435608"/>
-            <a:ext cx="457200" cy="457200"/>
+            <a:off x="8046720" y="1417320"/>
+            <a:ext cx="475488" cy="475488"/>
           </a:xfrm>
           <a:prstGeom prst="ellipse">
             <a:avLst/>
@@ -5433,16 +5815,40 @@
           </a:ln>
         </p:spPr>
       </p:sp>
-      <p:sp>
-        <p:nvSpPr>
-          <p:cNvPr id="6" name="BadgeNum0"/>
+      <p:pic>
+        <p:nvPicPr>
+          <p:cNvPr id="6" name="Icon_FaPeopleGroup" descr="FaPeopleGroup">    </p:cNvPr>
+          <p:cNvPicPr>
+            <a:picLocks noChangeAspect="1"/>
+          </p:cNvPicPr>
+          <p:nvPr/>
+        </p:nvPicPr>
+        <p:blipFill>
+          <a:blip r:embed="rId1"/>
+          <a:stretch>
+            <a:fillRect/>
+          </a:stretch>
+        </p:blipFill>
+        <p:spPr>
+          <a:xfrm>
+            <a:off x="8165592" y="1536192"/>
+            <a:ext cx="237744" cy="237744"/>
+          </a:xfrm>
+          <a:prstGeom prst="rect">
+            <a:avLst/>
+          </a:prstGeom>
+        </p:spPr>
+      </p:pic>
+      <p:sp>
+        <p:nvSpPr>
+          <p:cNvPr id="7" name="GridHead0"/>
           <p:cNvSpPr txBox="1"/>
           <p:nvPr/>
         </p:nvSpPr>
         <p:spPr>
           <a:xfrm>
-            <a:off x="8046720" y="1435608"/>
-            <a:ext cx="457200" cy="457200"/>
+            <a:off x="4892040" y="1389888"/>
+            <a:ext cx="3063240" cy="548640"/>
           </a:xfrm>
           <a:prstGeom prst="rect">
             <a:avLst/>
@@ -5451,37 +5857,37 @@
           <a:ln/>
         </p:spPr>
         <p:txBody>
-          <a:bodyPr wrap="square" lIns="0" tIns="0" rIns="0" bIns="0" rtlCol="0" anchor="ctr"/>
-          <a:lstStyle/>
-          <a:p>
-            <a:pPr rtl="1" algn="ctr" indent="0" marL="0">
+          <a:bodyPr wrap="square" rtlCol="0" anchor="ctr"/>
+          <a:lstStyle/>
+          <a:p>
+            <a:pPr rtl="1" algn="r" indent="0" marL="0">
               <a:buNone/>
             </a:pPr>
             <a:r>
-              <a:rPr lang="fa-IR" sz="1800" b="1" dirty="0">
-                <a:solidFill>
-                  <a:schemeClr val="bg1"/>
-                </a:solidFill>
-                <a:latin typeface="B Zar" pitchFamily="34" charset="0"/>
-                <a:ea typeface="B Zar" pitchFamily="34" charset="-122"/>
+              <a:rPr lang="fa-IR" sz="1700" b="1" dirty="0">
+                <a:solidFill>
+                  <a:schemeClr val="tx2"/>
+                </a:solidFill>
+                <a:latin typeface="Calibri" pitchFamily="34" charset="0"/>
+                <a:ea typeface="Calibri" pitchFamily="34" charset="-122"/>
                 <a:cs typeface="B Zar" pitchFamily="34" charset="-120"/>
               </a:rPr>
-              <a:t>۱</a:t>
-            </a:r>
-            <a:endParaRPr lang="fa-IR" sz="1800" dirty="0"/>
-          </a:p>
-        </p:txBody>
-      </p:sp>
-      <p:sp>
-        <p:nvSpPr>
-          <p:cNvPr id="7" name="GridHead0"/>
+              <a:t>مدل‌های مردم‌محور (Populist)</a:t>
+            </a:r>
+            <a:endParaRPr lang="fa-IR" sz="1700" dirty="0"/>
+          </a:p>
+        </p:txBody>
+      </p:sp>
+      <p:sp>
+        <p:nvSpPr>
+          <p:cNvPr id="8" name="GridBody0"/>
           <p:cNvSpPr txBox="1"/>
           <p:nvPr/>
         </p:nvSpPr>
         <p:spPr>
           <a:xfrm>
-            <a:off x="4892040" y="1389888"/>
-            <a:ext cx="3063240" cy="548640"/>
+            <a:off x="4892040" y="2011680"/>
+            <a:ext cx="3611880" cy="457200"/>
           </a:xfrm>
           <a:prstGeom prst="rect">
             <a:avLst/>
@@ -5490,58 +5896,19 @@
           <a:ln/>
         </p:spPr>
         <p:txBody>
-          <a:bodyPr wrap="square" rtlCol="0" anchor="ctr"/>
+          <a:bodyPr wrap="square" rtlCol="0" anchor="t"/>
           <a:lstStyle/>
           <a:p>
             <a:pPr rtl="1" algn="r" indent="0" marL="0">
               <a:buNone/>
             </a:pPr>
             <a:r>
-              <a:rPr lang="fa-IR" sz="1700" b="1" dirty="0">
-                <a:solidFill>
-                  <a:schemeClr val="tx2"/>
-                </a:solidFill>
-                <a:latin typeface="B Zar" pitchFamily="34" charset="0"/>
-                <a:ea typeface="B Zar" pitchFamily="34" charset="-122"/>
-                <a:cs typeface="B Zar" pitchFamily="34" charset="-120"/>
-              </a:rPr>
-              <a:t>مدل‌های مردم‌محور (Populist)</a:t>
-            </a:r>
-            <a:endParaRPr lang="fa-IR" sz="1700" dirty="0"/>
-          </a:p>
-        </p:txBody>
-      </p:sp>
-      <p:sp>
-        <p:nvSpPr>
-          <p:cNvPr id="8" name="GridBody0"/>
-          <p:cNvSpPr txBox="1"/>
-          <p:nvPr/>
-        </p:nvSpPr>
-        <p:spPr>
-          <a:xfrm>
-            <a:off x="4892040" y="2011680"/>
-            <a:ext cx="3611880" cy="457200"/>
-          </a:xfrm>
-          <a:prstGeom prst="rect">
-            <a:avLst/>
-          </a:prstGeom>
-          <a:noFill/>
-          <a:ln/>
-        </p:spPr>
-        <p:txBody>
-          <a:bodyPr wrap="square" rtlCol="0" anchor="t"/>
-          <a:lstStyle/>
-          <a:p>
-            <a:pPr rtl="1" algn="r" indent="0" marL="0">
-              <a:buNone/>
-            </a:pPr>
-            <a:r>
               <a:rPr lang="fa-IR" sz="1600" dirty="0">
                 <a:solidFill>
                   <a:schemeClr val="tx1"/>
                 </a:solidFill>
-                <a:latin typeface="B Nazanin" pitchFamily="34" charset="0"/>
-                <a:ea typeface="B Nazanin" pitchFamily="34" charset="-122"/>
+                <a:latin typeface="Calibri" pitchFamily="34" charset="0"/>
+                <a:ea typeface="Calibri" pitchFamily="34" charset="-122"/>
                 <a:cs typeface="B Nazanin" pitchFamily="34" charset="-120"/>
               </a:rPr>
               <a:t>تأکید بر مشارکت مردمی</a:t>
@@ -5586,14 +5953,14 @@
       </p:sp>
       <p:sp>
         <p:nvSpPr>
-          <p:cNvPr id="10" name="Badge1"/>
+          <p:cNvPr id="10" name="IconBg_FaLock"/>
           <p:cNvSpPr/>
           <p:nvPr/>
         </p:nvSpPr>
         <p:spPr>
           <a:xfrm>
-            <a:off x="3794760" y="1435608"/>
-            <a:ext cx="457200" cy="457200"/>
+            <a:off x="3794760" y="1417320"/>
+            <a:ext cx="475488" cy="475488"/>
           </a:xfrm>
           <a:prstGeom prst="ellipse">
             <a:avLst/>
@@ -5609,16 +5976,40 @@
           </a:ln>
         </p:spPr>
       </p:sp>
-      <p:sp>
-        <p:nvSpPr>
-          <p:cNvPr id="11" name="BadgeNum1"/>
+      <p:pic>
+        <p:nvPicPr>
+          <p:cNvPr id="11" name="Icon_FaLock" descr="FaLock">    </p:cNvPr>
+          <p:cNvPicPr>
+            <a:picLocks noChangeAspect="1"/>
+          </p:cNvPicPr>
+          <p:nvPr/>
+        </p:nvPicPr>
+        <p:blipFill>
+          <a:blip r:embed="rId2"/>
+          <a:stretch>
+            <a:fillRect/>
+          </a:stretch>
+        </p:blipFill>
+        <p:spPr>
+          <a:xfrm>
+            <a:off x="3913632" y="1536192"/>
+            <a:ext cx="237744" cy="237744"/>
+          </a:xfrm>
+          <a:prstGeom prst="rect">
+            <a:avLst/>
+          </a:prstGeom>
+        </p:spPr>
+      </p:pic>
+      <p:sp>
+        <p:nvSpPr>
+          <p:cNvPr id="12" name="GridHead1"/>
           <p:cNvSpPr txBox="1"/>
           <p:nvPr/>
         </p:nvSpPr>
         <p:spPr>
           <a:xfrm>
-            <a:off x="3794760" y="1435608"/>
-            <a:ext cx="457200" cy="457200"/>
+            <a:off x="640080" y="1389888"/>
+            <a:ext cx="3063240" cy="548640"/>
           </a:xfrm>
           <a:prstGeom prst="rect">
             <a:avLst/>
@@ -5627,37 +6018,37 @@
           <a:ln/>
         </p:spPr>
         <p:txBody>
-          <a:bodyPr wrap="square" lIns="0" tIns="0" rIns="0" bIns="0" rtlCol="0" anchor="ctr"/>
-          <a:lstStyle/>
-          <a:p>
-            <a:pPr rtl="1" algn="ctr" indent="0" marL="0">
+          <a:bodyPr wrap="square" rtlCol="0" anchor="ctr"/>
+          <a:lstStyle/>
+          <a:p>
+            <a:pPr rtl="1" algn="r" indent="0" marL="0">
               <a:buNone/>
             </a:pPr>
             <a:r>
-              <a:rPr lang="fa-IR" sz="1800" b="1" dirty="0">
-                <a:solidFill>
-                  <a:schemeClr val="bg1"/>
-                </a:solidFill>
-                <a:latin typeface="B Zar" pitchFamily="34" charset="0"/>
-                <a:ea typeface="B Zar" pitchFamily="34" charset="-122"/>
+              <a:rPr lang="fa-IR" sz="1700" b="1" dirty="0">
+                <a:solidFill>
+                  <a:schemeClr val="tx2"/>
+                </a:solidFill>
+                <a:latin typeface="Calibri" pitchFamily="34" charset="0"/>
+                <a:ea typeface="Calibri" pitchFamily="34" charset="-122"/>
                 <a:cs typeface="B Zar" pitchFamily="34" charset="-120"/>
               </a:rPr>
-              <a:t>۲</a:t>
-            </a:r>
-            <a:endParaRPr lang="fa-IR" sz="1800" dirty="0"/>
-          </a:p>
-        </p:txBody>
-      </p:sp>
-      <p:sp>
-        <p:nvSpPr>
-          <p:cNvPr id="12" name="GridHead1"/>
+              <a:t>مدل‌های بوروکراتیک مطلق</a:t>
+            </a:r>
+            <a:endParaRPr lang="fa-IR" sz="1700" dirty="0"/>
+          </a:p>
+        </p:txBody>
+      </p:sp>
+      <p:sp>
+        <p:nvSpPr>
+          <p:cNvPr id="13" name="GridBody1"/>
           <p:cNvSpPr txBox="1"/>
           <p:nvPr/>
         </p:nvSpPr>
         <p:spPr>
           <a:xfrm>
-            <a:off x="640080" y="1389888"/>
-            <a:ext cx="3063240" cy="548640"/>
+            <a:off x="640080" y="2011680"/>
+            <a:ext cx="3611880" cy="457200"/>
           </a:xfrm>
           <a:prstGeom prst="rect">
             <a:avLst/>
@@ -5666,58 +6057,19 @@
           <a:ln/>
         </p:spPr>
         <p:txBody>
-          <a:bodyPr wrap="square" rtlCol="0" anchor="ctr"/>
+          <a:bodyPr wrap="square" rtlCol="0" anchor="t"/>
           <a:lstStyle/>
           <a:p>
             <a:pPr rtl="1" algn="r" indent="0" marL="0">
               <a:buNone/>
             </a:pPr>
             <a:r>
-              <a:rPr lang="fa-IR" sz="1700" b="1" dirty="0">
-                <a:solidFill>
-                  <a:schemeClr val="tx2"/>
-                </a:solidFill>
-                <a:latin typeface="B Zar" pitchFamily="34" charset="0"/>
-                <a:ea typeface="B Zar" pitchFamily="34" charset="-122"/>
-                <a:cs typeface="B Zar" pitchFamily="34" charset="-120"/>
-              </a:rPr>
-              <a:t>مدل‌های بوروکراتیک مطلق</a:t>
-            </a:r>
-            <a:endParaRPr lang="fa-IR" sz="1700" dirty="0"/>
-          </a:p>
-        </p:txBody>
-      </p:sp>
-      <p:sp>
-        <p:nvSpPr>
-          <p:cNvPr id="13" name="GridBody1"/>
-          <p:cNvSpPr txBox="1"/>
-          <p:nvPr/>
-        </p:nvSpPr>
-        <p:spPr>
-          <a:xfrm>
-            <a:off x="640080" y="2011680"/>
-            <a:ext cx="3611880" cy="457200"/>
-          </a:xfrm>
-          <a:prstGeom prst="rect">
-            <a:avLst/>
-          </a:prstGeom>
-          <a:noFill/>
-          <a:ln/>
-        </p:spPr>
-        <p:txBody>
-          <a:bodyPr wrap="square" rtlCol="0" anchor="t"/>
-          <a:lstStyle/>
-          <a:p>
-            <a:pPr rtl="1" algn="r" indent="0" marL="0">
-              <a:buNone/>
-            </a:pPr>
-            <a:r>
               <a:rPr lang="fa-IR" sz="1600" dirty="0">
                 <a:solidFill>
                   <a:schemeClr val="tx1"/>
                 </a:solidFill>
-                <a:latin typeface="B Nazanin" pitchFamily="34" charset="0"/>
-                <a:ea typeface="B Nazanin" pitchFamily="34" charset="-122"/>
+                <a:latin typeface="Calibri" pitchFamily="34" charset="0"/>
+                <a:ea typeface="Calibri" pitchFamily="34" charset="-122"/>
                 <a:cs typeface="B Nazanin" pitchFamily="34" charset="-120"/>
               </a:rPr>
               <a:t>کنترل شدید و تمرکز</a:t>
@@ -5762,14 +6114,14 @@
       </p:sp>
       <p:sp>
         <p:nvSpPr>
-          <p:cNvPr id="15" name="Badge2"/>
+          <p:cNvPr id="15" name="IconBg_FaHandshake"/>
           <p:cNvSpPr/>
           <p:nvPr/>
         </p:nvSpPr>
         <p:spPr>
           <a:xfrm>
-            <a:off x="8046720" y="2852928"/>
-            <a:ext cx="457200" cy="457200"/>
+            <a:off x="8046720" y="2834640"/>
+            <a:ext cx="475488" cy="475488"/>
           </a:xfrm>
           <a:prstGeom prst="ellipse">
             <a:avLst/>
@@ -5785,16 +6137,40 @@
           </a:ln>
         </p:spPr>
       </p:sp>
-      <p:sp>
-        <p:nvSpPr>
-          <p:cNvPr id="16" name="BadgeNum2"/>
+      <p:pic>
+        <p:nvPicPr>
+          <p:cNvPr id="16" name="Icon_FaHandshake" descr="FaHandshake">    </p:cNvPr>
+          <p:cNvPicPr>
+            <a:picLocks noChangeAspect="1"/>
+          </p:cNvPicPr>
+          <p:nvPr/>
+        </p:nvPicPr>
+        <p:blipFill>
+          <a:blip r:embed="rId3"/>
+          <a:stretch>
+            <a:fillRect/>
+          </a:stretch>
+        </p:blipFill>
+        <p:spPr>
+          <a:xfrm>
+            <a:off x="8165592" y="2953512"/>
+            <a:ext cx="237744" cy="237744"/>
+          </a:xfrm>
+          <a:prstGeom prst="rect">
+            <a:avLst/>
+          </a:prstGeom>
+        </p:spPr>
+      </p:pic>
+      <p:sp>
+        <p:nvSpPr>
+          <p:cNvPr id="17" name="GridHead2"/>
           <p:cNvSpPr txBox="1"/>
           <p:nvPr/>
         </p:nvSpPr>
         <p:spPr>
           <a:xfrm>
-            <a:off x="8046720" y="2852928"/>
-            <a:ext cx="457200" cy="457200"/>
+            <a:off x="4892040" y="2807208"/>
+            <a:ext cx="3063240" cy="548640"/>
           </a:xfrm>
           <a:prstGeom prst="rect">
             <a:avLst/>
@@ -5803,37 +6179,37 @@
           <a:ln/>
         </p:spPr>
         <p:txBody>
-          <a:bodyPr wrap="square" lIns="0" tIns="0" rIns="0" bIns="0" rtlCol="0" anchor="ctr"/>
-          <a:lstStyle/>
-          <a:p>
-            <a:pPr rtl="1" algn="ctr" indent="0" marL="0">
+          <a:bodyPr wrap="square" rtlCol="0" anchor="ctr"/>
+          <a:lstStyle/>
+          <a:p>
+            <a:pPr rtl="1" algn="r" indent="0" marL="0">
               <a:buNone/>
             </a:pPr>
             <a:r>
-              <a:rPr lang="fa-IR" sz="1800" b="1" dirty="0">
-                <a:solidFill>
-                  <a:schemeClr val="bg1"/>
-                </a:solidFill>
-                <a:latin typeface="B Zar" pitchFamily="34" charset="0"/>
-                <a:ea typeface="B Zar" pitchFamily="34" charset="-122"/>
+              <a:rPr lang="fa-IR" sz="1700" b="1" dirty="0">
+                <a:solidFill>
+                  <a:schemeClr val="tx2"/>
+                </a:solidFill>
+                <a:latin typeface="Calibri" pitchFamily="34" charset="0"/>
+                <a:ea typeface="Calibri" pitchFamily="34" charset="-122"/>
                 <a:cs typeface="B Zar" pitchFamily="34" charset="-120"/>
               </a:rPr>
-              <a:t>۳</a:t>
-            </a:r>
-            <a:endParaRPr lang="fa-IR" sz="1800" dirty="0"/>
-          </a:p>
-        </p:txBody>
-      </p:sp>
-      <p:sp>
-        <p:nvSpPr>
-          <p:cNvPr id="17" name="GridHead2"/>
+              <a:t>مدل‌های ائتلافی</a:t>
+            </a:r>
+            <a:endParaRPr lang="fa-IR" sz="1700" dirty="0"/>
+          </a:p>
+        </p:txBody>
+      </p:sp>
+      <p:sp>
+        <p:nvSpPr>
+          <p:cNvPr id="18" name="GridBody2"/>
           <p:cNvSpPr txBox="1"/>
           <p:nvPr/>
         </p:nvSpPr>
         <p:spPr>
           <a:xfrm>
-            <a:off x="4892040" y="2807208"/>
-            <a:ext cx="3063240" cy="548640"/>
+            <a:off x="4892040" y="3429000"/>
+            <a:ext cx="3611880" cy="457200"/>
           </a:xfrm>
           <a:prstGeom prst="rect">
             <a:avLst/>
@@ -5842,58 +6218,19 @@
           <a:ln/>
         </p:spPr>
         <p:txBody>
-          <a:bodyPr wrap="square" rtlCol="0" anchor="ctr"/>
+          <a:bodyPr wrap="square" rtlCol="0" anchor="t"/>
           <a:lstStyle/>
           <a:p>
             <a:pPr rtl="1" algn="r" indent="0" marL="0">
               <a:buNone/>
             </a:pPr>
             <a:r>
-              <a:rPr lang="fa-IR" sz="1700" b="1" dirty="0">
-                <a:solidFill>
-                  <a:schemeClr val="tx2"/>
-                </a:solidFill>
-                <a:latin typeface="B Zar" pitchFamily="34" charset="0"/>
-                <a:ea typeface="B Zar" pitchFamily="34" charset="-122"/>
-                <a:cs typeface="B Zar" pitchFamily="34" charset="-120"/>
-              </a:rPr>
-              <a:t>مدل‌های ائتلافی</a:t>
-            </a:r>
-            <a:endParaRPr lang="fa-IR" sz="1700" dirty="0"/>
-          </a:p>
-        </p:txBody>
-      </p:sp>
-      <p:sp>
-        <p:nvSpPr>
-          <p:cNvPr id="18" name="GridBody2"/>
-          <p:cNvSpPr txBox="1"/>
-          <p:nvPr/>
-        </p:nvSpPr>
-        <p:spPr>
-          <a:xfrm>
-            <a:off x="4892040" y="3429000"/>
-            <a:ext cx="3611880" cy="457200"/>
-          </a:xfrm>
-          <a:prstGeom prst="rect">
-            <a:avLst/>
-          </a:prstGeom>
-          <a:noFill/>
-          <a:ln/>
-        </p:spPr>
-        <p:txBody>
-          <a:bodyPr wrap="square" rtlCol="0" anchor="t"/>
-          <a:lstStyle/>
-          <a:p>
-            <a:pPr rtl="1" algn="r" indent="0" marL="0">
-              <a:buNone/>
-            </a:pPr>
-            <a:r>
               <a:rPr lang="fa-IR" sz="1600" dirty="0">
                 <a:solidFill>
                   <a:schemeClr val="tx1"/>
                 </a:solidFill>
-                <a:latin typeface="B Nazanin" pitchFamily="34" charset="0"/>
-                <a:ea typeface="B Nazanin" pitchFamily="34" charset="-122"/>
+                <a:latin typeface="Calibri" pitchFamily="34" charset="0"/>
+                <a:ea typeface="Calibri" pitchFamily="34" charset="-122"/>
                 <a:cs typeface="B Nazanin" pitchFamily="34" charset="-120"/>
               </a:rPr>
               <a:t>ترکیب نیروهای سیاسی مختلف</a:t>
@@ -5938,14 +6275,14 @@
       </p:sp>
       <p:sp>
         <p:nvSpPr>
-          <p:cNvPr id="20" name="Badge3"/>
+          <p:cNvPr id="20" name="IconBg_FaBullhorn"/>
           <p:cNvSpPr/>
           <p:nvPr/>
         </p:nvSpPr>
         <p:spPr>
           <a:xfrm>
-            <a:off x="3794760" y="2852928"/>
-            <a:ext cx="457200" cy="457200"/>
+            <a:off x="3794760" y="2834640"/>
+            <a:ext cx="475488" cy="475488"/>
           </a:xfrm>
           <a:prstGeom prst="ellipse">
             <a:avLst/>
@@ -5961,16 +6298,40 @@
           </a:ln>
         </p:spPr>
       </p:sp>
-      <p:sp>
-        <p:nvSpPr>
-          <p:cNvPr id="21" name="BadgeNum3"/>
+      <p:pic>
+        <p:nvPicPr>
+          <p:cNvPr id="21" name="Icon_FaBullhorn" descr="FaBullhorn">    </p:cNvPr>
+          <p:cNvPicPr>
+            <a:picLocks noChangeAspect="1"/>
+          </p:cNvPicPr>
+          <p:nvPr/>
+        </p:nvPicPr>
+        <p:blipFill>
+          <a:blip r:embed="rId4"/>
+          <a:stretch>
+            <a:fillRect/>
+          </a:stretch>
+        </p:blipFill>
+        <p:spPr>
+          <a:xfrm>
+            <a:off x="3913632" y="2953512"/>
+            <a:ext cx="237744" cy="237744"/>
+          </a:xfrm>
+          <a:prstGeom prst="rect">
+            <a:avLst/>
+          </a:prstGeom>
+        </p:spPr>
+      </p:pic>
+      <p:sp>
+        <p:nvSpPr>
+          <p:cNvPr id="22" name="GridHead3"/>
           <p:cNvSpPr txBox="1"/>
           <p:nvPr/>
         </p:nvSpPr>
         <p:spPr>
           <a:xfrm>
-            <a:off x="3794760" y="2852928"/>
-            <a:ext cx="457200" cy="457200"/>
+            <a:off x="640080" y="2807208"/>
+            <a:ext cx="3063240" cy="548640"/>
           </a:xfrm>
           <a:prstGeom prst="rect">
             <a:avLst/>
@@ -5979,37 +6340,37 @@
           <a:ln/>
         </p:spPr>
         <p:txBody>
-          <a:bodyPr wrap="square" lIns="0" tIns="0" rIns="0" bIns="0" rtlCol="0" anchor="ctr"/>
-          <a:lstStyle/>
-          <a:p>
-            <a:pPr rtl="1" algn="ctr" indent="0" marL="0">
+          <a:bodyPr wrap="square" rtlCol="0" anchor="ctr"/>
+          <a:lstStyle/>
+          <a:p>
+            <a:pPr rtl="1" algn="r" indent="0" marL="0">
               <a:buNone/>
             </a:pPr>
             <a:r>
-              <a:rPr lang="fa-IR" sz="1800" b="1" dirty="0">
-                <a:solidFill>
-                  <a:schemeClr val="bg1"/>
-                </a:solidFill>
-                <a:latin typeface="B Zar" pitchFamily="34" charset="0"/>
-                <a:ea typeface="B Zar" pitchFamily="34" charset="-122"/>
+              <a:rPr lang="fa-IR" sz="1700" b="1" dirty="0">
+                <a:solidFill>
+                  <a:schemeClr val="tx2"/>
+                </a:solidFill>
+                <a:latin typeface="Calibri" pitchFamily="34" charset="0"/>
+                <a:ea typeface="Calibri" pitchFamily="34" charset="-122"/>
                 <a:cs typeface="B Zar" pitchFamily="34" charset="-120"/>
               </a:rPr>
-              <a:t>۴</a:t>
-            </a:r>
-            <a:endParaRPr lang="fa-IR" sz="1800" dirty="0"/>
-          </a:p>
-        </p:txBody>
-      </p:sp>
-      <p:sp>
-        <p:nvSpPr>
-          <p:cNvPr id="22" name="GridHead3"/>
+              <a:t>مدل‌های جنبشی</a:t>
+            </a:r>
+            <a:endParaRPr lang="fa-IR" sz="1700" dirty="0"/>
+          </a:p>
+        </p:txBody>
+      </p:sp>
+      <p:sp>
+        <p:nvSpPr>
+          <p:cNvPr id="23" name="GridBody3"/>
           <p:cNvSpPr txBox="1"/>
           <p:nvPr/>
         </p:nvSpPr>
         <p:spPr>
           <a:xfrm>
-            <a:off x="640080" y="2807208"/>
-            <a:ext cx="3063240" cy="548640"/>
+            <a:off x="640080" y="3429000"/>
+            <a:ext cx="3611880" cy="457200"/>
           </a:xfrm>
           <a:prstGeom prst="rect">
             <a:avLst/>
@@ -6018,58 +6379,19 @@
           <a:ln/>
         </p:spPr>
         <p:txBody>
-          <a:bodyPr wrap="square" rtlCol="0" anchor="ctr"/>
+          <a:bodyPr wrap="square" rtlCol="0" anchor="t"/>
           <a:lstStyle/>
           <a:p>
             <a:pPr rtl="1" algn="r" indent="0" marL="0">
               <a:buNone/>
             </a:pPr>
             <a:r>
-              <a:rPr lang="fa-IR" sz="1700" b="1" dirty="0">
-                <a:solidFill>
-                  <a:schemeClr val="tx2"/>
-                </a:solidFill>
-                <a:latin typeface="B Zar" pitchFamily="34" charset="0"/>
-                <a:ea typeface="B Zar" pitchFamily="34" charset="-122"/>
-                <a:cs typeface="B Zar" pitchFamily="34" charset="-120"/>
-              </a:rPr>
-              <a:t>مدل‌های جنبشی</a:t>
-            </a:r>
-            <a:endParaRPr lang="fa-IR" sz="1700" dirty="0"/>
-          </a:p>
-        </p:txBody>
-      </p:sp>
-      <p:sp>
-        <p:nvSpPr>
-          <p:cNvPr id="23" name="GridBody3"/>
-          <p:cNvSpPr txBox="1"/>
-          <p:nvPr/>
-        </p:nvSpPr>
-        <p:spPr>
-          <a:xfrm>
-            <a:off x="640080" y="3429000"/>
-            <a:ext cx="3611880" cy="457200"/>
-          </a:xfrm>
-          <a:prstGeom prst="rect">
-            <a:avLst/>
-          </a:prstGeom>
-          <a:noFill/>
-          <a:ln/>
-        </p:spPr>
-        <p:txBody>
-          <a:bodyPr wrap="square" rtlCol="0" anchor="t"/>
-          <a:lstStyle/>
-          <a:p>
-            <a:pPr rtl="1" algn="r" indent="0" marL="0">
-              <a:buNone/>
-            </a:pPr>
-            <a:r>
               <a:rPr lang="fa-IR" sz="1600" dirty="0">
                 <a:solidFill>
                   <a:schemeClr val="tx1"/>
                 </a:solidFill>
-                <a:latin typeface="B Nazanin" pitchFamily="34" charset="0"/>
-                <a:ea typeface="B Nazanin" pitchFamily="34" charset="-122"/>
+                <a:latin typeface="Calibri" pitchFamily="34" charset="0"/>
+                <a:ea typeface="Calibri" pitchFamily="34" charset="-122"/>
                 <a:cs typeface="B Nazanin" pitchFamily="34" charset="-120"/>
               </a:rPr>
               <a:t>مبتنی بر ایدئولوژی و تحرک سیاسی</a:t>
@@ -6148,7 +6470,7 @@
         <p:spPr>
           <a:xfrm>
             <a:off x="7406640" y="4206240"/>
-            <a:ext cx="1097280" cy="365760"/>
+            <a:ext cx="822960" cy="365760"/>
           </a:xfrm>
           <a:prstGeom prst="rect">
             <a:avLst/>
@@ -6168,8 +6490,8 @@
                 <a:solidFill>
                   <a:schemeClr val="bg1"/>
                 </a:solidFill>
-                <a:latin typeface="B Zar" pitchFamily="34" charset="0"/>
-                <a:ea typeface="B Zar" pitchFamily="34" charset="-122"/>
+                <a:latin typeface="Calibri" pitchFamily="34" charset="0"/>
+                <a:ea typeface="Calibri" pitchFamily="34" charset="-122"/>
                 <a:cs typeface="B Zar" pitchFamily="34" charset="-120"/>
               </a:rPr>
               <a:t>نکته</a:t>
@@ -6178,9 +6500,33 @@
           </a:p>
         </p:txBody>
       </p:sp>
-      <p:sp>
-        <p:nvSpPr>
-          <p:cNvPr id="27" name="Note"/>
+      <p:pic>
+        <p:nvPicPr>
+          <p:cNvPr id="27" name="NoteIcon" descr="lightbulb">    </p:cNvPr>
+          <p:cNvPicPr>
+            <a:picLocks noChangeAspect="1"/>
+          </p:cNvPicPr>
+          <p:nvPr/>
+        </p:nvPicPr>
+        <p:blipFill>
+          <a:blip r:embed="rId5"/>
+          <a:stretch>
+            <a:fillRect/>
+          </a:stretch>
+        </p:blipFill>
+        <p:spPr>
+          <a:xfrm>
+            <a:off x="8229600" y="4261104"/>
+            <a:ext cx="256032" cy="256032"/>
+          </a:xfrm>
+          <a:prstGeom prst="rect">
+            <a:avLst/>
+          </a:prstGeom>
+        </p:spPr>
+      </p:pic>
+      <p:sp>
+        <p:nvSpPr>
+          <p:cNvPr id="28" name="Note"/>
           <p:cNvSpPr txBox="1"/>
           <p:nvPr/>
         </p:nvSpPr>
@@ -6207,8 +6553,8 @@
                 <a:solidFill>
                   <a:schemeClr val="tx1"/>
                 </a:solidFill>
-                <a:latin typeface="B Nazanin" pitchFamily="34" charset="0"/>
-                <a:ea typeface="B Nazanin" pitchFamily="34" charset="-122"/>
+                <a:latin typeface="Calibri" pitchFamily="34" charset="0"/>
+                <a:ea typeface="Calibri" pitchFamily="34" charset="-122"/>
                 <a:cs typeface="B Nazanin" pitchFamily="34" charset="-120"/>
               </a:rPr>
               <a:t>این مدل‌ها توسط «ادوارد شیلز» و دیگران بسط یافتند.</a:t>
@@ -6249,8 +6595,9 @@
                 <a:solidFill>
                   <a:srgbClr val="6B7A86"/>
                 </a:solidFill>
-                <a:latin typeface="B Nazanin"/>
-                <a:ea typeface="B Nazanin"/>
+                <a:latin typeface="Calibri"/>
+                <a:cs typeface="B Nazanin"/>
+                <a:ea typeface="Calibri"/>
                 <a:cs typeface="B Nazanin"/>
               </a:defRPr>
             </a:lvl1pPr>
@@ -6322,8 +6669,8 @@
                 <a:solidFill>
                   <a:schemeClr val="accent2"/>
                 </a:solidFill>
-                <a:latin typeface="B Nazanin" pitchFamily="34" charset="0"/>
-                <a:ea typeface="B Nazanin" pitchFamily="34" charset="-122"/>
+                <a:latin typeface="Calibri" pitchFamily="34" charset="0"/>
+                <a:ea typeface="Calibri" pitchFamily="34" charset="-122"/>
                 <a:cs typeface="B Nazanin" pitchFamily="34" charset="-120"/>
               </a:rPr>
               <a:t>بخش سوم: دولت و نظام‌های اداری</a:t>
@@ -6363,8 +6710,8 @@
                 <a:solidFill>
                   <a:schemeClr val="accent1"/>
                 </a:solidFill>
-                <a:latin typeface="B Zar" pitchFamily="34" charset="0"/>
-                <a:ea typeface="B Zar" pitchFamily="34" charset="-122"/>
+                <a:latin typeface="Calibri" pitchFamily="34" charset="0"/>
+                <a:ea typeface="Calibri" pitchFamily="34" charset="-122"/>
                 <a:cs typeface="B Zar" pitchFamily="34" charset="-120"/>
               </a:rPr>
               <a:t>انواع نظام‌های اداری بر اساس «ریگز»</a:t>
@@ -6409,14 +6756,63 @@
       </p:sp>
       <p:sp>
         <p:nvSpPr>
-          <p:cNvPr id="5" name="CardHead0"/>
+          <p:cNvPr id="5" name="IconBg_FaDiagramProject"/>
+          <p:cNvSpPr/>
+          <p:nvPr/>
+        </p:nvSpPr>
+        <p:spPr>
+          <a:xfrm>
+            <a:off x="8138160" y="1344168"/>
+            <a:ext cx="420624" cy="420624"/>
+          </a:xfrm>
+          <a:prstGeom prst="ellipse">
+            <a:avLst/>
+          </a:prstGeom>
+          <a:solidFill>
+            <a:schemeClr val="accent1"/>
+          </a:solidFill>
+          <a:ln w="12700">
+            <a:solidFill>
+              <a:schemeClr val="accent1"/>
+            </a:solidFill>
+            <a:prstDash val="solid"/>
+          </a:ln>
+        </p:spPr>
+      </p:sp>
+      <p:pic>
+        <p:nvPicPr>
+          <p:cNvPr id="6" name="Icon_FaDiagramProject" descr="FaDiagramProject">    </p:cNvPr>
+          <p:cNvPicPr>
+            <a:picLocks noChangeAspect="1"/>
+          </p:cNvPicPr>
+          <p:nvPr/>
+        </p:nvPicPr>
+        <p:blipFill>
+          <a:blip r:embed="rId1"/>
+          <a:stretch>
+            <a:fillRect/>
+          </a:stretch>
+        </p:blipFill>
+        <p:spPr>
+          <a:xfrm>
+            <a:off x="8243316" y="1449324"/>
+            <a:ext cx="210312" cy="210312"/>
+          </a:xfrm>
+          <a:prstGeom prst="rect">
+            <a:avLst/>
+          </a:prstGeom>
+        </p:spPr>
+      </p:pic>
+      <p:sp>
+        <p:nvSpPr>
+          <p:cNvPr id="7" name="CardHead0"/>
           <p:cNvSpPr txBox="1"/>
           <p:nvPr/>
         </p:nvSpPr>
         <p:spPr>
           <a:xfrm>
             <a:off x="4846320" y="1325880"/>
-            <a:ext cx="3703320" cy="640080"/>
+            <a:ext cx="3200400" cy="640080"/>
           </a:xfrm>
           <a:prstGeom prst="rect">
             <a:avLst/>
@@ -6436,8 +6832,8 @@
                 <a:solidFill>
                   <a:schemeClr val="tx2"/>
                 </a:solidFill>
-                <a:latin typeface="B Zar" pitchFamily="34" charset="0"/>
-                <a:ea typeface="B Zar" pitchFamily="34" charset="-122"/>
+                <a:latin typeface="Calibri" pitchFamily="34" charset="0"/>
+                <a:ea typeface="Calibri" pitchFamily="34" charset="-122"/>
                 <a:cs typeface="B Zar" pitchFamily="34" charset="-120"/>
               </a:rPr>
               <a:t>معیار طبقه‌بندی</a:t>
@@ -6448,7 +6844,7 @@
       </p:sp>
       <p:sp>
         <p:nvSpPr>
-          <p:cNvPr id="6" name="CardBody0"/>
+          <p:cNvPr id="8" name="CardBody0"/>
           <p:cNvSpPr txBox="1"/>
           <p:nvPr/>
         </p:nvSpPr>
@@ -6479,8 +6875,8 @@
                 <a:solidFill>
                   <a:schemeClr val="tx1"/>
                 </a:solidFill>
-                <a:latin typeface="B Nazanin" pitchFamily="34" charset="0"/>
-                <a:ea typeface="B Nazanin" pitchFamily="34" charset="-122"/>
+                <a:latin typeface="Calibri" pitchFamily="34" charset="0"/>
+                <a:ea typeface="Calibri" pitchFamily="34" charset="-122"/>
                 <a:cs typeface="B Nazanin" pitchFamily="34" charset="-120"/>
               </a:rPr>
               <a:t>رابطه سیستم اداری با سیستم سیاسی، اقتصادی و اجتماعی</a:t>
@@ -6491,7 +6887,7 @@
       </p:sp>
       <p:sp>
         <p:nvSpPr>
-          <p:cNvPr id="7" name="Card1"/>
+          <p:cNvPr id="9" name="Card1"/>
           <p:cNvSpPr/>
           <p:nvPr/>
         </p:nvSpPr>
@@ -6525,14 +6921,63 @@
       </p:sp>
       <p:sp>
         <p:nvSpPr>
-          <p:cNvPr id="8" name="CardHead1"/>
+          <p:cNvPr id="10" name="IconBg_FaListCheck"/>
+          <p:cNvSpPr/>
+          <p:nvPr/>
+        </p:nvSpPr>
+        <p:spPr>
+          <a:xfrm>
+            <a:off x="3886200" y="1344168"/>
+            <a:ext cx="420624" cy="420624"/>
+          </a:xfrm>
+          <a:prstGeom prst="ellipse">
+            <a:avLst/>
+          </a:prstGeom>
+          <a:solidFill>
+            <a:schemeClr val="accent2"/>
+          </a:solidFill>
+          <a:ln w="12700">
+            <a:solidFill>
+              <a:schemeClr val="accent2"/>
+            </a:solidFill>
+            <a:prstDash val="solid"/>
+          </a:ln>
+        </p:spPr>
+      </p:sp>
+      <p:pic>
+        <p:nvPicPr>
+          <p:cNvPr id="11" name="Icon_FaListCheck" descr="FaListCheck">    </p:cNvPr>
+          <p:cNvPicPr>
+            <a:picLocks noChangeAspect="1"/>
+          </p:cNvPicPr>
+          <p:nvPr/>
+        </p:nvPicPr>
+        <p:blipFill>
+          <a:blip r:embed="rId2"/>
+          <a:stretch>
+            <a:fillRect/>
+          </a:stretch>
+        </p:blipFill>
+        <p:spPr>
+          <a:xfrm>
+            <a:off x="3991356" y="1449324"/>
+            <a:ext cx="210312" cy="210312"/>
+          </a:xfrm>
+          <a:prstGeom prst="rect">
+            <a:avLst/>
+          </a:prstGeom>
+        </p:spPr>
+      </p:pic>
+      <p:sp>
+        <p:nvSpPr>
+          <p:cNvPr id="12" name="CardHead1"/>
           <p:cNvSpPr txBox="1"/>
           <p:nvPr/>
         </p:nvSpPr>
         <p:spPr>
           <a:xfrm>
             <a:off x="594360" y="1325880"/>
-            <a:ext cx="3703320" cy="640080"/>
+            <a:ext cx="3200400" cy="640080"/>
           </a:xfrm>
           <a:prstGeom prst="rect">
             <a:avLst/>
@@ -6552,8 +6997,8 @@
                 <a:solidFill>
                   <a:schemeClr val="tx2"/>
                 </a:solidFill>
-                <a:latin typeface="B Zar" pitchFamily="34" charset="0"/>
-                <a:ea typeface="B Zar" pitchFamily="34" charset="-122"/>
+                <a:latin typeface="Calibri" pitchFamily="34" charset="0"/>
+                <a:ea typeface="Calibri" pitchFamily="34" charset="-122"/>
                 <a:cs typeface="B Zar" pitchFamily="34" charset="-120"/>
               </a:rPr>
               <a:t>سه ویژگی اصلی</a:t>
@@ -6564,7 +7009,7 @@
       </p:sp>
       <p:sp>
         <p:nvSpPr>
-          <p:cNvPr id="9" name="CardBody1"/>
+          <p:cNvPr id="13" name="CardBody1"/>
           <p:cNvSpPr txBox="1"/>
           <p:nvPr/>
         </p:nvSpPr>
@@ -6595,8 +7040,8 @@
                 <a:solidFill>
                   <a:schemeClr val="tx1"/>
                 </a:solidFill>
-                <a:latin typeface="B Nazanin" pitchFamily="34" charset="0"/>
-                <a:ea typeface="B Nazanin" pitchFamily="34" charset="-122"/>
+                <a:latin typeface="Calibri" pitchFamily="34" charset="0"/>
+                <a:ea typeface="Calibri" pitchFamily="34" charset="-122"/>
                 <a:cs typeface="B Nazanin" pitchFamily="34" charset="-120"/>
               </a:rPr>
               <a:t>پاسخگویی به حاکم</a:t>
@@ -6616,8 +7061,8 @@
                 <a:solidFill>
                   <a:schemeClr val="tx1"/>
                 </a:solidFill>
-                <a:latin typeface="B Nazanin" pitchFamily="34" charset="0"/>
-                <a:ea typeface="B Nazanin" pitchFamily="34" charset="-122"/>
+                <a:latin typeface="Calibri" pitchFamily="34" charset="0"/>
+                <a:ea typeface="Calibri" pitchFamily="34" charset="-122"/>
                 <a:cs typeface="B Nazanin" pitchFamily="34" charset="-120"/>
               </a:rPr>
               <a:t>پاسخگویی به حزب</a:t>
@@ -6637,8 +7082,8 @@
                 <a:solidFill>
                   <a:schemeClr val="tx1"/>
                 </a:solidFill>
-                <a:latin typeface="B Nazanin" pitchFamily="34" charset="0"/>
-                <a:ea typeface="B Nazanin" pitchFamily="34" charset="-122"/>
+                <a:latin typeface="Calibri" pitchFamily="34" charset="0"/>
+                <a:ea typeface="Calibri" pitchFamily="34" charset="-122"/>
                 <a:cs typeface="B Nazanin" pitchFamily="34" charset="-120"/>
               </a:rPr>
               <a:t>پاسخگویی به ارتش</a:t>
@@ -6649,7 +7094,7 @@
       </p:sp>
       <p:sp>
         <p:nvSpPr>
-          <p:cNvPr id="10" name="NoteCard"/>
+          <p:cNvPr id="14" name="NoteCard"/>
           <p:cNvSpPr/>
           <p:nvPr/>
         </p:nvSpPr>
@@ -6683,7 +7128,7 @@
       </p:sp>
       <p:sp>
         <p:nvSpPr>
-          <p:cNvPr id="11" name="NoteBadge"/>
+          <p:cNvPr id="15" name="NoteBadge"/>
           <p:cNvSpPr/>
           <p:nvPr/>
         </p:nvSpPr>
@@ -6710,14 +7155,14 @@
       </p:sp>
       <p:sp>
         <p:nvSpPr>
-          <p:cNvPr id="12" name="NoteBadgeText"/>
+          <p:cNvPr id="16" name="NoteBadgeText"/>
           <p:cNvSpPr txBox="1"/>
           <p:nvPr/>
         </p:nvSpPr>
         <p:spPr>
           <a:xfrm>
             <a:off x="7406640" y="4206240"/>
-            <a:ext cx="1097280" cy="365760"/>
+            <a:ext cx="822960" cy="365760"/>
           </a:xfrm>
           <a:prstGeom prst="rect">
             <a:avLst/>
@@ -6737,8 +7182,8 @@
                 <a:solidFill>
                   <a:schemeClr val="bg1"/>
                 </a:solidFill>
-                <a:latin typeface="B Zar" pitchFamily="34" charset="0"/>
-                <a:ea typeface="B Zar" pitchFamily="34" charset="-122"/>
+                <a:latin typeface="Calibri" pitchFamily="34" charset="0"/>
+                <a:ea typeface="Calibri" pitchFamily="34" charset="-122"/>
                 <a:cs typeface="B Zar" pitchFamily="34" charset="-120"/>
               </a:rPr>
               <a:t>نکته</a:t>
@@ -6747,9 +7192,33 @@
           </a:p>
         </p:txBody>
       </p:sp>
-      <p:sp>
-        <p:nvSpPr>
-          <p:cNvPr id="13" name="Note"/>
+      <p:pic>
+        <p:nvPicPr>
+          <p:cNvPr id="17" name="NoteIcon" descr="lightbulb">    </p:cNvPr>
+          <p:cNvPicPr>
+            <a:picLocks noChangeAspect="1"/>
+          </p:cNvPicPr>
+          <p:nvPr/>
+        </p:nvPicPr>
+        <p:blipFill>
+          <a:blip r:embed="rId3"/>
+          <a:stretch>
+            <a:fillRect/>
+          </a:stretch>
+        </p:blipFill>
+        <p:spPr>
+          <a:xfrm>
+            <a:off x="8229600" y="4261104"/>
+            <a:ext cx="256032" cy="256032"/>
+          </a:xfrm>
+          <a:prstGeom prst="rect">
+            <a:avLst/>
+          </a:prstGeom>
+        </p:spPr>
+      </p:pic>
+      <p:sp>
+        <p:nvSpPr>
+          <p:cNvPr id="18" name="Note"/>
           <p:cNvSpPr txBox="1"/>
           <p:nvPr/>
         </p:nvSpPr>
@@ -6776,8 +7245,8 @@
                 <a:solidFill>
                   <a:schemeClr val="tx1"/>
                 </a:solidFill>
-                <a:latin typeface="B Nazanin" pitchFamily="34" charset="0"/>
-                <a:ea typeface="B Nazanin" pitchFamily="34" charset="-122"/>
+                <a:latin typeface="Calibri" pitchFamily="34" charset="0"/>
+                <a:ea typeface="Calibri" pitchFamily="34" charset="-122"/>
                 <a:cs typeface="B Nazanin" pitchFamily="34" charset="-120"/>
               </a:rPr>
               <a:t>پاسخگویی به «حاکم» ← بوروکراسی سیاسی و وابسته. پاسخگویی به «قانون» ← بوروکراسی حرفه‌ای‌تر و مستقل‌تر.</a:t>
@@ -6818,8 +7287,9 @@
                 <a:solidFill>
                   <a:srgbClr val="6B7A86"/>
                 </a:solidFill>
-                <a:latin typeface="B Nazanin"/>
-                <a:ea typeface="B Nazanin"/>
+                <a:latin typeface="Calibri"/>
+                <a:cs typeface="B Nazanin"/>
+                <a:ea typeface="Calibri"/>
                 <a:cs typeface="B Nazanin"/>
               </a:defRPr>
             </a:lvl1pPr>
@@ -6923,8 +7393,8 @@
                 <a:solidFill>
                   <a:schemeClr val="bg1"/>
                 </a:solidFill>
-                <a:latin typeface="B Zar" pitchFamily="34" charset="0"/>
-                <a:ea typeface="B Zar" pitchFamily="34" charset="-122"/>
+                <a:latin typeface="Calibri" pitchFamily="34" charset="0"/>
+                <a:ea typeface="Calibri" pitchFamily="34" charset="-122"/>
                 <a:cs typeface="B Zar" pitchFamily="34" charset="-120"/>
               </a:rPr>
               <a:t>۴</a:t>
@@ -6933,16 +7403,40 @@
           </a:p>
         </p:txBody>
       </p:sp>
-      <p:sp>
-        <p:nvSpPr>
-          <p:cNvPr id="4" name="Title"/>
+      <p:pic>
+        <p:nvPicPr>
+          <p:cNvPr id="4" name="DividerArt" descr="bulb illustration">    </p:cNvPr>
+          <p:cNvPicPr>
+            <a:picLocks noChangeAspect="1"/>
+          </p:cNvPicPr>
+          <p:nvPr/>
+        </p:nvPicPr>
+        <p:blipFill>
+          <a:blip r:embed="rId1"/>
+          <a:stretch>
+            <a:fillRect/>
+          </a:stretch>
+        </p:blipFill>
+        <p:spPr>
+          <a:xfrm>
+            <a:off x="365760" y="914400"/>
+            <a:ext cx="3840480" cy="2990088"/>
+          </a:xfrm>
+          <a:prstGeom prst="rect">
+            <a:avLst/>
+          </a:prstGeom>
+        </p:spPr>
+      </p:pic>
+      <p:sp>
+        <p:nvSpPr>
+          <p:cNvPr id="5" name="Title"/>
           <p:cNvSpPr txBox="1"/>
           <p:nvPr/>
         </p:nvSpPr>
         <p:spPr>
           <a:xfrm>
-            <a:off x="640080" y="2377440"/>
-            <a:ext cx="7863840" cy="914400"/>
+            <a:off x="4389120" y="2286000"/>
+            <a:ext cx="4114800" cy="1097280"/>
           </a:xfrm>
           <a:prstGeom prst="rect">
             <a:avLst/>
@@ -6960,30 +7454,30 @@
               <a:buNone/>
             </a:pPr>
             <a:r>
-              <a:rPr lang="fa-IR" sz="3800" b="1" dirty="0">
+              <a:rPr lang="fa-IR" sz="3400" b="1" dirty="0">
                 <a:solidFill>
                   <a:schemeClr val="bg1"/>
                 </a:solidFill>
-                <a:latin typeface="B Zar" pitchFamily="34" charset="0"/>
-                <a:ea typeface="B Zar" pitchFamily="34" charset="-122"/>
+                <a:latin typeface="Calibri" pitchFamily="34" charset="0"/>
+                <a:ea typeface="Calibri" pitchFamily="34" charset="-122"/>
                 <a:cs typeface="B Zar" pitchFamily="34" charset="-120"/>
               </a:rPr>
               <a:t>جمع‌بندی و کاربرد در کلاس</a:t>
             </a:r>
-            <a:endParaRPr lang="fa-IR" sz="3800" dirty="0"/>
-          </a:p>
-        </p:txBody>
-      </p:sp>
-      <p:sp>
-        <p:nvSpPr>
-          <p:cNvPr id="5" name="Subtitle"/>
+            <a:endParaRPr lang="fa-IR" sz="3400" dirty="0"/>
+          </a:p>
+        </p:txBody>
+      </p:sp>
+      <p:sp>
+        <p:nvSpPr>
+          <p:cNvPr id="6" name="Subtitle"/>
           <p:cNvSpPr txBox="1"/>
           <p:nvPr/>
         </p:nvSpPr>
         <p:spPr>
           <a:xfrm>
-            <a:off x="640080" y="3337560"/>
-            <a:ext cx="7863840" cy="457200"/>
+            <a:off x="4389120" y="3429000"/>
+            <a:ext cx="4114800" cy="822960"/>
           </a:xfrm>
           <a:prstGeom prst="rect">
             <a:avLst/>
@@ -6999,17 +7493,17 @@
               <a:buNone/>
             </a:pPr>
             <a:r>
-              <a:rPr lang="fa-IR" sz="2000" dirty="0">
+              <a:rPr lang="fa-IR" sz="1800" dirty="0">
                 <a:solidFill>
                   <a:srgbClr val="CFE3E1"/>
                 </a:solidFill>
-                <a:latin typeface="B Nazanin" pitchFamily="34" charset="0"/>
-                <a:ea typeface="B Nazanin" pitchFamily="34" charset="-122"/>
+                <a:latin typeface="Calibri" pitchFamily="34" charset="0"/>
+                <a:ea typeface="Calibri" pitchFamily="34" charset="-122"/>
                 <a:cs typeface="B Nazanin" pitchFamily="34" charset="-120"/>
               </a:rPr>
               <a:t>نتیجه‌گیری و نکات کلیدی ارائه</a:t>
             </a:r>
-            <a:endParaRPr lang="fa-IR" sz="2000" dirty="0"/>
+            <a:endParaRPr lang="fa-IR" sz="1800" dirty="0"/>
           </a:p>
         </p:txBody>
       </p:sp>
@@ -7070,8 +7564,8 @@
                 <a:solidFill>
                   <a:schemeClr val="accent2"/>
                 </a:solidFill>
-                <a:latin typeface="B Nazanin" pitchFamily="34" charset="0"/>
-                <a:ea typeface="B Nazanin" pitchFamily="34" charset="-122"/>
+                <a:latin typeface="Calibri" pitchFamily="34" charset="0"/>
+                <a:ea typeface="Calibri" pitchFamily="34" charset="-122"/>
                 <a:cs typeface="B Nazanin" pitchFamily="34" charset="-120"/>
               </a:rPr>
               <a:t>بخش چهارم: جمع‌بندی و کاربرد در کلاس</a:t>
@@ -7111,8 +7605,8 @@
                 <a:solidFill>
                   <a:schemeClr val="accent1"/>
                 </a:solidFill>
-                <a:latin typeface="B Zar" pitchFamily="34" charset="0"/>
-                <a:ea typeface="B Zar" pitchFamily="34" charset="-122"/>
+                <a:latin typeface="Calibri" pitchFamily="34" charset="0"/>
+                <a:ea typeface="Calibri" pitchFamily="34" charset="-122"/>
                 <a:cs typeface="B Zar" pitchFamily="34" charset="-120"/>
               </a:rPr>
               <a:t>جمع‌بندی و نتیجه‌گیری</a:t>
@@ -7157,14 +7651,63 @@
       </p:sp>
       <p:sp>
         <p:nvSpPr>
-          <p:cNvPr id="5" name="CardHead0"/>
+          <p:cNvPr id="5" name="IconBg_FaGem"/>
+          <p:cNvSpPr/>
+          <p:nvPr/>
+        </p:nvSpPr>
+        <p:spPr>
+          <a:xfrm>
+            <a:off x="8138160" y="1344168"/>
+            <a:ext cx="420624" cy="420624"/>
+          </a:xfrm>
+          <a:prstGeom prst="ellipse">
+            <a:avLst/>
+          </a:prstGeom>
+          <a:solidFill>
+            <a:schemeClr val="accent1"/>
+          </a:solidFill>
+          <a:ln w="12700">
+            <a:solidFill>
+              <a:schemeClr val="accent1"/>
+            </a:solidFill>
+            <a:prstDash val="solid"/>
+          </a:ln>
+        </p:spPr>
+      </p:sp>
+      <p:pic>
+        <p:nvPicPr>
+          <p:cNvPr id="6" name="Icon_FaGem" descr="FaGem">    </p:cNvPr>
+          <p:cNvPicPr>
+            <a:picLocks noChangeAspect="1"/>
+          </p:cNvPicPr>
+          <p:nvPr/>
+        </p:nvPicPr>
+        <p:blipFill>
+          <a:blip r:embed="rId1"/>
+          <a:stretch>
+            <a:fillRect/>
+          </a:stretch>
+        </p:blipFill>
+        <p:spPr>
+          <a:xfrm>
+            <a:off x="8243316" y="1449324"/>
+            <a:ext cx="210312" cy="210312"/>
+          </a:xfrm>
+          <a:prstGeom prst="rect">
+            <a:avLst/>
+          </a:prstGeom>
+        </p:spPr>
+      </p:pic>
+      <p:sp>
+        <p:nvSpPr>
+          <p:cNvPr id="7" name="CardHead0"/>
           <p:cNvSpPr txBox="1"/>
           <p:nvPr/>
         </p:nvSpPr>
         <p:spPr>
           <a:xfrm>
             <a:off x="6263640" y="1325880"/>
-            <a:ext cx="2286000" cy="640080"/>
+            <a:ext cx="1783080" cy="640080"/>
           </a:xfrm>
           <a:prstGeom prst="rect">
             <a:avLst/>
@@ -7184,8 +7727,8 @@
                 <a:solidFill>
                   <a:schemeClr val="tx2"/>
                 </a:solidFill>
-                <a:latin typeface="B Zar" pitchFamily="34" charset="0"/>
-                <a:ea typeface="B Zar" pitchFamily="34" charset="-122"/>
+                <a:latin typeface="Calibri" pitchFamily="34" charset="0"/>
+                <a:ea typeface="Calibri" pitchFamily="34" charset="-122"/>
                 <a:cs typeface="B Zar" pitchFamily="34" charset="-120"/>
               </a:rPr>
               <a:t>ریگز و مدل منشوری</a:t>
@@ -7196,14 +7739,14 @@
       </p:sp>
       <p:sp>
         <p:nvSpPr>
-          <p:cNvPr id="6" name="CardBody0"/>
+          <p:cNvPr id="8" name="CardBody0"/>
           <p:cNvSpPr txBox="1"/>
           <p:nvPr/>
         </p:nvSpPr>
         <p:spPr>
           <a:xfrm>
-            <a:off x="6263640" y="2011680"/>
-            <a:ext cx="2286000" cy="1828800"/>
+            <a:off x="6263640" y="2130552"/>
+            <a:ext cx="2286000" cy="1737360"/>
           </a:xfrm>
           <a:prstGeom prst="rect">
             <a:avLst/>
@@ -7227,8 +7770,8 @@
                 <a:solidFill>
                   <a:schemeClr val="tx1"/>
                 </a:solidFill>
-                <a:latin typeface="B Nazanin" pitchFamily="34" charset="0"/>
-                <a:ea typeface="B Nazanin" pitchFamily="34" charset="-122"/>
+                <a:latin typeface="Calibri" pitchFamily="34" charset="0"/>
+                <a:ea typeface="Calibri" pitchFamily="34" charset="-122"/>
                 <a:cs typeface="B Nazanin" pitchFamily="34" charset="-120"/>
               </a:rPr>
               <a:t>بهترین چارچوب برای تحلیل بوروکراسی در کشورهای در حال توسعه</a:t>
@@ -7239,7 +7782,7 @@
       </p:sp>
       <p:sp>
         <p:nvSpPr>
-          <p:cNvPr id="7" name="Card1"/>
+          <p:cNvPr id="9" name="Card1"/>
           <p:cNvSpPr/>
           <p:nvPr/>
         </p:nvSpPr>
@@ -7273,14 +7816,63 @@
       </p:sp>
       <p:sp>
         <p:nvSpPr>
-          <p:cNvPr id="8" name="CardHead1"/>
+          <p:cNvPr id="10" name="IconBg_FaTriangleExclamation"/>
+          <p:cNvSpPr/>
+          <p:nvPr/>
+        </p:nvSpPr>
+        <p:spPr>
+          <a:xfrm>
+            <a:off x="5303520" y="1344168"/>
+            <a:ext cx="420624" cy="420624"/>
+          </a:xfrm>
+          <a:prstGeom prst="ellipse">
+            <a:avLst/>
+          </a:prstGeom>
+          <a:solidFill>
+            <a:schemeClr val="accent2"/>
+          </a:solidFill>
+          <a:ln w="12700">
+            <a:solidFill>
+              <a:schemeClr val="accent2"/>
+            </a:solidFill>
+            <a:prstDash val="solid"/>
+          </a:ln>
+        </p:spPr>
+      </p:sp>
+      <p:pic>
+        <p:nvPicPr>
+          <p:cNvPr id="11" name="Icon_FaTriangleExclamation" descr="FaTriangleExclamation">    </p:cNvPr>
+          <p:cNvPicPr>
+            <a:picLocks noChangeAspect="1"/>
+          </p:cNvPicPr>
+          <p:nvPr/>
+        </p:nvPicPr>
+        <p:blipFill>
+          <a:blip r:embed="rId2"/>
+          <a:stretch>
+            <a:fillRect/>
+          </a:stretch>
+        </p:blipFill>
+        <p:spPr>
+          <a:xfrm>
+            <a:off x="5408676" y="1449324"/>
+            <a:ext cx="210312" cy="210312"/>
+          </a:xfrm>
+          <a:prstGeom prst="rect">
+            <a:avLst/>
+          </a:prstGeom>
+        </p:spPr>
+      </p:pic>
+      <p:sp>
+        <p:nvSpPr>
+          <p:cNvPr id="12" name="CardHead1"/>
           <p:cNvSpPr txBox="1"/>
           <p:nvPr/>
         </p:nvSpPr>
         <p:spPr>
           <a:xfrm>
             <a:off x="3429000" y="1325880"/>
-            <a:ext cx="2286000" cy="640080"/>
+            <a:ext cx="1783080" cy="640080"/>
           </a:xfrm>
           <a:prstGeom prst="rect">
             <a:avLst/>
@@ -7300,8 +7892,8 @@
                 <a:solidFill>
                   <a:schemeClr val="tx2"/>
                 </a:solidFill>
-                <a:latin typeface="B Zar" pitchFamily="34" charset="0"/>
-                <a:ea typeface="B Zar" pitchFamily="34" charset="-122"/>
+                <a:latin typeface="Calibri" pitchFamily="34" charset="0"/>
+                <a:ea typeface="Calibri" pitchFamily="34" charset="-122"/>
                 <a:cs typeface="B Zar" pitchFamily="34" charset="-120"/>
               </a:rPr>
               <a:t>چالش اصلی</a:t>
@@ -7312,14 +7904,14 @@
       </p:sp>
       <p:sp>
         <p:nvSpPr>
-          <p:cNvPr id="9" name="CardBody1"/>
+          <p:cNvPr id="13" name="CardBody1"/>
           <p:cNvSpPr txBox="1"/>
           <p:nvPr/>
         </p:nvSpPr>
         <p:spPr>
           <a:xfrm>
-            <a:off x="3429000" y="2011680"/>
-            <a:ext cx="2286000" cy="1828800"/>
+            <a:off x="3429000" y="2130552"/>
+            <a:ext cx="2286000" cy="1737360"/>
           </a:xfrm>
           <a:prstGeom prst="rect">
             <a:avLst/>
@@ -7343,8 +7935,8 @@
                 <a:solidFill>
                   <a:schemeClr val="tx1"/>
                 </a:solidFill>
-                <a:latin typeface="B Nazanin" pitchFamily="34" charset="0"/>
-                <a:ea typeface="B Nazanin" pitchFamily="34" charset="-122"/>
+                <a:latin typeface="Calibri" pitchFamily="34" charset="0"/>
+                <a:ea typeface="Calibri" pitchFamily="34" charset="-122"/>
                 <a:cs typeface="B Nazanin" pitchFamily="34" charset="-120"/>
               </a:rPr>
               <a:t>عدم تطابق بین ساختارهای مدرن و کارکردهای سنتی</a:t>
@@ -7355,7 +7947,7 @@
       </p:sp>
       <p:sp>
         <p:nvSpPr>
-          <p:cNvPr id="10" name="Card2"/>
+          <p:cNvPr id="14" name="Card2"/>
           <p:cNvSpPr/>
           <p:nvPr/>
         </p:nvSpPr>
@@ -7389,14 +7981,63 @@
       </p:sp>
       <p:sp>
         <p:nvSpPr>
-          <p:cNvPr id="11" name="CardHead2"/>
+          <p:cNvPr id="15" name="IconBg_FaKey"/>
+          <p:cNvSpPr/>
+          <p:nvPr/>
+        </p:nvSpPr>
+        <p:spPr>
+          <a:xfrm>
+            <a:off x="2468880" y="1344168"/>
+            <a:ext cx="420624" cy="420624"/>
+          </a:xfrm>
+          <a:prstGeom prst="ellipse">
+            <a:avLst/>
+          </a:prstGeom>
+          <a:solidFill>
+            <a:schemeClr val="accent3"/>
+          </a:solidFill>
+          <a:ln w="12700">
+            <a:solidFill>
+              <a:schemeClr val="accent3"/>
+            </a:solidFill>
+            <a:prstDash val="solid"/>
+          </a:ln>
+        </p:spPr>
+      </p:sp>
+      <p:pic>
+        <p:nvPicPr>
+          <p:cNvPr id="16" name="Icon_FaKey" descr="FaKey">    </p:cNvPr>
+          <p:cNvPicPr>
+            <a:picLocks noChangeAspect="1"/>
+          </p:cNvPicPr>
+          <p:nvPr/>
+        </p:nvPicPr>
+        <p:blipFill>
+          <a:blip r:embed="rId3"/>
+          <a:stretch>
+            <a:fillRect/>
+          </a:stretch>
+        </p:blipFill>
+        <p:spPr>
+          <a:xfrm>
+            <a:off x="2574036" y="1449324"/>
+            <a:ext cx="210312" cy="210312"/>
+          </a:xfrm>
+          <a:prstGeom prst="rect">
+            <a:avLst/>
+          </a:prstGeom>
+        </p:spPr>
+      </p:pic>
+      <p:sp>
+        <p:nvSpPr>
+          <p:cNvPr id="17" name="CardHead2"/>
           <p:cNvSpPr txBox="1"/>
           <p:nvPr/>
         </p:nvSpPr>
         <p:spPr>
           <a:xfrm>
             <a:off x="594360" y="1325880"/>
-            <a:ext cx="2286000" cy="640080"/>
+            <a:ext cx="1783080" cy="640080"/>
           </a:xfrm>
           <a:prstGeom prst="rect">
             <a:avLst/>
@@ -7416,8 +8057,8 @@
                 <a:solidFill>
                   <a:schemeClr val="tx2"/>
                 </a:solidFill>
-                <a:latin typeface="B Zar" pitchFamily="34" charset="0"/>
-                <a:ea typeface="B Zar" pitchFamily="34" charset="-122"/>
+                <a:latin typeface="Calibri" pitchFamily="34" charset="0"/>
+                <a:ea typeface="Calibri" pitchFamily="34" charset="-122"/>
                 <a:cs typeface="B Zar" pitchFamily="34" charset="-120"/>
               </a:rPr>
               <a:t>راهکار</a:t>
@@ -7428,14 +8069,14 @@
       </p:sp>
       <p:sp>
         <p:nvSpPr>
-          <p:cNvPr id="12" name="CardBody2"/>
+          <p:cNvPr id="18" name="CardBody2"/>
           <p:cNvSpPr txBox="1"/>
           <p:nvPr/>
         </p:nvSpPr>
         <p:spPr>
           <a:xfrm>
-            <a:off x="594360" y="2011680"/>
-            <a:ext cx="2286000" cy="1828800"/>
+            <a:off x="594360" y="2130552"/>
+            <a:ext cx="2286000" cy="1737360"/>
           </a:xfrm>
           <a:prstGeom prst="rect">
             <a:avLst/>
@@ -7459,8 +8100,8 @@
                 <a:solidFill>
                   <a:schemeClr val="tx1"/>
                 </a:solidFill>
-                <a:latin typeface="B Nazanin" pitchFamily="34" charset="0"/>
-                <a:ea typeface="B Nazanin" pitchFamily="34" charset="-122"/>
+                <a:latin typeface="Calibri" pitchFamily="34" charset="0"/>
+                <a:ea typeface="Calibri" pitchFamily="34" charset="-122"/>
                 <a:cs typeface="B Nazanin" pitchFamily="34" charset="-120"/>
               </a:rPr>
               <a:t>درک بوم‌شناسی اداری (محیط سیاسی، اجتماعی و فرهنگی) قبل از هرگونه اصلاحات اداری</a:t>
@@ -7471,7 +8112,7 @@
       </p:sp>
       <p:sp>
         <p:nvSpPr>
-          <p:cNvPr id="13" name="NoteCard"/>
+          <p:cNvPr id="19" name="NoteCard"/>
           <p:cNvSpPr/>
           <p:nvPr/>
         </p:nvSpPr>
@@ -7505,7 +8146,7 @@
       </p:sp>
       <p:sp>
         <p:nvSpPr>
-          <p:cNvPr id="14" name="NoteBadge"/>
+          <p:cNvPr id="20" name="NoteBadge"/>
           <p:cNvSpPr/>
           <p:nvPr/>
         </p:nvSpPr>
@@ -7532,14 +8173,14 @@
       </p:sp>
       <p:sp>
         <p:nvSpPr>
-          <p:cNvPr id="15" name="NoteBadgeText"/>
+          <p:cNvPr id="21" name="NoteBadgeText"/>
           <p:cNvSpPr txBox="1"/>
           <p:nvPr/>
         </p:nvSpPr>
         <p:spPr>
           <a:xfrm>
             <a:off x="7406640" y="4206240"/>
-            <a:ext cx="1097280" cy="365760"/>
+            <a:ext cx="822960" cy="365760"/>
           </a:xfrm>
           <a:prstGeom prst="rect">
             <a:avLst/>
@@ -7559,8 +8200,8 @@
                 <a:solidFill>
                   <a:schemeClr val="bg1"/>
                 </a:solidFill>
-                <a:latin typeface="B Zar" pitchFamily="34" charset="0"/>
-                <a:ea typeface="B Zar" pitchFamily="34" charset="-122"/>
+                <a:latin typeface="Calibri" pitchFamily="34" charset="0"/>
+                <a:ea typeface="Calibri" pitchFamily="34" charset="-122"/>
                 <a:cs typeface="B Zar" pitchFamily="34" charset="-120"/>
               </a:rPr>
               <a:t>نکته</a:t>
@@ -7569,9 +8210,33 @@
           </a:p>
         </p:txBody>
       </p:sp>
-      <p:sp>
-        <p:nvSpPr>
-          <p:cNvPr id="16" name="Note"/>
+      <p:pic>
+        <p:nvPicPr>
+          <p:cNvPr id="22" name="NoteIcon" descr="lightbulb">    </p:cNvPr>
+          <p:cNvPicPr>
+            <a:picLocks noChangeAspect="1"/>
+          </p:cNvPicPr>
+          <p:nvPr/>
+        </p:nvPicPr>
+        <p:blipFill>
+          <a:blip r:embed="rId4"/>
+          <a:stretch>
+            <a:fillRect/>
+          </a:stretch>
+        </p:blipFill>
+        <p:spPr>
+          <a:xfrm>
+            <a:off x="8229600" y="4261104"/>
+            <a:ext cx="256032" cy="256032"/>
+          </a:xfrm>
+          <a:prstGeom prst="rect">
+            <a:avLst/>
+          </a:prstGeom>
+        </p:spPr>
+      </p:pic>
+      <p:sp>
+        <p:nvSpPr>
+          <p:cNvPr id="23" name="Note"/>
           <p:cNvSpPr txBox="1"/>
           <p:nvPr/>
         </p:nvSpPr>
@@ -7598,8 +8263,8 @@
                 <a:solidFill>
                   <a:schemeClr val="tx1"/>
                 </a:solidFill>
-                <a:latin typeface="B Nazanin" pitchFamily="34" charset="0"/>
-                <a:ea typeface="B Nazanin" pitchFamily="34" charset="-122"/>
+                <a:latin typeface="Calibri" pitchFamily="34" charset="0"/>
+                <a:ea typeface="Calibri" pitchFamily="34" charset="-122"/>
                 <a:cs typeface="B Nazanin" pitchFamily="34" charset="-120"/>
               </a:rPr>
               <a:t>سخن آخر: بوروکراسی صرفاً یک ابزار فنی نیست، بلکه بازتابی از فرهنگ و سیاست هر جامعه است.</a:t>
@@ -7640,8 +8305,9 @@
                 <a:solidFill>
                   <a:srgbClr val="6B7A86"/>
                 </a:solidFill>
-                <a:latin typeface="B Nazanin"/>
-                <a:ea typeface="B Nazanin"/>
+                <a:latin typeface="Calibri"/>
+                <a:cs typeface="B Nazanin"/>
+                <a:ea typeface="Calibri"/>
                 <a:cs typeface="B Nazanin"/>
               </a:defRPr>
             </a:lvl1pPr>
@@ -7713,8 +8379,8 @@
                 <a:solidFill>
                   <a:schemeClr val="accent2"/>
                 </a:solidFill>
-                <a:latin typeface="B Nazanin" pitchFamily="34" charset="0"/>
-                <a:ea typeface="B Nazanin" pitchFamily="34" charset="-122"/>
+                <a:latin typeface="Calibri" pitchFamily="34" charset="0"/>
+                <a:ea typeface="Calibri" pitchFamily="34" charset="-122"/>
                 <a:cs typeface="B Nazanin" pitchFamily="34" charset="-120"/>
               </a:rPr>
               <a:t>بخش چهارم: جمع‌بندی و کاربرد در کلاس</a:t>
@@ -7754,8 +8420,8 @@
                 <a:solidFill>
                   <a:schemeClr val="accent1"/>
                 </a:solidFill>
-                <a:latin typeface="B Zar" pitchFamily="34" charset="0"/>
-                <a:ea typeface="B Zar" pitchFamily="34" charset="-122"/>
+                <a:latin typeface="Calibri" pitchFamily="34" charset="0"/>
+                <a:ea typeface="Calibri" pitchFamily="34" charset="-122"/>
                 <a:cs typeface="B Zar" pitchFamily="34" charset="-120"/>
               </a:rPr>
               <a:t>نکات کلیدی برای ارائه در کلاس</a:t>
@@ -7800,14 +8466,14 @@
       </p:sp>
       <p:sp>
         <p:nvSpPr>
-          <p:cNvPr id="5" name="NumBadge0"/>
+          <p:cNvPr id="5" name="IconBg_FaChartSimple"/>
           <p:cNvSpPr/>
           <p:nvPr/>
         </p:nvSpPr>
         <p:spPr>
           <a:xfrm>
-            <a:off x="7909560" y="1527048"/>
-            <a:ext cx="457200" cy="457200"/>
+            <a:off x="7863840" y="1463040"/>
+            <a:ext cx="594360" cy="594360"/>
           </a:xfrm>
           <a:prstGeom prst="ellipse">
             <a:avLst/>
@@ -7823,16 +8489,40 @@
           </a:ln>
         </p:spPr>
       </p:sp>
-      <p:sp>
-        <p:nvSpPr>
-          <p:cNvPr id="6" name="NumTxt0"/>
+      <p:pic>
+        <p:nvPicPr>
+          <p:cNvPr id="6" name="Icon_FaChartSimple" descr="FaChartSimple">    </p:cNvPr>
+          <p:cNvPicPr>
+            <a:picLocks noChangeAspect="1"/>
+          </p:cNvPicPr>
+          <p:nvPr/>
+        </p:nvPicPr>
+        <p:blipFill>
+          <a:blip r:embed="rId1"/>
+          <a:stretch>
+            <a:fillRect/>
+          </a:stretch>
+        </p:blipFill>
+        <p:spPr>
+          <a:xfrm>
+            <a:off x="8012430" y="1611630"/>
+            <a:ext cx="297180" cy="297180"/>
+          </a:xfrm>
+          <a:prstGeom prst="rect">
+            <a:avLst/>
+          </a:prstGeom>
+        </p:spPr>
+      </p:pic>
+      <p:sp>
+        <p:nvSpPr>
+          <p:cNvPr id="7" name="NumBody0"/>
           <p:cNvSpPr txBox="1"/>
           <p:nvPr/>
         </p:nvSpPr>
         <p:spPr>
           <a:xfrm>
-            <a:off x="7909560" y="1527048"/>
-            <a:ext cx="457200" cy="457200"/>
+            <a:off x="685800" y="1280160"/>
+            <a:ext cx="7040880" cy="960120"/>
           </a:xfrm>
           <a:prstGeom prst="rect">
             <a:avLst/>
@@ -7841,45 +8531,6 @@
           <a:ln/>
         </p:spPr>
         <p:txBody>
-          <a:bodyPr wrap="square" lIns="0" tIns="0" rIns="0" bIns="0" rtlCol="0" anchor="ctr"/>
-          <a:lstStyle/>
-          <a:p>
-            <a:pPr rtl="1" algn="ctr" indent="0" marL="0">
-              <a:buNone/>
-            </a:pPr>
-            <a:r>
-              <a:rPr lang="fa-IR" sz="1800" b="1" dirty="0">
-                <a:solidFill>
-                  <a:schemeClr val="bg1"/>
-                </a:solidFill>
-                <a:latin typeface="B Zar" pitchFamily="34" charset="0"/>
-                <a:ea typeface="B Zar" pitchFamily="34" charset="-122"/>
-                <a:cs typeface="B Zar" pitchFamily="34" charset="-120"/>
-              </a:rPr>
-              <a:t>۱</a:t>
-            </a:r>
-            <a:endParaRPr lang="fa-IR" sz="1800" dirty="0"/>
-          </a:p>
-        </p:txBody>
-      </p:sp>
-      <p:sp>
-        <p:nvSpPr>
-          <p:cNvPr id="7" name="NumBody0"/>
-          <p:cNvSpPr txBox="1"/>
-          <p:nvPr/>
-        </p:nvSpPr>
-        <p:spPr>
-          <a:xfrm>
-            <a:off x="685800" y="1280160"/>
-            <a:ext cx="7040880" cy="960120"/>
-          </a:xfrm>
-          <a:prstGeom prst="rect">
-            <a:avLst/>
-          </a:prstGeom>
-          <a:noFill/>
-          <a:ln/>
-        </p:spPr>
-        <p:txBody>
           <a:bodyPr wrap="square" rtlCol="0" anchor="ctr"/>
           <a:lstStyle/>
           <a:p>
@@ -7891,8 +8542,8 @@
                 <a:solidFill>
                   <a:schemeClr val="tx1"/>
                 </a:solidFill>
-                <a:latin typeface="B Nazanin" pitchFamily="34" charset="0"/>
-                <a:ea typeface="B Nazanin" pitchFamily="34" charset="-122"/>
+                <a:latin typeface="Calibri" pitchFamily="34" charset="0"/>
+                <a:ea typeface="Calibri" pitchFamily="34" charset="-122"/>
                 <a:cs typeface="B Nazanin" pitchFamily="34" charset="-120"/>
               </a:rPr>
               <a:t>استفاده از نمودارها: نمودار درختی مدل‌های ریگز را روی تخته یا اسلاید بکشید</a:t>
@@ -7937,14 +8588,14 @@
       </p:sp>
       <p:sp>
         <p:nvSpPr>
-          <p:cNvPr id="9" name="NumBadge1"/>
+          <p:cNvPr id="9" name="IconBg_FaBuildingColumns"/>
           <p:cNvSpPr/>
           <p:nvPr/>
         </p:nvSpPr>
         <p:spPr>
           <a:xfrm>
-            <a:off x="7909560" y="2624328"/>
-            <a:ext cx="457200" cy="457200"/>
+            <a:off x="7863840" y="2560320"/>
+            <a:ext cx="594360" cy="594360"/>
           </a:xfrm>
           <a:prstGeom prst="ellipse">
             <a:avLst/>
@@ -7960,16 +8611,40 @@
           </a:ln>
         </p:spPr>
       </p:sp>
-      <p:sp>
-        <p:nvSpPr>
-          <p:cNvPr id="10" name="NumTxt1"/>
+      <p:pic>
+        <p:nvPicPr>
+          <p:cNvPr id="10" name="Icon_FaBuildingColumns" descr="FaBuildingColumns">    </p:cNvPr>
+          <p:cNvPicPr>
+            <a:picLocks noChangeAspect="1"/>
+          </p:cNvPicPr>
+          <p:nvPr/>
+        </p:nvPicPr>
+        <p:blipFill>
+          <a:blip r:embed="rId2"/>
+          <a:stretch>
+            <a:fillRect/>
+          </a:stretch>
+        </p:blipFill>
+        <p:spPr>
+          <a:xfrm>
+            <a:off x="8012430" y="2708910"/>
+            <a:ext cx="297180" cy="297180"/>
+          </a:xfrm>
+          <a:prstGeom prst="rect">
+            <a:avLst/>
+          </a:prstGeom>
+        </p:spPr>
+      </p:pic>
+      <p:sp>
+        <p:nvSpPr>
+          <p:cNvPr id="11" name="NumBody1"/>
           <p:cNvSpPr txBox="1"/>
           <p:nvPr/>
         </p:nvSpPr>
         <p:spPr>
           <a:xfrm>
-            <a:off x="7909560" y="2624328"/>
-            <a:ext cx="457200" cy="457200"/>
+            <a:off x="685800" y="2377440"/>
+            <a:ext cx="7040880" cy="960120"/>
           </a:xfrm>
           <a:prstGeom prst="rect">
             <a:avLst/>
@@ -7978,45 +8653,6 @@
           <a:ln/>
         </p:spPr>
         <p:txBody>
-          <a:bodyPr wrap="square" lIns="0" tIns="0" rIns="0" bIns="0" rtlCol="0" anchor="ctr"/>
-          <a:lstStyle/>
-          <a:p>
-            <a:pPr rtl="1" algn="ctr" indent="0" marL="0">
-              <a:buNone/>
-            </a:pPr>
-            <a:r>
-              <a:rPr lang="fa-IR" sz="1800" b="1" dirty="0">
-                <a:solidFill>
-                  <a:schemeClr val="bg1"/>
-                </a:solidFill>
-                <a:latin typeface="B Zar" pitchFamily="34" charset="0"/>
-                <a:ea typeface="B Zar" pitchFamily="34" charset="-122"/>
-                <a:cs typeface="B Zar" pitchFamily="34" charset="-120"/>
-              </a:rPr>
-              <a:t>۲</a:t>
-            </a:r>
-            <a:endParaRPr lang="fa-IR" sz="1800" dirty="0"/>
-          </a:p>
-        </p:txBody>
-      </p:sp>
-      <p:sp>
-        <p:nvSpPr>
-          <p:cNvPr id="11" name="NumBody1"/>
-          <p:cNvSpPr txBox="1"/>
-          <p:nvPr/>
-        </p:nvSpPr>
-        <p:spPr>
-          <a:xfrm>
-            <a:off x="685800" y="2377440"/>
-            <a:ext cx="7040880" cy="960120"/>
-          </a:xfrm>
-          <a:prstGeom prst="rect">
-            <a:avLst/>
-          </a:prstGeom>
-          <a:noFill/>
-          <a:ln/>
-        </p:spPr>
-        <p:txBody>
           <a:bodyPr wrap="square" rtlCol="0" anchor="ctr"/>
           <a:lstStyle/>
           <a:p>
@@ -8028,8 +8664,8 @@
                 <a:solidFill>
                   <a:schemeClr val="tx1"/>
                 </a:solidFill>
-                <a:latin typeface="B Nazanin" pitchFamily="34" charset="0"/>
-                <a:ea typeface="B Nazanin" pitchFamily="34" charset="-122"/>
+                <a:latin typeface="Calibri" pitchFamily="34" charset="0"/>
+                <a:ea typeface="Calibri" pitchFamily="34" charset="-122"/>
                 <a:cs typeface="B Nazanin" pitchFamily="34" charset="-120"/>
               </a:rPr>
               <a:t>مثال‌های عینی: برای مدل «منشوری»، مثال سازمان‌های دولتی در ایران را ذکر کنید</a:t>
@@ -8074,14 +8710,14 @@
       </p:sp>
       <p:sp>
         <p:nvSpPr>
-          <p:cNvPr id="13" name="NumBadge2"/>
+          <p:cNvPr id="13" name="IconBg_FaComments"/>
           <p:cNvSpPr/>
           <p:nvPr/>
         </p:nvSpPr>
         <p:spPr>
           <a:xfrm>
-            <a:off x="7909560" y="3721608"/>
-            <a:ext cx="457200" cy="457200"/>
+            <a:off x="7863840" y="3657600"/>
+            <a:ext cx="594360" cy="594360"/>
           </a:xfrm>
           <a:prstGeom prst="ellipse">
             <a:avLst/>
@@ -8097,16 +8733,40 @@
           </a:ln>
         </p:spPr>
       </p:sp>
-      <p:sp>
-        <p:nvSpPr>
-          <p:cNvPr id="14" name="NumTxt2"/>
+      <p:pic>
+        <p:nvPicPr>
+          <p:cNvPr id="14" name="Icon_FaComments" descr="FaComments">    </p:cNvPr>
+          <p:cNvPicPr>
+            <a:picLocks noChangeAspect="1"/>
+          </p:cNvPicPr>
+          <p:nvPr/>
+        </p:nvPicPr>
+        <p:blipFill>
+          <a:blip r:embed="rId3"/>
+          <a:stretch>
+            <a:fillRect/>
+          </a:stretch>
+        </p:blipFill>
+        <p:spPr>
+          <a:xfrm>
+            <a:off x="8012430" y="3806190"/>
+            <a:ext cx="297180" cy="297180"/>
+          </a:xfrm>
+          <a:prstGeom prst="rect">
+            <a:avLst/>
+          </a:prstGeom>
+        </p:spPr>
+      </p:pic>
+      <p:sp>
+        <p:nvSpPr>
+          <p:cNvPr id="15" name="NumBody2"/>
           <p:cNvSpPr txBox="1"/>
           <p:nvPr/>
         </p:nvSpPr>
         <p:spPr>
           <a:xfrm>
-            <a:off x="7909560" y="3721608"/>
-            <a:ext cx="457200" cy="457200"/>
+            <a:off x="685800" y="3474720"/>
+            <a:ext cx="7040880" cy="960120"/>
           </a:xfrm>
           <a:prstGeom prst="rect">
             <a:avLst/>
@@ -8115,45 +8775,6 @@
           <a:ln/>
         </p:spPr>
         <p:txBody>
-          <a:bodyPr wrap="square" lIns="0" tIns="0" rIns="0" bIns="0" rtlCol="0" anchor="ctr"/>
-          <a:lstStyle/>
-          <a:p>
-            <a:pPr rtl="1" algn="ctr" indent="0" marL="0">
-              <a:buNone/>
-            </a:pPr>
-            <a:r>
-              <a:rPr lang="fa-IR" sz="1800" b="1" dirty="0">
-                <a:solidFill>
-                  <a:schemeClr val="bg1"/>
-                </a:solidFill>
-                <a:latin typeface="B Zar" pitchFamily="34" charset="0"/>
-                <a:ea typeface="B Zar" pitchFamily="34" charset="-122"/>
-                <a:cs typeface="B Zar" pitchFamily="34" charset="-120"/>
-              </a:rPr>
-              <a:t>۳</a:t>
-            </a:r>
-            <a:endParaRPr lang="fa-IR" sz="1800" dirty="0"/>
-          </a:p>
-        </p:txBody>
-      </p:sp>
-      <p:sp>
-        <p:nvSpPr>
-          <p:cNvPr id="15" name="NumBody2"/>
-          <p:cNvSpPr txBox="1"/>
-          <p:nvPr/>
-        </p:nvSpPr>
-        <p:spPr>
-          <a:xfrm>
-            <a:off x="685800" y="3474720"/>
-            <a:ext cx="7040880" cy="960120"/>
-          </a:xfrm>
-          <a:prstGeom prst="rect">
-            <a:avLst/>
-          </a:prstGeom>
-          <a:noFill/>
-          <a:ln/>
-        </p:spPr>
-        <p:txBody>
           <a:bodyPr wrap="square" rtlCol="0" anchor="ctr"/>
           <a:lstStyle/>
           <a:p>
@@ -8165,8 +8786,8 @@
                 <a:solidFill>
                   <a:schemeClr val="tx1"/>
                 </a:solidFill>
-                <a:latin typeface="B Nazanin" pitchFamily="34" charset="0"/>
-                <a:ea typeface="B Nazanin" pitchFamily="34" charset="-122"/>
+                <a:latin typeface="Calibri" pitchFamily="34" charset="0"/>
+                <a:ea typeface="Calibri" pitchFamily="34" charset="-122"/>
                 <a:cs typeface="B Nazanin" pitchFamily="34" charset="-120"/>
               </a:rPr>
               <a:t>پرسش و پاسخ: از همکلاسی‌ها بپرسید: «به نظر شما بوروکراسی در ایران بیشتر به مدل وبری نزدیک است یا مدل منشوری ریگز؟»</a:t>
@@ -8207,8 +8828,9 @@
                 <a:solidFill>
                   <a:srgbClr val="6B7A86"/>
                 </a:solidFill>
-                <a:latin typeface="B Nazanin"/>
-                <a:ea typeface="B Nazanin"/>
+                <a:latin typeface="Calibri"/>
+                <a:cs typeface="B Nazanin"/>
+                <a:ea typeface="Calibri"/>
                 <a:cs typeface="B Nazanin"/>
               </a:defRPr>
             </a:lvl1pPr>
@@ -8251,16 +8873,40 @@
           <a:chExt cx="0" cy="0"/>
         </a:xfrm>
       </p:grpSpPr>
-      <p:sp>
-        <p:nvSpPr>
-          <p:cNvPr id="2" name="Title"/>
+      <p:pic>
+        <p:nvPicPr>
+          <p:cNvPr id="2" name="PrismArt" descr="prism illustration">    </p:cNvPr>
+          <p:cNvPicPr>
+            <a:picLocks noChangeAspect="1"/>
+          </p:cNvPicPr>
+          <p:nvPr/>
+        </p:nvPicPr>
+        <p:blipFill>
+          <a:blip r:embed="rId1"/>
+          <a:stretch>
+            <a:fillRect/>
+          </a:stretch>
+        </p:blipFill>
+        <p:spPr>
+          <a:xfrm>
+            <a:off x="182880" y="1097280"/>
+            <a:ext cx="3200400" cy="2487168"/>
+          </a:xfrm>
+          <a:prstGeom prst="rect">
+            <a:avLst/>
+          </a:prstGeom>
+        </p:spPr>
+      </p:pic>
+      <p:sp>
+        <p:nvSpPr>
+          <p:cNvPr id="3" name="Title"/>
           <p:cNvSpPr txBox="1"/>
           <p:nvPr/>
         </p:nvSpPr>
         <p:spPr>
           <a:xfrm>
-            <a:off x="640080" y="1371600"/>
-            <a:ext cx="7863840" cy="1097280"/>
+            <a:off x="3566160" y="1371600"/>
+            <a:ext cx="4937760" cy="1097280"/>
           </a:xfrm>
           <a:prstGeom prst="rect">
             <a:avLst/>
@@ -8280,8 +8926,8 @@
                 <a:solidFill>
                   <a:schemeClr val="bg1"/>
                 </a:solidFill>
-                <a:latin typeface="B Zar" pitchFamily="34" charset="0"/>
-                <a:ea typeface="B Zar" pitchFamily="34" charset="-122"/>
+                <a:latin typeface="Calibri" pitchFamily="34" charset="0"/>
+                <a:ea typeface="Calibri" pitchFamily="34" charset="-122"/>
                 <a:cs typeface="B Zar" pitchFamily="34" charset="-120"/>
               </a:rPr>
               <a:t>پرسش و پاسخ</a:t>
@@ -8292,14 +8938,14 @@
       </p:sp>
       <p:sp>
         <p:nvSpPr>
-          <p:cNvPr id="3" name="Subtitle"/>
+          <p:cNvPr id="4" name="Subtitle"/>
           <p:cNvSpPr txBox="1"/>
           <p:nvPr/>
         </p:nvSpPr>
         <p:spPr>
           <a:xfrm>
-            <a:off x="640080" y="2560320"/>
-            <a:ext cx="7863840" cy="548640"/>
+            <a:off x="3566160" y="2560320"/>
+            <a:ext cx="4937760" cy="548640"/>
           </a:xfrm>
           <a:prstGeom prst="rect">
             <a:avLst/>
@@ -8319,8 +8965,8 @@
                 <a:solidFill>
                   <a:srgbClr val="F2B661"/>
                 </a:solidFill>
-                <a:latin typeface="B Nazanin" pitchFamily="34" charset="0"/>
-                <a:ea typeface="B Nazanin" pitchFamily="34" charset="-122"/>
+                <a:latin typeface="Calibri" pitchFamily="34" charset="0"/>
+                <a:ea typeface="Calibri" pitchFamily="34" charset="-122"/>
                 <a:cs typeface="B Nazanin" pitchFamily="34" charset="-120"/>
               </a:rPr>
               <a:t>با سپاس از توجه شما</a:t>
@@ -8331,14 +8977,14 @@
       </p:sp>
       <p:sp>
         <p:nvSpPr>
-          <p:cNvPr id="4" name="Tagline"/>
+          <p:cNvPr id="5" name="Tagline"/>
           <p:cNvSpPr txBox="1"/>
           <p:nvPr/>
         </p:nvSpPr>
         <p:spPr>
           <a:xfrm>
-            <a:off x="640080" y="3200400"/>
-            <a:ext cx="7863840" cy="457200"/>
+            <a:off x="3566160" y="3200400"/>
+            <a:ext cx="4937760" cy="731520"/>
           </a:xfrm>
           <a:prstGeom prst="rect">
             <a:avLst/>
@@ -8358,8 +9004,8 @@
                 <a:solidFill>
                   <a:srgbClr val="CFE3E1"/>
                 </a:solidFill>
-                <a:latin typeface="B Nazanin" pitchFamily="34" charset="0"/>
-                <a:ea typeface="B Nazanin" pitchFamily="34" charset="-122"/>
+                <a:latin typeface="Calibri" pitchFamily="34" charset="0"/>
+                <a:ea typeface="Calibri" pitchFamily="34" charset="-122"/>
                 <a:cs typeface="B Nazanin" pitchFamily="34" charset="-120"/>
               </a:rPr>
               <a:t>بوروکراسی بازتابی از فرهنگ و سیاست هر جامعه است</a:t>
@@ -8425,8 +9071,8 @@
                 <a:solidFill>
                   <a:schemeClr val="accent2"/>
                 </a:solidFill>
-                <a:latin typeface="B Nazanin" pitchFamily="34" charset="0"/>
-                <a:ea typeface="B Nazanin" pitchFamily="34" charset="-122"/>
+                <a:latin typeface="Calibri" pitchFamily="34" charset="0"/>
+                <a:ea typeface="Calibri" pitchFamily="34" charset="-122"/>
                 <a:cs typeface="B Nazanin" pitchFamily="34" charset="-120"/>
               </a:rPr>
               <a:t>آغاز</a:t>
@@ -8466,8 +9112,8 @@
                 <a:solidFill>
                   <a:schemeClr val="accent1"/>
                 </a:solidFill>
-                <a:latin typeface="B Zar" pitchFamily="34" charset="0"/>
-                <a:ea typeface="B Zar" pitchFamily="34" charset="-122"/>
+                <a:latin typeface="Calibri" pitchFamily="34" charset="0"/>
+                <a:ea typeface="Calibri" pitchFamily="34" charset="-122"/>
                 <a:cs typeface="B Zar" pitchFamily="34" charset="-120"/>
               </a:rPr>
               <a:t>فهرست مطالب</a:t>
@@ -8512,14 +9158,14 @@
       </p:sp>
       <p:sp>
         <p:nvSpPr>
-          <p:cNvPr id="5" name="Badge0"/>
+          <p:cNvPr id="5" name="IconBg_FaBookOpen"/>
           <p:cNvSpPr/>
           <p:nvPr/>
         </p:nvSpPr>
         <p:spPr>
           <a:xfrm>
-            <a:off x="8046720" y="1435608"/>
-            <a:ext cx="457200" cy="457200"/>
+            <a:off x="8046720" y="1417320"/>
+            <a:ext cx="475488" cy="475488"/>
           </a:xfrm>
           <a:prstGeom prst="ellipse">
             <a:avLst/>
@@ -8535,16 +9181,40 @@
           </a:ln>
         </p:spPr>
       </p:sp>
-      <p:sp>
-        <p:nvSpPr>
-          <p:cNvPr id="6" name="BadgeNum0"/>
+      <p:pic>
+        <p:nvPicPr>
+          <p:cNvPr id="6" name="Icon_FaBookOpen" descr="FaBookOpen">    </p:cNvPr>
+          <p:cNvPicPr>
+            <a:picLocks noChangeAspect="1"/>
+          </p:cNvPicPr>
+          <p:nvPr/>
+        </p:nvPicPr>
+        <p:blipFill>
+          <a:blip r:embed="rId1"/>
+          <a:stretch>
+            <a:fillRect/>
+          </a:stretch>
+        </p:blipFill>
+        <p:spPr>
+          <a:xfrm>
+            <a:off x="8165592" y="1536192"/>
+            <a:ext cx="237744" cy="237744"/>
+          </a:xfrm>
+          <a:prstGeom prst="rect">
+            <a:avLst/>
+          </a:prstGeom>
+        </p:spPr>
+      </p:pic>
+      <p:sp>
+        <p:nvSpPr>
+          <p:cNvPr id="7" name="GridHead0"/>
           <p:cNvSpPr txBox="1"/>
           <p:nvPr/>
         </p:nvSpPr>
         <p:spPr>
           <a:xfrm>
-            <a:off x="8046720" y="1435608"/>
-            <a:ext cx="457200" cy="457200"/>
+            <a:off x="4892040" y="1389888"/>
+            <a:ext cx="3063240" cy="548640"/>
           </a:xfrm>
           <a:prstGeom prst="rect">
             <a:avLst/>
@@ -8553,37 +9223,37 @@
           <a:ln/>
         </p:spPr>
         <p:txBody>
-          <a:bodyPr wrap="square" lIns="0" tIns="0" rIns="0" bIns="0" rtlCol="0" anchor="ctr"/>
-          <a:lstStyle/>
-          <a:p>
-            <a:pPr rtl="1" algn="ctr" indent="0" marL="0">
+          <a:bodyPr wrap="square" rtlCol="0" anchor="ctr"/>
+          <a:lstStyle/>
+          <a:p>
+            <a:pPr rtl="1" algn="r" indent="0" marL="0">
               <a:buNone/>
             </a:pPr>
             <a:r>
-              <a:rPr lang="fa-IR" sz="1800" b="1" dirty="0">
-                <a:solidFill>
-                  <a:schemeClr val="bg1"/>
-                </a:solidFill>
-                <a:latin typeface="B Zar" pitchFamily="34" charset="0"/>
-                <a:ea typeface="B Zar" pitchFamily="34" charset="-122"/>
+              <a:rPr lang="fa-IR" sz="1700" b="1" dirty="0">
+                <a:solidFill>
+                  <a:schemeClr val="tx2"/>
+                </a:solidFill>
+                <a:latin typeface="Calibri" pitchFamily="34" charset="0"/>
+                <a:ea typeface="Calibri" pitchFamily="34" charset="-122"/>
                 <a:cs typeface="B Zar" pitchFamily="34" charset="-120"/>
               </a:rPr>
-              <a:t>۱</a:t>
-            </a:r>
-            <a:endParaRPr lang="fa-IR" sz="1800" dirty="0"/>
-          </a:p>
-        </p:txBody>
-      </p:sp>
-      <p:sp>
-        <p:nvSpPr>
-          <p:cNvPr id="7" name="GridHead0"/>
+              <a:t>مبانی نظری ریگز و نقد وبر</a:t>
+            </a:r>
+            <a:endParaRPr lang="fa-IR" sz="1700" dirty="0"/>
+          </a:p>
+        </p:txBody>
+      </p:sp>
+      <p:sp>
+        <p:nvSpPr>
+          <p:cNvPr id="8" name="GridBody0"/>
           <p:cNvSpPr txBox="1"/>
           <p:nvPr/>
         </p:nvSpPr>
         <p:spPr>
           <a:xfrm>
-            <a:off x="4892040" y="1389888"/>
-            <a:ext cx="3063240" cy="548640"/>
+            <a:off x="4892040" y="2011680"/>
+            <a:ext cx="3611880" cy="457200"/>
           </a:xfrm>
           <a:prstGeom prst="rect">
             <a:avLst/>
@@ -8592,58 +9262,19 @@
           <a:ln/>
         </p:spPr>
         <p:txBody>
-          <a:bodyPr wrap="square" rtlCol="0" anchor="ctr"/>
+          <a:bodyPr wrap="square" rtlCol="0" anchor="t"/>
           <a:lstStyle/>
           <a:p>
             <a:pPr rtl="1" algn="r" indent="0" marL="0">
               <a:buNone/>
             </a:pPr>
             <a:r>
-              <a:rPr lang="fa-IR" sz="1700" b="1" dirty="0">
-                <a:solidFill>
-                  <a:schemeClr val="tx2"/>
-                </a:solidFill>
-                <a:latin typeface="B Zar" pitchFamily="34" charset="0"/>
-                <a:ea typeface="B Zar" pitchFamily="34" charset="-122"/>
-                <a:cs typeface="B Zar" pitchFamily="34" charset="-120"/>
-              </a:rPr>
-              <a:t>مبانی نظری ریگز و نقد وبر</a:t>
-            </a:r>
-            <a:endParaRPr lang="fa-IR" sz="1700" dirty="0"/>
-          </a:p>
-        </p:txBody>
-      </p:sp>
-      <p:sp>
-        <p:nvSpPr>
-          <p:cNvPr id="8" name="GridBody0"/>
-          <p:cNvSpPr txBox="1"/>
-          <p:nvPr/>
-        </p:nvSpPr>
-        <p:spPr>
-          <a:xfrm>
-            <a:off x="4892040" y="2011680"/>
-            <a:ext cx="3611880" cy="457200"/>
-          </a:xfrm>
-          <a:prstGeom prst="rect">
-            <a:avLst/>
-          </a:prstGeom>
-          <a:noFill/>
-          <a:ln/>
-        </p:spPr>
-        <p:txBody>
-          <a:bodyPr wrap="square" rtlCol="0" anchor="t"/>
-          <a:lstStyle/>
-          <a:p>
-            <a:pPr rtl="1" algn="r" indent="0" marL="0">
-              <a:buNone/>
-            </a:pPr>
-            <a:r>
               <a:rPr lang="fa-IR" sz="1600" dirty="0">
                 <a:solidFill>
                   <a:schemeClr val="tx1"/>
                 </a:solidFill>
-                <a:latin typeface="B Nazanin" pitchFamily="34" charset="0"/>
-                <a:ea typeface="B Nazanin" pitchFamily="34" charset="-122"/>
+                <a:latin typeface="Calibri" pitchFamily="34" charset="0"/>
+                <a:ea typeface="Calibri" pitchFamily="34" charset="-122"/>
                 <a:cs typeface="B Nazanin" pitchFamily="34" charset="-120"/>
               </a:rPr>
               <a:t>مفهوم منشوری، نقد مدل وبری و مدل‌های سه‌گانه</a:t>
@@ -8688,14 +9319,14 @@
       </p:sp>
       <p:sp>
         <p:nvSpPr>
-          <p:cNvPr id="10" name="Badge1"/>
+          <p:cNvPr id="10" name="IconBg_FaGlobe"/>
           <p:cNvSpPr/>
           <p:nvPr/>
         </p:nvSpPr>
         <p:spPr>
           <a:xfrm>
-            <a:off x="3794760" y="1435608"/>
-            <a:ext cx="457200" cy="457200"/>
+            <a:off x="3794760" y="1417320"/>
+            <a:ext cx="475488" cy="475488"/>
           </a:xfrm>
           <a:prstGeom prst="ellipse">
             <a:avLst/>
@@ -8711,16 +9342,40 @@
           </a:ln>
         </p:spPr>
       </p:sp>
-      <p:sp>
-        <p:nvSpPr>
-          <p:cNvPr id="11" name="BadgeNum1"/>
+      <p:pic>
+        <p:nvPicPr>
+          <p:cNvPr id="11" name="Icon_FaGlobe" descr="FaGlobe">    </p:cNvPr>
+          <p:cNvPicPr>
+            <a:picLocks noChangeAspect="1"/>
+          </p:cNvPicPr>
+          <p:nvPr/>
+        </p:nvPicPr>
+        <p:blipFill>
+          <a:blip r:embed="rId2"/>
+          <a:stretch>
+            <a:fillRect/>
+          </a:stretch>
+        </p:blipFill>
+        <p:spPr>
+          <a:xfrm>
+            <a:off x="3913632" y="1536192"/>
+            <a:ext cx="237744" cy="237744"/>
+          </a:xfrm>
+          <a:prstGeom prst="rect">
+            <a:avLst/>
+          </a:prstGeom>
+        </p:spPr>
+      </p:pic>
+      <p:sp>
+        <p:nvSpPr>
+          <p:cNvPr id="12" name="GridHead1"/>
           <p:cNvSpPr txBox="1"/>
           <p:nvPr/>
         </p:nvSpPr>
         <p:spPr>
           <a:xfrm>
-            <a:off x="3794760" y="1435608"/>
-            <a:ext cx="457200" cy="457200"/>
+            <a:off x="640080" y="1389888"/>
+            <a:ext cx="3063240" cy="548640"/>
           </a:xfrm>
           <a:prstGeom prst="rect">
             <a:avLst/>
@@ -8729,37 +9384,37 @@
           <a:ln/>
         </p:spPr>
         <p:txBody>
-          <a:bodyPr wrap="square" lIns="0" tIns="0" rIns="0" bIns="0" rtlCol="0" anchor="ctr"/>
-          <a:lstStyle/>
-          <a:p>
-            <a:pPr rtl="1" algn="ctr" indent="0" marL="0">
+          <a:bodyPr wrap="square" rtlCol="0" anchor="ctr"/>
+          <a:lstStyle/>
+          <a:p>
+            <a:pPr rtl="1" algn="r" indent="0" marL="0">
               <a:buNone/>
             </a:pPr>
             <a:r>
-              <a:rPr lang="fa-IR" sz="1800" b="1" dirty="0">
-                <a:solidFill>
-                  <a:schemeClr val="bg1"/>
-                </a:solidFill>
-                <a:latin typeface="B Zar" pitchFamily="34" charset="0"/>
-                <a:ea typeface="B Zar" pitchFamily="34" charset="-122"/>
+              <a:rPr lang="fa-IR" sz="1700" b="1" dirty="0">
+                <a:solidFill>
+                  <a:schemeClr val="tx2"/>
+                </a:solidFill>
+                <a:latin typeface="Calibri" pitchFamily="34" charset="0"/>
+                <a:ea typeface="Calibri" pitchFamily="34" charset="-122"/>
                 <a:cs typeface="B Zar" pitchFamily="34" charset="-120"/>
               </a:rPr>
-              <a:t>۲</a:t>
-            </a:r>
-            <a:endParaRPr lang="fa-IR" sz="1800" dirty="0"/>
-          </a:p>
-        </p:txBody>
-      </p:sp>
-      <p:sp>
-        <p:nvSpPr>
-          <p:cNvPr id="12" name="GridHead1"/>
+              <a:t>جامعه، حکومت و بوم‌شناسی اداری</a:t>
+            </a:r>
+            <a:endParaRPr lang="fa-IR" sz="1700" dirty="0"/>
+          </a:p>
+        </p:txBody>
+      </p:sp>
+      <p:sp>
+        <p:nvSpPr>
+          <p:cNvPr id="13" name="GridBody1"/>
           <p:cNvSpPr txBox="1"/>
           <p:nvPr/>
         </p:nvSpPr>
         <p:spPr>
           <a:xfrm>
-            <a:off x="640080" y="1389888"/>
-            <a:ext cx="3063240" cy="548640"/>
+            <a:off x="640080" y="2011680"/>
+            <a:ext cx="3611880" cy="457200"/>
           </a:xfrm>
           <a:prstGeom prst="rect">
             <a:avLst/>
@@ -8768,58 +9423,19 @@
           <a:ln/>
         </p:spPr>
         <p:txBody>
-          <a:bodyPr wrap="square" rtlCol="0" anchor="ctr"/>
+          <a:bodyPr wrap="square" rtlCol="0" anchor="t"/>
           <a:lstStyle/>
           <a:p>
             <a:pPr rtl="1" algn="r" indent="0" marL="0">
               <a:buNone/>
             </a:pPr>
             <a:r>
-              <a:rPr lang="fa-IR" sz="1700" b="1" dirty="0">
-                <a:solidFill>
-                  <a:schemeClr val="tx2"/>
-                </a:solidFill>
-                <a:latin typeface="B Zar" pitchFamily="34" charset="0"/>
-                <a:ea typeface="B Zar" pitchFamily="34" charset="-122"/>
-                <a:cs typeface="B Zar" pitchFamily="34" charset="-120"/>
-              </a:rPr>
-              <a:t>جامعه، حکومت و بوم‌شناسی اداری</a:t>
-            </a:r>
-            <a:endParaRPr lang="fa-IR" sz="1700" dirty="0"/>
-          </a:p>
-        </p:txBody>
-      </p:sp>
-      <p:sp>
-        <p:nvSpPr>
-          <p:cNvPr id="13" name="GridBody1"/>
-          <p:cNvSpPr txBox="1"/>
-          <p:nvPr/>
-        </p:nvSpPr>
-        <p:spPr>
-          <a:xfrm>
-            <a:off x="640080" y="2011680"/>
-            <a:ext cx="3611880" cy="457200"/>
-          </a:xfrm>
-          <a:prstGeom prst="rect">
-            <a:avLst/>
-          </a:prstGeom>
-          <a:noFill/>
-          <a:ln/>
-        </p:spPr>
-        <p:txBody>
-          <a:bodyPr wrap="square" rtlCol="0" anchor="t"/>
-          <a:lstStyle/>
-          <a:p>
-            <a:pPr rtl="1" algn="r" indent="0" marL="0">
-              <a:buNone/>
-            </a:pPr>
-            <a:r>
               <a:rPr lang="fa-IR" sz="1600" dirty="0">
                 <a:solidFill>
                   <a:schemeClr val="tx1"/>
                 </a:solidFill>
-                <a:latin typeface="B Nazanin" pitchFamily="34" charset="0"/>
-                <a:ea typeface="B Nazanin" pitchFamily="34" charset="-122"/>
+                <a:latin typeface="Calibri" pitchFamily="34" charset="0"/>
+                <a:ea typeface="Calibri" pitchFamily="34" charset="-122"/>
                 <a:cs typeface="B Nazanin" pitchFamily="34" charset="-120"/>
               </a:rPr>
               <a:t>یکپارچگی جوامع، نظام‌های سیاسی و نظریه گاوس</a:t>
@@ -8864,14 +9480,14 @@
       </p:sp>
       <p:sp>
         <p:nvSpPr>
-          <p:cNvPr id="15" name="Badge2"/>
+          <p:cNvPr id="15" name="IconBg_FaLandmark"/>
           <p:cNvSpPr/>
           <p:nvPr/>
         </p:nvSpPr>
         <p:spPr>
           <a:xfrm>
-            <a:off x="8046720" y="2852928"/>
-            <a:ext cx="457200" cy="457200"/>
+            <a:off x="8046720" y="2834640"/>
+            <a:ext cx="475488" cy="475488"/>
           </a:xfrm>
           <a:prstGeom prst="ellipse">
             <a:avLst/>
@@ -8887,16 +9503,40 @@
           </a:ln>
         </p:spPr>
       </p:sp>
-      <p:sp>
-        <p:nvSpPr>
-          <p:cNvPr id="16" name="BadgeNum2"/>
+      <p:pic>
+        <p:nvPicPr>
+          <p:cNvPr id="16" name="Icon_FaLandmark" descr="FaLandmark">    </p:cNvPr>
+          <p:cNvPicPr>
+            <a:picLocks noChangeAspect="1"/>
+          </p:cNvPicPr>
+          <p:nvPr/>
+        </p:nvPicPr>
+        <p:blipFill>
+          <a:blip r:embed="rId3"/>
+          <a:stretch>
+            <a:fillRect/>
+          </a:stretch>
+        </p:blipFill>
+        <p:spPr>
+          <a:xfrm>
+            <a:off x="8165592" y="2953512"/>
+            <a:ext cx="237744" cy="237744"/>
+          </a:xfrm>
+          <a:prstGeom prst="rect">
+            <a:avLst/>
+          </a:prstGeom>
+        </p:spPr>
+      </p:pic>
+      <p:sp>
+        <p:nvSpPr>
+          <p:cNvPr id="17" name="GridHead2"/>
           <p:cNvSpPr txBox="1"/>
           <p:nvPr/>
         </p:nvSpPr>
         <p:spPr>
           <a:xfrm>
-            <a:off x="8046720" y="2852928"/>
-            <a:ext cx="457200" cy="457200"/>
+            <a:off x="4892040" y="2807208"/>
+            <a:ext cx="3063240" cy="548640"/>
           </a:xfrm>
           <a:prstGeom prst="rect">
             <a:avLst/>
@@ -8905,37 +9545,37 @@
           <a:ln/>
         </p:spPr>
         <p:txBody>
-          <a:bodyPr wrap="square" lIns="0" tIns="0" rIns="0" bIns="0" rtlCol="0" anchor="ctr"/>
-          <a:lstStyle/>
-          <a:p>
-            <a:pPr rtl="1" algn="ctr" indent="0" marL="0">
+          <a:bodyPr wrap="square" rtlCol="0" anchor="ctr"/>
+          <a:lstStyle/>
+          <a:p>
+            <a:pPr rtl="1" algn="r" indent="0" marL="0">
               <a:buNone/>
             </a:pPr>
             <a:r>
-              <a:rPr lang="fa-IR" sz="1800" b="1" dirty="0">
-                <a:solidFill>
-                  <a:schemeClr val="bg1"/>
-                </a:solidFill>
-                <a:latin typeface="B Zar" pitchFamily="34" charset="0"/>
-                <a:ea typeface="B Zar" pitchFamily="34" charset="-122"/>
+              <a:rPr lang="fa-IR" sz="1700" b="1" dirty="0">
+                <a:solidFill>
+                  <a:schemeClr val="tx2"/>
+                </a:solidFill>
+                <a:latin typeface="Calibri" pitchFamily="34" charset="0"/>
+                <a:ea typeface="Calibri" pitchFamily="34" charset="-122"/>
                 <a:cs typeface="B Zar" pitchFamily="34" charset="-120"/>
               </a:rPr>
-              <a:t>۳</a:t>
-            </a:r>
-            <a:endParaRPr lang="fa-IR" sz="1800" dirty="0"/>
-          </a:p>
-        </p:txBody>
-      </p:sp>
-      <p:sp>
-        <p:nvSpPr>
-          <p:cNvPr id="17" name="GridHead2"/>
+              <a:t>دولت و نظام‌های اداری</a:t>
+            </a:r>
+            <a:endParaRPr lang="fa-IR" sz="1700" dirty="0"/>
+          </a:p>
+        </p:txBody>
+      </p:sp>
+      <p:sp>
+        <p:nvSpPr>
+          <p:cNvPr id="18" name="GridBody2"/>
           <p:cNvSpPr txBox="1"/>
           <p:nvPr/>
         </p:nvSpPr>
         <p:spPr>
           <a:xfrm>
-            <a:off x="4892040" y="2807208"/>
-            <a:ext cx="3063240" cy="548640"/>
+            <a:off x="4892040" y="3429000"/>
+            <a:ext cx="3611880" cy="457200"/>
           </a:xfrm>
           <a:prstGeom prst="rect">
             <a:avLst/>
@@ -8944,58 +9584,19 @@
           <a:ln/>
         </p:spPr>
         <p:txBody>
-          <a:bodyPr wrap="square" rtlCol="0" anchor="ctr"/>
+          <a:bodyPr wrap="square" rtlCol="0" anchor="t"/>
           <a:lstStyle/>
           <a:p>
             <a:pPr rtl="1" algn="r" indent="0" marL="0">
               <a:buNone/>
             </a:pPr>
             <a:r>
-              <a:rPr lang="fa-IR" sz="1700" b="1" dirty="0">
-                <a:solidFill>
-                  <a:schemeClr val="tx2"/>
-                </a:solidFill>
-                <a:latin typeface="B Zar" pitchFamily="34" charset="0"/>
-                <a:ea typeface="B Zar" pitchFamily="34" charset="-122"/>
-                <a:cs typeface="B Zar" pitchFamily="34" charset="-120"/>
-              </a:rPr>
-              <a:t>دولت و نظام‌های اداری</a:t>
-            </a:r>
-            <a:endParaRPr lang="fa-IR" sz="1700" dirty="0"/>
-          </a:p>
-        </p:txBody>
-      </p:sp>
-      <p:sp>
-        <p:nvSpPr>
-          <p:cNvPr id="18" name="GridBody2"/>
-          <p:cNvSpPr txBox="1"/>
-          <p:nvPr/>
-        </p:nvSpPr>
-        <p:spPr>
-          <a:xfrm>
-            <a:off x="4892040" y="3429000"/>
-            <a:ext cx="3611880" cy="457200"/>
-          </a:xfrm>
-          <a:prstGeom prst="rect">
-            <a:avLst/>
-          </a:prstGeom>
-          <a:noFill/>
-          <a:ln/>
-        </p:spPr>
-        <p:txBody>
-          <a:bodyPr wrap="square" rtlCol="0" anchor="t"/>
-          <a:lstStyle/>
-          <a:p>
-            <a:pPr rtl="1" algn="r" indent="0" marL="0">
-              <a:buNone/>
-            </a:pPr>
-            <a:r>
               <a:rPr lang="fa-IR" sz="1600" dirty="0">
                 <a:solidFill>
                   <a:schemeClr val="tx1"/>
                 </a:solidFill>
-                <a:latin typeface="B Nazanin" pitchFamily="34" charset="0"/>
-                <a:ea typeface="B Nazanin" pitchFamily="34" charset="-122"/>
+                <a:latin typeface="Calibri" pitchFamily="34" charset="0"/>
+                <a:ea typeface="Calibri" pitchFamily="34" charset="-122"/>
                 <a:cs typeface="B Nazanin" pitchFamily="34" charset="-120"/>
               </a:rPr>
               <a:t>اندازه دولت، مدل‌های توسعه و انواع نظام‌های اداری</a:t>
@@ -9040,14 +9641,14 @@
       </p:sp>
       <p:sp>
         <p:nvSpPr>
-          <p:cNvPr id="20" name="Badge3"/>
+          <p:cNvPr id="20" name="IconBg_FaCircleCheck"/>
           <p:cNvSpPr/>
           <p:nvPr/>
         </p:nvSpPr>
         <p:spPr>
           <a:xfrm>
-            <a:off x="3794760" y="2852928"/>
-            <a:ext cx="457200" cy="457200"/>
+            <a:off x="3794760" y="2834640"/>
+            <a:ext cx="475488" cy="475488"/>
           </a:xfrm>
           <a:prstGeom prst="ellipse">
             <a:avLst/>
@@ -9063,16 +9664,40 @@
           </a:ln>
         </p:spPr>
       </p:sp>
-      <p:sp>
-        <p:nvSpPr>
-          <p:cNvPr id="21" name="BadgeNum3"/>
+      <p:pic>
+        <p:nvPicPr>
+          <p:cNvPr id="21" name="Icon_FaCircleCheck" descr="FaCircleCheck">    </p:cNvPr>
+          <p:cNvPicPr>
+            <a:picLocks noChangeAspect="1"/>
+          </p:cNvPicPr>
+          <p:nvPr/>
+        </p:nvPicPr>
+        <p:blipFill>
+          <a:blip r:embed="rId4"/>
+          <a:stretch>
+            <a:fillRect/>
+          </a:stretch>
+        </p:blipFill>
+        <p:spPr>
+          <a:xfrm>
+            <a:off x="3913632" y="2953512"/>
+            <a:ext cx="237744" cy="237744"/>
+          </a:xfrm>
+          <a:prstGeom prst="rect">
+            <a:avLst/>
+          </a:prstGeom>
+        </p:spPr>
+      </p:pic>
+      <p:sp>
+        <p:nvSpPr>
+          <p:cNvPr id="22" name="GridHead3"/>
           <p:cNvSpPr txBox="1"/>
           <p:nvPr/>
         </p:nvSpPr>
         <p:spPr>
           <a:xfrm>
-            <a:off x="3794760" y="2852928"/>
-            <a:ext cx="457200" cy="457200"/>
+            <a:off x="640080" y="2807208"/>
+            <a:ext cx="3063240" cy="548640"/>
           </a:xfrm>
           <a:prstGeom prst="rect">
             <a:avLst/>
@@ -9081,37 +9706,37 @@
           <a:ln/>
         </p:spPr>
         <p:txBody>
-          <a:bodyPr wrap="square" lIns="0" tIns="0" rIns="0" bIns="0" rtlCol="0" anchor="ctr"/>
-          <a:lstStyle/>
-          <a:p>
-            <a:pPr rtl="1" algn="ctr" indent="0" marL="0">
+          <a:bodyPr wrap="square" rtlCol="0" anchor="ctr"/>
+          <a:lstStyle/>
+          <a:p>
+            <a:pPr rtl="1" algn="r" indent="0" marL="0">
               <a:buNone/>
             </a:pPr>
             <a:r>
-              <a:rPr lang="fa-IR" sz="1800" b="1" dirty="0">
-                <a:solidFill>
-                  <a:schemeClr val="bg1"/>
-                </a:solidFill>
-                <a:latin typeface="B Zar" pitchFamily="34" charset="0"/>
-                <a:ea typeface="B Zar" pitchFamily="34" charset="-122"/>
+              <a:rPr lang="fa-IR" sz="1700" b="1" dirty="0">
+                <a:solidFill>
+                  <a:schemeClr val="tx2"/>
+                </a:solidFill>
+                <a:latin typeface="Calibri" pitchFamily="34" charset="0"/>
+                <a:ea typeface="Calibri" pitchFamily="34" charset="-122"/>
                 <a:cs typeface="B Zar" pitchFamily="34" charset="-120"/>
               </a:rPr>
-              <a:t>۴</a:t>
-            </a:r>
-            <a:endParaRPr lang="fa-IR" sz="1800" dirty="0"/>
-          </a:p>
-        </p:txBody>
-      </p:sp>
-      <p:sp>
-        <p:nvSpPr>
-          <p:cNvPr id="22" name="GridHead3"/>
+              <a:t>جمع‌بندی و کاربرد در کلاس</a:t>
+            </a:r>
+            <a:endParaRPr lang="fa-IR" sz="1700" dirty="0"/>
+          </a:p>
+        </p:txBody>
+      </p:sp>
+      <p:sp>
+        <p:nvSpPr>
+          <p:cNvPr id="23" name="GridBody3"/>
           <p:cNvSpPr txBox="1"/>
           <p:nvPr/>
         </p:nvSpPr>
         <p:spPr>
           <a:xfrm>
-            <a:off x="640080" y="2807208"/>
-            <a:ext cx="3063240" cy="548640"/>
+            <a:off x="640080" y="3429000"/>
+            <a:ext cx="3611880" cy="457200"/>
           </a:xfrm>
           <a:prstGeom prst="rect">
             <a:avLst/>
@@ -9120,58 +9745,19 @@
           <a:ln/>
         </p:spPr>
         <p:txBody>
-          <a:bodyPr wrap="square" rtlCol="0" anchor="ctr"/>
+          <a:bodyPr wrap="square" rtlCol="0" anchor="t"/>
           <a:lstStyle/>
           <a:p>
             <a:pPr rtl="1" algn="r" indent="0" marL="0">
               <a:buNone/>
             </a:pPr>
             <a:r>
-              <a:rPr lang="fa-IR" sz="1700" b="1" dirty="0">
-                <a:solidFill>
-                  <a:schemeClr val="tx2"/>
-                </a:solidFill>
-                <a:latin typeface="B Zar" pitchFamily="34" charset="0"/>
-                <a:ea typeface="B Zar" pitchFamily="34" charset="-122"/>
-                <a:cs typeface="B Zar" pitchFamily="34" charset="-120"/>
-              </a:rPr>
-              <a:t>جمع‌بندی و کاربرد در کلاس</a:t>
-            </a:r>
-            <a:endParaRPr lang="fa-IR" sz="1700" dirty="0"/>
-          </a:p>
-        </p:txBody>
-      </p:sp>
-      <p:sp>
-        <p:nvSpPr>
-          <p:cNvPr id="23" name="GridBody3"/>
-          <p:cNvSpPr txBox="1"/>
-          <p:nvPr/>
-        </p:nvSpPr>
-        <p:spPr>
-          <a:xfrm>
-            <a:off x="640080" y="3429000"/>
-            <a:ext cx="3611880" cy="457200"/>
-          </a:xfrm>
-          <a:prstGeom prst="rect">
-            <a:avLst/>
-          </a:prstGeom>
-          <a:noFill/>
-          <a:ln/>
-        </p:spPr>
-        <p:txBody>
-          <a:bodyPr wrap="square" rtlCol="0" anchor="t"/>
-          <a:lstStyle/>
-          <a:p>
-            <a:pPr rtl="1" algn="r" indent="0" marL="0">
-              <a:buNone/>
-            </a:pPr>
-            <a:r>
               <a:rPr lang="fa-IR" sz="1600" dirty="0">
                 <a:solidFill>
                   <a:schemeClr val="tx1"/>
                 </a:solidFill>
-                <a:latin typeface="B Nazanin" pitchFamily="34" charset="0"/>
-                <a:ea typeface="B Nazanin" pitchFamily="34" charset="-122"/>
+                <a:latin typeface="Calibri" pitchFamily="34" charset="0"/>
+                <a:ea typeface="Calibri" pitchFamily="34" charset="-122"/>
                 <a:cs typeface="B Nazanin" pitchFamily="34" charset="-120"/>
               </a:rPr>
               <a:t>نتیجه‌گیری و نکات کلیدی ارائه</a:t>
@@ -9212,8 +9798,9 @@
                 <a:solidFill>
                   <a:srgbClr val="6B7A86"/>
                 </a:solidFill>
-                <a:latin typeface="B Nazanin"/>
-                <a:ea typeface="B Nazanin"/>
+                <a:latin typeface="Calibri"/>
+                <a:cs typeface="B Nazanin"/>
+                <a:ea typeface="Calibri"/>
                 <a:cs typeface="B Nazanin"/>
               </a:defRPr>
             </a:lvl1pPr>
@@ -9317,8 +9904,8 @@
                 <a:solidFill>
                   <a:schemeClr val="bg1"/>
                 </a:solidFill>
-                <a:latin typeface="B Zar" pitchFamily="34" charset="0"/>
-                <a:ea typeface="B Zar" pitchFamily="34" charset="-122"/>
+                <a:latin typeface="Calibri" pitchFamily="34" charset="0"/>
+                <a:ea typeface="Calibri" pitchFamily="34" charset="-122"/>
                 <a:cs typeface="B Zar" pitchFamily="34" charset="-120"/>
               </a:rPr>
               <a:t>۱</a:t>
@@ -9327,16 +9914,40 @@
           </a:p>
         </p:txBody>
       </p:sp>
-      <p:sp>
-        <p:nvSpPr>
-          <p:cNvPr id="4" name="Title"/>
+      <p:pic>
+        <p:nvPicPr>
+          <p:cNvPr id="4" name="DividerArt" descr="hier illustration">    </p:cNvPr>
+          <p:cNvPicPr>
+            <a:picLocks noChangeAspect="1"/>
+          </p:cNvPicPr>
+          <p:nvPr/>
+        </p:nvPicPr>
+        <p:blipFill>
+          <a:blip r:embed="rId1"/>
+          <a:stretch>
+            <a:fillRect/>
+          </a:stretch>
+        </p:blipFill>
+        <p:spPr>
+          <a:xfrm>
+            <a:off x="365760" y="914400"/>
+            <a:ext cx="3840480" cy="2990088"/>
+          </a:xfrm>
+          <a:prstGeom prst="rect">
+            <a:avLst/>
+          </a:prstGeom>
+        </p:spPr>
+      </p:pic>
+      <p:sp>
+        <p:nvSpPr>
+          <p:cNvPr id="5" name="Title"/>
           <p:cNvSpPr txBox="1"/>
           <p:nvPr/>
         </p:nvSpPr>
         <p:spPr>
           <a:xfrm>
-            <a:off x="640080" y="2377440"/>
-            <a:ext cx="7863840" cy="914400"/>
+            <a:off x="4389120" y="2286000"/>
+            <a:ext cx="4114800" cy="1097280"/>
           </a:xfrm>
           <a:prstGeom prst="rect">
             <a:avLst/>
@@ -9354,30 +9965,30 @@
               <a:buNone/>
             </a:pPr>
             <a:r>
-              <a:rPr lang="fa-IR" sz="3800" b="1" dirty="0">
+              <a:rPr lang="fa-IR" sz="3400" b="1" dirty="0">
                 <a:solidFill>
                   <a:schemeClr val="bg1"/>
                 </a:solidFill>
-                <a:latin typeface="B Zar" pitchFamily="34" charset="0"/>
-                <a:ea typeface="B Zar" pitchFamily="34" charset="-122"/>
+                <a:latin typeface="Calibri" pitchFamily="34" charset="0"/>
+                <a:ea typeface="Calibri" pitchFamily="34" charset="-122"/>
                 <a:cs typeface="B Zar" pitchFamily="34" charset="-120"/>
               </a:rPr>
               <a:t>مبانی نظری ریگز و نقد وبر</a:t>
             </a:r>
-            <a:endParaRPr lang="fa-IR" sz="3800" dirty="0"/>
-          </a:p>
-        </p:txBody>
-      </p:sp>
-      <p:sp>
-        <p:nvSpPr>
-          <p:cNvPr id="5" name="Subtitle"/>
+            <a:endParaRPr lang="fa-IR" sz="3400" dirty="0"/>
+          </a:p>
+        </p:txBody>
+      </p:sp>
+      <p:sp>
+        <p:nvSpPr>
+          <p:cNvPr id="6" name="Subtitle"/>
           <p:cNvSpPr txBox="1"/>
           <p:nvPr/>
         </p:nvSpPr>
         <p:spPr>
           <a:xfrm>
-            <a:off x="640080" y="3337560"/>
-            <a:ext cx="7863840" cy="457200"/>
+            <a:off x="4389120" y="3429000"/>
+            <a:ext cx="4114800" cy="822960"/>
           </a:xfrm>
           <a:prstGeom prst="rect">
             <a:avLst/>
@@ -9393,17 +10004,17 @@
               <a:buNone/>
             </a:pPr>
             <a:r>
-              <a:rPr lang="fa-IR" sz="2000" dirty="0">
+              <a:rPr lang="fa-IR" sz="1800" dirty="0">
                 <a:solidFill>
                   <a:srgbClr val="CFE3E1"/>
                 </a:solidFill>
-                <a:latin typeface="B Nazanin" pitchFamily="34" charset="0"/>
-                <a:ea typeface="B Nazanin" pitchFamily="34" charset="-122"/>
+                <a:latin typeface="Calibri" pitchFamily="34" charset="0"/>
+                <a:ea typeface="Calibri" pitchFamily="34" charset="-122"/>
                 <a:cs typeface="B Nazanin" pitchFamily="34" charset="-120"/>
               </a:rPr>
               <a:t>مفهوم منشوری، نقد مدل وبری و مدل‌های سه‌گانه</a:t>
             </a:r>
-            <a:endParaRPr lang="fa-IR" sz="2000" dirty="0"/>
+            <a:endParaRPr lang="fa-IR" sz="1800" dirty="0"/>
           </a:p>
         </p:txBody>
       </p:sp>
@@ -9464,8 +10075,8 @@
                 <a:solidFill>
                   <a:schemeClr val="accent2"/>
                 </a:solidFill>
-                <a:latin typeface="B Nazanin" pitchFamily="34" charset="0"/>
-                <a:ea typeface="B Nazanin" pitchFamily="34" charset="-122"/>
+                <a:latin typeface="Calibri" pitchFamily="34" charset="0"/>
+                <a:ea typeface="Calibri" pitchFamily="34" charset="-122"/>
                 <a:cs typeface="B Nazanin" pitchFamily="34" charset="-120"/>
               </a:rPr>
               <a:t>بخش اول: مبانی نظری ریگز و نقد وبر</a:t>
@@ -9505,8 +10116,8 @@
                 <a:solidFill>
                   <a:schemeClr val="accent1"/>
                 </a:solidFill>
-                <a:latin typeface="B Zar" pitchFamily="34" charset="0"/>
-                <a:ea typeface="B Zar" pitchFamily="34" charset="-122"/>
+                <a:latin typeface="Calibri" pitchFamily="34" charset="0"/>
+                <a:ea typeface="Calibri" pitchFamily="34" charset="-122"/>
                 <a:cs typeface="B Zar" pitchFamily="34" charset="-120"/>
               </a:rPr>
               <a:t>مقدمه و مفهوم «ریگز»</a:t>
@@ -9551,14 +10162,63 @@
       </p:sp>
       <p:sp>
         <p:nvSpPr>
-          <p:cNvPr id="5" name="CardHead0"/>
+          <p:cNvPr id="5" name="IconBg_FaUserGraduate"/>
+          <p:cNvSpPr/>
+          <p:nvPr/>
+        </p:nvSpPr>
+        <p:spPr>
+          <a:xfrm>
+            <a:off x="8138160" y="1344168"/>
+            <a:ext cx="420624" cy="420624"/>
+          </a:xfrm>
+          <a:prstGeom prst="ellipse">
+            <a:avLst/>
+          </a:prstGeom>
+          <a:solidFill>
+            <a:schemeClr val="accent1"/>
+          </a:solidFill>
+          <a:ln w="12700">
+            <a:solidFill>
+              <a:schemeClr val="accent1"/>
+            </a:solidFill>
+            <a:prstDash val="solid"/>
+          </a:ln>
+        </p:spPr>
+      </p:sp>
+      <p:pic>
+        <p:nvPicPr>
+          <p:cNvPr id="6" name="Icon_FaUserGraduate" descr="FaUserGraduate">    </p:cNvPr>
+          <p:cNvPicPr>
+            <a:picLocks noChangeAspect="1"/>
+          </p:cNvPicPr>
+          <p:nvPr/>
+        </p:nvPicPr>
+        <p:blipFill>
+          <a:blip r:embed="rId1"/>
+          <a:stretch>
+            <a:fillRect/>
+          </a:stretch>
+        </p:blipFill>
+        <p:spPr>
+          <a:xfrm>
+            <a:off x="8243316" y="1449324"/>
+            <a:ext cx="210312" cy="210312"/>
+          </a:xfrm>
+          <a:prstGeom prst="rect">
+            <a:avLst/>
+          </a:prstGeom>
+        </p:spPr>
+      </p:pic>
+      <p:sp>
+        <p:nvSpPr>
+          <p:cNvPr id="7" name="CardHead0"/>
           <p:cNvSpPr txBox="1"/>
           <p:nvPr/>
         </p:nvSpPr>
         <p:spPr>
           <a:xfrm>
             <a:off x="4846320" y="1325880"/>
-            <a:ext cx="3703320" cy="640080"/>
+            <a:ext cx="3200400" cy="640080"/>
           </a:xfrm>
           <a:prstGeom prst="rect">
             <a:avLst/>
@@ -9578,8 +10238,8 @@
                 <a:solidFill>
                   <a:schemeClr val="tx2"/>
                 </a:solidFill>
-                <a:latin typeface="B Zar" pitchFamily="34" charset="0"/>
-                <a:ea typeface="B Zar" pitchFamily="34" charset="-122"/>
+                <a:latin typeface="Calibri" pitchFamily="34" charset="0"/>
+                <a:ea typeface="Calibri" pitchFamily="34" charset="-122"/>
                 <a:cs typeface="B Zar" pitchFamily="34" charset="-120"/>
               </a:rPr>
               <a:t>فرد ریگز (Riggs)</a:t>
@@ -9590,7 +10250,7 @@
       </p:sp>
       <p:sp>
         <p:nvSpPr>
-          <p:cNvPr id="6" name="CardBody0"/>
+          <p:cNvPr id="8" name="CardBody0"/>
           <p:cNvSpPr txBox="1"/>
           <p:nvPr/>
         </p:nvSpPr>
@@ -9621,8 +10281,8 @@
                 <a:solidFill>
                   <a:schemeClr val="tx1"/>
                 </a:solidFill>
-                <a:latin typeface="B Nazanin" pitchFamily="34" charset="0"/>
-                <a:ea typeface="B Nazanin" pitchFamily="34" charset="-122"/>
+                <a:latin typeface="Calibri" pitchFamily="34" charset="0"/>
+                <a:ea typeface="Calibri" pitchFamily="34" charset="-122"/>
                 <a:cs typeface="B Nazanin" pitchFamily="34" charset="-120"/>
               </a:rPr>
               <a:t>تئوری منشوری (Prismatic Theory)</a:t>
@@ -9642,8 +10302,8 @@
                 <a:solidFill>
                   <a:schemeClr val="tx1"/>
                 </a:solidFill>
-                <a:latin typeface="B Nazanin" pitchFamily="34" charset="0"/>
-                <a:ea typeface="B Nazanin" pitchFamily="34" charset="-122"/>
+                <a:latin typeface="Calibri" pitchFamily="34" charset="0"/>
+                <a:ea typeface="Calibri" pitchFamily="34" charset="-122"/>
                 <a:cs typeface="B Nazanin" pitchFamily="34" charset="-120"/>
               </a:rPr>
               <a:t>کشورهای در حال توسعه = ساختارهای «منشوری» (ترکیب سنت + مدرنیته)</a:t>
@@ -9654,7 +10314,7 @@
       </p:sp>
       <p:sp>
         <p:nvSpPr>
-          <p:cNvPr id="7" name="Card1"/>
+          <p:cNvPr id="9" name="Card1"/>
           <p:cNvSpPr/>
           <p:nvPr/>
         </p:nvSpPr>
@@ -9688,14 +10348,63 @@
       </p:sp>
       <p:sp>
         <p:nvSpPr>
-          <p:cNvPr id="8" name="CardHead1"/>
+          <p:cNvPr id="10" name="IconBg_FaBuilding"/>
+          <p:cNvSpPr/>
+          <p:nvPr/>
+        </p:nvSpPr>
+        <p:spPr>
+          <a:xfrm>
+            <a:off x="3886200" y="1344168"/>
+            <a:ext cx="420624" cy="420624"/>
+          </a:xfrm>
+          <a:prstGeom prst="ellipse">
+            <a:avLst/>
+          </a:prstGeom>
+          <a:solidFill>
+            <a:schemeClr val="accent2"/>
+          </a:solidFill>
+          <a:ln w="12700">
+            <a:solidFill>
+              <a:schemeClr val="accent2"/>
+            </a:solidFill>
+            <a:prstDash val="solid"/>
+          </a:ln>
+        </p:spPr>
+      </p:sp>
+      <p:pic>
+        <p:nvPicPr>
+          <p:cNvPr id="11" name="Icon_FaBuilding" descr="FaBuilding">    </p:cNvPr>
+          <p:cNvPicPr>
+            <a:picLocks noChangeAspect="1"/>
+          </p:cNvPicPr>
+          <p:nvPr/>
+        </p:nvPicPr>
+        <p:blipFill>
+          <a:blip r:embed="rId2"/>
+          <a:stretch>
+            <a:fillRect/>
+          </a:stretch>
+        </p:blipFill>
+        <p:spPr>
+          <a:xfrm>
+            <a:off x="3991356" y="1449324"/>
+            <a:ext cx="210312" cy="210312"/>
+          </a:xfrm>
+          <a:prstGeom prst="rect">
+            <a:avLst/>
+          </a:prstGeom>
+        </p:spPr>
+      </p:pic>
+      <p:sp>
+        <p:nvSpPr>
+          <p:cNvPr id="12" name="CardHead1"/>
           <p:cNvSpPr txBox="1"/>
           <p:nvPr/>
         </p:nvSpPr>
         <p:spPr>
           <a:xfrm>
             <a:off x="594360" y="1325880"/>
-            <a:ext cx="3703320" cy="640080"/>
+            <a:ext cx="3200400" cy="640080"/>
           </a:xfrm>
           <a:prstGeom prst="rect">
             <a:avLst/>
@@ -9715,8 +10424,8 @@
                 <a:solidFill>
                   <a:schemeClr val="tx2"/>
                 </a:solidFill>
-                <a:latin typeface="B Zar" pitchFamily="34" charset="0"/>
-                <a:ea typeface="B Zar" pitchFamily="34" charset="-122"/>
+                <a:latin typeface="Calibri" pitchFamily="34" charset="0"/>
+                <a:ea typeface="Calibri" pitchFamily="34" charset="-122"/>
                 <a:cs typeface="B Zar" pitchFamily="34" charset="-120"/>
               </a:rPr>
               <a:t>مفهوم «سالا» (Sala)</a:t>
@@ -9727,7 +10436,7 @@
       </p:sp>
       <p:sp>
         <p:nvSpPr>
-          <p:cNvPr id="9" name="CardBody1"/>
+          <p:cNvPr id="13" name="CardBody1"/>
           <p:cNvSpPr txBox="1"/>
           <p:nvPr/>
         </p:nvSpPr>
@@ -9758,8 +10467,8 @@
                 <a:solidFill>
                   <a:schemeClr val="tx1"/>
                 </a:solidFill>
-                <a:latin typeface="B Nazanin" pitchFamily="34" charset="0"/>
-                <a:ea typeface="B Nazanin" pitchFamily="34" charset="-122"/>
+                <a:latin typeface="Calibri" pitchFamily="34" charset="0"/>
+                <a:ea typeface="Calibri" pitchFamily="34" charset="-122"/>
                 <a:cs typeface="B Nazanin" pitchFamily="34" charset="-120"/>
               </a:rPr>
               <a:t>دیوان (Bureau): هر سه مدل (متمرکز، مرکب، وسیع)</a:t>
@@ -9779,8 +10488,8 @@
                 <a:solidFill>
                   <a:schemeClr val="tx1"/>
                 </a:solidFill>
-                <a:latin typeface="B Nazanin" pitchFamily="34" charset="0"/>
-                <a:ea typeface="B Nazanin" pitchFamily="34" charset="-122"/>
+                <a:latin typeface="Calibri" pitchFamily="34" charset="0"/>
+                <a:ea typeface="Calibri" pitchFamily="34" charset="-122"/>
                 <a:cs typeface="B Nazanin" pitchFamily="34" charset="-120"/>
               </a:rPr>
               <a:t>اتاق (Chamber): بوروکراسی مرکب</a:t>
@@ -9800,8 +10509,8 @@
                 <a:solidFill>
                   <a:schemeClr val="tx1"/>
                 </a:solidFill>
-                <a:latin typeface="B Nazanin" pitchFamily="34" charset="0"/>
-                <a:ea typeface="B Nazanin" pitchFamily="34" charset="-122"/>
+                <a:latin typeface="Calibri" pitchFamily="34" charset="0"/>
+                <a:ea typeface="Calibri" pitchFamily="34" charset="-122"/>
                 <a:cs typeface="B Nazanin" pitchFamily="34" charset="-120"/>
               </a:rPr>
               <a:t>اداره (Office): بوروکراسی وسیع و جدید</a:t>
@@ -9812,7 +10521,7 @@
       </p:sp>
       <p:sp>
         <p:nvSpPr>
-          <p:cNvPr id="10" name="NoteCard"/>
+          <p:cNvPr id="14" name="NoteCard"/>
           <p:cNvSpPr/>
           <p:nvPr/>
         </p:nvSpPr>
@@ -9846,7 +10555,7 @@
       </p:sp>
       <p:sp>
         <p:nvSpPr>
-          <p:cNvPr id="11" name="NoteBadge"/>
+          <p:cNvPr id="15" name="NoteBadge"/>
           <p:cNvSpPr/>
           <p:nvPr/>
         </p:nvSpPr>
@@ -9873,14 +10582,14 @@
       </p:sp>
       <p:sp>
         <p:nvSpPr>
-          <p:cNvPr id="12" name="NoteBadgeText"/>
+          <p:cNvPr id="16" name="NoteBadgeText"/>
           <p:cNvSpPr txBox="1"/>
           <p:nvPr/>
         </p:nvSpPr>
         <p:spPr>
           <a:xfrm>
             <a:off x="7406640" y="4206240"/>
-            <a:ext cx="1097280" cy="365760"/>
+            <a:ext cx="822960" cy="365760"/>
           </a:xfrm>
           <a:prstGeom prst="rect">
             <a:avLst/>
@@ -9900,8 +10609,8 @@
                 <a:solidFill>
                   <a:schemeClr val="bg1"/>
                 </a:solidFill>
-                <a:latin typeface="B Zar" pitchFamily="34" charset="0"/>
-                <a:ea typeface="B Zar" pitchFamily="34" charset="-122"/>
+                <a:latin typeface="Calibri" pitchFamily="34" charset="0"/>
+                <a:ea typeface="Calibri" pitchFamily="34" charset="-122"/>
                 <a:cs typeface="B Zar" pitchFamily="34" charset="-120"/>
               </a:rPr>
               <a:t>نکته</a:t>
@@ -9910,9 +10619,33 @@
           </a:p>
         </p:txBody>
       </p:sp>
-      <p:sp>
-        <p:nvSpPr>
-          <p:cNvPr id="13" name="Note"/>
+      <p:pic>
+        <p:nvPicPr>
+          <p:cNvPr id="17" name="NoteIcon" descr="lightbulb">    </p:cNvPr>
+          <p:cNvPicPr>
+            <a:picLocks noChangeAspect="1"/>
+          </p:cNvPicPr>
+          <p:nvPr/>
+        </p:nvPicPr>
+        <p:blipFill>
+          <a:blip r:embed="rId3"/>
+          <a:stretch>
+            <a:fillRect/>
+          </a:stretch>
+        </p:blipFill>
+        <p:spPr>
+          <a:xfrm>
+            <a:off x="8229600" y="4261104"/>
+            <a:ext cx="256032" cy="256032"/>
+          </a:xfrm>
+          <a:prstGeom prst="rect">
+            <a:avLst/>
+          </a:prstGeom>
+        </p:spPr>
+      </p:pic>
+      <p:sp>
+        <p:nvSpPr>
+          <p:cNvPr id="18" name="Note"/>
           <p:cNvSpPr txBox="1"/>
           <p:nvPr/>
         </p:nvSpPr>
@@ -9939,8 +10672,8 @@
                 <a:solidFill>
                   <a:schemeClr val="tx1"/>
                 </a:solidFill>
-                <a:latin typeface="B Nazanin" pitchFamily="34" charset="0"/>
-                <a:ea typeface="B Nazanin" pitchFamily="34" charset="-122"/>
+                <a:latin typeface="Calibri" pitchFamily="34" charset="0"/>
+                <a:ea typeface="Calibri" pitchFamily="34" charset="-122"/>
                 <a:cs typeface="B Nazanin" pitchFamily="34" charset="-120"/>
               </a:rPr>
               <a:t>در جوامع در حال توسعه، ساختارها ظاهراً مدرن‌اند، اما کارکردهایشان هنوز سنتی و خانوادگی است.</a:t>
@@ -9981,8 +10714,9 @@
                 <a:solidFill>
                   <a:srgbClr val="6B7A86"/>
                 </a:solidFill>
-                <a:latin typeface="B Nazanin"/>
-                <a:ea typeface="B Nazanin"/>
+                <a:latin typeface="Calibri"/>
+                <a:cs typeface="B Nazanin"/>
+                <a:ea typeface="Calibri"/>
                 <a:cs typeface="B Nazanin"/>
               </a:defRPr>
             </a:lvl1pPr>
@@ -10054,8 +10788,8 @@
                 <a:solidFill>
                   <a:schemeClr val="accent2"/>
                 </a:solidFill>
-                <a:latin typeface="B Nazanin" pitchFamily="34" charset="0"/>
-                <a:ea typeface="B Nazanin" pitchFamily="34" charset="-122"/>
+                <a:latin typeface="Calibri" pitchFamily="34" charset="0"/>
+                <a:ea typeface="Calibri" pitchFamily="34" charset="-122"/>
                 <a:cs typeface="B Nazanin" pitchFamily="34" charset="-120"/>
               </a:rPr>
               <a:t>بخش اول: مبانی نظری ریگز و نقد وبر</a:t>
@@ -10095,8 +10829,8 @@
                 <a:solidFill>
                   <a:schemeClr val="accent1"/>
                 </a:solidFill>
-                <a:latin typeface="B Zar" pitchFamily="34" charset="0"/>
-                <a:ea typeface="B Zar" pitchFamily="34" charset="-122"/>
+                <a:latin typeface="Calibri" pitchFamily="34" charset="0"/>
+                <a:ea typeface="Calibri" pitchFamily="34" charset="-122"/>
                 <a:cs typeface="B Zar" pitchFamily="34" charset="-120"/>
               </a:rPr>
               <a:t>نقد مدل وبری</a:t>
@@ -10141,14 +10875,63 @@
       </p:sp>
       <p:sp>
         <p:nvSpPr>
-          <p:cNvPr id="5" name="CardHead0"/>
+          <p:cNvPr id="5" name="IconBg_FaSitemap"/>
+          <p:cNvSpPr/>
+          <p:nvPr/>
+        </p:nvSpPr>
+        <p:spPr>
+          <a:xfrm>
+            <a:off x="8138160" y="1344168"/>
+            <a:ext cx="420624" cy="420624"/>
+          </a:xfrm>
+          <a:prstGeom prst="ellipse">
+            <a:avLst/>
+          </a:prstGeom>
+          <a:solidFill>
+            <a:schemeClr val="accent1"/>
+          </a:solidFill>
+          <a:ln w="12700">
+            <a:solidFill>
+              <a:schemeClr val="accent1"/>
+            </a:solidFill>
+            <a:prstDash val="solid"/>
+          </a:ln>
+        </p:spPr>
+      </p:sp>
+      <p:pic>
+        <p:nvPicPr>
+          <p:cNvPr id="6" name="Icon_FaSitemap" descr="FaSitemap">    </p:cNvPr>
+          <p:cNvPicPr>
+            <a:picLocks noChangeAspect="1"/>
+          </p:cNvPicPr>
+          <p:nvPr/>
+        </p:nvPicPr>
+        <p:blipFill>
+          <a:blip r:embed="rId1"/>
+          <a:stretch>
+            <a:fillRect/>
+          </a:stretch>
+        </p:blipFill>
+        <p:spPr>
+          <a:xfrm>
+            <a:off x="8243316" y="1449324"/>
+            <a:ext cx="210312" cy="210312"/>
+          </a:xfrm>
+          <a:prstGeom prst="rect">
+            <a:avLst/>
+          </a:prstGeom>
+        </p:spPr>
+      </p:pic>
+      <p:sp>
+        <p:nvSpPr>
+          <p:cNvPr id="7" name="CardHead0"/>
           <p:cNvSpPr txBox="1"/>
           <p:nvPr/>
         </p:nvSpPr>
         <p:spPr>
           <a:xfrm>
             <a:off x="6263640" y="1325880"/>
-            <a:ext cx="2286000" cy="640080"/>
+            <a:ext cx="1783080" cy="640080"/>
           </a:xfrm>
           <a:prstGeom prst="rect">
             <a:avLst/>
@@ -10168,8 +10951,8 @@
                 <a:solidFill>
                   <a:schemeClr val="tx2"/>
                 </a:solidFill>
-                <a:latin typeface="B Zar" pitchFamily="34" charset="0"/>
-                <a:ea typeface="B Zar" pitchFamily="34" charset="-122"/>
+                <a:latin typeface="Calibri" pitchFamily="34" charset="0"/>
+                <a:ea typeface="Calibri" pitchFamily="34" charset="-122"/>
                 <a:cs typeface="B Zar" pitchFamily="34" charset="-120"/>
               </a:rPr>
               <a:t>مدل وبری (عقلانی-قانونی)</a:t>
@@ -10180,14 +10963,14 @@
       </p:sp>
       <p:sp>
         <p:nvSpPr>
-          <p:cNvPr id="6" name="CardBody0"/>
+          <p:cNvPr id="8" name="CardBody0"/>
           <p:cNvSpPr txBox="1"/>
           <p:nvPr/>
         </p:nvSpPr>
         <p:spPr>
           <a:xfrm>
-            <a:off x="6263640" y="2011680"/>
-            <a:ext cx="2286000" cy="1828800"/>
+            <a:off x="6263640" y="2130552"/>
+            <a:ext cx="2286000" cy="1737360"/>
           </a:xfrm>
           <a:prstGeom prst="rect">
             <a:avLst/>
@@ -10211,8 +10994,8 @@
                 <a:solidFill>
                   <a:schemeClr val="tx1"/>
                 </a:solidFill>
-                <a:latin typeface="B Nazanin" pitchFamily="34" charset="0"/>
-                <a:ea typeface="B Nazanin" pitchFamily="34" charset="-122"/>
+                <a:latin typeface="Calibri" pitchFamily="34" charset="0"/>
+                <a:ea typeface="Calibri" pitchFamily="34" charset="-122"/>
                 <a:cs typeface="B Nazanin" pitchFamily="34" charset="-120"/>
               </a:rPr>
               <a:t>سلسله‌مراتب</a:t>
@@ -10232,8 +11015,8 @@
                 <a:solidFill>
                   <a:schemeClr val="tx1"/>
                 </a:solidFill>
-                <a:latin typeface="B Nazanin" pitchFamily="34" charset="0"/>
-                <a:ea typeface="B Nazanin" pitchFamily="34" charset="-122"/>
+                <a:latin typeface="Calibri" pitchFamily="34" charset="0"/>
+                <a:ea typeface="Calibri" pitchFamily="34" charset="-122"/>
                 <a:cs typeface="B Nazanin" pitchFamily="34" charset="-120"/>
               </a:rPr>
               <a:t>تقسیم کار</a:t>
@@ -10253,8 +11036,8 @@
                 <a:solidFill>
                   <a:schemeClr val="tx1"/>
                 </a:solidFill>
-                <a:latin typeface="B Nazanin" pitchFamily="34" charset="0"/>
-                <a:ea typeface="B Nazanin" pitchFamily="34" charset="-122"/>
+                <a:latin typeface="Calibri" pitchFamily="34" charset="0"/>
+                <a:ea typeface="Calibri" pitchFamily="34" charset="-122"/>
                 <a:cs typeface="B Nazanin" pitchFamily="34" charset="-120"/>
               </a:rPr>
               <a:t>قوانین مکتوب</a:t>
@@ -10274,8 +11057,8 @@
                 <a:solidFill>
                   <a:schemeClr val="tx1"/>
                 </a:solidFill>
-                <a:latin typeface="B Nazanin" pitchFamily="34" charset="0"/>
-                <a:ea typeface="B Nazanin" pitchFamily="34" charset="-122"/>
+                <a:latin typeface="Calibri" pitchFamily="34" charset="0"/>
+                <a:ea typeface="Calibri" pitchFamily="34" charset="-122"/>
                 <a:cs typeface="B Nazanin" pitchFamily="34" charset="-120"/>
               </a:rPr>
               <a:t>تخصص</a:t>
@@ -10286,7 +11069,7 @@
       </p:sp>
       <p:sp>
         <p:nvSpPr>
-          <p:cNvPr id="7" name="Card1"/>
+          <p:cNvPr id="9" name="Card1"/>
           <p:cNvSpPr/>
           <p:nvPr/>
         </p:nvSpPr>
@@ -10320,14 +11103,63 @@
       </p:sp>
       <p:sp>
         <p:nvSpPr>
-          <p:cNvPr id="8" name="CardHead1"/>
+          <p:cNvPr id="10" name="IconBg_FaMagnifyingGlass"/>
+          <p:cNvSpPr/>
+          <p:nvPr/>
+        </p:nvSpPr>
+        <p:spPr>
+          <a:xfrm>
+            <a:off x="5303520" y="1344168"/>
+            <a:ext cx="420624" cy="420624"/>
+          </a:xfrm>
+          <a:prstGeom prst="ellipse">
+            <a:avLst/>
+          </a:prstGeom>
+          <a:solidFill>
+            <a:schemeClr val="accent2"/>
+          </a:solidFill>
+          <a:ln w="12700">
+            <a:solidFill>
+              <a:schemeClr val="accent2"/>
+            </a:solidFill>
+            <a:prstDash val="solid"/>
+          </a:ln>
+        </p:spPr>
+      </p:sp>
+      <p:pic>
+        <p:nvPicPr>
+          <p:cNvPr id="11" name="Icon_FaMagnifyingGlass" descr="FaMagnifyingGlass">    </p:cNvPr>
+          <p:cNvPicPr>
+            <a:picLocks noChangeAspect="1"/>
+          </p:cNvPicPr>
+          <p:nvPr/>
+        </p:nvPicPr>
+        <p:blipFill>
+          <a:blip r:embed="rId2"/>
+          <a:stretch>
+            <a:fillRect/>
+          </a:stretch>
+        </p:blipFill>
+        <p:spPr>
+          <a:xfrm>
+            <a:off x="5408676" y="1449324"/>
+            <a:ext cx="210312" cy="210312"/>
+          </a:xfrm>
+          <a:prstGeom prst="rect">
+            <a:avLst/>
+          </a:prstGeom>
+        </p:spPr>
+      </p:pic>
+      <p:sp>
+        <p:nvSpPr>
+          <p:cNvPr id="12" name="CardHead1"/>
           <p:cNvSpPr txBox="1"/>
           <p:nvPr/>
         </p:nvSpPr>
         <p:spPr>
           <a:xfrm>
             <a:off x="3429000" y="1325880"/>
-            <a:ext cx="2286000" cy="640080"/>
+            <a:ext cx="1783080" cy="640080"/>
           </a:xfrm>
           <a:prstGeom prst="rect">
             <a:avLst/>
@@ -10347,8 +11179,8 @@
                 <a:solidFill>
                   <a:schemeClr val="tx2"/>
                 </a:solidFill>
-                <a:latin typeface="B Zar" pitchFamily="34" charset="0"/>
-                <a:ea typeface="B Zar" pitchFamily="34" charset="-122"/>
+                <a:latin typeface="Calibri" pitchFamily="34" charset="0"/>
+                <a:ea typeface="Calibri" pitchFamily="34" charset="-122"/>
                 <a:cs typeface="B Zar" pitchFamily="34" charset="-120"/>
               </a:rPr>
               <a:t>نقد ریگز به وبر</a:t>
@@ -10359,14 +11191,14 @@
       </p:sp>
       <p:sp>
         <p:nvSpPr>
-          <p:cNvPr id="9" name="CardBody1"/>
+          <p:cNvPr id="13" name="CardBody1"/>
           <p:cNvSpPr txBox="1"/>
           <p:nvPr/>
         </p:nvSpPr>
         <p:spPr>
           <a:xfrm>
-            <a:off x="3429000" y="2011680"/>
-            <a:ext cx="2286000" cy="1828800"/>
+            <a:off x="3429000" y="2130552"/>
+            <a:ext cx="2286000" cy="1737360"/>
           </a:xfrm>
           <a:prstGeom prst="rect">
             <a:avLst/>
@@ -10390,8 +11222,8 @@
                 <a:solidFill>
                   <a:schemeClr val="tx1"/>
                 </a:solidFill>
-                <a:latin typeface="B Nazanin" pitchFamily="34" charset="0"/>
-                <a:ea typeface="B Nazanin" pitchFamily="34" charset="-122"/>
+                <a:latin typeface="Calibri" pitchFamily="34" charset="0"/>
+                <a:ea typeface="Calibri" pitchFamily="34" charset="-122"/>
                 <a:cs typeface="B Nazanin" pitchFamily="34" charset="-120"/>
               </a:rPr>
               <a:t>مدل وبری برای جوامع غربی طراحی شده</a:t>
@@ -10411,8 +11243,8 @@
                 <a:solidFill>
                   <a:schemeClr val="tx1"/>
                 </a:solidFill>
-                <a:latin typeface="B Nazanin" pitchFamily="34" charset="0"/>
-                <a:ea typeface="B Nazanin" pitchFamily="34" charset="-122"/>
+                <a:latin typeface="Calibri" pitchFamily="34" charset="0"/>
+                <a:ea typeface="Calibri" pitchFamily="34" charset="-122"/>
                 <a:cs typeface="B Nazanin" pitchFamily="34" charset="-120"/>
               </a:rPr>
               <a:t>برای جوامع در حال توسعه کارایی ندارد</a:t>
@@ -10423,7 +11255,7 @@
       </p:sp>
       <p:sp>
         <p:nvSpPr>
-          <p:cNvPr id="10" name="Card2"/>
+          <p:cNvPr id="14" name="Card2"/>
           <p:cNvSpPr/>
           <p:nvPr/>
         </p:nvSpPr>
@@ -10457,14 +11289,63 @@
       </p:sp>
       <p:sp>
         <p:nvSpPr>
-          <p:cNvPr id="11" name="CardHead2"/>
+          <p:cNvPr id="15" name="IconBg_FaTriangleExclamation"/>
+          <p:cNvSpPr/>
+          <p:nvPr/>
+        </p:nvSpPr>
+        <p:spPr>
+          <a:xfrm>
+            <a:off x="2468880" y="1344168"/>
+            <a:ext cx="420624" cy="420624"/>
+          </a:xfrm>
+          <a:prstGeom prst="ellipse">
+            <a:avLst/>
+          </a:prstGeom>
+          <a:solidFill>
+            <a:schemeClr val="accent3"/>
+          </a:solidFill>
+          <a:ln w="12700">
+            <a:solidFill>
+              <a:schemeClr val="accent3"/>
+            </a:solidFill>
+            <a:prstDash val="solid"/>
+          </a:ln>
+        </p:spPr>
+      </p:sp>
+      <p:pic>
+        <p:nvPicPr>
+          <p:cNvPr id="16" name="Icon_FaTriangleExclamation" descr="FaTriangleExclamation">    </p:cNvPr>
+          <p:cNvPicPr>
+            <a:picLocks noChangeAspect="1"/>
+          </p:cNvPicPr>
+          <p:nvPr/>
+        </p:nvPicPr>
+        <p:blipFill>
+          <a:blip r:embed="rId3"/>
+          <a:stretch>
+            <a:fillRect/>
+          </a:stretch>
+        </p:blipFill>
+        <p:spPr>
+          <a:xfrm>
+            <a:off x="2574036" y="1449324"/>
+            <a:ext cx="210312" cy="210312"/>
+          </a:xfrm>
+          <a:prstGeom prst="rect">
+            <a:avLst/>
+          </a:prstGeom>
+        </p:spPr>
+      </p:pic>
+      <p:sp>
+        <p:nvSpPr>
+          <p:cNvPr id="17" name="CardHead2"/>
           <p:cNvSpPr txBox="1"/>
           <p:nvPr/>
         </p:nvSpPr>
         <p:spPr>
           <a:xfrm>
             <a:off x="594360" y="1325880"/>
-            <a:ext cx="2286000" cy="640080"/>
+            <a:ext cx="1783080" cy="640080"/>
           </a:xfrm>
           <a:prstGeom prst="rect">
             <a:avLst/>
@@ -10484,8 +11365,8 @@
                 <a:solidFill>
                   <a:schemeClr val="tx2"/>
                 </a:solidFill>
-                <a:latin typeface="B Zar" pitchFamily="34" charset="0"/>
-                <a:ea typeface="B Zar" pitchFamily="34" charset="-122"/>
+                <a:latin typeface="Calibri" pitchFamily="34" charset="0"/>
+                <a:ea typeface="Calibri" pitchFamily="34" charset="-122"/>
                 <a:cs typeface="B Zar" pitchFamily="34" charset="-120"/>
               </a:rPr>
               <a:t>مشکلات در کشورهای در حال توسعه</a:t>
@@ -10496,14 +11377,14 @@
       </p:sp>
       <p:sp>
         <p:nvSpPr>
-          <p:cNvPr id="12" name="CardBody2"/>
+          <p:cNvPr id="18" name="CardBody2"/>
           <p:cNvSpPr txBox="1"/>
           <p:nvPr/>
         </p:nvSpPr>
         <p:spPr>
           <a:xfrm>
-            <a:off x="594360" y="2011680"/>
-            <a:ext cx="2286000" cy="1828800"/>
+            <a:off x="594360" y="2130552"/>
+            <a:ext cx="2286000" cy="1737360"/>
           </a:xfrm>
           <a:prstGeom prst="rect">
             <a:avLst/>
@@ -10527,8 +11408,8 @@
                 <a:solidFill>
                   <a:schemeClr val="tx1"/>
                 </a:solidFill>
-                <a:latin typeface="B Nazanin" pitchFamily="34" charset="0"/>
-                <a:ea typeface="B Nazanin" pitchFamily="34" charset="-122"/>
+                <a:latin typeface="Calibri" pitchFamily="34" charset="0"/>
+                <a:ea typeface="Calibri" pitchFamily="34" charset="-122"/>
                 <a:cs typeface="B Nazanin" pitchFamily="34" charset="-120"/>
               </a:rPr>
               <a:t>نادیده گرفتن روابط غیررسمی و خانوادگی</a:t>
@@ -10548,8 +11429,8 @@
                 <a:solidFill>
                   <a:schemeClr val="tx1"/>
                 </a:solidFill>
-                <a:latin typeface="B Nazanin" pitchFamily="34" charset="0"/>
-                <a:ea typeface="B Nazanin" pitchFamily="34" charset="-122"/>
+                <a:latin typeface="Calibri" pitchFamily="34" charset="0"/>
+                <a:ea typeface="Calibri" pitchFamily="34" charset="-122"/>
                 <a:cs typeface="B Nazanin" pitchFamily="34" charset="-120"/>
               </a:rPr>
               <a:t>عدم تطابق با ساختارهای سیاسی سنتی</a:t>
@@ -10569,8 +11450,8 @@
                 <a:solidFill>
                   <a:schemeClr val="tx1"/>
                 </a:solidFill>
-                <a:latin typeface="B Nazanin" pitchFamily="34" charset="0"/>
-                <a:ea typeface="B Nazanin" pitchFamily="34" charset="-122"/>
+                <a:latin typeface="Calibri" pitchFamily="34" charset="0"/>
+                <a:ea typeface="Calibri" pitchFamily="34" charset="-122"/>
                 <a:cs typeface="B Nazanin" pitchFamily="34" charset="-120"/>
               </a:rPr>
               <a:t>شکاف بین انتظارات رسمی و رفتار عملی کارکنان</a:t>
@@ -10581,7 +11462,7 @@
       </p:sp>
       <p:sp>
         <p:nvSpPr>
-          <p:cNvPr id="13" name="NoteCard"/>
+          <p:cNvPr id="19" name="NoteCard"/>
           <p:cNvSpPr/>
           <p:nvPr/>
         </p:nvSpPr>
@@ -10615,7 +11496,7 @@
       </p:sp>
       <p:sp>
         <p:nvSpPr>
-          <p:cNvPr id="14" name="NoteBadge"/>
+          <p:cNvPr id="20" name="NoteBadge"/>
           <p:cNvSpPr/>
           <p:nvPr/>
         </p:nvSpPr>
@@ -10642,14 +11523,14 @@
       </p:sp>
       <p:sp>
         <p:nvSpPr>
-          <p:cNvPr id="15" name="NoteBadgeText"/>
+          <p:cNvPr id="21" name="NoteBadgeText"/>
           <p:cNvSpPr txBox="1"/>
           <p:nvPr/>
         </p:nvSpPr>
         <p:spPr>
           <a:xfrm>
             <a:off x="7406640" y="4206240"/>
-            <a:ext cx="1097280" cy="365760"/>
+            <a:ext cx="822960" cy="365760"/>
           </a:xfrm>
           <a:prstGeom prst="rect">
             <a:avLst/>
@@ -10669,8 +11550,8 @@
                 <a:solidFill>
                   <a:schemeClr val="bg1"/>
                 </a:solidFill>
-                <a:latin typeface="B Zar" pitchFamily="34" charset="0"/>
-                <a:ea typeface="B Zar" pitchFamily="34" charset="-122"/>
+                <a:latin typeface="Calibri" pitchFamily="34" charset="0"/>
+                <a:ea typeface="Calibri" pitchFamily="34" charset="-122"/>
                 <a:cs typeface="B Zar" pitchFamily="34" charset="-120"/>
               </a:rPr>
               <a:t>نکته</a:t>
@@ -10679,9 +11560,33 @@
           </a:p>
         </p:txBody>
       </p:sp>
-      <p:sp>
-        <p:nvSpPr>
-          <p:cNvPr id="16" name="Note"/>
+      <p:pic>
+        <p:nvPicPr>
+          <p:cNvPr id="22" name="NoteIcon" descr="lightbulb">    </p:cNvPr>
+          <p:cNvPicPr>
+            <a:picLocks noChangeAspect="1"/>
+          </p:cNvPicPr>
+          <p:nvPr/>
+        </p:nvPicPr>
+        <p:blipFill>
+          <a:blip r:embed="rId4"/>
+          <a:stretch>
+            <a:fillRect/>
+          </a:stretch>
+        </p:blipFill>
+        <p:spPr>
+          <a:xfrm>
+            <a:off x="8229600" y="4261104"/>
+            <a:ext cx="256032" cy="256032"/>
+          </a:xfrm>
+          <a:prstGeom prst="rect">
+            <a:avLst/>
+          </a:prstGeom>
+        </p:spPr>
+      </p:pic>
+      <p:sp>
+        <p:nvSpPr>
+          <p:cNvPr id="23" name="Note"/>
           <p:cNvSpPr txBox="1"/>
           <p:nvPr/>
         </p:nvSpPr>
@@ -10708,8 +11613,8 @@
                 <a:solidFill>
                   <a:schemeClr val="tx1"/>
                 </a:solidFill>
-                <a:latin typeface="B Nazanin" pitchFamily="34" charset="0"/>
-                <a:ea typeface="B Nazanin" pitchFamily="34" charset="-122"/>
+                <a:latin typeface="Calibri" pitchFamily="34" charset="0"/>
+                <a:ea typeface="Calibri" pitchFamily="34" charset="-122"/>
                 <a:cs typeface="B Nazanin" pitchFamily="34" charset="-120"/>
               </a:rPr>
               <a:t>«آلوریان» معتقد است مدل وبری در کشورهای در حال توسعه باعث «بوروکراسی زائد» می‌شود.</a:t>
@@ -10750,8 +11655,9 @@
                 <a:solidFill>
                   <a:srgbClr val="6B7A86"/>
                 </a:solidFill>
-                <a:latin typeface="B Nazanin"/>
-                <a:ea typeface="B Nazanin"/>
+                <a:latin typeface="Calibri"/>
+                <a:cs typeface="B Nazanin"/>
+                <a:ea typeface="Calibri"/>
                 <a:cs typeface="B Nazanin"/>
               </a:defRPr>
             </a:lvl1pPr>
@@ -10823,8 +11729,8 @@
                 <a:solidFill>
                   <a:schemeClr val="accent2"/>
                 </a:solidFill>
-                <a:latin typeface="B Nazanin" pitchFamily="34" charset="0"/>
-                <a:ea typeface="B Nazanin" pitchFamily="34" charset="-122"/>
+                <a:latin typeface="Calibri" pitchFamily="34" charset="0"/>
+                <a:ea typeface="Calibri" pitchFamily="34" charset="-122"/>
                 <a:cs typeface="B Nazanin" pitchFamily="34" charset="-120"/>
               </a:rPr>
               <a:t>بخش اول: مبانی نظری ریگز و نقد وبر</a:t>
@@ -10864,8 +11770,8 @@
                 <a:solidFill>
                   <a:schemeClr val="accent1"/>
                 </a:solidFill>
-                <a:latin typeface="B Zar" pitchFamily="34" charset="0"/>
-                <a:ea typeface="B Zar" pitchFamily="34" charset="-122"/>
+                <a:latin typeface="Calibri" pitchFamily="34" charset="0"/>
+                <a:ea typeface="Calibri" pitchFamily="34" charset="-122"/>
                 <a:cs typeface="B Zar" pitchFamily="34" charset="-120"/>
               </a:rPr>
               <a:t>مدل‌های سه‌گانه بوروکراسی در نظریه ریگز</a:t>
@@ -10915,15 +11821,15 @@
                           <a:solidFill>
                             <a:schemeClr val="bg1"/>
                           </a:solidFill>
-                          <a:latin typeface="B Zar" pitchFamily="34" charset="0"/>
-                          <a:ea typeface="B Zar" pitchFamily="34" charset="-122"/>
+                          <a:latin typeface="Calibri" pitchFamily="34" charset="0"/>
+                          <a:ea typeface="Calibri" pitchFamily="34" charset="-122"/>
                           <a:cs typeface="B Zar" pitchFamily="34" charset="-120"/>
                         </a:rPr>
                         <a:t>مثال</a:t>
                       </a:r>
                       <a:endParaRPr lang="fa-IR" sz="1600" dirty="0">
-                        <a:latin typeface="B Zar" charset="0"/>
-                        <a:ea typeface="B Zar" charset="0"/>
+                        <a:latin typeface="Calibri" charset="0"/>
+                        <a:ea typeface="Calibri" charset="0"/>
                         <a:cs typeface="B Zar" charset="0"/>
                       </a:endParaRPr>
                     </a:p>
@@ -10983,15 +11889,15 @@
                           <a:solidFill>
                             <a:schemeClr val="bg1"/>
                           </a:solidFill>
-                          <a:latin typeface="B Zar" pitchFamily="34" charset="0"/>
-                          <a:ea typeface="B Zar" pitchFamily="34" charset="-122"/>
+                          <a:latin typeface="Calibri" pitchFamily="34" charset="0"/>
+                          <a:ea typeface="Calibri" pitchFamily="34" charset="-122"/>
                           <a:cs typeface="B Zar" pitchFamily="34" charset="-120"/>
                         </a:rPr>
                         <a:t>ویژگی‌ها</a:t>
                       </a:r>
                       <a:endParaRPr lang="fa-IR" sz="1600" dirty="0">
-                        <a:latin typeface="B Zar" charset="0"/>
-                        <a:ea typeface="B Zar" charset="0"/>
+                        <a:latin typeface="Calibri" charset="0"/>
+                        <a:ea typeface="Calibri" charset="0"/>
                         <a:cs typeface="B Zar" charset="0"/>
                       </a:endParaRPr>
                     </a:p>
@@ -11051,15 +11957,15 @@
                           <a:solidFill>
                             <a:schemeClr val="bg1"/>
                           </a:solidFill>
-                          <a:latin typeface="B Zar" pitchFamily="34" charset="0"/>
-                          <a:ea typeface="B Zar" pitchFamily="34" charset="-122"/>
+                          <a:latin typeface="Calibri" pitchFamily="34" charset="0"/>
+                          <a:ea typeface="Calibri" pitchFamily="34" charset="-122"/>
                           <a:cs typeface="B Zar" pitchFamily="34" charset="-120"/>
                         </a:rPr>
                         <a:t>مدل</a:t>
                       </a:r>
                       <a:endParaRPr lang="fa-IR" sz="1600" dirty="0">
-                        <a:latin typeface="B Zar" charset="0"/>
-                        <a:ea typeface="B Zar" charset="0"/>
+                        <a:latin typeface="Calibri" charset="0"/>
+                        <a:ea typeface="Calibri" charset="0"/>
                         <a:cs typeface="B Zar" charset="0"/>
                       </a:endParaRPr>
                     </a:p>
@@ -11121,15 +12027,15 @@
                           <a:solidFill>
                             <a:schemeClr val="tx1"/>
                           </a:solidFill>
-                          <a:latin typeface="B Nazanin" pitchFamily="34" charset="0"/>
-                          <a:ea typeface="B Nazanin" pitchFamily="34" charset="-122"/>
+                          <a:latin typeface="Calibri" pitchFamily="34" charset="0"/>
+                          <a:ea typeface="Calibri" pitchFamily="34" charset="-122"/>
                           <a:cs typeface="B Nazanin" pitchFamily="34" charset="-120"/>
                         </a:rPr>
                         <a:t>کشورهای توسعه‌یافته غربی</a:t>
                       </a:r>
                       <a:endParaRPr lang="fa-IR" sz="1600" dirty="0">
-                        <a:latin typeface="B Nazanin" charset="0"/>
-                        <a:ea typeface="B Nazanin" charset="0"/>
+                        <a:latin typeface="Calibri" charset="0"/>
+                        <a:ea typeface="Calibri" charset="0"/>
                         <a:cs typeface="B Nazanin" charset="0"/>
                       </a:endParaRPr>
                     </a:p>
@@ -11189,15 +12095,15 @@
                           <a:solidFill>
                             <a:schemeClr val="tx1"/>
                           </a:solidFill>
-                          <a:latin typeface="B Nazanin" pitchFamily="34" charset="0"/>
-                          <a:ea typeface="B Nazanin" pitchFamily="34" charset="-122"/>
+                          <a:latin typeface="Calibri" pitchFamily="34" charset="0"/>
+                          <a:ea typeface="Calibri" pitchFamily="34" charset="-122"/>
                           <a:cs typeface="B Nazanin" pitchFamily="34" charset="-120"/>
                         </a:rPr>
                         <a:t>قوانین، عقلانیت، سلسله‌مراتب، تخصص</a:t>
                       </a:r>
                       <a:endParaRPr lang="fa-IR" sz="1600" dirty="0">
-                        <a:latin typeface="B Nazanin" charset="0"/>
-                        <a:ea typeface="B Nazanin" charset="0"/>
+                        <a:latin typeface="Calibri" charset="0"/>
+                        <a:ea typeface="Calibri" charset="0"/>
                         <a:cs typeface="B Nazanin" charset="0"/>
                       </a:endParaRPr>
                     </a:p>
@@ -11257,15 +12163,15 @@
                           <a:solidFill>
                             <a:schemeClr val="tx1"/>
                           </a:solidFill>
-                          <a:latin typeface="B Nazanin" pitchFamily="34" charset="0"/>
-                          <a:ea typeface="B Nazanin" pitchFamily="34" charset="-122"/>
+                          <a:latin typeface="Calibri" pitchFamily="34" charset="0"/>
+                          <a:ea typeface="Calibri" pitchFamily="34" charset="-122"/>
                           <a:cs typeface="B Nazanin" pitchFamily="34" charset="-120"/>
                         </a:rPr>
                         <a:t>۱. مدل «حاکمیت» (Weberian/Classic)</a:t>
                       </a:r>
                       <a:endParaRPr lang="fa-IR" sz="1600" dirty="0">
-                        <a:latin typeface="B Nazanin" charset="0"/>
-                        <a:ea typeface="B Nazanin" charset="0"/>
+                        <a:latin typeface="Calibri" charset="0"/>
+                        <a:ea typeface="Calibri" charset="0"/>
                         <a:cs typeface="B Nazanin" charset="0"/>
                       </a:endParaRPr>
                     </a:p>
@@ -11327,15 +12233,15 @@
                           <a:solidFill>
                             <a:schemeClr val="tx1"/>
                           </a:solidFill>
-                          <a:latin typeface="B Nazanin" pitchFamily="34" charset="0"/>
-                          <a:ea typeface="B Nazanin" pitchFamily="34" charset="-122"/>
+                          <a:latin typeface="Calibri" pitchFamily="34" charset="0"/>
+                          <a:ea typeface="Calibri" pitchFamily="34" charset="-122"/>
                           <a:cs typeface="B Nazanin" pitchFamily="34" charset="-120"/>
                         </a:rPr>
                         <a:t>کشورهای در حال توسعه (ایران، مصر)</a:t>
                       </a:r>
                       <a:endParaRPr lang="fa-IR" sz="1600" dirty="0">
-                        <a:latin typeface="B Nazanin" charset="0"/>
-                        <a:ea typeface="B Nazanin" charset="0"/>
+                        <a:latin typeface="Calibri" charset="0"/>
+                        <a:ea typeface="Calibri" charset="0"/>
                         <a:cs typeface="B Nazanin" charset="0"/>
                       </a:endParaRPr>
                     </a:p>
@@ -11395,15 +12301,15 @@
                           <a:solidFill>
                             <a:schemeClr val="tx1"/>
                           </a:solidFill>
-                          <a:latin typeface="B Nazanin" pitchFamily="34" charset="0"/>
-                          <a:ea typeface="B Nazanin" pitchFamily="34" charset="-122"/>
+                          <a:latin typeface="Calibri" pitchFamily="34" charset="0"/>
+                          <a:ea typeface="Calibri" pitchFamily="34" charset="-122"/>
                           <a:cs typeface="B Nazanin" pitchFamily="34" charset="-120"/>
                         </a:rPr>
                         <a:t>ترکیب سنتی و مدرن، عدم تطابق کارکردها با ساختار</a:t>
                       </a:r>
                       <a:endParaRPr lang="fa-IR" sz="1600" dirty="0">
-                        <a:latin typeface="B Nazanin" charset="0"/>
-                        <a:ea typeface="B Nazanin" charset="0"/>
+                        <a:latin typeface="Calibri" charset="0"/>
+                        <a:ea typeface="Calibri" charset="0"/>
                         <a:cs typeface="B Nazanin" charset="0"/>
                       </a:endParaRPr>
                     </a:p>
@@ -11463,15 +12369,15 @@
                           <a:solidFill>
                             <a:schemeClr val="tx1"/>
                           </a:solidFill>
-                          <a:latin typeface="B Nazanin" pitchFamily="34" charset="0"/>
-                          <a:ea typeface="B Nazanin" pitchFamily="34" charset="-122"/>
+                          <a:latin typeface="Calibri" pitchFamily="34" charset="0"/>
+                          <a:ea typeface="Calibri" pitchFamily="34" charset="-122"/>
                           <a:cs typeface="B Nazanin" pitchFamily="34" charset="-120"/>
                         </a:rPr>
                         <a:t>۲. مدل «منشوری» (Prismatic)</a:t>
                       </a:r>
                       <a:endParaRPr lang="fa-IR" sz="1600" dirty="0">
-                        <a:latin typeface="B Nazanin" charset="0"/>
-                        <a:ea typeface="B Nazanin" charset="0"/>
+                        <a:latin typeface="Calibri" charset="0"/>
+                        <a:ea typeface="Calibri" charset="0"/>
                         <a:cs typeface="B Nazanin" charset="0"/>
                       </a:endParaRPr>
                     </a:p>
@@ -11533,15 +12439,15 @@
                           <a:solidFill>
                             <a:schemeClr val="tx1"/>
                           </a:solidFill>
-                          <a:latin typeface="B Nazanin" pitchFamily="34" charset="0"/>
-                          <a:ea typeface="B Nazanin" pitchFamily="34" charset="-122"/>
+                          <a:latin typeface="Calibri" pitchFamily="34" charset="0"/>
+                          <a:ea typeface="Calibri" pitchFamily="34" charset="-122"/>
                           <a:cs typeface="B Nazanin" pitchFamily="34" charset="-120"/>
                         </a:rPr>
                         <a:t>—</a:t>
                       </a:r>
                       <a:endParaRPr lang="fa-IR" sz="1600" dirty="0">
-                        <a:latin typeface="B Nazanin" charset="0"/>
-                        <a:ea typeface="B Nazanin" charset="0"/>
+                        <a:latin typeface="Calibri" charset="0"/>
+                        <a:ea typeface="Calibri" charset="0"/>
                         <a:cs typeface="B Nazanin" charset="0"/>
                       </a:endParaRPr>
                     </a:p>
@@ -11601,15 +12507,15 @@
                           <a:solidFill>
                             <a:schemeClr val="tx1"/>
                           </a:solidFill>
-                          <a:latin typeface="B Nazanin" pitchFamily="34" charset="0"/>
-                          <a:ea typeface="B Nazanin" pitchFamily="34" charset="-122"/>
+                          <a:latin typeface="Calibri" pitchFamily="34" charset="0"/>
+                          <a:ea typeface="Calibri" pitchFamily="34" charset="-122"/>
                           <a:cs typeface="B Nazanin" pitchFamily="34" charset="-120"/>
                         </a:rPr>
                         <a:t>ترکیبی؛ شامل «دیوان»، «اتاق» و «اداره»</a:t>
                       </a:r>
                       <a:endParaRPr lang="fa-IR" sz="1600" dirty="0">
-                        <a:latin typeface="B Nazanin" charset="0"/>
-                        <a:ea typeface="B Nazanin" charset="0"/>
+                        <a:latin typeface="Calibri" charset="0"/>
+                        <a:ea typeface="Calibri" charset="0"/>
                         <a:cs typeface="B Nazanin" charset="0"/>
                       </a:endParaRPr>
                     </a:p>
@@ -11669,15 +12575,15 @@
                           <a:solidFill>
                             <a:schemeClr val="tx1"/>
                           </a:solidFill>
-                          <a:latin typeface="B Nazanin" pitchFamily="34" charset="0"/>
-                          <a:ea typeface="B Nazanin" pitchFamily="34" charset="-122"/>
+                          <a:latin typeface="Calibri" pitchFamily="34" charset="0"/>
+                          <a:ea typeface="Calibri" pitchFamily="34" charset="-122"/>
                           <a:cs typeface="B Nazanin" pitchFamily="34" charset="-120"/>
                         </a:rPr>
                         <a:t>۳. مدل «سالا» (Sala)</a:t>
                       </a:r>
                       <a:endParaRPr lang="fa-IR" sz="1600" dirty="0">
-                        <a:latin typeface="B Nazanin" charset="0"/>
-                        <a:ea typeface="B Nazanin" charset="0"/>
+                        <a:latin typeface="Calibri" charset="0"/>
+                        <a:ea typeface="Calibri" charset="0"/>
                         <a:cs typeface="B Nazanin" charset="0"/>
                       </a:endParaRPr>
                     </a:p>
@@ -11799,7 +12705,7 @@
         <p:spPr>
           <a:xfrm>
             <a:off x="7406640" y="4206240"/>
-            <a:ext cx="1097280" cy="365760"/>
+            <a:ext cx="822960" cy="365760"/>
           </a:xfrm>
           <a:prstGeom prst="rect">
             <a:avLst/>
@@ -11819,8 +12725,8 @@
                 <a:solidFill>
                   <a:schemeClr val="bg1"/>
                 </a:solidFill>
-                <a:latin typeface="B Zar" pitchFamily="34" charset="0"/>
-                <a:ea typeface="B Zar" pitchFamily="34" charset="-122"/>
+                <a:latin typeface="Calibri" pitchFamily="34" charset="0"/>
+                <a:ea typeface="Calibri" pitchFamily="34" charset="-122"/>
                 <a:cs typeface="B Zar" pitchFamily="34" charset="-120"/>
               </a:rPr>
               <a:t>نکته</a:t>
@@ -11829,9 +12735,33 @@
           </a:p>
         </p:txBody>
       </p:sp>
-      <p:sp>
-        <p:nvSpPr>
-          <p:cNvPr id="8" name="Note"/>
+      <p:pic>
+        <p:nvPicPr>
+          <p:cNvPr id="8" name="NoteIcon" descr="lightbulb">    </p:cNvPr>
+          <p:cNvPicPr>
+            <a:picLocks noChangeAspect="1"/>
+          </p:cNvPicPr>
+          <p:nvPr/>
+        </p:nvPicPr>
+        <p:blipFill>
+          <a:blip r:embed="rId1"/>
+          <a:stretch>
+            <a:fillRect/>
+          </a:stretch>
+        </p:blipFill>
+        <p:spPr>
+          <a:xfrm>
+            <a:off x="8229600" y="4261104"/>
+            <a:ext cx="256032" cy="256032"/>
+          </a:xfrm>
+          <a:prstGeom prst="rect">
+            <a:avLst/>
+          </a:prstGeom>
+        </p:spPr>
+      </p:pic>
+      <p:sp>
+        <p:nvSpPr>
+          <p:cNvPr id="9" name="Note"/>
           <p:cNvSpPr txBox="1"/>
           <p:nvPr/>
         </p:nvSpPr>
@@ -11858,8 +12788,8 @@
                 <a:solidFill>
                   <a:schemeClr val="tx1"/>
                 </a:solidFill>
-                <a:latin typeface="B Nazanin" pitchFamily="34" charset="0"/>
-                <a:ea typeface="B Nazanin" pitchFamily="34" charset="-122"/>
+                <a:latin typeface="Calibri" pitchFamily="34" charset="0"/>
+                <a:ea typeface="Calibri" pitchFamily="34" charset="-122"/>
                 <a:cs typeface="B Nazanin" pitchFamily="34" charset="-120"/>
               </a:rPr>
               <a:t>در مدل «منشوری»، پدیده «هم‌ریختگی» (Overlapping) رخ می‌دهد؛ سازمان‌های جدید جایگزین قدیمی‌ها نمی‌شوند، بلکه در کنار آنها با کارکردهای متناقض ادامه می‌یابند.</a:t>
@@ -11900,8 +12830,9 @@
                 <a:solidFill>
                   <a:srgbClr val="6B7A86"/>
                 </a:solidFill>
-                <a:latin typeface="B Nazanin"/>
-                <a:ea typeface="B Nazanin"/>
+                <a:latin typeface="Calibri"/>
+                <a:cs typeface="B Nazanin"/>
+                <a:ea typeface="Calibri"/>
                 <a:cs typeface="B Nazanin"/>
               </a:defRPr>
             </a:lvl1pPr>
@@ -12005,8 +12936,8 @@
                 <a:solidFill>
                   <a:schemeClr val="bg1"/>
                 </a:solidFill>
-                <a:latin typeface="B Zar" pitchFamily="34" charset="0"/>
-                <a:ea typeface="B Zar" pitchFamily="34" charset="-122"/>
+                <a:latin typeface="Calibri" pitchFamily="34" charset="0"/>
+                <a:ea typeface="Calibri" pitchFamily="34" charset="-122"/>
                 <a:cs typeface="B Zar" pitchFamily="34" charset="-120"/>
               </a:rPr>
               <a:t>۲</a:t>
@@ -12015,16 +12946,40 @@
           </a:p>
         </p:txBody>
       </p:sp>
-      <p:sp>
-        <p:nvSpPr>
-          <p:cNvPr id="4" name="Title"/>
+      <p:pic>
+        <p:nvPicPr>
+          <p:cNvPr id="4" name="DividerArt" descr="globe illustration">    </p:cNvPr>
+          <p:cNvPicPr>
+            <a:picLocks noChangeAspect="1"/>
+          </p:cNvPicPr>
+          <p:nvPr/>
+        </p:nvPicPr>
+        <p:blipFill>
+          <a:blip r:embed="rId1"/>
+          <a:stretch>
+            <a:fillRect/>
+          </a:stretch>
+        </p:blipFill>
+        <p:spPr>
+          <a:xfrm>
+            <a:off x="365760" y="914400"/>
+            <a:ext cx="3840480" cy="2990088"/>
+          </a:xfrm>
+          <a:prstGeom prst="rect">
+            <a:avLst/>
+          </a:prstGeom>
+        </p:spPr>
+      </p:pic>
+      <p:sp>
+        <p:nvSpPr>
+          <p:cNvPr id="5" name="Title"/>
           <p:cNvSpPr txBox="1"/>
           <p:nvPr/>
         </p:nvSpPr>
         <p:spPr>
           <a:xfrm>
-            <a:off x="640080" y="2377440"/>
-            <a:ext cx="7863840" cy="914400"/>
+            <a:off x="4389120" y="2286000"/>
+            <a:ext cx="4114800" cy="1097280"/>
           </a:xfrm>
           <a:prstGeom prst="rect">
             <a:avLst/>
@@ -12042,30 +12997,30 @@
               <a:buNone/>
             </a:pPr>
             <a:r>
-              <a:rPr lang="fa-IR" sz="3800" b="1" dirty="0">
+              <a:rPr lang="fa-IR" sz="3400" b="1" dirty="0">
                 <a:solidFill>
                   <a:schemeClr val="bg1"/>
                 </a:solidFill>
-                <a:latin typeface="B Zar" pitchFamily="34" charset="0"/>
-                <a:ea typeface="B Zar" pitchFamily="34" charset="-122"/>
+                <a:latin typeface="Calibri" pitchFamily="34" charset="0"/>
+                <a:ea typeface="Calibri" pitchFamily="34" charset="-122"/>
                 <a:cs typeface="B Zar" pitchFamily="34" charset="-120"/>
               </a:rPr>
               <a:t>جامعه، حکومت و بوم‌شناسی اداری</a:t>
             </a:r>
-            <a:endParaRPr lang="fa-IR" sz="3800" dirty="0"/>
-          </a:p>
-        </p:txBody>
-      </p:sp>
-      <p:sp>
-        <p:nvSpPr>
-          <p:cNvPr id="5" name="Subtitle"/>
+            <a:endParaRPr lang="fa-IR" sz="3400" dirty="0"/>
+          </a:p>
+        </p:txBody>
+      </p:sp>
+      <p:sp>
+        <p:nvSpPr>
+          <p:cNvPr id="6" name="Subtitle"/>
           <p:cNvSpPr txBox="1"/>
           <p:nvPr/>
         </p:nvSpPr>
         <p:spPr>
           <a:xfrm>
-            <a:off x="640080" y="3337560"/>
-            <a:ext cx="7863840" cy="457200"/>
+            <a:off x="4389120" y="3429000"/>
+            <a:ext cx="4114800" cy="822960"/>
           </a:xfrm>
           <a:prstGeom prst="rect">
             <a:avLst/>
@@ -12081,17 +13036,17 @@
               <a:buNone/>
             </a:pPr>
             <a:r>
-              <a:rPr lang="fa-IR" sz="2000" dirty="0">
+              <a:rPr lang="fa-IR" sz="1800" dirty="0">
                 <a:solidFill>
                   <a:srgbClr val="CFE3E1"/>
                 </a:solidFill>
-                <a:latin typeface="B Nazanin" pitchFamily="34" charset="0"/>
-                <a:ea typeface="B Nazanin" pitchFamily="34" charset="-122"/>
+                <a:latin typeface="Calibri" pitchFamily="34" charset="0"/>
+                <a:ea typeface="Calibri" pitchFamily="34" charset="-122"/>
                 <a:cs typeface="B Nazanin" pitchFamily="34" charset="-120"/>
               </a:rPr>
               <a:t>یکپارچگی جوامع، نظام‌های سیاسی و نظریه گاوس</a:t>
             </a:r>
-            <a:endParaRPr lang="fa-IR" sz="2000" dirty="0"/>
+            <a:endParaRPr lang="fa-IR" sz="1800" dirty="0"/>
           </a:p>
         </p:txBody>
       </p:sp>
@@ -12152,8 +13107,8 @@
                 <a:solidFill>
                   <a:schemeClr val="accent2"/>
                 </a:solidFill>
-                <a:latin typeface="B Nazanin" pitchFamily="34" charset="0"/>
-                <a:ea typeface="B Nazanin" pitchFamily="34" charset="-122"/>
+                <a:latin typeface="Calibri" pitchFamily="34" charset="0"/>
+                <a:ea typeface="Calibri" pitchFamily="34" charset="-122"/>
                 <a:cs typeface="B Nazanin" pitchFamily="34" charset="-120"/>
               </a:rPr>
               <a:t>بخش دوم: جامعه، حکومت و بوم‌شناسی اداری</a:t>
@@ -12193,8 +13148,8 @@
                 <a:solidFill>
                   <a:schemeClr val="accent1"/>
                 </a:solidFill>
-                <a:latin typeface="B Zar" pitchFamily="34" charset="0"/>
-                <a:ea typeface="B Zar" pitchFamily="34" charset="-122"/>
+                <a:latin typeface="Calibri" pitchFamily="34" charset="0"/>
+                <a:ea typeface="Calibri" pitchFamily="34" charset="-122"/>
                 <a:cs typeface="B Zar" pitchFamily="34" charset="-120"/>
               </a:rPr>
               <a:t>یکپارچگی و عدم یکپارچگی در جوامع</a:t>
@@ -12239,14 +13194,63 @@
       </p:sp>
       <p:sp>
         <p:nvSpPr>
-          <p:cNvPr id="5" name="CardHead0"/>
+          <p:cNvPr id="5" name="IconBg_FaPeopleGroup"/>
+          <p:cNvSpPr/>
+          <p:nvPr/>
+        </p:nvSpPr>
+        <p:spPr>
+          <a:xfrm>
+            <a:off x="8138160" y="1344168"/>
+            <a:ext cx="420624" cy="420624"/>
+          </a:xfrm>
+          <a:prstGeom prst="ellipse">
+            <a:avLst/>
+          </a:prstGeom>
+          <a:solidFill>
+            <a:schemeClr val="accent1"/>
+          </a:solidFill>
+          <a:ln w="12700">
+            <a:solidFill>
+              <a:schemeClr val="accent1"/>
+            </a:solidFill>
+            <a:prstDash val="solid"/>
+          </a:ln>
+        </p:spPr>
+      </p:sp>
+      <p:pic>
+        <p:nvPicPr>
+          <p:cNvPr id="6" name="Icon_FaPeopleGroup" descr="FaPeopleGroup">    </p:cNvPr>
+          <p:cNvPicPr>
+            <a:picLocks noChangeAspect="1"/>
+          </p:cNvPicPr>
+          <p:nvPr/>
+        </p:nvPicPr>
+        <p:blipFill>
+          <a:blip r:embed="rId1"/>
+          <a:stretch>
+            <a:fillRect/>
+          </a:stretch>
+        </p:blipFill>
+        <p:spPr>
+          <a:xfrm>
+            <a:off x="8243316" y="1449324"/>
+            <a:ext cx="210312" cy="210312"/>
+          </a:xfrm>
+          <a:prstGeom prst="rect">
+            <a:avLst/>
+          </a:prstGeom>
+        </p:spPr>
+      </p:pic>
+      <p:sp>
+        <p:nvSpPr>
+          <p:cNvPr id="7" name="CardHead0"/>
           <p:cNvSpPr txBox="1"/>
           <p:nvPr/>
         </p:nvSpPr>
         <p:spPr>
           <a:xfrm>
             <a:off x="6263640" y="1325880"/>
-            <a:ext cx="2286000" cy="640080"/>
+            <a:ext cx="1783080" cy="640080"/>
           </a:xfrm>
           <a:prstGeom prst="rect">
             <a:avLst/>
@@ -12266,8 +13270,8 @@
                 <a:solidFill>
                   <a:schemeClr val="tx2"/>
                 </a:solidFill>
-                <a:latin typeface="B Zar" pitchFamily="34" charset="0"/>
-                <a:ea typeface="B Zar" pitchFamily="34" charset="-122"/>
+                <a:latin typeface="Calibri" pitchFamily="34" charset="0"/>
+                <a:ea typeface="Calibri" pitchFamily="34" charset="-122"/>
                 <a:cs typeface="B Zar" pitchFamily="34" charset="-120"/>
               </a:rPr>
               <a:t>جامعه یکپارچه (Fused)</a:t>
@@ -12278,14 +13282,14 @@
       </p:sp>
       <p:sp>
         <p:nvSpPr>
-          <p:cNvPr id="6" name="CardBody0"/>
+          <p:cNvPr id="8" name="CardBody0"/>
           <p:cNvSpPr txBox="1"/>
           <p:nvPr/>
         </p:nvSpPr>
         <p:spPr>
           <a:xfrm>
-            <a:off x="6263640" y="2011680"/>
-            <a:ext cx="2286000" cy="1828800"/>
+            <a:off x="6263640" y="2130552"/>
+            <a:ext cx="2286000" cy="1737360"/>
           </a:xfrm>
           <a:prstGeom prst="rect">
             <a:avLst/>
@@ -12309,8 +13313,8 @@
                 <a:solidFill>
                   <a:schemeClr val="tx1"/>
                 </a:solidFill>
-                <a:latin typeface="B Nazanin" pitchFamily="34" charset="0"/>
-                <a:ea typeface="B Nazanin" pitchFamily="34" charset="-122"/>
+                <a:latin typeface="Calibri" pitchFamily="34" charset="0"/>
+                <a:ea typeface="Calibri" pitchFamily="34" charset="-122"/>
                 <a:cs typeface="B Nazanin" pitchFamily="34" charset="-120"/>
               </a:rPr>
               <a:t>جوامع سنتی</a:t>
@@ -12330,8 +13334,8 @@
                 <a:solidFill>
                   <a:schemeClr val="tx1"/>
                 </a:solidFill>
-                <a:latin typeface="B Nazanin" pitchFamily="34" charset="0"/>
-                <a:ea typeface="B Nazanin" pitchFamily="34" charset="-122"/>
+                <a:latin typeface="Calibri" pitchFamily="34" charset="0"/>
+                <a:ea typeface="Calibri" pitchFamily="34" charset="-122"/>
                 <a:cs typeface="B Nazanin" pitchFamily="34" charset="-120"/>
               </a:rPr>
               <a:t>ساختارها و کارکردها تفکیک نشده‌اند (قبیله‌ای)</a:t>
@@ -12342,7 +13346,7 @@
       </p:sp>
       <p:sp>
         <p:nvSpPr>
-          <p:cNvPr id="7" name="Card1"/>
+          <p:cNvPr id="9" name="Card1"/>
           <p:cNvSpPr/>
           <p:nvPr/>
         </p:nvSpPr>
@@ -12376,14 +13380,63 @@
       </p:sp>
       <p:sp>
         <p:nvSpPr>
-          <p:cNvPr id="8" name="CardHead1"/>
+          <p:cNvPr id="10" name="IconBg_FaGem"/>
+          <p:cNvSpPr/>
+          <p:nvPr/>
+        </p:nvSpPr>
+        <p:spPr>
+          <a:xfrm>
+            <a:off x="5303520" y="1344168"/>
+            <a:ext cx="420624" cy="420624"/>
+          </a:xfrm>
+          <a:prstGeom prst="ellipse">
+            <a:avLst/>
+          </a:prstGeom>
+          <a:solidFill>
+            <a:schemeClr val="accent2"/>
+          </a:solidFill>
+          <a:ln w="12700">
+            <a:solidFill>
+              <a:schemeClr val="accent2"/>
+            </a:solidFill>
+            <a:prstDash val="solid"/>
+          </a:ln>
+        </p:spPr>
+      </p:sp>
+      <p:pic>
+        <p:nvPicPr>
+          <p:cNvPr id="11" name="Icon_FaGem" descr="FaGem">    </p:cNvPr>
+          <p:cNvPicPr>
+            <a:picLocks noChangeAspect="1"/>
+          </p:cNvPicPr>
+          <p:nvPr/>
+        </p:nvPicPr>
+        <p:blipFill>
+          <a:blip r:embed="rId2"/>
+          <a:stretch>
+            <a:fillRect/>
+          </a:stretch>
+        </p:blipFill>
+        <p:spPr>
+          <a:xfrm>
+            <a:off x="5408676" y="1449324"/>
+            <a:ext cx="210312" cy="210312"/>
+          </a:xfrm>
+          <a:prstGeom prst="rect">
+            <a:avLst/>
+          </a:prstGeom>
+        </p:spPr>
+      </p:pic>
+      <p:sp>
+        <p:nvSpPr>
+          <p:cNvPr id="12" name="CardHead1"/>
           <p:cNvSpPr txBox="1"/>
           <p:nvPr/>
         </p:nvSpPr>
         <p:spPr>
           <a:xfrm>
             <a:off x="3429000" y="1325880"/>
-            <a:ext cx="2286000" cy="640080"/>
+            <a:ext cx="1783080" cy="640080"/>
           </a:xfrm>
           <a:prstGeom prst="rect">
             <a:avLst/>
@@ -12403,8 +13456,8 @@
                 <a:solidFill>
                   <a:schemeClr val="tx2"/>
                 </a:solidFill>
-                <a:latin typeface="B Zar" pitchFamily="34" charset="0"/>
-                <a:ea typeface="B Zar" pitchFamily="34" charset="-122"/>
+                <a:latin typeface="Calibri" pitchFamily="34" charset="0"/>
+                <a:ea typeface="Calibri" pitchFamily="34" charset="-122"/>
                 <a:cs typeface="B Zar" pitchFamily="34" charset="-120"/>
               </a:rPr>
               <a:t>جامعه منشوری (Prismatic)</a:t>
@@ -12415,14 +13468,14 @@
       </p:sp>
       <p:sp>
         <p:nvSpPr>
-          <p:cNvPr id="9" name="CardBody1"/>
+          <p:cNvPr id="13" name="CardBody1"/>
           <p:cNvSpPr txBox="1"/>
           <p:nvPr/>
         </p:nvSpPr>
         <p:spPr>
           <a:xfrm>
-            <a:off x="3429000" y="2011680"/>
-            <a:ext cx="2286000" cy="1828800"/>
+            <a:off x="3429000" y="2130552"/>
+            <a:ext cx="2286000" cy="1737360"/>
           </a:xfrm>
           <a:prstGeom prst="rect">
             <a:avLst/>
@@ -12446,8 +13499,8 @@
                 <a:solidFill>
                   <a:schemeClr val="tx1"/>
                 </a:solidFill>
-                <a:latin typeface="B Nazanin" pitchFamily="34" charset="0"/>
-                <a:ea typeface="B Nazanin" pitchFamily="34" charset="-122"/>
+                <a:latin typeface="Calibri" pitchFamily="34" charset="0"/>
+                <a:ea typeface="Calibri" pitchFamily="34" charset="-122"/>
                 <a:cs typeface="B Nazanin" pitchFamily="34" charset="-120"/>
               </a:rPr>
               <a:t>جوامع در حال گذار</a:t>
@@ -12467,8 +13520,8 @@
                 <a:solidFill>
                   <a:schemeClr val="tx1"/>
                 </a:solidFill>
-                <a:latin typeface="B Nazanin" pitchFamily="34" charset="0"/>
-                <a:ea typeface="B Nazanin" pitchFamily="34" charset="-122"/>
+                <a:latin typeface="Calibri" pitchFamily="34" charset="0"/>
+                <a:ea typeface="Calibri" pitchFamily="34" charset="-122"/>
                 <a:cs typeface="B Nazanin" pitchFamily="34" charset="-120"/>
               </a:rPr>
               <a:t>نهادهای جدید ایجاد شده، اما کارکردها هنوز سنتی است</a:t>
@@ -12479,7 +13532,7 @@
       </p:sp>
       <p:sp>
         <p:nvSpPr>
-          <p:cNvPr id="10" name="Card2"/>
+          <p:cNvPr id="14" name="Card2"/>
           <p:cNvSpPr/>
           <p:nvPr/>
         </p:nvSpPr>
@@ -12513,14 +13566,63 @@
       </p:sp>
       <p:sp>
         <p:nvSpPr>
-          <p:cNvPr id="11" name="CardHead2"/>
+          <p:cNvPr id="15" name="IconBg_FaCity"/>
+          <p:cNvSpPr/>
+          <p:nvPr/>
+        </p:nvSpPr>
+        <p:spPr>
+          <a:xfrm>
+            <a:off x="2468880" y="1344168"/>
+            <a:ext cx="420624" cy="420624"/>
+          </a:xfrm>
+          <a:prstGeom prst="ellipse">
+            <a:avLst/>
+          </a:prstGeom>
+          <a:solidFill>
+            <a:schemeClr val="accent3"/>
+          </a:solidFill>
+          <a:ln w="12700">
+            <a:solidFill>
+              <a:schemeClr val="accent3"/>
+            </a:solidFill>
+            <a:prstDash val="solid"/>
+          </a:ln>
+        </p:spPr>
+      </p:sp>
+      <p:pic>
+        <p:nvPicPr>
+          <p:cNvPr id="16" name="Icon_FaCity" descr="FaCity">    </p:cNvPr>
+          <p:cNvPicPr>
+            <a:picLocks noChangeAspect="1"/>
+          </p:cNvPicPr>
+          <p:nvPr/>
+        </p:nvPicPr>
+        <p:blipFill>
+          <a:blip r:embed="rId3"/>
+          <a:stretch>
+            <a:fillRect/>
+          </a:stretch>
+        </p:blipFill>
+        <p:spPr>
+          <a:xfrm>
+            <a:off x="2574036" y="1449324"/>
+            <a:ext cx="210312" cy="210312"/>
+          </a:xfrm>
+          <a:prstGeom prst="rect">
+            <a:avLst/>
+          </a:prstGeom>
+        </p:spPr>
+      </p:pic>
+      <p:sp>
+        <p:nvSpPr>
+          <p:cNvPr id="17" name="CardHead2"/>
           <p:cNvSpPr txBox="1"/>
           <p:nvPr/>
         </p:nvSpPr>
         <p:spPr>
           <a:xfrm>
             <a:off x="594360" y="1325880"/>
-            <a:ext cx="2286000" cy="640080"/>
+            <a:ext cx="1783080" cy="640080"/>
           </a:xfrm>
           <a:prstGeom prst="rect">
             <a:avLst/>
@@ -12540,8 +13642,8 @@
                 <a:solidFill>
                   <a:schemeClr val="tx2"/>
                 </a:solidFill>
-                <a:latin typeface="B Zar" pitchFamily="34" charset="0"/>
-                <a:ea typeface="B Zar" pitchFamily="34" charset="-122"/>
+                <a:latin typeface="Calibri" pitchFamily="34" charset="0"/>
+                <a:ea typeface="Calibri" pitchFamily="34" charset="-122"/>
                 <a:cs typeface="B Zar" pitchFamily="34" charset="-120"/>
               </a:rPr>
               <a:t>جامعه تفکیک‌یافته (Diffracted)</a:t>
@@ -12552,14 +13654,14 @@
       </p:sp>
       <p:sp>
         <p:nvSpPr>
-          <p:cNvPr id="12" name="CardBody2"/>
+          <p:cNvPr id="18" name="CardBody2"/>
           <p:cNvSpPr txBox="1"/>
           <p:nvPr/>
         </p:nvSpPr>
         <p:spPr>
           <a:xfrm>
-            <a:off x="594360" y="2011680"/>
-            <a:ext cx="2286000" cy="1828800"/>
+            <a:off x="594360" y="2130552"/>
+            <a:ext cx="2286000" cy="1737360"/>
           </a:xfrm>
           <a:prstGeom prst="rect">
             <a:avLst/>
@@ -12583,8 +13685,8 @@
                 <a:solidFill>
                   <a:schemeClr val="tx1"/>
                 </a:solidFill>
-                <a:latin typeface="B Nazanin" pitchFamily="34" charset="0"/>
-                <a:ea typeface="B Nazanin" pitchFamily="34" charset="-122"/>
+                <a:latin typeface="Calibri" pitchFamily="34" charset="0"/>
+                <a:ea typeface="Calibri" pitchFamily="34" charset="-122"/>
                 <a:cs typeface="B Nazanin" pitchFamily="34" charset="-120"/>
               </a:rPr>
               <a:t>جوامع مدرن</a:t>
@@ -12604,8 +13706,8 @@
                 <a:solidFill>
                   <a:schemeClr val="tx1"/>
                 </a:solidFill>
-                <a:latin typeface="B Nazanin" pitchFamily="34" charset="0"/>
-                <a:ea typeface="B Nazanin" pitchFamily="34" charset="-122"/>
+                <a:latin typeface="Calibri" pitchFamily="34" charset="0"/>
+                <a:ea typeface="Calibri" pitchFamily="34" charset="-122"/>
                 <a:cs typeface="B Nazanin" pitchFamily="34" charset="-120"/>
               </a:rPr>
               <a:t>تفکیک کامل ساختارها و کارکردها</a:t>
@@ -12616,7 +13718,7 @@
       </p:sp>
       <p:sp>
         <p:nvSpPr>
-          <p:cNvPr id="13" name="NoteCard"/>
+          <p:cNvPr id="19" name="NoteCard"/>
           <p:cNvSpPr/>
           <p:nvPr/>
         </p:nvSpPr>
@@ -12650,7 +13752,7 @@
       </p:sp>
       <p:sp>
         <p:nvSpPr>
-          <p:cNvPr id="14" name="NoteBadge"/>
+          <p:cNvPr id="20" name="NoteBadge"/>
           <p:cNvSpPr/>
           <p:nvPr/>
         </p:nvSpPr>
@@ -12677,14 +13779,14 @@
       </p:sp>
       <p:sp>
         <p:nvSpPr>
-          <p:cNvPr id="15" name="NoteBadgeText"/>
+          <p:cNvPr id="21" name="NoteBadgeText"/>
           <p:cNvSpPr txBox="1"/>
           <p:nvPr/>
         </p:nvSpPr>
         <p:spPr>
           <a:xfrm>
             <a:off x="7406640" y="4206240"/>
-            <a:ext cx="1097280" cy="365760"/>
+            <a:ext cx="822960" cy="365760"/>
           </a:xfrm>
           <a:prstGeom prst="rect">
             <a:avLst/>
@@ -12704,8 +13806,8 @@
                 <a:solidFill>
                   <a:schemeClr val="bg1"/>
                 </a:solidFill>
-                <a:latin typeface="B Zar" pitchFamily="34" charset="0"/>
-                <a:ea typeface="B Zar" pitchFamily="34" charset="-122"/>
+                <a:latin typeface="Calibri" pitchFamily="34" charset="0"/>
+                <a:ea typeface="Calibri" pitchFamily="34" charset="-122"/>
                 <a:cs typeface="B Zar" pitchFamily="34" charset="-120"/>
               </a:rPr>
               <a:t>نکته</a:t>
@@ -12714,9 +13816,33 @@
           </a:p>
         </p:txBody>
       </p:sp>
-      <p:sp>
-        <p:nvSpPr>
-          <p:cNvPr id="16" name="Note"/>
+      <p:pic>
+        <p:nvPicPr>
+          <p:cNvPr id="22" name="NoteIcon" descr="lightbulb">    </p:cNvPr>
+          <p:cNvPicPr>
+            <a:picLocks noChangeAspect="1"/>
+          </p:cNvPicPr>
+          <p:nvPr/>
+        </p:nvPicPr>
+        <p:blipFill>
+          <a:blip r:embed="rId4"/>
+          <a:stretch>
+            <a:fillRect/>
+          </a:stretch>
+        </p:blipFill>
+        <p:spPr>
+          <a:xfrm>
+            <a:off x="8229600" y="4261104"/>
+            <a:ext cx="256032" cy="256032"/>
+          </a:xfrm>
+          <a:prstGeom prst="rect">
+            <a:avLst/>
+          </a:prstGeom>
+        </p:spPr>
+      </p:pic>
+      <p:sp>
+        <p:nvSpPr>
+          <p:cNvPr id="23" name="Note"/>
           <p:cNvSpPr txBox="1"/>
           <p:nvPr/>
         </p:nvSpPr>
@@ -12743,8 +13869,8 @@
                 <a:solidFill>
                   <a:schemeClr val="tx1"/>
                 </a:solidFill>
-                <a:latin typeface="B Nazanin" pitchFamily="34" charset="0"/>
-                <a:ea typeface="B Nazanin" pitchFamily="34" charset="-122"/>
+                <a:latin typeface="Calibri" pitchFamily="34" charset="0"/>
+                <a:ea typeface="Calibri" pitchFamily="34" charset="-122"/>
                 <a:cs typeface="B Nazanin" pitchFamily="34" charset="-120"/>
               </a:rPr>
               <a:t>مثال از متن: ریگز جامعه منشوری را به «ارکستر سمفونی» تشبیه می‌کند که هر نوازنده ساز خود را می‌زند و هماهنگی وجود ندارد.</a:t>
@@ -12785,8 +13911,9 @@
                 <a:solidFill>
                   <a:srgbClr val="6B7A86"/>
                 </a:solidFill>
-                <a:latin typeface="B Nazanin"/>
-                <a:ea typeface="B Nazanin"/>
+                <a:latin typeface="Calibri"/>
+                <a:cs typeface="B Nazanin"/>
+                <a:ea typeface="Calibri"/>
                 <a:cs typeface="B Nazanin"/>
               </a:defRPr>
             </a:lvl1pPr>
@@ -12858,8 +13985,8 @@
                 <a:solidFill>
                   <a:schemeClr val="accent2"/>
                 </a:solidFill>
-                <a:latin typeface="B Nazanin" pitchFamily="34" charset="0"/>
-                <a:ea typeface="B Nazanin" pitchFamily="34" charset="-122"/>
+                <a:latin typeface="Calibri" pitchFamily="34" charset="0"/>
+                <a:ea typeface="Calibri" pitchFamily="34" charset="-122"/>
                 <a:cs typeface="B Nazanin" pitchFamily="34" charset="-120"/>
               </a:rPr>
               <a:t>بخش دوم: جامعه، حکومت و بوم‌شناسی اداری</a:t>
@@ -12899,8 +14026,8 @@
                 <a:solidFill>
                   <a:schemeClr val="accent1"/>
                 </a:solidFill>
-                <a:latin typeface="B Zar" pitchFamily="34" charset="0"/>
-                <a:ea typeface="B Zar" pitchFamily="34" charset="-122"/>
+                <a:latin typeface="Calibri" pitchFamily="34" charset="0"/>
+                <a:ea typeface="Calibri" pitchFamily="34" charset="-122"/>
                 <a:cs typeface="B Zar" pitchFamily="34" charset="-120"/>
               </a:rPr>
               <a:t>نمودار مفهومی: درجه تفکیک ساختاری و کارکردی</a:t>
@@ -13022,8 +14149,8 @@
                 <a:solidFill>
                   <a:schemeClr val="tx2"/>
                 </a:solidFill>
-                <a:latin typeface="B Zar" pitchFamily="34" charset="0"/>
-                <a:ea typeface="B Zar" pitchFamily="34" charset="-122"/>
+                <a:latin typeface="Calibri" pitchFamily="34" charset="0"/>
+                <a:ea typeface="Calibri" pitchFamily="34" charset="-122"/>
                 <a:cs typeface="B Zar" pitchFamily="34" charset="-120"/>
               </a:rPr>
               <a:t>خوانش نمودار</a:t>
@@ -13065,8 +14192,8 @@
                 <a:solidFill>
                   <a:schemeClr val="tx1"/>
                 </a:solidFill>
-                <a:latin typeface="B Nazanin" pitchFamily="34" charset="0"/>
-                <a:ea typeface="B Nazanin" pitchFamily="34" charset="-122"/>
+                <a:latin typeface="Calibri" pitchFamily="34" charset="0"/>
+                <a:ea typeface="Calibri" pitchFamily="34" charset="-122"/>
                 <a:cs typeface="B Nazanin" pitchFamily="34" charset="-120"/>
               </a:rPr>
               <a:t>یکپارچه: ساختار و کارکرد از هم جدا نشده‌اند</a:t>
@@ -13086,8 +14213,8 @@
                 <a:solidFill>
                   <a:schemeClr val="tx1"/>
                 </a:solidFill>
-                <a:latin typeface="B Nazanin" pitchFamily="34" charset="0"/>
-                <a:ea typeface="B Nazanin" pitchFamily="34" charset="-122"/>
+                <a:latin typeface="Calibri" pitchFamily="34" charset="0"/>
+                <a:ea typeface="Calibri" pitchFamily="34" charset="-122"/>
                 <a:cs typeface="B Nazanin" pitchFamily="34" charset="-120"/>
               </a:rPr>
               <a:t>منشوری: ساختار جدید، اما کارکرد هنوز سنتی</a:t>
@@ -13107,8 +14234,8 @@
                 <a:solidFill>
                   <a:schemeClr val="tx1"/>
                 </a:solidFill>
-                <a:latin typeface="B Nazanin" pitchFamily="34" charset="0"/>
-                <a:ea typeface="B Nazanin" pitchFamily="34" charset="-122"/>
+                <a:latin typeface="Calibri" pitchFamily="34" charset="0"/>
+                <a:ea typeface="Calibri" pitchFamily="34" charset="-122"/>
                 <a:cs typeface="B Nazanin" pitchFamily="34" charset="-120"/>
               </a:rPr>
               <a:t>تفکیک‌یافته: تفکیک کامل ساختارها و کارکردها</a:t>
@@ -13187,7 +14314,7 @@
         <p:spPr>
           <a:xfrm>
             <a:off x="7406640" y="4206240"/>
-            <a:ext cx="1097280" cy="365760"/>
+            <a:ext cx="822960" cy="365760"/>
           </a:xfrm>
           <a:prstGeom prst="rect">
             <a:avLst/>
@@ -13207,8 +14334,8 @@
                 <a:solidFill>
                   <a:schemeClr val="bg1"/>
                 </a:solidFill>
-                <a:latin typeface="B Zar" pitchFamily="34" charset="0"/>
-                <a:ea typeface="B Zar" pitchFamily="34" charset="-122"/>
+                <a:latin typeface="Calibri" pitchFamily="34" charset="0"/>
+                <a:ea typeface="Calibri" pitchFamily="34" charset="-122"/>
                 <a:cs typeface="B Zar" pitchFamily="34" charset="-120"/>
               </a:rPr>
               <a:t>نکته</a:t>
@@ -13217,9 +14344,33 @@
           </a:p>
         </p:txBody>
       </p:sp>
-      <p:sp>
-        <p:nvSpPr>
-          <p:cNvPr id="12" name="Note"/>
+      <p:pic>
+        <p:nvPicPr>
+          <p:cNvPr id="12" name="NoteIcon" descr="lightbulb">    </p:cNvPr>
+          <p:cNvPicPr>
+            <a:picLocks noChangeAspect="1"/>
+          </p:cNvPicPr>
+          <p:nvPr/>
+        </p:nvPicPr>
+        <p:blipFill>
+          <a:blip r:embed="rId2"/>
+          <a:stretch>
+            <a:fillRect/>
+          </a:stretch>
+        </p:blipFill>
+        <p:spPr>
+          <a:xfrm>
+            <a:off x="8229600" y="4261104"/>
+            <a:ext cx="256032" cy="256032"/>
+          </a:xfrm>
+          <a:prstGeom prst="rect">
+            <a:avLst/>
+          </a:prstGeom>
+        </p:spPr>
+      </p:pic>
+      <p:sp>
+        <p:nvSpPr>
+          <p:cNvPr id="13" name="Note"/>
           <p:cNvSpPr txBox="1"/>
           <p:nvPr/>
         </p:nvSpPr>
@@ -13246,8 +14397,8 @@
                 <a:solidFill>
                   <a:schemeClr val="tx1"/>
                 </a:solidFill>
-                <a:latin typeface="B Nazanin" pitchFamily="34" charset="0"/>
-                <a:ea typeface="B Nazanin" pitchFamily="34" charset="-122"/>
+                <a:latin typeface="Calibri" pitchFamily="34" charset="0"/>
+                <a:ea typeface="Calibri" pitchFamily="34" charset="-122"/>
                 <a:cs typeface="B Nazanin" pitchFamily="34" charset="-120"/>
               </a:rPr>
               <a:t>ارتفاع ستون‌ها فقط ترتیب مفهومی سه نوع جامعه را نشان می‌دهد و داده آماری نیست.</a:t>
@@ -13288,8 +14439,9 @@
                 <a:solidFill>
                   <a:srgbClr val="6B7A86"/>
                 </a:solidFill>
-                <a:latin typeface="B Nazanin"/>
-                <a:ea typeface="B Nazanin"/>
+                <a:latin typeface="Calibri"/>
+                <a:cs typeface="B Nazanin"/>
+                <a:ea typeface="Calibri"/>
                 <a:cs typeface="B Nazanin"/>
               </a:defRPr>
             </a:lvl1pPr>
@@ -13358,7 +14510,7 @@
     </a:clrScheme>
     <a:fontScheme name="Riggs">
       <a:majorFont>
-        <a:latin typeface="B Zar"/>
+        <a:latin typeface="Calibri"/>
         <a:ea typeface=""/>
         <a:cs typeface=""/>
         <a:font script="Jpan" typeface="游ゴシック Light"/>
@@ -13410,7 +14562,7 @@
         <a:font script="Tfng" typeface="Ebrima"/>
       </a:majorFont>
       <a:minorFont>
-        <a:latin typeface="B Nazanin"/>
+        <a:latin typeface="Calibri"/>
         <a:ea typeface=""/>
         <a:cs typeface=""/>
         <a:font script="Jpan" typeface="游ゴシック"/>

--- a/riggs-bureaucracy.pptx
+++ b/riggs-bureaucracy.pptx
@@ -125,13 +125,13 @@
   <p:extLst>
     <p:ext uri="{521415D9-36F7-43E2-AB2F-B90AF26B5E84}">
       <p14:sectionLst xmlns:p14="http://schemas.microsoft.com/office/powerpoint/2010/main">
-        <p14:section name="آغاز" id="{5c2da6e5-3e6e-3747-b09f-fca273e841de}">
+        <p14:section name="آغاز" id="{44e40e80-6098-71ef-4159-e7c19ac225b2}">
           <p14:sldIdLst>
             <p14:sldId id="256"/>
             <p14:sldId id="257"/>
           </p14:sldIdLst>
         </p14:section>
-        <p14:section name="بخش اول: مبانی نظری ریگز و نقد وبر" id="{8b9bb63c-662b-c352-9196-872fba90fc4e}">
+        <p14:section name="بخش اول: مبانی نظری ریگز و نقد وبر" id="{7701ac0f-d6b2-1498-6655-e54f047e12f5}">
           <p14:sldIdLst>
             <p14:sldId id="258"/>
             <p14:sldId id="259"/>
@@ -139,7 +139,7 @@
             <p14:sldId id="261"/>
           </p14:sldIdLst>
         </p14:section>
-        <p14:section name="بخش دوم: جامعه، حکومت و بوم‌شناسی اداری" id="{154ac544-7b9b-7d84-b8e4-4e60174689ac}">
+        <p14:section name="بخش دوم: جامعه، حکومت و بوم‌شناسی اداری" id="{d0d04d16-08a2-0bc4-6089-9a7ea3b62c0f}">
           <p14:sldIdLst>
             <p14:sldId id="262"/>
             <p14:sldId id="263"/>
@@ -148,7 +148,7 @@
             <p14:sldId id="266"/>
           </p14:sldIdLst>
         </p14:section>
-        <p14:section name="بخش سوم: دولت و نظام‌های اداری" id="{b9e55b62-1c2c-0f21-d04d-a3d1fb4d72d8}">
+        <p14:section name="بخش سوم: دولت و نظام‌های اداری" id="{ce5f2adf-649b-ae7b-d60a-c85fa3b778c7}">
           <p14:sldIdLst>
             <p14:sldId id="267"/>
             <p14:sldId id="268"/>
@@ -156,14 +156,14 @@
             <p14:sldId id="270"/>
           </p14:sldIdLst>
         </p14:section>
-        <p14:section name="بخش چهارم: جمع‌بندی و کاربرد در کلاس" id="{a5e8d032-c10a-66a3-f687-9e66b2dde070}">
+        <p14:section name="بخش چهارم: جمع‌بندی و کاربرد در کلاس" id="{8da67456-c62f-c7c8-43d0-2dda580241d8}">
           <p14:sldIdLst>
             <p14:sldId id="271"/>
             <p14:sldId id="272"/>
             <p14:sldId id="273"/>
           </p14:sldIdLst>
         </p14:section>
-        <p14:section name="پایان" id="{51799078-aaa9-f670-db18-4a583f8be3fc}">
+        <p14:section name="پایان" id="{583241dd-513d-4971-f4a2-eedc3f3154f4}">
           <p14:sldIdLst>
             <p14:sldId id="274"/>
           </p14:sldIdLst>
@@ -3687,7 +3687,29 @@
                 <a:ea typeface="Calibri" pitchFamily="34" charset="-122"/>
                 <a:cs typeface="B Zar" pitchFamily="34" charset="-120"/>
               </a:rPr>
-              <a:t>مدل «حاکمیت» (Heer)</a:t>
+              <a:t>مدل «حاکمیت» (</a:t>
+            </a:r>
+            <a:r>
+              <a:rPr lang="fa-IR" sz="1700" b="1" dirty="0">
+                <a:solidFill>
+                  <a:schemeClr val="tx2"/>
+                </a:solidFill>
+                <a:latin typeface="Calibri" pitchFamily="34" charset="0"/>
+                <a:ea typeface="Calibri" pitchFamily="34" charset="-122"/>
+                <a:cs typeface="Calibri"/>
+              </a:rPr>
+              <a:t>Heer</a:t>
+            </a:r>
+            <a:r>
+              <a:rPr lang="fa-IR" sz="1700" b="1" dirty="0">
+                <a:solidFill>
+                  <a:schemeClr val="tx2"/>
+                </a:solidFill>
+                <a:latin typeface="Calibri" pitchFamily="34" charset="0"/>
+                <a:ea typeface="Calibri" pitchFamily="34" charset="-122"/>
+                <a:cs typeface="B Zar" pitchFamily="34" charset="-120"/>
+              </a:rPr>
+              <a:t>)</a:t>
             </a:r>
             <a:endParaRPr lang="fa-IR" sz="1700" dirty="0"/>
           </a:p>
@@ -4379,7 +4401,29 @@
                 <a:ea typeface="Calibri" pitchFamily="34" charset="-122"/>
                 <a:cs typeface="B Zar" pitchFamily="34" charset="-120"/>
               </a:rPr>
-              <a:t>جان گاوس (John Gaus)</a:t>
+              <a:t>جان گاوس (</a:t>
+            </a:r>
+            <a:r>
+              <a:rPr lang="fa-IR" sz="1700" b="1" dirty="0">
+                <a:solidFill>
+                  <a:schemeClr val="tx2"/>
+                </a:solidFill>
+                <a:latin typeface="Calibri" pitchFamily="34" charset="0"/>
+                <a:ea typeface="Calibri" pitchFamily="34" charset="-122"/>
+                <a:cs typeface="Calibri"/>
+              </a:rPr>
+              <a:t>John Gaus</a:t>
+            </a:r>
+            <a:r>
+              <a:rPr lang="fa-IR" sz="1700" b="1" dirty="0">
+                <a:solidFill>
+                  <a:schemeClr val="tx2"/>
+                </a:solidFill>
+                <a:latin typeface="Calibri" pitchFamily="34" charset="0"/>
+                <a:ea typeface="Calibri" pitchFamily="34" charset="-122"/>
+                <a:cs typeface="B Zar" pitchFamily="34" charset="-120"/>
+              </a:rPr>
+              <a:t>)</a:t>
             </a:r>
             <a:endParaRPr lang="fa-IR" sz="1700" dirty="0"/>
           </a:p>
@@ -5872,7 +5916,29 @@
                 <a:ea typeface="Calibri" pitchFamily="34" charset="-122"/>
                 <a:cs typeface="B Zar" pitchFamily="34" charset="-120"/>
               </a:rPr>
-              <a:t>مدل‌های مردم‌محور (Populist)</a:t>
+              <a:t>مدل‌های مردم‌محور (</a:t>
+            </a:r>
+            <a:r>
+              <a:rPr lang="fa-IR" sz="1700" b="1" dirty="0">
+                <a:solidFill>
+                  <a:schemeClr val="tx2"/>
+                </a:solidFill>
+                <a:latin typeface="Calibri" pitchFamily="34" charset="0"/>
+                <a:ea typeface="Calibri" pitchFamily="34" charset="-122"/>
+                <a:cs typeface="Calibri"/>
+              </a:rPr>
+              <a:t>Populist</a:t>
+            </a:r>
+            <a:r>
+              <a:rPr lang="fa-IR" sz="1700" b="1" dirty="0">
+                <a:solidFill>
+                  <a:schemeClr val="tx2"/>
+                </a:solidFill>
+                <a:latin typeface="Calibri" pitchFamily="34" charset="0"/>
+                <a:ea typeface="Calibri" pitchFamily="34" charset="-122"/>
+                <a:cs typeface="B Zar" pitchFamily="34" charset="-120"/>
+              </a:rPr>
+              <a:t>)</a:t>
             </a:r>
             <a:endParaRPr lang="fa-IR" sz="1700" dirty="0"/>
           </a:p>
@@ -10242,7 +10308,29 @@
                 <a:ea typeface="Calibri" pitchFamily="34" charset="-122"/>
                 <a:cs typeface="B Zar" pitchFamily="34" charset="-120"/>
               </a:rPr>
-              <a:t>فرد ریگز (Riggs)</a:t>
+              <a:t>فرد ریگز (</a:t>
+            </a:r>
+            <a:r>
+              <a:rPr lang="fa-IR" sz="1700" b="1" dirty="0">
+                <a:solidFill>
+                  <a:schemeClr val="tx2"/>
+                </a:solidFill>
+                <a:latin typeface="Calibri" pitchFamily="34" charset="0"/>
+                <a:ea typeface="Calibri" pitchFamily="34" charset="-122"/>
+                <a:cs typeface="Calibri"/>
+              </a:rPr>
+              <a:t>Riggs</a:t>
+            </a:r>
+            <a:r>
+              <a:rPr lang="fa-IR" sz="1700" b="1" dirty="0">
+                <a:solidFill>
+                  <a:schemeClr val="tx2"/>
+                </a:solidFill>
+                <a:latin typeface="Calibri" pitchFamily="34" charset="0"/>
+                <a:ea typeface="Calibri" pitchFamily="34" charset="-122"/>
+                <a:cs typeface="B Zar" pitchFamily="34" charset="-120"/>
+              </a:rPr>
+              <a:t>)</a:t>
             </a:r>
             <a:endParaRPr lang="fa-IR" sz="1700" dirty="0"/>
           </a:p>
@@ -10285,7 +10373,29 @@
                 <a:ea typeface="Calibri" pitchFamily="34" charset="-122"/>
                 <a:cs typeface="B Nazanin" pitchFamily="34" charset="-120"/>
               </a:rPr>
-              <a:t>تئوری منشوری (Prismatic Theory)</a:t>
+              <a:t>تئوری منشوری (</a:t>
+            </a:r>
+            <a:r>
+              <a:rPr lang="fa-IR" sz="1600" dirty="0">
+                <a:solidFill>
+                  <a:schemeClr val="tx1"/>
+                </a:solidFill>
+                <a:latin typeface="Calibri" pitchFamily="34" charset="0"/>
+                <a:ea typeface="Calibri" pitchFamily="34" charset="-122"/>
+                <a:cs typeface="Calibri"/>
+              </a:rPr>
+              <a:t>Prismatic Theory</a:t>
+            </a:r>
+            <a:r>
+              <a:rPr lang="fa-IR" sz="1600" dirty="0">
+                <a:solidFill>
+                  <a:schemeClr val="tx1"/>
+                </a:solidFill>
+                <a:latin typeface="Calibri" pitchFamily="34" charset="0"/>
+                <a:ea typeface="Calibri" pitchFamily="34" charset="-122"/>
+                <a:cs typeface="B Nazanin" pitchFamily="34" charset="-120"/>
+              </a:rPr>
+              <a:t>)</a:t>
             </a:r>
             <a:endParaRPr lang="fa-IR" sz="1600" dirty="0"/>
           </a:p>
@@ -10428,7 +10538,29 @@
                 <a:ea typeface="Calibri" pitchFamily="34" charset="-122"/>
                 <a:cs typeface="B Zar" pitchFamily="34" charset="-120"/>
               </a:rPr>
-              <a:t>مفهوم «سالا» (Sala)</a:t>
+              <a:t>مفهوم «سالا» (</a:t>
+            </a:r>
+            <a:r>
+              <a:rPr lang="fa-IR" sz="1700" b="1" dirty="0">
+                <a:solidFill>
+                  <a:schemeClr val="tx2"/>
+                </a:solidFill>
+                <a:latin typeface="Calibri" pitchFamily="34" charset="0"/>
+                <a:ea typeface="Calibri" pitchFamily="34" charset="-122"/>
+                <a:cs typeface="Calibri"/>
+              </a:rPr>
+              <a:t>Sala</a:t>
+            </a:r>
+            <a:r>
+              <a:rPr lang="fa-IR" sz="1700" b="1" dirty="0">
+                <a:solidFill>
+                  <a:schemeClr val="tx2"/>
+                </a:solidFill>
+                <a:latin typeface="Calibri" pitchFamily="34" charset="0"/>
+                <a:ea typeface="Calibri" pitchFamily="34" charset="-122"/>
+                <a:cs typeface="B Zar" pitchFamily="34" charset="-120"/>
+              </a:rPr>
+              <a:t>)</a:t>
             </a:r>
             <a:endParaRPr lang="fa-IR" sz="1700" dirty="0"/>
           </a:p>
@@ -10471,7 +10603,29 @@
                 <a:ea typeface="Calibri" pitchFamily="34" charset="-122"/>
                 <a:cs typeface="B Nazanin" pitchFamily="34" charset="-120"/>
               </a:rPr>
-              <a:t>دیوان (Bureau): هر سه مدل (متمرکز، مرکب، وسیع)</a:t>
+              <a:t>دیوان (</a:t>
+            </a:r>
+            <a:r>
+              <a:rPr lang="fa-IR" sz="1600" dirty="0">
+                <a:solidFill>
+                  <a:schemeClr val="tx1"/>
+                </a:solidFill>
+                <a:latin typeface="Calibri" pitchFamily="34" charset="0"/>
+                <a:ea typeface="Calibri" pitchFamily="34" charset="-122"/>
+                <a:cs typeface="Calibri"/>
+              </a:rPr>
+              <a:t>Bureau</a:t>
+            </a:r>
+            <a:r>
+              <a:rPr lang="fa-IR" sz="1600" dirty="0">
+                <a:solidFill>
+                  <a:schemeClr val="tx1"/>
+                </a:solidFill>
+                <a:latin typeface="Calibri" pitchFamily="34" charset="0"/>
+                <a:ea typeface="Calibri" pitchFamily="34" charset="-122"/>
+                <a:cs typeface="B Nazanin" pitchFamily="34" charset="-120"/>
+              </a:rPr>
+              <a:t>): هر سه مدل (متمرکز، مرکب، وسیع)</a:t>
             </a:r>
             <a:endParaRPr lang="fa-IR" sz="1600" dirty="0"/>
           </a:p>
@@ -10492,7 +10646,29 @@
                 <a:ea typeface="Calibri" pitchFamily="34" charset="-122"/>
                 <a:cs typeface="B Nazanin" pitchFamily="34" charset="-120"/>
               </a:rPr>
-              <a:t>اتاق (Chamber): بوروکراسی مرکب</a:t>
+              <a:t>اتاق (</a:t>
+            </a:r>
+            <a:r>
+              <a:rPr lang="fa-IR" sz="1600" dirty="0">
+                <a:solidFill>
+                  <a:schemeClr val="tx1"/>
+                </a:solidFill>
+                <a:latin typeface="Calibri" pitchFamily="34" charset="0"/>
+                <a:ea typeface="Calibri" pitchFamily="34" charset="-122"/>
+                <a:cs typeface="Calibri"/>
+              </a:rPr>
+              <a:t>Chamber</a:t>
+            </a:r>
+            <a:r>
+              <a:rPr lang="fa-IR" sz="1600" dirty="0">
+                <a:solidFill>
+                  <a:schemeClr val="tx1"/>
+                </a:solidFill>
+                <a:latin typeface="Calibri" pitchFamily="34" charset="0"/>
+                <a:ea typeface="Calibri" pitchFamily="34" charset="-122"/>
+                <a:cs typeface="B Nazanin" pitchFamily="34" charset="-120"/>
+              </a:rPr>
+              <a:t>): بوروکراسی مرکب</a:t>
             </a:r>
             <a:endParaRPr lang="fa-IR" sz="1600" dirty="0"/>
           </a:p>
@@ -10513,7 +10689,29 @@
                 <a:ea typeface="Calibri" pitchFamily="34" charset="-122"/>
                 <a:cs typeface="B Nazanin" pitchFamily="34" charset="-120"/>
               </a:rPr>
-              <a:t>اداره (Office): بوروکراسی وسیع و جدید</a:t>
+              <a:t>اداره (</a:t>
+            </a:r>
+            <a:r>
+              <a:rPr lang="fa-IR" sz="1600" dirty="0">
+                <a:solidFill>
+                  <a:schemeClr val="tx1"/>
+                </a:solidFill>
+                <a:latin typeface="Calibri" pitchFamily="34" charset="0"/>
+                <a:ea typeface="Calibri" pitchFamily="34" charset="-122"/>
+                <a:cs typeface="Calibri"/>
+              </a:rPr>
+              <a:t>Office</a:t>
+            </a:r>
+            <a:r>
+              <a:rPr lang="fa-IR" sz="1600" dirty="0">
+                <a:solidFill>
+                  <a:schemeClr val="tx1"/>
+                </a:solidFill>
+                <a:latin typeface="Calibri" pitchFamily="34" charset="0"/>
+                <a:ea typeface="Calibri" pitchFamily="34" charset="-122"/>
+                <a:cs typeface="B Nazanin" pitchFamily="34" charset="-120"/>
+              </a:rPr>
+              <a:t>): بوروکراسی وسیع و جدید</a:t>
             </a:r>
             <a:endParaRPr lang="fa-IR" sz="1600" dirty="0"/>
           </a:p>
@@ -12167,7 +12365,29 @@
                           <a:ea typeface="Calibri" pitchFamily="34" charset="-122"/>
                           <a:cs typeface="B Nazanin" pitchFamily="34" charset="-120"/>
                         </a:rPr>
-                        <a:t>۱. مدل «حاکمیت» (Weberian/Classic)</a:t>
+                        <a:t>۱. مدل «حاکمیت» (</a:t>
+                      </a:r>
+                      <a:r>
+                        <a:rPr lang="fa-IR" sz="1600" dirty="0">
+                          <a:solidFill>
+                            <a:schemeClr val="tx1"/>
+                          </a:solidFill>
+                          <a:latin typeface="Calibri" pitchFamily="34" charset="0"/>
+                          <a:ea typeface="Calibri" pitchFamily="34" charset="-122"/>
+                          <a:cs typeface="Calibri"/>
+                        </a:rPr>
+                        <a:t>Weberian/Classic</a:t>
+                      </a:r>
+                      <a:r>
+                        <a:rPr lang="fa-IR" sz="1600" dirty="0">
+                          <a:solidFill>
+                            <a:schemeClr val="tx1"/>
+                          </a:solidFill>
+                          <a:latin typeface="Calibri" pitchFamily="34" charset="0"/>
+                          <a:ea typeface="Calibri" pitchFamily="34" charset="-122"/>
+                          <a:cs typeface="B Nazanin" pitchFamily="34" charset="-120"/>
+                        </a:rPr>
+                        <a:t>)</a:t>
                       </a:r>
                       <a:endParaRPr lang="fa-IR" sz="1600" dirty="0">
                         <a:latin typeface="Calibri" charset="0"/>
@@ -12373,7 +12593,29 @@
                           <a:ea typeface="Calibri" pitchFamily="34" charset="-122"/>
                           <a:cs typeface="B Nazanin" pitchFamily="34" charset="-120"/>
                         </a:rPr>
-                        <a:t>۲. مدل «منشوری» (Prismatic)</a:t>
+                        <a:t>۲. مدل «منشوری» (</a:t>
+                      </a:r>
+                      <a:r>
+                        <a:rPr lang="fa-IR" sz="1600" dirty="0">
+                          <a:solidFill>
+                            <a:schemeClr val="tx1"/>
+                          </a:solidFill>
+                          <a:latin typeface="Calibri" pitchFamily="34" charset="0"/>
+                          <a:ea typeface="Calibri" pitchFamily="34" charset="-122"/>
+                          <a:cs typeface="Calibri"/>
+                        </a:rPr>
+                        <a:t>Prismatic</a:t>
+                      </a:r>
+                      <a:r>
+                        <a:rPr lang="fa-IR" sz="1600" dirty="0">
+                          <a:solidFill>
+                            <a:schemeClr val="tx1"/>
+                          </a:solidFill>
+                          <a:latin typeface="Calibri" pitchFamily="34" charset="0"/>
+                          <a:ea typeface="Calibri" pitchFamily="34" charset="-122"/>
+                          <a:cs typeface="B Nazanin" pitchFamily="34" charset="-120"/>
+                        </a:rPr>
+                        <a:t>)</a:t>
                       </a:r>
                       <a:endParaRPr lang="fa-IR" sz="1600" dirty="0">
                         <a:latin typeface="Calibri" charset="0"/>
@@ -12579,7 +12821,29 @@
                           <a:ea typeface="Calibri" pitchFamily="34" charset="-122"/>
                           <a:cs typeface="B Nazanin" pitchFamily="34" charset="-120"/>
                         </a:rPr>
-                        <a:t>۳. مدل «سالا» (Sala)</a:t>
+                        <a:t>۳. مدل «سالا» (</a:t>
+                      </a:r>
+                      <a:r>
+                        <a:rPr lang="fa-IR" sz="1600" dirty="0">
+                          <a:solidFill>
+                            <a:schemeClr val="tx1"/>
+                          </a:solidFill>
+                          <a:latin typeface="Calibri" pitchFamily="34" charset="0"/>
+                          <a:ea typeface="Calibri" pitchFamily="34" charset="-122"/>
+                          <a:cs typeface="Calibri"/>
+                        </a:rPr>
+                        <a:t>Sala</a:t>
+                      </a:r>
+                      <a:r>
+                        <a:rPr lang="fa-IR" sz="1600" dirty="0">
+                          <a:solidFill>
+                            <a:schemeClr val="tx1"/>
+                          </a:solidFill>
+                          <a:latin typeface="Calibri" pitchFamily="34" charset="0"/>
+                          <a:ea typeface="Calibri" pitchFamily="34" charset="-122"/>
+                          <a:cs typeface="B Nazanin" pitchFamily="34" charset="-120"/>
+                        </a:rPr>
+                        <a:t>)</a:t>
                       </a:r>
                       <a:endParaRPr lang="fa-IR" sz="1600" dirty="0">
                         <a:latin typeface="Calibri" charset="0"/>
@@ -12792,7 +13056,29 @@
                 <a:ea typeface="Calibri" pitchFamily="34" charset="-122"/>
                 <a:cs typeface="B Nazanin" pitchFamily="34" charset="-120"/>
               </a:rPr>
-              <a:t>در مدل «منشوری»، پدیده «هم‌ریختگی» (Overlapping) رخ می‌دهد؛ سازمان‌های جدید جایگزین قدیمی‌ها نمی‌شوند، بلکه در کنار آنها با کارکردهای متناقض ادامه می‌یابند.</a:t>
+              <a:t>در مدل «منشوری»، پدیده «هم‌ریختگی» (</a:t>
+            </a:r>
+            <a:r>
+              <a:rPr lang="fa-IR" sz="1500" dirty="0">
+                <a:solidFill>
+                  <a:schemeClr val="tx1"/>
+                </a:solidFill>
+                <a:latin typeface="Calibri" pitchFamily="34" charset="0"/>
+                <a:ea typeface="Calibri" pitchFamily="34" charset="-122"/>
+                <a:cs typeface="Calibri"/>
+              </a:rPr>
+              <a:t>Overlapping</a:t>
+            </a:r>
+            <a:r>
+              <a:rPr lang="fa-IR" sz="1500" dirty="0">
+                <a:solidFill>
+                  <a:schemeClr val="tx1"/>
+                </a:solidFill>
+                <a:latin typeface="Calibri" pitchFamily="34" charset="0"/>
+                <a:ea typeface="Calibri" pitchFamily="34" charset="-122"/>
+                <a:cs typeface="B Nazanin" pitchFamily="34" charset="-120"/>
+              </a:rPr>
+              <a:t>) رخ می‌دهد؛ سازمان‌های جدید جایگزین قدیمی‌ها نمی‌شوند، بلکه در کنار آنها با کارکردهای متناقض ادامه می‌یابند.</a:t>
             </a:r>
             <a:endParaRPr lang="fa-IR" sz="1500" dirty="0"/>
           </a:p>
@@ -13274,7 +13560,29 @@
                 <a:ea typeface="Calibri" pitchFamily="34" charset="-122"/>
                 <a:cs typeface="B Zar" pitchFamily="34" charset="-120"/>
               </a:rPr>
-              <a:t>جامعه یکپارچه (Fused)</a:t>
+              <a:t>جامعه یکپارچه (</a:t>
+            </a:r>
+            <a:r>
+              <a:rPr lang="fa-IR" sz="1500" b="1" dirty="0">
+                <a:solidFill>
+                  <a:schemeClr val="tx2"/>
+                </a:solidFill>
+                <a:latin typeface="Calibri" pitchFamily="34" charset="0"/>
+                <a:ea typeface="Calibri" pitchFamily="34" charset="-122"/>
+                <a:cs typeface="Calibri"/>
+              </a:rPr>
+              <a:t>Fused</a:t>
+            </a:r>
+            <a:r>
+              <a:rPr lang="fa-IR" sz="1500" b="1" dirty="0">
+                <a:solidFill>
+                  <a:schemeClr val="tx2"/>
+                </a:solidFill>
+                <a:latin typeface="Calibri" pitchFamily="34" charset="0"/>
+                <a:ea typeface="Calibri" pitchFamily="34" charset="-122"/>
+                <a:cs typeface="B Zar" pitchFamily="34" charset="-120"/>
+              </a:rPr>
+              <a:t>)</a:t>
             </a:r>
             <a:endParaRPr lang="fa-IR" sz="1500" dirty="0"/>
           </a:p>
@@ -13460,7 +13768,29 @@
                 <a:ea typeface="Calibri" pitchFamily="34" charset="-122"/>
                 <a:cs typeface="B Zar" pitchFamily="34" charset="-120"/>
               </a:rPr>
-              <a:t>جامعه منشوری (Prismatic)</a:t>
+              <a:t>جامعه منشوری (</a:t>
+            </a:r>
+            <a:r>
+              <a:rPr lang="fa-IR" sz="1500" b="1" dirty="0">
+                <a:solidFill>
+                  <a:schemeClr val="tx2"/>
+                </a:solidFill>
+                <a:latin typeface="Calibri" pitchFamily="34" charset="0"/>
+                <a:ea typeface="Calibri" pitchFamily="34" charset="-122"/>
+                <a:cs typeface="Calibri"/>
+              </a:rPr>
+              <a:t>Prismatic</a:t>
+            </a:r>
+            <a:r>
+              <a:rPr lang="fa-IR" sz="1500" b="1" dirty="0">
+                <a:solidFill>
+                  <a:schemeClr val="tx2"/>
+                </a:solidFill>
+                <a:latin typeface="Calibri" pitchFamily="34" charset="0"/>
+                <a:ea typeface="Calibri" pitchFamily="34" charset="-122"/>
+                <a:cs typeface="B Zar" pitchFamily="34" charset="-120"/>
+              </a:rPr>
+              <a:t>)</a:t>
             </a:r>
             <a:endParaRPr lang="fa-IR" sz="1500" dirty="0"/>
           </a:p>
@@ -13646,7 +13976,29 @@
                 <a:ea typeface="Calibri" pitchFamily="34" charset="-122"/>
                 <a:cs typeface="B Zar" pitchFamily="34" charset="-120"/>
               </a:rPr>
-              <a:t>جامعه تفکیک‌یافته (Diffracted)</a:t>
+              <a:t>جامعه تفکیک‌یافته (</a:t>
+            </a:r>
+            <a:r>
+              <a:rPr lang="fa-IR" sz="1500" b="1" dirty="0">
+                <a:solidFill>
+                  <a:schemeClr val="tx2"/>
+                </a:solidFill>
+                <a:latin typeface="Calibri" pitchFamily="34" charset="0"/>
+                <a:ea typeface="Calibri" pitchFamily="34" charset="-122"/>
+                <a:cs typeface="Calibri"/>
+              </a:rPr>
+              <a:t>Diffracted</a:t>
+            </a:r>
+            <a:r>
+              <a:rPr lang="fa-IR" sz="1500" b="1" dirty="0">
+                <a:solidFill>
+                  <a:schemeClr val="tx2"/>
+                </a:solidFill>
+                <a:latin typeface="Calibri" pitchFamily="34" charset="0"/>
+                <a:ea typeface="Calibri" pitchFamily="34" charset="-122"/>
+                <a:cs typeface="B Zar" pitchFamily="34" charset="-120"/>
+              </a:rPr>
+              <a:t>)</a:t>
             </a:r>
             <a:endParaRPr lang="fa-IR" sz="1500" dirty="0"/>
           </a:p>
